--- a/decks/day3/module-5-mcp.pptx
+++ b/decks/day3/module-5-mcp.pptx
@@ -17,9 +17,11 @@
     <p:sldId id="265" r:id="rId11"/>
     <p:sldId id="266" r:id="rId12"/>
     <p:sldId id="267" r:id="rId13"/>
+    <p:sldId id="268" r:id="rId14"/>
+    <p:sldId id="269" r:id="rId15"/>
   </p:sldIdLst>
   <p:notesMasterIdLst>
-    <p:notesMasterId r:id="rId14"/>
+    <p:notesMasterId r:id="rId16"/>
   </p:notesMasterIdLst>
   <p:sldSz cx="9144000" cy="5143500"/>
   <p:notesSz cx="5143500" cy="9144000"/>
@@ -602,8 +604,9 @@
           <a:p>
             <a:r>
               <a:rPr lang="en-US" dirty="0"/>
-              <a:t>• Async context managers are not cosmetic. They close transports, sessions, and local child processes even when an exception occurs. Nest credential, MCP tool, and agent lifecycles deliberately.
-• GROUNDING SOURCE: https://learn.microsoft.com/en-us/agent-framework/agents/tools/local-mcp-tools?tabs=python</a:t>
+              <a:t>• Placeholder marker slide — the runbook has full narration, setup, and fallback plan. Adapts the approval pause/resume mechanic from function_tool_with_approval.py onto an MCP tool's approval_mode constructor option; no MCP-specific approval sample exists in the repo yet, so the API reference is the primary grounding source for the MCP-side wiring.
+• GROUNDING SOURCE: https://learn.microsoft.com/en-us/python/api/agent-framework-core/agent_framework.mcpstreamablehttptool?view=agent-framework-python-latest
+• GROUNDING SOURCE: https://github.com/microsoft/agent-framework/blob/main/python/samples/02-agents/tools/function_tool_with_approval.py</a:t>
             </a:r>
             <a:endParaRPr lang="en-US" dirty="0"/>
           </a:p>
@@ -691,7 +694,7 @@
           <a:p>
             <a:r>
               <a:rPr lang="en-US" dirty="0"/>
-              <a:t>• Choose remote when a trusted service hosts and updates the endpoint. Choose local when the server is local-only or the client cannot complete remote authentication. Local means you own package and process security.
+              <a:t>• Treat remote tool descriptions, annotations, and results as untrusted input. Review the operator, data sharing, retention, costs, and permissions. Prefer first-party hosted servers over proxies when available.
 • GROUNDING SOURCE: https://learn.microsoft.com/en-us/agent-framework/agents/tools/local-mcp-tools?tabs=python</a:t>
             </a:r>
             <a:endParaRPr lang="en-US" dirty="0"/>
@@ -780,7 +783,7 @@
           <a:p>
             <a:r>
               <a:rPr lang="en-US" dirty="0"/>
-              <a:t>• Transition to the official Azure DevOps remote server. It is a strong example of remote-first hosting, Entra authentication, server-side filtering, and distinct read/write tools.
+              <a:t>• Async context managers are not cosmetic. They close transports, sessions, and local child processes even when an exception occurs. Nest credential, MCP tool, and agent lifecycles deliberately.
 • GROUNDING SOURCE: https://learn.microsoft.com/en-us/agent-framework/agents/tools/local-mcp-tools?tabs=python</a:t>
             </a:r>
             <a:endParaRPr lang="en-US" dirty="0"/>
@@ -805,6 +808,184 @@
             <a:fld id="{F7021451-1387-4CA6-816F-3879F97B5CBC}" type="slidenum">
               <a:rPr lang="en-US"/>
               <a:t>12</a:t>
+            </a:fld>
+            <a:endParaRPr lang="en-US"/>
+          </a:p>
+        </p:txBody>
+      </p:sp>
+    </p:spTree>
+    <p:extLst>
+      <p:ext uri="{BB962C8B-B14F-4D97-AF65-F5344CB8AC3E}">
+        <p14:creationId xmlns:p14="http://schemas.microsoft.com/office/powerpoint/2010/main" val="1024086991"/>
+      </p:ext>
+    </p:extLst>
+  </p:cSld>
+  <p:clrMapOvr>
+    <a:masterClrMapping/>
+  </p:clrMapOvr>
+</p:notes>
+</file>
+
+<file path=ppt/notesSlides/notesSlide13.xml><?xml version="1.0" encoding="utf-8"?>
+<p:notes xmlns:a="http://schemas.openxmlformats.org/drawingml/2006/main" xmlns:r="http://schemas.openxmlformats.org/officeDocument/2006/relationships" xmlns:p="http://schemas.openxmlformats.org/presentationml/2006/main">
+  <p:cSld>
+    <p:spTree>
+      <p:nvGrpSpPr>
+        <p:cNvPr id="1" name=""/>
+        <p:cNvGrpSpPr/>
+        <p:nvPr/>
+      </p:nvGrpSpPr>
+      <p:grpSpPr>
+        <a:xfrm>
+          <a:off x="0" y="0"/>
+          <a:ext cx="0" cy="0"/>
+          <a:chOff x="0" y="0"/>
+          <a:chExt cx="0" cy="0"/>
+        </a:xfrm>
+      </p:grpSpPr>
+      <p:sp>
+        <p:nvSpPr>
+          <p:cNvPr id="2" name="Slide Image Placeholder 1"/>
+          <p:cNvSpPr>
+            <a:spLocks noGrp="1" noRot="1" noChangeAspect="1"/>
+          </p:cNvSpPr>
+          <p:nvPr>
+            <p:ph type="sldImg"/>
+          </p:nvPr>
+        </p:nvSpPr>
+        <p:spPr/>
+      </p:sp>
+      <p:sp>
+        <p:nvSpPr>
+          <p:cNvPr id="3" name="Notes Placeholder 2"/>
+          <p:cNvSpPr>
+            <a:spLocks noGrp="1"/>
+          </p:cNvSpPr>
+          <p:nvPr>
+            <p:ph type="body" idx="1"/>
+          </p:nvPr>
+        </p:nvSpPr>
+        <p:spPr/>
+        <p:txBody>
+          <a:bodyPr/>
+          <a:lstStyle/>
+          <a:p>
+            <a:r>
+              <a:rPr lang="en-US" dirty="0"/>
+              <a:t>• Choose remote when a trusted service hosts and updates the endpoint. Choose local when the server is local-only or the client cannot complete remote authentication. Local means you own package and process security.
+• GROUNDING SOURCE: https://learn.microsoft.com/en-us/agent-framework/agents/tools/local-mcp-tools?tabs=python</a:t>
+            </a:r>
+            <a:endParaRPr lang="en-US" dirty="0"/>
+          </a:p>
+        </p:txBody>
+      </p:sp>
+      <p:sp>
+        <p:nvSpPr>
+          <p:cNvPr id="4" name="Slide Number Placeholder 3"/>
+          <p:cNvSpPr>
+            <a:spLocks noGrp="1"/>
+          </p:cNvSpPr>
+          <p:nvPr>
+            <p:ph type="sldNum" sz="quarter" idx="10"/>
+          </p:nvPr>
+        </p:nvSpPr>
+        <p:spPr/>
+        <p:txBody>
+          <a:bodyPr/>
+          <a:lstStyle/>
+          <a:p>
+            <a:fld id="{F7021451-1387-4CA6-816F-3879F97B5CBC}" type="slidenum">
+              <a:rPr lang="en-US"/>
+              <a:t>13</a:t>
+            </a:fld>
+            <a:endParaRPr lang="en-US"/>
+          </a:p>
+        </p:txBody>
+      </p:sp>
+    </p:spTree>
+    <p:extLst>
+      <p:ext uri="{BB962C8B-B14F-4D97-AF65-F5344CB8AC3E}">
+        <p14:creationId xmlns:p14="http://schemas.microsoft.com/office/powerpoint/2010/main" val="1024086991"/>
+      </p:ext>
+    </p:extLst>
+  </p:cSld>
+  <p:clrMapOvr>
+    <a:masterClrMapping/>
+  </p:clrMapOvr>
+</p:notes>
+</file>
+
+<file path=ppt/notesSlides/notesSlide14.xml><?xml version="1.0" encoding="utf-8"?>
+<p:notes xmlns:a="http://schemas.openxmlformats.org/drawingml/2006/main" xmlns:r="http://schemas.openxmlformats.org/officeDocument/2006/relationships" xmlns:p="http://schemas.openxmlformats.org/presentationml/2006/main">
+  <p:cSld>
+    <p:spTree>
+      <p:nvGrpSpPr>
+        <p:cNvPr id="1" name=""/>
+        <p:cNvGrpSpPr/>
+        <p:nvPr/>
+      </p:nvGrpSpPr>
+      <p:grpSpPr>
+        <a:xfrm>
+          <a:off x="0" y="0"/>
+          <a:ext cx="0" cy="0"/>
+          <a:chOff x="0" y="0"/>
+          <a:chExt cx="0" cy="0"/>
+        </a:xfrm>
+      </p:grpSpPr>
+      <p:sp>
+        <p:nvSpPr>
+          <p:cNvPr id="2" name="Slide Image Placeholder 1"/>
+          <p:cNvSpPr>
+            <a:spLocks noGrp="1" noRot="1" noChangeAspect="1"/>
+          </p:cNvSpPr>
+          <p:nvPr>
+            <p:ph type="sldImg"/>
+          </p:nvPr>
+        </p:nvSpPr>
+        <p:spPr/>
+      </p:sp>
+      <p:sp>
+        <p:nvSpPr>
+          <p:cNvPr id="3" name="Notes Placeholder 2"/>
+          <p:cNvSpPr>
+            <a:spLocks noGrp="1"/>
+          </p:cNvSpPr>
+          <p:nvPr>
+            <p:ph type="body" idx="1"/>
+          </p:nvPr>
+        </p:nvSpPr>
+        <p:spPr/>
+        <p:txBody>
+          <a:bodyPr/>
+          <a:lstStyle/>
+          <a:p>
+            <a:r>
+              <a:rPr lang="en-US" dirty="0"/>
+              <a:t>• Transition to the official Azure DevOps remote server. It is a strong example of remote-first hosting, Entra authentication, server-side filtering, and distinct read/write tools.
+• GROUNDING SOURCE: https://learn.microsoft.com/en-us/agent-framework/agents/tools/local-mcp-tools?tabs=python</a:t>
+            </a:r>
+            <a:endParaRPr lang="en-US" dirty="0"/>
+          </a:p>
+        </p:txBody>
+      </p:sp>
+      <p:sp>
+        <p:nvSpPr>
+          <p:cNvPr id="4" name="Slide Number Placeholder 3"/>
+          <p:cNvSpPr>
+            <a:spLocks noGrp="1"/>
+          </p:cNvSpPr>
+          <p:nvPr>
+            <p:ph type="sldNum" sz="quarter" idx="10"/>
+          </p:nvPr>
+        </p:nvSpPr>
+        <p:spPr/>
+        <p:txBody>
+          <a:bodyPr/>
+          <a:lstStyle/>
+          <a:p>
+            <a:fld id="{F7021451-1387-4CA6-816F-3879F97B5CBC}" type="slidenum">
+              <a:rPr lang="en-US"/>
+              <a:t>14</a:t>
             </a:fld>
             <a:endParaRPr lang="en-US"/>
           </a:p>
@@ -1136,9 +1317,8 @@
           <a:p>
             <a:r>
               <a:rPr lang="en-US" dirty="0"/>
-              <a:t>• The documented FoundryChatClient sample uses MCPStreamableHTTPTool for a remote endpoint. Do not put tokens in slide code or source control; use a provider that acquires or refreshes credentials.
-• GROUNDING SOURCE: https://learn.microsoft.com/en-us/agent-framework/agents/tools/local-mcp-tools?tabs=python
-• GROUNDING SOURCE: https://learn.microsoft.com/en-us/python/api/agent-framework-core/agent_framework.mcpstreamablehttptool?view=agent-framework-python-latest</a:t>
+              <a:t>• Placeholder marker slide — the runbook has full narration, setup, and fallback plan. Runs the previous slide's exact MCPStdioTool + mcp-server-calculator pattern live; no matching sample file exists in the repo's 02-agents/mcp folder, so this demo is grounded directly in the Learn doc's own documented code.
+• GROUNDING SOURCE: https://learn.microsoft.com/en-us/agent-framework/agents/tools/local-mcp-tools?tabs=python</a:t>
             </a:r>
             <a:endParaRPr lang="en-US" dirty="0"/>
           </a:p>
@@ -1226,8 +1406,9 @@
           <a:p>
             <a:r>
               <a:rPr lang="en-US" dirty="0"/>
-              <a:t>• During a tool call, header_provider receives function_invocation_kwargs. Ambient requests such as initialization, discovery, and pings receive an empty dictionary. Therefore connection-time auth cannot depend only on a per-run value.
-• GROUNDING SOURCE: https://learn.microsoft.com/en-us/agent-framework/agents/tools/local-mcp-tools?tabs=python</a:t>
+              <a:t>• The documented FoundryChatClient sample uses MCPStreamableHTTPTool for a remote endpoint. Do not put tokens in slide code or source control; use a provider that acquires or refreshes credentials.
+• GROUNDING SOURCE: https://learn.microsoft.com/en-us/agent-framework/agents/tools/local-mcp-tools?tabs=python
+• GROUNDING SOURCE: https://learn.microsoft.com/en-us/python/api/agent-framework-core/agent_framework.mcpstreamablehttptool?view=agent-framework-python-latest</a:t>
             </a:r>
             <a:endParaRPr lang="en-US" dirty="0"/>
           </a:p>
@@ -1315,9 +1496,8 @@
           <a:p>
             <a:r>
               <a:rPr lang="en-US" dirty="0"/>
-              <a:t>• allowed_tools is a documented MCP constructor option. Progressive exposure is a separate experimental Python function-loop feature, not an MCP transport feature. Use it only if you need staged discovery and accept its experimental status.
-• GROUNDING SOURCE: https://learn.microsoft.com/en-us/python/api/agent-framework-core/agent_framework.mcpstreamablehttptool?view=agent-framework-python-latest
-• GROUNDING SOURCE: https://learn.microsoft.com/en-us/agent-framework/agents/tools/controlling-tool-availability?tabs=python</a:t>
+              <a:t>• During a tool call, header_provider receives function_invocation_kwargs. Ambient requests such as initialization, discovery, and pings receive an empty dictionary. Therefore connection-time auth cannot depend only on a per-run value.
+• GROUNDING SOURCE: https://learn.microsoft.com/en-us/agent-framework/agents/tools/local-mcp-tools?tabs=python</a:t>
             </a:r>
             <a:endParaRPr lang="en-US" dirty="0"/>
           </a:p>
@@ -1405,9 +1585,9 @@
           <a:p>
             <a:r>
               <a:rPr lang="en-US" dirty="0"/>
-              <a:t>• approval_mode can require approval for all tools, waive it for all tools, or apply a per-tool mapping on the MCP tool. A run that needs approval returns a user-input request; the application displays the name and arguments and resumes with the decision.
+              <a:t>• allowed_tools is a documented MCP constructor option. Progressive exposure is a separate experimental Python function-loop feature, not an MCP transport feature. Use it only if you need staged discovery and accept its experimental status.
 • GROUNDING SOURCE: https://learn.microsoft.com/en-us/python/api/agent-framework-core/agent_framework.mcpstreamablehttptool?view=agent-framework-python-latest
-• GROUNDING SOURCE: https://learn.microsoft.com/en-us/agent-framework/agents/tools/tool-approval?tabs=python</a:t>
+• GROUNDING SOURCE: https://learn.microsoft.com/en-us/agent-framework/agents/tools/controlling-tool-availability?tabs=python</a:t>
             </a:r>
             <a:endParaRPr lang="en-US" dirty="0"/>
           </a:p>
@@ -1495,8 +1675,9 @@
           <a:p>
             <a:r>
               <a:rPr lang="en-US" dirty="0"/>
-              <a:t>• Treat remote tool descriptions, annotations, and results as untrusted input. Review the operator, data sharing, retention, costs, and permissions. Prefer first-party hosted servers over proxies when available.
-• GROUNDING SOURCE: https://learn.microsoft.com/en-us/agent-framework/agents/tools/local-mcp-tools?tabs=python</a:t>
+              <a:t>• approval_mode can require approval for all tools, waive it for all tools, or apply a per-tool mapping on the MCP tool. A run that needs approval returns a user-input request; the application displays the name and arguments and resumes with the decision.
+• GROUNDING SOURCE: https://learn.microsoft.com/en-us/python/api/agent-framework-core/agent_framework.mcpstreamablehttptool?view=agent-framework-python-latest
+• GROUNDING SOURCE: https://learn.microsoft.com/en-us/agent-framework/agents/tools/tool-approval?tabs=python</a:t>
             </a:r>
             <a:endParaRPr lang="en-US" dirty="0"/>
           </a:p>
@@ -2103,7 +2284,7 @@
     <p:bg>
       <p:bgPr>
         <a:solidFill>
-          <a:srgbClr val="FFFFFF"/>
+          <a:srgbClr val="CADCFC"/>
         </a:solidFill>
       </p:bgPr>
     </p:bg>
@@ -2130,7 +2311,7 @@
         <p:spPr>
           <a:xfrm>
             <a:off x="0" y="0"/>
-            <a:ext cx="54864" cy="5143500"/>
+            <a:ext cx="146304" cy="5143500"/>
           </a:xfrm>
           <a:prstGeom prst="rect">
             <a:avLst/>
@@ -2149,26 +2330,24 @@
         </p:nvSpPr>
         <p:spPr>
           <a:xfrm>
-            <a:off x="5486400" y="256032"/>
-            <a:ext cx="3337560" cy="228600"/>
-          </a:xfrm>
-          <a:prstGeom prst="rect">
-            <a:avLst/>
-          </a:prstGeom>
-          <a:noFill/>
-          <a:ln/>
-        </p:spPr>
-        <p:txBody>
-          <a:bodyPr wrap="square" lIns="0" tIns="0" rIns="0" bIns="0" rtlCol="0" anchor="ctr">
-            <a:normAutofit/>
-          </a:bodyPr>
+            <a:off x="5669280" y="274320"/>
+            <a:ext cx="3291840" cy="274320"/>
+          </a:xfrm>
+          <a:prstGeom prst="rect">
+            <a:avLst/>
+          </a:prstGeom>
+          <a:noFill/>
+          <a:ln/>
+        </p:spPr>
+        <p:txBody>
+          <a:bodyPr wrap="square" lIns="0" tIns="0" rIns="0" bIns="0" rtlCol="0" anchor="ctr"/>
           <a:lstStyle/>
           <a:p>
             <a:pPr algn="r" indent="0" marL="0">
               <a:buNone/>
             </a:pPr>
             <a:r>
-              <a:rPr lang="en-US" sz="950" dirty="0">
+              <a:rPr lang="en-US" sz="1000" dirty="0">
                 <a:solidFill>
                   <a:srgbClr val="6B7280"/>
                 </a:solidFill>
@@ -2176,9 +2355,9 @@
                 <a:ea typeface="Calibri" pitchFamily="34" charset="-122"/>
                 <a:cs typeface="Calibri" pitchFamily="34" charset="-120"/>
               </a:rPr>
-              <a:t>Day 3 · Module 5</a:t>
-            </a:r>
-            <a:endParaRPr lang="en-US" sz="950" dirty="0"/>
+              <a:t>Day 3 · Module 5 · Demo</a:t>
+            </a:r>
+            <a:endParaRPr lang="en-US" sz="1000" dirty="0"/>
           </a:p>
         </p:txBody>
       </p:sp>
@@ -2190,26 +2369,24 @@
         </p:nvSpPr>
         <p:spPr>
           <a:xfrm>
-            <a:off x="365760" y="310896"/>
-            <a:ext cx="6583680" cy="603504"/>
-          </a:xfrm>
-          <a:prstGeom prst="rect">
-            <a:avLst/>
-          </a:prstGeom>
-          <a:noFill/>
-          <a:ln/>
-        </p:spPr>
-        <p:txBody>
-          <a:bodyPr wrap="square" lIns="0" tIns="0" rIns="0" bIns="0" rtlCol="0" anchor="ctr">
-            <a:normAutofit/>
-          </a:bodyPr>
+            <a:off x="548640" y="1051560"/>
+            <a:ext cx="5486400" cy="502920"/>
+          </a:xfrm>
+          <a:prstGeom prst="rect">
+            <a:avLst/>
+          </a:prstGeom>
+          <a:noFill/>
+          <a:ln/>
+        </p:spPr>
+        <p:txBody>
+          <a:bodyPr wrap="square" lIns="0" tIns="0" rIns="0" bIns="0" rtlCol="0" anchor="ctr"/>
           <a:lstStyle/>
           <a:p>
             <a:pPr indent="0" marL="0">
               <a:buNone/>
             </a:pPr>
             <a:r>
-              <a:rPr lang="en-US" sz="2800" b="1" dirty="0">
+              <a:rPr lang="en-US" sz="3200" b="1" spc="800" kern="0" dirty="0">
                 <a:solidFill>
                   <a:srgbClr val="1E2761"/>
                 </a:solidFill>
@@ -2217,69 +2394,22 @@
                 <a:ea typeface="Calibri" pitchFamily="34" charset="-122"/>
                 <a:cs typeface="Calibri" pitchFamily="34" charset="-120"/>
               </a:rPr>
-              <a:t>Always close the lifecycle</a:t>
-            </a:r>
-            <a:endParaRPr lang="en-US" sz="2800" dirty="0"/>
-          </a:p>
-        </p:txBody>
-      </p:sp>
-      <p:sp>
-        <p:nvSpPr>
-          <p:cNvPr id="5" name="Shape 3"/>
-          <p:cNvSpPr/>
-          <p:nvPr/>
-        </p:nvSpPr>
-        <p:spPr>
-          <a:xfrm>
-            <a:off x="365760" y="1216152"/>
-            <a:ext cx="2633472" cy="1572768"/>
-          </a:xfrm>
-          <a:prstGeom prst="roundRect">
-            <a:avLst>
-              <a:gd name="adj" fmla="val 3488"/>
-            </a:avLst>
-          </a:prstGeom>
-          <a:solidFill>
-            <a:srgbClr val="CADCFC"/>
-          </a:solidFill>
-          <a:ln w="10160">
-            <a:solidFill>
-              <a:srgbClr val="1E2761"/>
-            </a:solidFill>
-            <a:prstDash val="solid"/>
-          </a:ln>
-        </p:spPr>
-      </p:sp>
-      <p:sp>
-        <p:nvSpPr>
-          <p:cNvPr id="6" name="Shape 4"/>
-          <p:cNvSpPr/>
-          <p:nvPr/>
-        </p:nvSpPr>
-        <p:spPr>
-          <a:xfrm>
-            <a:off x="475488" y="1335024"/>
-            <a:ext cx="320040" cy="320040"/>
-          </a:xfrm>
-          <a:prstGeom prst="ellipse">
-            <a:avLst/>
-          </a:prstGeom>
-          <a:solidFill>
-            <a:srgbClr val="1E2761"/>
-          </a:solidFill>
-          <a:ln/>
-        </p:spPr>
-      </p:sp>
-      <p:sp>
-        <p:nvSpPr>
-          <p:cNvPr id="7" name="Text 5"/>
-          <p:cNvSpPr/>
-          <p:nvPr/>
-        </p:nvSpPr>
-        <p:spPr>
-          <a:xfrm>
-            <a:off x="475488" y="1385316"/>
-            <a:ext cx="320040" cy="146304"/>
+              <a:t>DEMO</a:t>
+            </a:r>
+            <a:endParaRPr lang="en-US" sz="3200" dirty="0"/>
+          </a:p>
+        </p:txBody>
+      </p:sp>
+      <p:sp>
+        <p:nvSpPr>
+          <p:cNvPr id="5" name="Text 3"/>
+          <p:cNvSpPr/>
+          <p:nvPr/>
+        </p:nvSpPr>
+        <p:spPr>
+          <a:xfrm>
+            <a:off x="548640" y="1691640"/>
+            <a:ext cx="8046720" cy="914400"/>
           </a:xfrm>
           <a:prstGeom prst="rect">
             <a:avLst/>
@@ -2291,142 +2421,73 @@
           <a:bodyPr wrap="square" lIns="0" tIns="0" rIns="0" bIns="0" rtlCol="0" anchor="ctr"/>
           <a:lstStyle/>
           <a:p>
-            <a:pPr algn="ctr" indent="0" marL="0">
+            <a:pPr indent="0" marL="0">
               <a:buNone/>
             </a:pPr>
             <a:r>
-              <a:rPr lang="en-US" sz="900" b="1" dirty="0">
-                <a:solidFill>
-                  <a:srgbClr val="FFFFFF"/>
+              <a:rPr lang="en-US" sz="3000" b="1" dirty="0">
+                <a:solidFill>
+                  <a:srgbClr val="1E2761"/>
                 </a:solidFill>
                 <a:latin typeface="Calibri" pitchFamily="34" charset="0"/>
                 <a:ea typeface="Calibri" pitchFamily="34" charset="-122"/>
                 <a:cs typeface="Calibri" pitchFamily="34" charset="-120"/>
               </a:rPr>
-              <a:t>1</a:t>
-            </a:r>
-            <a:endParaRPr lang="en-US" sz="900" dirty="0"/>
-          </a:p>
-        </p:txBody>
-      </p:sp>
-      <p:sp>
-        <p:nvSpPr>
-          <p:cNvPr id="8" name="Text 6"/>
-          <p:cNvSpPr/>
-          <p:nvPr/>
-        </p:nvSpPr>
-        <p:spPr>
-          <a:xfrm>
-            <a:off x="896112" y="1335024"/>
-            <a:ext cx="1975104" cy="1353312"/>
-          </a:xfrm>
-          <a:prstGeom prst="rect">
-            <a:avLst/>
-          </a:prstGeom>
-          <a:noFill/>
-          <a:ln/>
-        </p:spPr>
-        <p:txBody>
-          <a:bodyPr wrap="square" lIns="0" tIns="0" rIns="0" bIns="0" rtlCol="0" anchor="ctr">
-            <a:normAutofit/>
-          </a:bodyPr>
-          <a:lstStyle/>
-          <a:p>
-            <a:pPr indent="0" marL="0">
+              <a:t>approval_mode pauses a write tool for review</a:t>
+            </a:r>
+            <a:endParaRPr lang="en-US" sz="3000" dirty="0"/>
+          </a:p>
+        </p:txBody>
+      </p:sp>
+      <p:sp>
+        <p:nvSpPr>
+          <p:cNvPr id="6" name="Text 4"/>
+          <p:cNvSpPr/>
+          <p:nvPr/>
+        </p:nvSpPr>
+        <p:spPr>
+          <a:xfrm>
+            <a:off x="6583680" y="1051560"/>
+            <a:ext cx="2194560" cy="502920"/>
+          </a:xfrm>
+          <a:prstGeom prst="rect">
+            <a:avLst/>
+          </a:prstGeom>
+          <a:noFill/>
+          <a:ln/>
+        </p:spPr>
+        <p:txBody>
+          <a:bodyPr wrap="square" lIns="0" tIns="0" rIns="0" bIns="0" rtlCol="0" anchor="ctr"/>
+          <a:lstStyle/>
+          <a:p>
+            <a:pPr algn="r" indent="0" marL="0">
               <a:buNone/>
             </a:pPr>
             <a:r>
-              <a:rPr lang="en-US" sz="1500" b="1" dirty="0">
-                <a:solidFill>
-                  <a:srgbClr val="1E2761"/>
+              <a:rPr lang="en-US" sz="1800" i="1" dirty="0">
+                <a:solidFill>
+                  <a:srgbClr val="6B7280"/>
                 </a:solidFill>
                 <a:latin typeface="Calibri" pitchFamily="34" charset="0"/>
                 <a:ea typeface="Calibri" pitchFamily="34" charset="-122"/>
                 <a:cs typeface="Calibri" pitchFamily="34" charset="-120"/>
               </a:rPr>
-              <a:t>Acquire credential</a:t>
-            </a:r>
-            <a:endParaRPr lang="en-US" sz="1500" dirty="0"/>
-          </a:p>
-        </p:txBody>
-      </p:sp>
-      <p:sp>
-        <p:nvSpPr>
-          <p:cNvPr id="9" name="Shape 7"/>
-          <p:cNvSpPr/>
-          <p:nvPr/>
-        </p:nvSpPr>
-        <p:spPr>
-          <a:xfrm>
-            <a:off x="3035808" y="1892808"/>
-            <a:ext cx="164592" cy="219456"/>
-          </a:xfrm>
-          <a:prstGeom prst="chevron">
-            <a:avLst/>
-          </a:prstGeom>
-          <a:solidFill>
-            <a:srgbClr val="E8A87C"/>
-          </a:solidFill>
-          <a:ln/>
-        </p:spPr>
-      </p:sp>
-      <p:sp>
-        <p:nvSpPr>
-          <p:cNvPr id="10" name="Shape 8"/>
-          <p:cNvSpPr/>
-          <p:nvPr/>
-        </p:nvSpPr>
-        <p:spPr>
-          <a:xfrm>
-            <a:off x="3255264" y="1216152"/>
-            <a:ext cx="2633472" cy="1572768"/>
-          </a:xfrm>
-          <a:prstGeom prst="roundRect">
-            <a:avLst>
-              <a:gd name="adj" fmla="val 3488"/>
-            </a:avLst>
-          </a:prstGeom>
-          <a:solidFill>
-            <a:srgbClr val="F3F4F6"/>
-          </a:solidFill>
-          <a:ln w="10160">
-            <a:solidFill>
-              <a:srgbClr val="D1D5DB"/>
-            </a:solidFill>
-            <a:prstDash val="solid"/>
-          </a:ln>
-        </p:spPr>
-      </p:sp>
-      <p:sp>
-        <p:nvSpPr>
-          <p:cNvPr id="11" name="Shape 9"/>
-          <p:cNvSpPr/>
-          <p:nvPr/>
-        </p:nvSpPr>
-        <p:spPr>
-          <a:xfrm>
-            <a:off x="3364992" y="1335024"/>
-            <a:ext cx="320040" cy="320040"/>
-          </a:xfrm>
-          <a:prstGeom prst="ellipse">
-            <a:avLst/>
-          </a:prstGeom>
-          <a:solidFill>
-            <a:srgbClr val="1E2761"/>
-          </a:solidFill>
-          <a:ln/>
-        </p:spPr>
-      </p:sp>
-      <p:sp>
-        <p:nvSpPr>
-          <p:cNvPr id="12" name="Text 10"/>
-          <p:cNvSpPr/>
-          <p:nvPr/>
-        </p:nvSpPr>
-        <p:spPr>
-          <a:xfrm>
-            <a:off x="3364992" y="1385316"/>
-            <a:ext cx="320040" cy="146304"/>
+              <a:t>~5 min</a:t>
+            </a:r>
+            <a:endParaRPr lang="en-US" sz="1800" dirty="0"/>
+          </a:p>
+        </p:txBody>
+      </p:sp>
+      <p:sp>
+        <p:nvSpPr>
+          <p:cNvPr id="7" name="Text 5"/>
+          <p:cNvSpPr/>
+          <p:nvPr/>
+        </p:nvSpPr>
+        <p:spPr>
+          <a:xfrm>
+            <a:off x="548640" y="2788920"/>
+            <a:ext cx="8046720" cy="1371600"/>
           </a:xfrm>
           <a:prstGeom prst="rect">
             <a:avLst/>
@@ -2438,489 +2499,69 @@
           <a:bodyPr wrap="square" lIns="0" tIns="0" rIns="0" bIns="0" rtlCol="0" anchor="ctr"/>
           <a:lstStyle/>
           <a:p>
-            <a:pPr algn="ctr" indent="0" marL="0">
+            <a:pPr indent="0" marL="0">
+              <a:spcAft>
+                <a:spcPts val="600"/>
+              </a:spcAft>
               <a:buNone/>
             </a:pPr>
             <a:r>
-              <a:rPr lang="en-US" sz="900" b="1" dirty="0">
-                <a:solidFill>
-                  <a:srgbClr val="FFFFFF"/>
+              <a:rPr lang="en-US" sz="1600" dirty="0">
+                <a:solidFill>
+                  <a:srgbClr val="212121"/>
                 </a:solidFill>
                 <a:latin typeface="Calibri" pitchFamily="34" charset="0"/>
                 <a:ea typeface="Calibri" pitchFamily="34" charset="-122"/>
                 <a:cs typeface="Calibri" pitchFamily="34" charset="-120"/>
               </a:rPr>
-              <a:t>2</a:t>
-            </a:r>
-            <a:endParaRPr lang="en-US" sz="900" dirty="0"/>
-          </a:p>
-        </p:txBody>
-      </p:sp>
-      <p:sp>
-        <p:nvSpPr>
-          <p:cNvPr id="13" name="Text 11"/>
-          <p:cNvSpPr/>
-          <p:nvPr/>
-        </p:nvSpPr>
-        <p:spPr>
-          <a:xfrm>
-            <a:off x="3785616" y="1335024"/>
-            <a:ext cx="1975104" cy="1353312"/>
-          </a:xfrm>
-          <a:prstGeom prst="rect">
-            <a:avLst/>
-          </a:prstGeom>
-          <a:noFill/>
-          <a:ln/>
-        </p:spPr>
-        <p:txBody>
-          <a:bodyPr wrap="square" lIns="0" tIns="0" rIns="0" bIns="0" rtlCol="0" anchor="ctr">
-            <a:normAutofit/>
-          </a:bodyPr>
+              <a:t>Set approval_mode="always_require" on the MCP tool and run a request that needs it: the run pauses with a user-input request naming the tool and arguments, and only resumes after an explicit approval decision — the same pause/resume mechanic the official function-tool sample demonstrates, wired onto an MCP tool.</a:t>
+            </a:r>
+            <a:endParaRPr lang="en-US" sz="1600" dirty="0"/>
+          </a:p>
+        </p:txBody>
+      </p:sp>
+      <p:sp>
+        <p:nvSpPr>
+          <p:cNvPr id="8" name="Text 6"/>
+          <p:cNvSpPr/>
+          <p:nvPr/>
+        </p:nvSpPr>
+        <p:spPr>
+          <a:xfrm>
+            <a:off x="548640" y="4434840"/>
+            <a:ext cx="8046720" cy="320040"/>
+          </a:xfrm>
+          <a:prstGeom prst="rect">
+            <a:avLst/>
+          </a:prstGeom>
+          <a:noFill/>
+          <a:ln/>
+        </p:spPr>
+        <p:txBody>
+          <a:bodyPr wrap="square" lIns="0" tIns="0" rIns="0" bIns="0" rtlCol="0" anchor="ctr"/>
           <a:lstStyle/>
           <a:p>
             <a:pPr indent="0" marL="0">
               <a:buNone/>
             </a:pPr>
             <a:r>
-              <a:rPr lang="en-US" sz="1500" b="1" dirty="0">
-                <a:solidFill>
-                  <a:srgbClr val="1E2761"/>
+              <a:rPr lang="en-US" sz="1100" i="1" dirty="0">
+                <a:solidFill>
+                  <a:srgbClr val="6B7280"/>
                 </a:solidFill>
                 <a:latin typeface="Calibri" pitchFamily="34" charset="0"/>
                 <a:ea typeface="Calibri" pitchFamily="34" charset="-122"/>
                 <a:cs typeface="Calibri" pitchFamily="34" charset="-120"/>
               </a:rPr>
-              <a:t>Open MCP tool</a:t>
-            </a:r>
-            <a:endParaRPr lang="en-US" sz="1500" dirty="0"/>
-          </a:p>
-        </p:txBody>
-      </p:sp>
-      <p:sp>
-        <p:nvSpPr>
-          <p:cNvPr id="14" name="Shape 12"/>
-          <p:cNvSpPr/>
-          <p:nvPr/>
-        </p:nvSpPr>
-        <p:spPr>
-          <a:xfrm>
-            <a:off x="5925312" y="1892808"/>
-            <a:ext cx="164592" cy="219456"/>
-          </a:xfrm>
-          <a:prstGeom prst="chevron">
-            <a:avLst/>
-          </a:prstGeom>
-          <a:solidFill>
-            <a:srgbClr val="E8A87C"/>
-          </a:solidFill>
-          <a:ln/>
-        </p:spPr>
-      </p:sp>
-      <p:sp>
-        <p:nvSpPr>
-          <p:cNvPr id="15" name="Shape 13"/>
-          <p:cNvSpPr/>
-          <p:nvPr/>
-        </p:nvSpPr>
-        <p:spPr>
-          <a:xfrm>
-            <a:off x="6144768" y="1216152"/>
-            <a:ext cx="2633472" cy="1572768"/>
-          </a:xfrm>
-          <a:prstGeom prst="roundRect">
-            <a:avLst>
-              <a:gd name="adj" fmla="val 3488"/>
-            </a:avLst>
-          </a:prstGeom>
-          <a:solidFill>
-            <a:srgbClr val="F3F4F6"/>
-          </a:solidFill>
-          <a:ln w="10160">
-            <a:solidFill>
-              <a:srgbClr val="D1D5DB"/>
-            </a:solidFill>
-            <a:prstDash val="solid"/>
-          </a:ln>
-        </p:spPr>
-      </p:sp>
-      <p:sp>
-        <p:nvSpPr>
-          <p:cNvPr id="16" name="Shape 14"/>
-          <p:cNvSpPr/>
-          <p:nvPr/>
-        </p:nvSpPr>
-        <p:spPr>
-          <a:xfrm>
-            <a:off x="6254496" y="1335024"/>
-            <a:ext cx="320040" cy="320040"/>
-          </a:xfrm>
-          <a:prstGeom prst="ellipse">
-            <a:avLst/>
-          </a:prstGeom>
-          <a:solidFill>
-            <a:srgbClr val="1E2761"/>
-          </a:solidFill>
-          <a:ln/>
-        </p:spPr>
-      </p:sp>
-      <p:sp>
-        <p:nvSpPr>
-          <p:cNvPr id="17" name="Text 15"/>
-          <p:cNvSpPr/>
-          <p:nvPr/>
-        </p:nvSpPr>
-        <p:spPr>
-          <a:xfrm>
-            <a:off x="6254496" y="1385316"/>
-            <a:ext cx="320040" cy="146304"/>
-          </a:xfrm>
-          <a:prstGeom prst="rect">
-            <a:avLst/>
-          </a:prstGeom>
-          <a:noFill/>
-          <a:ln/>
-        </p:spPr>
-        <p:txBody>
-          <a:bodyPr wrap="square" lIns="0" tIns="0" rIns="0" bIns="0" rtlCol="0" anchor="ctr"/>
-          <a:lstStyle/>
-          <a:p>
-            <a:pPr algn="ctr" indent="0" marL="0">
-              <a:buNone/>
-            </a:pPr>
-            <a:r>
-              <a:rPr lang="en-US" sz="900" b="1" dirty="0">
-                <a:solidFill>
-                  <a:srgbClr val="FFFFFF"/>
-                </a:solidFill>
-                <a:latin typeface="Calibri" pitchFamily="34" charset="0"/>
-                <a:ea typeface="Calibri" pitchFamily="34" charset="-122"/>
-                <a:cs typeface="Calibri" pitchFamily="34" charset="-120"/>
-              </a:rPr>
-              <a:t>3</a:t>
-            </a:r>
-            <a:endParaRPr lang="en-US" sz="900" dirty="0"/>
-          </a:p>
-        </p:txBody>
-      </p:sp>
-      <p:sp>
-        <p:nvSpPr>
-          <p:cNvPr id="18" name="Text 16"/>
-          <p:cNvSpPr/>
-          <p:nvPr/>
-        </p:nvSpPr>
-        <p:spPr>
-          <a:xfrm>
-            <a:off x="6675120" y="1335024"/>
-            <a:ext cx="1975104" cy="1353312"/>
-          </a:xfrm>
-          <a:prstGeom prst="rect">
-            <a:avLst/>
-          </a:prstGeom>
-          <a:noFill/>
-          <a:ln/>
-        </p:spPr>
-        <p:txBody>
-          <a:bodyPr wrap="square" lIns="0" tIns="0" rIns="0" bIns="0" rtlCol="0" anchor="ctr">
-            <a:normAutofit/>
-          </a:bodyPr>
-          <a:lstStyle/>
-          <a:p>
-            <a:pPr indent="0" marL="0">
-              <a:buNone/>
-            </a:pPr>
-            <a:r>
-              <a:rPr lang="en-US" sz="1500" b="1" dirty="0">
-                <a:solidFill>
-                  <a:srgbClr val="1E2761"/>
-                </a:solidFill>
-                <a:latin typeface="Calibri" pitchFamily="34" charset="0"/>
-                <a:ea typeface="Calibri" pitchFamily="34" charset="-122"/>
-                <a:cs typeface="Calibri" pitchFamily="34" charset="-120"/>
-              </a:rPr>
-              <a:t>Open agent</a:t>
-            </a:r>
-            <a:endParaRPr lang="en-US" sz="1500" dirty="0"/>
-          </a:p>
-        </p:txBody>
-      </p:sp>
-      <p:sp>
-        <p:nvSpPr>
-          <p:cNvPr id="19" name="Shape 17"/>
-          <p:cNvSpPr/>
-          <p:nvPr/>
-        </p:nvSpPr>
-        <p:spPr>
-          <a:xfrm>
-            <a:off x="365760" y="3044952"/>
-            <a:ext cx="2633472" cy="1572768"/>
-          </a:xfrm>
-          <a:prstGeom prst="roundRect">
-            <a:avLst>
-              <a:gd name="adj" fmla="val 3488"/>
-            </a:avLst>
-          </a:prstGeom>
-          <a:solidFill>
-            <a:srgbClr val="F3F4F6"/>
-          </a:solidFill>
-          <a:ln w="10160">
-            <a:solidFill>
-              <a:srgbClr val="D1D5DB"/>
-            </a:solidFill>
-            <a:prstDash val="solid"/>
-          </a:ln>
-        </p:spPr>
-      </p:sp>
-      <p:sp>
-        <p:nvSpPr>
-          <p:cNvPr id="20" name="Shape 18"/>
-          <p:cNvSpPr/>
-          <p:nvPr/>
-        </p:nvSpPr>
-        <p:spPr>
-          <a:xfrm>
-            <a:off x="475488" y="3163824"/>
-            <a:ext cx="320040" cy="320040"/>
-          </a:xfrm>
-          <a:prstGeom prst="ellipse">
-            <a:avLst/>
-          </a:prstGeom>
-          <a:solidFill>
-            <a:srgbClr val="1E2761"/>
-          </a:solidFill>
-          <a:ln/>
-        </p:spPr>
-      </p:sp>
-      <p:sp>
-        <p:nvSpPr>
-          <p:cNvPr id="21" name="Text 19"/>
-          <p:cNvSpPr/>
-          <p:nvPr/>
-        </p:nvSpPr>
-        <p:spPr>
-          <a:xfrm>
-            <a:off x="475488" y="3214116"/>
-            <a:ext cx="320040" cy="146304"/>
-          </a:xfrm>
-          <a:prstGeom prst="rect">
-            <a:avLst/>
-          </a:prstGeom>
-          <a:noFill/>
-          <a:ln/>
-        </p:spPr>
-        <p:txBody>
-          <a:bodyPr wrap="square" lIns="0" tIns="0" rIns="0" bIns="0" rtlCol="0" anchor="ctr"/>
-          <a:lstStyle/>
-          <a:p>
-            <a:pPr algn="ctr" indent="0" marL="0">
-              <a:buNone/>
-            </a:pPr>
-            <a:r>
-              <a:rPr lang="en-US" sz="900" b="1" dirty="0">
-                <a:solidFill>
-                  <a:srgbClr val="FFFFFF"/>
-                </a:solidFill>
-                <a:latin typeface="Calibri" pitchFamily="34" charset="0"/>
-                <a:ea typeface="Calibri" pitchFamily="34" charset="-122"/>
-                <a:cs typeface="Calibri" pitchFamily="34" charset="-120"/>
-              </a:rPr>
-              <a:t>4</a:t>
-            </a:r>
-            <a:endParaRPr lang="en-US" sz="900" dirty="0"/>
-          </a:p>
-        </p:txBody>
-      </p:sp>
-      <p:sp>
-        <p:nvSpPr>
-          <p:cNvPr id="22" name="Text 20"/>
-          <p:cNvSpPr/>
-          <p:nvPr/>
-        </p:nvSpPr>
-        <p:spPr>
-          <a:xfrm>
-            <a:off x="896112" y="3163824"/>
-            <a:ext cx="1975104" cy="1353312"/>
-          </a:xfrm>
-          <a:prstGeom prst="rect">
-            <a:avLst/>
-          </a:prstGeom>
-          <a:noFill/>
-          <a:ln/>
-        </p:spPr>
-        <p:txBody>
-          <a:bodyPr wrap="square" lIns="0" tIns="0" rIns="0" bIns="0" rtlCol="0" anchor="ctr">
-            <a:normAutofit/>
-          </a:bodyPr>
-          <a:lstStyle/>
-          <a:p>
-            <a:pPr indent="0" marL="0">
-              <a:buNone/>
-            </a:pPr>
-            <a:r>
-              <a:rPr lang="en-US" sz="1500" b="1" dirty="0">
-                <a:solidFill>
-                  <a:srgbClr val="1E2761"/>
-                </a:solidFill>
-                <a:latin typeface="Calibri" pitchFamily="34" charset="0"/>
-                <a:ea typeface="Calibri" pitchFamily="34" charset="-122"/>
-                <a:cs typeface="Calibri" pitchFamily="34" charset="-120"/>
-              </a:rPr>
-              <a:t>Run and handle approvals</a:t>
-            </a:r>
-            <a:endParaRPr lang="en-US" sz="1500" dirty="0"/>
-          </a:p>
-        </p:txBody>
-      </p:sp>
-      <p:sp>
-        <p:nvSpPr>
-          <p:cNvPr id="23" name="Shape 21"/>
-          <p:cNvSpPr/>
-          <p:nvPr/>
-        </p:nvSpPr>
-        <p:spPr>
-          <a:xfrm>
-            <a:off x="3035808" y="3721608"/>
-            <a:ext cx="164592" cy="219456"/>
-          </a:xfrm>
-          <a:prstGeom prst="chevron">
-            <a:avLst/>
-          </a:prstGeom>
-          <a:solidFill>
-            <a:srgbClr val="E8A87C"/>
-          </a:solidFill>
-          <a:ln/>
-        </p:spPr>
-      </p:sp>
-      <p:sp>
-        <p:nvSpPr>
-          <p:cNvPr id="24" name="Shape 22"/>
-          <p:cNvSpPr/>
-          <p:nvPr/>
-        </p:nvSpPr>
-        <p:spPr>
-          <a:xfrm>
-            <a:off x="3255264" y="3044952"/>
-            <a:ext cx="2633472" cy="1572768"/>
-          </a:xfrm>
-          <a:prstGeom prst="roundRect">
-            <a:avLst>
-              <a:gd name="adj" fmla="val 3488"/>
-            </a:avLst>
-          </a:prstGeom>
-          <a:solidFill>
-            <a:srgbClr val="CADCFC"/>
-          </a:solidFill>
-          <a:ln w="10160">
-            <a:solidFill>
-              <a:srgbClr val="1E2761"/>
-            </a:solidFill>
-            <a:prstDash val="solid"/>
-          </a:ln>
-        </p:spPr>
-      </p:sp>
-      <p:sp>
-        <p:nvSpPr>
-          <p:cNvPr id="25" name="Shape 23"/>
-          <p:cNvSpPr/>
-          <p:nvPr/>
-        </p:nvSpPr>
-        <p:spPr>
-          <a:xfrm>
-            <a:off x="3364992" y="3163824"/>
-            <a:ext cx="320040" cy="320040"/>
-          </a:xfrm>
-          <a:prstGeom prst="ellipse">
-            <a:avLst/>
-          </a:prstGeom>
-          <a:solidFill>
-            <a:srgbClr val="1E2761"/>
-          </a:solidFill>
-          <a:ln/>
-        </p:spPr>
-      </p:sp>
-      <p:sp>
-        <p:nvSpPr>
-          <p:cNvPr id="26" name="Text 24"/>
-          <p:cNvSpPr/>
-          <p:nvPr/>
-        </p:nvSpPr>
-        <p:spPr>
-          <a:xfrm>
-            <a:off x="3364992" y="3214116"/>
-            <a:ext cx="320040" cy="146304"/>
-          </a:xfrm>
-          <a:prstGeom prst="rect">
-            <a:avLst/>
-          </a:prstGeom>
-          <a:noFill/>
-          <a:ln/>
-        </p:spPr>
-        <p:txBody>
-          <a:bodyPr wrap="square" lIns="0" tIns="0" rIns="0" bIns="0" rtlCol="0" anchor="ctr"/>
-          <a:lstStyle/>
-          <a:p>
-            <a:pPr algn="ctr" indent="0" marL="0">
-              <a:buNone/>
-            </a:pPr>
-            <a:r>
-              <a:rPr lang="en-US" sz="900" b="1" dirty="0">
-                <a:solidFill>
-                  <a:srgbClr val="FFFFFF"/>
-                </a:solidFill>
-                <a:latin typeface="Calibri" pitchFamily="34" charset="0"/>
-                <a:ea typeface="Calibri" pitchFamily="34" charset="-122"/>
-                <a:cs typeface="Calibri" pitchFamily="34" charset="-120"/>
-              </a:rPr>
-              <a:t>5</a:t>
-            </a:r>
-            <a:endParaRPr lang="en-US" sz="900" dirty="0"/>
-          </a:p>
-        </p:txBody>
-      </p:sp>
-      <p:sp>
-        <p:nvSpPr>
-          <p:cNvPr id="27" name="Text 25"/>
-          <p:cNvSpPr/>
-          <p:nvPr/>
-        </p:nvSpPr>
-        <p:spPr>
-          <a:xfrm>
-            <a:off x="3785616" y="3163824"/>
-            <a:ext cx="1975104" cy="1353312"/>
-          </a:xfrm>
-          <a:prstGeom prst="rect">
-            <a:avLst/>
-          </a:prstGeom>
-          <a:noFill/>
-          <a:ln/>
-        </p:spPr>
-        <p:txBody>
-          <a:bodyPr wrap="square" lIns="0" tIns="0" rIns="0" bIns="0" rtlCol="0" anchor="ctr">
-            <a:normAutofit/>
-          </a:bodyPr>
-          <a:lstStyle/>
-          <a:p>
-            <a:pPr indent="0" marL="0">
-              <a:buNone/>
-            </a:pPr>
-            <a:r>
-              <a:rPr lang="en-US" sz="1500" b="1" dirty="0">
-                <a:solidFill>
-                  <a:srgbClr val="1E2761"/>
-                </a:solidFill>
-                <a:latin typeface="Calibri" pitchFamily="34" charset="0"/>
-                <a:ea typeface="Calibri" pitchFamily="34" charset="-122"/>
-                <a:cs typeface="Calibri" pitchFamily="34" charset="-120"/>
-              </a:rPr>
-              <a:t>Exit contexts in reverse order</a:t>
-            </a:r>
-            <a:endParaRPr lang="en-US" sz="1500" dirty="0"/>
-          </a:p>
-        </p:txBody>
-      </p:sp>
-      <p:sp>
-        <p:nvSpPr>
-          <p:cNvPr id="28" name="Shape 26"/>
+              <a:t>Runbook: demos/day3/module-5-demo-2-approval-mode.md</a:t>
+            </a:r>
+            <a:endParaRPr lang="en-US" sz="1100" dirty="0"/>
+          </a:p>
+        </p:txBody>
+      </p:sp>
+      <p:sp>
+        <p:nvSpPr>
+          <p:cNvPr id="9" name="Shape 7"/>
           <p:cNvSpPr/>
           <p:nvPr/>
         </p:nvSpPr>
@@ -2943,7 +2584,7 @@
       </p:sp>
       <p:sp>
         <p:nvSpPr>
-          <p:cNvPr id="29" name="Text 27"/>
+          <p:cNvPr id="10" name="Text 8"/>
           <p:cNvSpPr/>
           <p:nvPr/>
         </p:nvSpPr>
@@ -2976,7 +2617,7 @@
                 <a:ea typeface="Calibri" pitchFamily="34" charset="-122"/>
                 <a:cs typeface="Calibri" pitchFamily="34" charset="-120"/>
               </a:rPr>
-              <a:t>Source: https://learn.microsoft.com/en-us/agent-framework/agents/tools/local-mcp-tools?tabs=python</a:t>
+              <a:t>Source: https://learn.microsoft.com/en-us/python/api/agent-framework-core/agent_framework.mcpstreamablehttptool?view=agent-framework-python-latest  ·  +1 in notes</a:t>
             </a:r>
             <a:endParaRPr lang="en-US" sz="820" dirty="0"/>
           </a:p>
@@ -3102,7 +2743,7 @@
               <a:buNone/>
             </a:pPr>
             <a:r>
-              <a:rPr lang="en-US" sz="2800" b="1" dirty="0">
+              <a:rPr lang="en-US" sz="2500" b="1" dirty="0">
                 <a:solidFill>
                   <a:srgbClr val="1E2761"/>
                 </a:solidFill>
@@ -3110,6 +2751,1533 @@
                 <a:ea typeface="Calibri" pitchFamily="34" charset="-122"/>
                 <a:cs typeface="Calibri" pitchFamily="34" charset="-120"/>
               </a:rPr>
+              <a:t>Security is broader than authentication</a:t>
+            </a:r>
+            <a:endParaRPr lang="en-US" sz="2500" dirty="0"/>
+          </a:p>
+        </p:txBody>
+      </p:sp>
+      <p:sp>
+        <p:nvSpPr>
+          <p:cNvPr id="5" name="Shape 3"/>
+          <p:cNvSpPr/>
+          <p:nvPr/>
+        </p:nvSpPr>
+        <p:spPr>
+          <a:xfrm>
+            <a:off x="365760" y="1078992"/>
+            <a:ext cx="4105656" cy="1655064"/>
+          </a:xfrm>
+          <a:prstGeom prst="roundRect">
+            <a:avLst>
+              <a:gd name="adj" fmla="val 3315"/>
+            </a:avLst>
+          </a:prstGeom>
+          <a:solidFill>
+            <a:srgbClr val="CADCFC"/>
+          </a:solidFill>
+          <a:ln w="10160">
+            <a:solidFill>
+              <a:srgbClr val="1E2761"/>
+            </a:solidFill>
+            <a:prstDash val="solid"/>
+          </a:ln>
+        </p:spPr>
+      </p:sp>
+      <p:sp>
+        <p:nvSpPr>
+          <p:cNvPr id="6" name="Text 4"/>
+          <p:cNvSpPr/>
+          <p:nvPr/>
+        </p:nvSpPr>
+        <p:spPr>
+          <a:xfrm>
+            <a:off x="512064" y="1197864"/>
+            <a:ext cx="3813048" cy="310896"/>
+          </a:xfrm>
+          <a:prstGeom prst="rect">
+            <a:avLst/>
+          </a:prstGeom>
+          <a:noFill/>
+          <a:ln/>
+        </p:spPr>
+        <p:txBody>
+          <a:bodyPr wrap="square" lIns="0" tIns="0" rIns="0" bIns="0" rtlCol="0" anchor="ctr">
+            <a:normAutofit/>
+          </a:bodyPr>
+          <a:lstStyle/>
+          <a:p>
+            <a:pPr indent="0" marL="0">
+              <a:buNone/>
+            </a:pPr>
+            <a:r>
+              <a:rPr lang="en-US" sz="1500" b="1" dirty="0">
+                <a:solidFill>
+                  <a:srgbClr val="1E2761"/>
+                </a:solidFill>
+                <a:latin typeface="Calibri" pitchFamily="34" charset="0"/>
+                <a:ea typeface="Calibri" pitchFamily="34" charset="-122"/>
+                <a:cs typeface="Calibri" pitchFamily="34" charset="-120"/>
+              </a:rPr>
+              <a:t>Trust</a:t>
+            </a:r>
+            <a:endParaRPr lang="en-US" sz="1500" dirty="0"/>
+          </a:p>
+        </p:txBody>
+      </p:sp>
+      <p:sp>
+        <p:nvSpPr>
+          <p:cNvPr id="7" name="Text 5"/>
+          <p:cNvSpPr/>
+          <p:nvPr/>
+        </p:nvSpPr>
+        <p:spPr>
+          <a:xfrm>
+            <a:off x="512064" y="1581912"/>
+            <a:ext cx="3813048" cy="1033272"/>
+          </a:xfrm>
+          <a:prstGeom prst="rect">
+            <a:avLst/>
+          </a:prstGeom>
+          <a:noFill/>
+          <a:ln/>
+        </p:spPr>
+        <p:txBody>
+          <a:bodyPr wrap="square" lIns="0" tIns="0" rIns="0" bIns="0" rtlCol="0" anchor="t">
+            <a:normAutofit/>
+          </a:bodyPr>
+          <a:lstStyle/>
+          <a:p>
+            <a:pPr indent="0" marL="0">
+              <a:buNone/>
+            </a:pPr>
+            <a:r>
+              <a:rPr lang="en-US" sz="1150" dirty="0">
+                <a:solidFill>
+                  <a:srgbClr val="212121"/>
+                </a:solidFill>
+                <a:latin typeface="Calibri" pitchFamily="34" charset="0"/>
+                <a:ea typeface="Calibri" pitchFamily="34" charset="-122"/>
+                <a:cs typeface="Calibri" pitchFamily="34" charset="-120"/>
+              </a:rPr>
+              <a:t>Review the server operator and package provenance</a:t>
+            </a:r>
+            <a:endParaRPr lang="en-US" sz="1150" dirty="0"/>
+          </a:p>
+        </p:txBody>
+      </p:sp>
+      <p:sp>
+        <p:nvSpPr>
+          <p:cNvPr id="8" name="Shape 6"/>
+          <p:cNvSpPr/>
+          <p:nvPr/>
+        </p:nvSpPr>
+        <p:spPr>
+          <a:xfrm>
+            <a:off x="4672584" y="1078992"/>
+            <a:ext cx="4105656" cy="1655064"/>
+          </a:xfrm>
+          <a:prstGeom prst="roundRect">
+            <a:avLst>
+              <a:gd name="adj" fmla="val 3315"/>
+            </a:avLst>
+          </a:prstGeom>
+          <a:solidFill>
+            <a:srgbClr val="F3F4F6"/>
+          </a:solidFill>
+          <a:ln w="10160">
+            <a:solidFill>
+              <a:srgbClr val="D1D5DB"/>
+            </a:solidFill>
+            <a:prstDash val="solid"/>
+          </a:ln>
+        </p:spPr>
+      </p:sp>
+      <p:sp>
+        <p:nvSpPr>
+          <p:cNvPr id="9" name="Text 7"/>
+          <p:cNvSpPr/>
+          <p:nvPr/>
+        </p:nvSpPr>
+        <p:spPr>
+          <a:xfrm>
+            <a:off x="4818888" y="1197864"/>
+            <a:ext cx="3813048" cy="310896"/>
+          </a:xfrm>
+          <a:prstGeom prst="rect">
+            <a:avLst/>
+          </a:prstGeom>
+          <a:noFill/>
+          <a:ln/>
+        </p:spPr>
+        <p:txBody>
+          <a:bodyPr wrap="square" lIns="0" tIns="0" rIns="0" bIns="0" rtlCol="0" anchor="ctr">
+            <a:normAutofit/>
+          </a:bodyPr>
+          <a:lstStyle/>
+          <a:p>
+            <a:pPr indent="0" marL="0">
+              <a:buNone/>
+            </a:pPr>
+            <a:r>
+              <a:rPr lang="en-US" sz="1500" b="1" dirty="0">
+                <a:solidFill>
+                  <a:srgbClr val="1E2761"/>
+                </a:solidFill>
+                <a:latin typeface="Calibri" pitchFamily="34" charset="0"/>
+                <a:ea typeface="Calibri" pitchFamily="34" charset="-122"/>
+                <a:cs typeface="Calibri" pitchFamily="34" charset="-120"/>
+              </a:rPr>
+              <a:t>Least privilege</a:t>
+            </a:r>
+            <a:endParaRPr lang="en-US" sz="1500" dirty="0"/>
+          </a:p>
+        </p:txBody>
+      </p:sp>
+      <p:sp>
+        <p:nvSpPr>
+          <p:cNvPr id="10" name="Text 8"/>
+          <p:cNvSpPr/>
+          <p:nvPr/>
+        </p:nvSpPr>
+        <p:spPr>
+          <a:xfrm>
+            <a:off x="4818888" y="1581912"/>
+            <a:ext cx="3813048" cy="1033272"/>
+          </a:xfrm>
+          <a:prstGeom prst="rect">
+            <a:avLst/>
+          </a:prstGeom>
+          <a:noFill/>
+          <a:ln/>
+        </p:spPr>
+        <p:txBody>
+          <a:bodyPr wrap="square" lIns="0" tIns="0" rIns="0" bIns="0" rtlCol="0" anchor="t">
+            <a:normAutofit/>
+          </a:bodyPr>
+          <a:lstStyle/>
+          <a:p>
+            <a:pPr indent="0" marL="0">
+              <a:buNone/>
+            </a:pPr>
+            <a:r>
+              <a:rPr lang="en-US" sz="1150" dirty="0">
+                <a:solidFill>
+                  <a:srgbClr val="212121"/>
+                </a:solidFill>
+                <a:latin typeface="Calibri" pitchFamily="34" charset="0"/>
+                <a:ea typeface="Calibri" pitchFamily="34" charset="-122"/>
+                <a:cs typeface="Calibri" pitchFamily="34" charset="-120"/>
+              </a:rPr>
+              <a:t>Narrow identity scopes and allowed_tools</a:t>
+            </a:r>
+            <a:endParaRPr lang="en-US" sz="1150" dirty="0"/>
+          </a:p>
+        </p:txBody>
+      </p:sp>
+      <p:sp>
+        <p:nvSpPr>
+          <p:cNvPr id="11" name="Shape 9"/>
+          <p:cNvSpPr/>
+          <p:nvPr/>
+        </p:nvSpPr>
+        <p:spPr>
+          <a:xfrm>
+            <a:off x="365760" y="2935224"/>
+            <a:ext cx="4105656" cy="1655064"/>
+          </a:xfrm>
+          <a:prstGeom prst="roundRect">
+            <a:avLst>
+              <a:gd name="adj" fmla="val 3315"/>
+            </a:avLst>
+          </a:prstGeom>
+          <a:solidFill>
+            <a:srgbClr val="F3F4F6"/>
+          </a:solidFill>
+          <a:ln w="10160">
+            <a:solidFill>
+              <a:srgbClr val="D1D5DB"/>
+            </a:solidFill>
+            <a:prstDash val="solid"/>
+          </a:ln>
+        </p:spPr>
+      </p:sp>
+      <p:sp>
+        <p:nvSpPr>
+          <p:cNvPr id="12" name="Text 10"/>
+          <p:cNvSpPr/>
+          <p:nvPr/>
+        </p:nvSpPr>
+        <p:spPr>
+          <a:xfrm>
+            <a:off x="512064" y="3054096"/>
+            <a:ext cx="3813048" cy="310896"/>
+          </a:xfrm>
+          <a:prstGeom prst="rect">
+            <a:avLst/>
+          </a:prstGeom>
+          <a:noFill/>
+          <a:ln/>
+        </p:spPr>
+        <p:txBody>
+          <a:bodyPr wrap="square" lIns="0" tIns="0" rIns="0" bIns="0" rtlCol="0" anchor="ctr">
+            <a:normAutofit/>
+          </a:bodyPr>
+          <a:lstStyle/>
+          <a:p>
+            <a:pPr indent="0" marL="0">
+              <a:buNone/>
+            </a:pPr>
+            <a:r>
+              <a:rPr lang="en-US" sz="1500" b="1" dirty="0">
+                <a:solidFill>
+                  <a:srgbClr val="1E2761"/>
+                </a:solidFill>
+                <a:latin typeface="Calibri" pitchFamily="34" charset="0"/>
+                <a:ea typeface="Calibri" pitchFamily="34" charset="-122"/>
+                <a:cs typeface="Calibri" pitchFamily="34" charset="-120"/>
+              </a:rPr>
+              <a:t>Prompt injection</a:t>
+            </a:r>
+            <a:endParaRPr lang="en-US" sz="1500" dirty="0"/>
+          </a:p>
+        </p:txBody>
+      </p:sp>
+      <p:sp>
+        <p:nvSpPr>
+          <p:cNvPr id="13" name="Text 11"/>
+          <p:cNvSpPr/>
+          <p:nvPr/>
+        </p:nvSpPr>
+        <p:spPr>
+          <a:xfrm>
+            <a:off x="512064" y="3438144"/>
+            <a:ext cx="3813048" cy="1033272"/>
+          </a:xfrm>
+          <a:prstGeom prst="rect">
+            <a:avLst/>
+          </a:prstGeom>
+          <a:noFill/>
+          <a:ln/>
+        </p:spPr>
+        <p:txBody>
+          <a:bodyPr wrap="square" lIns="0" tIns="0" rIns="0" bIns="0" rtlCol="0" anchor="t">
+            <a:normAutofit/>
+          </a:bodyPr>
+          <a:lstStyle/>
+          <a:p>
+            <a:pPr indent="0" marL="0">
+              <a:buNone/>
+            </a:pPr>
+            <a:r>
+              <a:rPr lang="en-US" sz="1150" dirty="0">
+                <a:solidFill>
+                  <a:srgbClr val="212121"/>
+                </a:solidFill>
+                <a:latin typeface="Calibri" pitchFamily="34" charset="0"/>
+                <a:ea typeface="Calibri" pitchFamily="34" charset="-122"/>
+                <a:cs typeface="Calibri" pitchFamily="34" charset="-120"/>
+              </a:rPr>
+              <a:t>Treat tool metadata and results as untrusted</a:t>
+            </a:r>
+            <a:endParaRPr lang="en-US" sz="1150" dirty="0"/>
+          </a:p>
+        </p:txBody>
+      </p:sp>
+      <p:sp>
+        <p:nvSpPr>
+          <p:cNvPr id="14" name="Shape 12"/>
+          <p:cNvSpPr/>
+          <p:nvPr/>
+        </p:nvSpPr>
+        <p:spPr>
+          <a:xfrm>
+            <a:off x="4672584" y="2935224"/>
+            <a:ext cx="4105656" cy="1655064"/>
+          </a:xfrm>
+          <a:prstGeom prst="roundRect">
+            <a:avLst>
+              <a:gd name="adj" fmla="val 3315"/>
+            </a:avLst>
+          </a:prstGeom>
+          <a:solidFill>
+            <a:srgbClr val="F3F4F6"/>
+          </a:solidFill>
+          <a:ln w="10160">
+            <a:solidFill>
+              <a:srgbClr val="D1D5DB"/>
+            </a:solidFill>
+            <a:prstDash val="solid"/>
+          </a:ln>
+        </p:spPr>
+      </p:sp>
+      <p:sp>
+        <p:nvSpPr>
+          <p:cNvPr id="15" name="Text 13"/>
+          <p:cNvSpPr/>
+          <p:nvPr/>
+        </p:nvSpPr>
+        <p:spPr>
+          <a:xfrm>
+            <a:off x="4818888" y="3054096"/>
+            <a:ext cx="3813048" cy="310896"/>
+          </a:xfrm>
+          <a:prstGeom prst="rect">
+            <a:avLst/>
+          </a:prstGeom>
+          <a:noFill/>
+          <a:ln/>
+        </p:spPr>
+        <p:txBody>
+          <a:bodyPr wrap="square" lIns="0" tIns="0" rIns="0" bIns="0" rtlCol="0" anchor="ctr">
+            <a:normAutofit/>
+          </a:bodyPr>
+          <a:lstStyle/>
+          <a:p>
+            <a:pPr indent="0" marL="0">
+              <a:buNone/>
+            </a:pPr>
+            <a:r>
+              <a:rPr lang="en-US" sz="1500" b="1" dirty="0">
+                <a:solidFill>
+                  <a:srgbClr val="1E2761"/>
+                </a:solidFill>
+                <a:latin typeface="Calibri" pitchFamily="34" charset="0"/>
+                <a:ea typeface="Calibri" pitchFamily="34" charset="-122"/>
+                <a:cs typeface="Calibri" pitchFamily="34" charset="-120"/>
+              </a:rPr>
+              <a:t>Audit</a:t>
+            </a:r>
+            <a:endParaRPr lang="en-US" sz="1500" dirty="0"/>
+          </a:p>
+        </p:txBody>
+      </p:sp>
+      <p:sp>
+        <p:nvSpPr>
+          <p:cNvPr id="16" name="Text 14"/>
+          <p:cNvSpPr/>
+          <p:nvPr/>
+        </p:nvSpPr>
+        <p:spPr>
+          <a:xfrm>
+            <a:off x="4818888" y="3438144"/>
+            <a:ext cx="3813048" cy="1033272"/>
+          </a:xfrm>
+          <a:prstGeom prst="rect">
+            <a:avLst/>
+          </a:prstGeom>
+          <a:noFill/>
+          <a:ln/>
+        </p:spPr>
+        <p:txBody>
+          <a:bodyPr wrap="square" lIns="0" tIns="0" rIns="0" bIns="0" rtlCol="0" anchor="t">
+            <a:normAutofit/>
+          </a:bodyPr>
+          <a:lstStyle/>
+          <a:p>
+            <a:pPr indent="0" marL="0">
+              <a:buNone/>
+            </a:pPr>
+            <a:r>
+              <a:rPr lang="en-US" sz="1150" dirty="0">
+                <a:solidFill>
+                  <a:srgbClr val="212121"/>
+                </a:solidFill>
+                <a:latin typeface="Calibri" pitchFamily="34" charset="0"/>
+                <a:ea typeface="Calibri" pitchFamily="34" charset="-122"/>
+                <a:cs typeface="Calibri" pitchFamily="34" charset="-120"/>
+              </a:rPr>
+              <a:t>Log selected tool, arguments, approval, result status, and caller</a:t>
+            </a:r>
+            <a:endParaRPr lang="en-US" sz="1150" dirty="0"/>
+          </a:p>
+        </p:txBody>
+      </p:sp>
+      <p:sp>
+        <p:nvSpPr>
+          <p:cNvPr id="17" name="Shape 15"/>
+          <p:cNvSpPr/>
+          <p:nvPr/>
+        </p:nvSpPr>
+        <p:spPr>
+          <a:xfrm>
+            <a:off x="365760" y="4773168"/>
+            <a:ext cx="8412480" cy="0"/>
+          </a:xfrm>
+          <a:prstGeom prst="line">
+            <a:avLst/>
+          </a:prstGeom>
+          <a:noFill/>
+          <a:ln w="6350">
+            <a:solidFill>
+              <a:srgbClr val="D1D5DB"/>
+            </a:solidFill>
+            <a:prstDash val="solid"/>
+          </a:ln>
+        </p:spPr>
+      </p:sp>
+      <p:sp>
+        <p:nvSpPr>
+          <p:cNvPr id="18" name="Text 16"/>
+          <p:cNvSpPr/>
+          <p:nvPr/>
+        </p:nvSpPr>
+        <p:spPr>
+          <a:xfrm>
+            <a:off x="384048" y="4818888"/>
+            <a:ext cx="8275320" cy="182880"/>
+          </a:xfrm>
+          <a:prstGeom prst="rect">
+            <a:avLst/>
+          </a:prstGeom>
+          <a:noFill/>
+          <a:ln/>
+        </p:spPr>
+        <p:txBody>
+          <a:bodyPr wrap="square" lIns="0" tIns="0" rIns="0" bIns="0" rtlCol="0" anchor="ctr">
+            <a:normAutofit/>
+          </a:bodyPr>
+          <a:lstStyle/>
+          <a:p>
+            <a:pPr indent="0" marL="0">
+              <a:buNone/>
+            </a:pPr>
+            <a:r>
+              <a:rPr lang="en-US" sz="820" dirty="0">
+                <a:solidFill>
+                  <a:srgbClr val="6B7280"/>
+                </a:solidFill>
+                <a:latin typeface="Calibri" pitchFamily="34" charset="0"/>
+                <a:ea typeface="Calibri" pitchFamily="34" charset="-122"/>
+                <a:cs typeface="Calibri" pitchFamily="34" charset="-120"/>
+              </a:rPr>
+              <a:t>Source: https://learn.microsoft.com/en-us/agent-framework/agents/tools/local-mcp-tools?tabs=python</a:t>
+            </a:r>
+            <a:endParaRPr lang="en-US" sz="820" dirty="0"/>
+          </a:p>
+        </p:txBody>
+      </p:sp>
+    </p:spTree>
+  </p:cSld>
+  <p:clrMapOvr>
+    <a:masterClrMapping/>
+  </p:clrMapOvr>
+</p:sld>
+</file>
+
+<file path=ppt/slides/slide12.xml><?xml version="1.0" encoding="utf-8"?>
+<p:sld xmlns:a="http://schemas.openxmlformats.org/drawingml/2006/main" xmlns:r="http://schemas.openxmlformats.org/officeDocument/2006/relationships" xmlns:p="http://schemas.openxmlformats.org/presentationml/2006/main">
+  <p:cSld name="Slide 12">
+    <p:bg>
+      <p:bgPr>
+        <a:solidFill>
+          <a:srgbClr val="FFFFFF"/>
+        </a:solidFill>
+      </p:bgPr>
+    </p:bg>
+    <p:spTree>
+      <p:nvGrpSpPr>
+        <p:cNvPr id="1" name=""/>
+        <p:cNvGrpSpPr/>
+        <p:nvPr/>
+      </p:nvGrpSpPr>
+      <p:grpSpPr>
+        <a:xfrm>
+          <a:off x="0" y="0"/>
+          <a:ext cx="0" cy="0"/>
+          <a:chOff x="0" y="0"/>
+          <a:chExt cx="0" cy="0"/>
+        </a:xfrm>
+      </p:grpSpPr>
+      <p:sp>
+        <p:nvSpPr>
+          <p:cNvPr id="2" name="Shape 0"/>
+          <p:cNvSpPr/>
+          <p:nvPr/>
+        </p:nvSpPr>
+        <p:spPr>
+          <a:xfrm>
+            <a:off x="0" y="0"/>
+            <a:ext cx="54864" cy="5143500"/>
+          </a:xfrm>
+          <a:prstGeom prst="rect">
+            <a:avLst/>
+          </a:prstGeom>
+          <a:solidFill>
+            <a:srgbClr val="1E2761"/>
+          </a:solidFill>
+          <a:ln/>
+        </p:spPr>
+      </p:sp>
+      <p:sp>
+        <p:nvSpPr>
+          <p:cNvPr id="3" name="Text 1"/>
+          <p:cNvSpPr/>
+          <p:nvPr/>
+        </p:nvSpPr>
+        <p:spPr>
+          <a:xfrm>
+            <a:off x="5486400" y="256032"/>
+            <a:ext cx="3337560" cy="228600"/>
+          </a:xfrm>
+          <a:prstGeom prst="rect">
+            <a:avLst/>
+          </a:prstGeom>
+          <a:noFill/>
+          <a:ln/>
+        </p:spPr>
+        <p:txBody>
+          <a:bodyPr wrap="square" lIns="0" tIns="0" rIns="0" bIns="0" rtlCol="0" anchor="ctr">
+            <a:normAutofit/>
+          </a:bodyPr>
+          <a:lstStyle/>
+          <a:p>
+            <a:pPr algn="r" indent="0" marL="0">
+              <a:buNone/>
+            </a:pPr>
+            <a:r>
+              <a:rPr lang="en-US" sz="950" dirty="0">
+                <a:solidFill>
+                  <a:srgbClr val="6B7280"/>
+                </a:solidFill>
+                <a:latin typeface="Calibri" pitchFamily="34" charset="0"/>
+                <a:ea typeface="Calibri" pitchFamily="34" charset="-122"/>
+                <a:cs typeface="Calibri" pitchFamily="34" charset="-120"/>
+              </a:rPr>
+              <a:t>Day 3 · Module 5</a:t>
+            </a:r>
+            <a:endParaRPr lang="en-US" sz="950" dirty="0"/>
+          </a:p>
+        </p:txBody>
+      </p:sp>
+      <p:sp>
+        <p:nvSpPr>
+          <p:cNvPr id="4" name="Text 2"/>
+          <p:cNvSpPr/>
+          <p:nvPr/>
+        </p:nvSpPr>
+        <p:spPr>
+          <a:xfrm>
+            <a:off x="365760" y="310896"/>
+            <a:ext cx="6583680" cy="603504"/>
+          </a:xfrm>
+          <a:prstGeom prst="rect">
+            <a:avLst/>
+          </a:prstGeom>
+          <a:noFill/>
+          <a:ln/>
+        </p:spPr>
+        <p:txBody>
+          <a:bodyPr wrap="square" lIns="0" tIns="0" rIns="0" bIns="0" rtlCol="0" anchor="ctr">
+            <a:normAutofit/>
+          </a:bodyPr>
+          <a:lstStyle/>
+          <a:p>
+            <a:pPr indent="0" marL="0">
+              <a:buNone/>
+            </a:pPr>
+            <a:r>
+              <a:rPr lang="en-US" sz="2800" b="1" dirty="0">
+                <a:solidFill>
+                  <a:srgbClr val="1E2761"/>
+                </a:solidFill>
+                <a:latin typeface="Calibri" pitchFamily="34" charset="0"/>
+                <a:ea typeface="Calibri" pitchFamily="34" charset="-122"/>
+                <a:cs typeface="Calibri" pitchFamily="34" charset="-120"/>
+              </a:rPr>
+              <a:t>Always close the lifecycle</a:t>
+            </a:r>
+            <a:endParaRPr lang="en-US" sz="2800" dirty="0"/>
+          </a:p>
+        </p:txBody>
+      </p:sp>
+      <p:sp>
+        <p:nvSpPr>
+          <p:cNvPr id="5" name="Shape 3"/>
+          <p:cNvSpPr/>
+          <p:nvPr/>
+        </p:nvSpPr>
+        <p:spPr>
+          <a:xfrm>
+            <a:off x="365760" y="1216152"/>
+            <a:ext cx="2633472" cy="1572768"/>
+          </a:xfrm>
+          <a:prstGeom prst="roundRect">
+            <a:avLst>
+              <a:gd name="adj" fmla="val 3488"/>
+            </a:avLst>
+          </a:prstGeom>
+          <a:solidFill>
+            <a:srgbClr val="CADCFC"/>
+          </a:solidFill>
+          <a:ln w="10160">
+            <a:solidFill>
+              <a:srgbClr val="1E2761"/>
+            </a:solidFill>
+            <a:prstDash val="solid"/>
+          </a:ln>
+        </p:spPr>
+      </p:sp>
+      <p:sp>
+        <p:nvSpPr>
+          <p:cNvPr id="6" name="Shape 4"/>
+          <p:cNvSpPr/>
+          <p:nvPr/>
+        </p:nvSpPr>
+        <p:spPr>
+          <a:xfrm>
+            <a:off x="475488" y="1335024"/>
+            <a:ext cx="320040" cy="320040"/>
+          </a:xfrm>
+          <a:prstGeom prst="ellipse">
+            <a:avLst/>
+          </a:prstGeom>
+          <a:solidFill>
+            <a:srgbClr val="1E2761"/>
+          </a:solidFill>
+          <a:ln/>
+        </p:spPr>
+      </p:sp>
+      <p:sp>
+        <p:nvSpPr>
+          <p:cNvPr id="7" name="Text 5"/>
+          <p:cNvSpPr/>
+          <p:nvPr/>
+        </p:nvSpPr>
+        <p:spPr>
+          <a:xfrm>
+            <a:off x="475488" y="1385316"/>
+            <a:ext cx="320040" cy="146304"/>
+          </a:xfrm>
+          <a:prstGeom prst="rect">
+            <a:avLst/>
+          </a:prstGeom>
+          <a:noFill/>
+          <a:ln/>
+        </p:spPr>
+        <p:txBody>
+          <a:bodyPr wrap="square" lIns="0" tIns="0" rIns="0" bIns="0" rtlCol="0" anchor="ctr"/>
+          <a:lstStyle/>
+          <a:p>
+            <a:pPr algn="ctr" indent="0" marL="0">
+              <a:buNone/>
+            </a:pPr>
+            <a:r>
+              <a:rPr lang="en-US" sz="900" b="1" dirty="0">
+                <a:solidFill>
+                  <a:srgbClr val="FFFFFF"/>
+                </a:solidFill>
+                <a:latin typeface="Calibri" pitchFamily="34" charset="0"/>
+                <a:ea typeface="Calibri" pitchFamily="34" charset="-122"/>
+                <a:cs typeface="Calibri" pitchFamily="34" charset="-120"/>
+              </a:rPr>
+              <a:t>1</a:t>
+            </a:r>
+            <a:endParaRPr lang="en-US" sz="900" dirty="0"/>
+          </a:p>
+        </p:txBody>
+      </p:sp>
+      <p:sp>
+        <p:nvSpPr>
+          <p:cNvPr id="8" name="Text 6"/>
+          <p:cNvSpPr/>
+          <p:nvPr/>
+        </p:nvSpPr>
+        <p:spPr>
+          <a:xfrm>
+            <a:off x="896112" y="1335024"/>
+            <a:ext cx="1975104" cy="1353312"/>
+          </a:xfrm>
+          <a:prstGeom prst="rect">
+            <a:avLst/>
+          </a:prstGeom>
+          <a:noFill/>
+          <a:ln/>
+        </p:spPr>
+        <p:txBody>
+          <a:bodyPr wrap="square" lIns="0" tIns="0" rIns="0" bIns="0" rtlCol="0" anchor="ctr">
+            <a:normAutofit/>
+          </a:bodyPr>
+          <a:lstStyle/>
+          <a:p>
+            <a:pPr indent="0" marL="0">
+              <a:buNone/>
+            </a:pPr>
+            <a:r>
+              <a:rPr lang="en-US" sz="1500" b="1" dirty="0">
+                <a:solidFill>
+                  <a:srgbClr val="1E2761"/>
+                </a:solidFill>
+                <a:latin typeface="Calibri" pitchFamily="34" charset="0"/>
+                <a:ea typeface="Calibri" pitchFamily="34" charset="-122"/>
+                <a:cs typeface="Calibri" pitchFamily="34" charset="-120"/>
+              </a:rPr>
+              <a:t>Acquire credential</a:t>
+            </a:r>
+            <a:endParaRPr lang="en-US" sz="1500" dirty="0"/>
+          </a:p>
+        </p:txBody>
+      </p:sp>
+      <p:sp>
+        <p:nvSpPr>
+          <p:cNvPr id="9" name="Shape 7"/>
+          <p:cNvSpPr/>
+          <p:nvPr/>
+        </p:nvSpPr>
+        <p:spPr>
+          <a:xfrm>
+            <a:off x="3035808" y="1892808"/>
+            <a:ext cx="164592" cy="219456"/>
+          </a:xfrm>
+          <a:prstGeom prst="chevron">
+            <a:avLst/>
+          </a:prstGeom>
+          <a:solidFill>
+            <a:srgbClr val="E8A87C"/>
+          </a:solidFill>
+          <a:ln/>
+        </p:spPr>
+      </p:sp>
+      <p:sp>
+        <p:nvSpPr>
+          <p:cNvPr id="10" name="Shape 8"/>
+          <p:cNvSpPr/>
+          <p:nvPr/>
+        </p:nvSpPr>
+        <p:spPr>
+          <a:xfrm>
+            <a:off x="3255264" y="1216152"/>
+            <a:ext cx="2633472" cy="1572768"/>
+          </a:xfrm>
+          <a:prstGeom prst="roundRect">
+            <a:avLst>
+              <a:gd name="adj" fmla="val 3488"/>
+            </a:avLst>
+          </a:prstGeom>
+          <a:solidFill>
+            <a:srgbClr val="F3F4F6"/>
+          </a:solidFill>
+          <a:ln w="10160">
+            <a:solidFill>
+              <a:srgbClr val="D1D5DB"/>
+            </a:solidFill>
+            <a:prstDash val="solid"/>
+          </a:ln>
+        </p:spPr>
+      </p:sp>
+      <p:sp>
+        <p:nvSpPr>
+          <p:cNvPr id="11" name="Shape 9"/>
+          <p:cNvSpPr/>
+          <p:nvPr/>
+        </p:nvSpPr>
+        <p:spPr>
+          <a:xfrm>
+            <a:off x="3364992" y="1335024"/>
+            <a:ext cx="320040" cy="320040"/>
+          </a:xfrm>
+          <a:prstGeom prst="ellipse">
+            <a:avLst/>
+          </a:prstGeom>
+          <a:solidFill>
+            <a:srgbClr val="1E2761"/>
+          </a:solidFill>
+          <a:ln/>
+        </p:spPr>
+      </p:sp>
+      <p:sp>
+        <p:nvSpPr>
+          <p:cNvPr id="12" name="Text 10"/>
+          <p:cNvSpPr/>
+          <p:nvPr/>
+        </p:nvSpPr>
+        <p:spPr>
+          <a:xfrm>
+            <a:off x="3364992" y="1385316"/>
+            <a:ext cx="320040" cy="146304"/>
+          </a:xfrm>
+          <a:prstGeom prst="rect">
+            <a:avLst/>
+          </a:prstGeom>
+          <a:noFill/>
+          <a:ln/>
+        </p:spPr>
+        <p:txBody>
+          <a:bodyPr wrap="square" lIns="0" tIns="0" rIns="0" bIns="0" rtlCol="0" anchor="ctr"/>
+          <a:lstStyle/>
+          <a:p>
+            <a:pPr algn="ctr" indent="0" marL="0">
+              <a:buNone/>
+            </a:pPr>
+            <a:r>
+              <a:rPr lang="en-US" sz="900" b="1" dirty="0">
+                <a:solidFill>
+                  <a:srgbClr val="FFFFFF"/>
+                </a:solidFill>
+                <a:latin typeface="Calibri" pitchFamily="34" charset="0"/>
+                <a:ea typeface="Calibri" pitchFamily="34" charset="-122"/>
+                <a:cs typeface="Calibri" pitchFamily="34" charset="-120"/>
+              </a:rPr>
+              <a:t>2</a:t>
+            </a:r>
+            <a:endParaRPr lang="en-US" sz="900" dirty="0"/>
+          </a:p>
+        </p:txBody>
+      </p:sp>
+      <p:sp>
+        <p:nvSpPr>
+          <p:cNvPr id="13" name="Text 11"/>
+          <p:cNvSpPr/>
+          <p:nvPr/>
+        </p:nvSpPr>
+        <p:spPr>
+          <a:xfrm>
+            <a:off x="3785616" y="1335024"/>
+            <a:ext cx="1975104" cy="1353312"/>
+          </a:xfrm>
+          <a:prstGeom prst="rect">
+            <a:avLst/>
+          </a:prstGeom>
+          <a:noFill/>
+          <a:ln/>
+        </p:spPr>
+        <p:txBody>
+          <a:bodyPr wrap="square" lIns="0" tIns="0" rIns="0" bIns="0" rtlCol="0" anchor="ctr">
+            <a:normAutofit/>
+          </a:bodyPr>
+          <a:lstStyle/>
+          <a:p>
+            <a:pPr indent="0" marL="0">
+              <a:buNone/>
+            </a:pPr>
+            <a:r>
+              <a:rPr lang="en-US" sz="1500" b="1" dirty="0">
+                <a:solidFill>
+                  <a:srgbClr val="1E2761"/>
+                </a:solidFill>
+                <a:latin typeface="Calibri" pitchFamily="34" charset="0"/>
+                <a:ea typeface="Calibri" pitchFamily="34" charset="-122"/>
+                <a:cs typeface="Calibri" pitchFamily="34" charset="-120"/>
+              </a:rPr>
+              <a:t>Open MCP tool</a:t>
+            </a:r>
+            <a:endParaRPr lang="en-US" sz="1500" dirty="0"/>
+          </a:p>
+        </p:txBody>
+      </p:sp>
+      <p:sp>
+        <p:nvSpPr>
+          <p:cNvPr id="14" name="Shape 12"/>
+          <p:cNvSpPr/>
+          <p:nvPr/>
+        </p:nvSpPr>
+        <p:spPr>
+          <a:xfrm>
+            <a:off x="5925312" y="1892808"/>
+            <a:ext cx="164592" cy="219456"/>
+          </a:xfrm>
+          <a:prstGeom prst="chevron">
+            <a:avLst/>
+          </a:prstGeom>
+          <a:solidFill>
+            <a:srgbClr val="E8A87C"/>
+          </a:solidFill>
+          <a:ln/>
+        </p:spPr>
+      </p:sp>
+      <p:sp>
+        <p:nvSpPr>
+          <p:cNvPr id="15" name="Shape 13"/>
+          <p:cNvSpPr/>
+          <p:nvPr/>
+        </p:nvSpPr>
+        <p:spPr>
+          <a:xfrm>
+            <a:off x="6144768" y="1216152"/>
+            <a:ext cx="2633472" cy="1572768"/>
+          </a:xfrm>
+          <a:prstGeom prst="roundRect">
+            <a:avLst>
+              <a:gd name="adj" fmla="val 3488"/>
+            </a:avLst>
+          </a:prstGeom>
+          <a:solidFill>
+            <a:srgbClr val="F3F4F6"/>
+          </a:solidFill>
+          <a:ln w="10160">
+            <a:solidFill>
+              <a:srgbClr val="D1D5DB"/>
+            </a:solidFill>
+            <a:prstDash val="solid"/>
+          </a:ln>
+        </p:spPr>
+      </p:sp>
+      <p:sp>
+        <p:nvSpPr>
+          <p:cNvPr id="16" name="Shape 14"/>
+          <p:cNvSpPr/>
+          <p:nvPr/>
+        </p:nvSpPr>
+        <p:spPr>
+          <a:xfrm>
+            <a:off x="6254496" y="1335024"/>
+            <a:ext cx="320040" cy="320040"/>
+          </a:xfrm>
+          <a:prstGeom prst="ellipse">
+            <a:avLst/>
+          </a:prstGeom>
+          <a:solidFill>
+            <a:srgbClr val="1E2761"/>
+          </a:solidFill>
+          <a:ln/>
+        </p:spPr>
+      </p:sp>
+      <p:sp>
+        <p:nvSpPr>
+          <p:cNvPr id="17" name="Text 15"/>
+          <p:cNvSpPr/>
+          <p:nvPr/>
+        </p:nvSpPr>
+        <p:spPr>
+          <a:xfrm>
+            <a:off x="6254496" y="1385316"/>
+            <a:ext cx="320040" cy="146304"/>
+          </a:xfrm>
+          <a:prstGeom prst="rect">
+            <a:avLst/>
+          </a:prstGeom>
+          <a:noFill/>
+          <a:ln/>
+        </p:spPr>
+        <p:txBody>
+          <a:bodyPr wrap="square" lIns="0" tIns="0" rIns="0" bIns="0" rtlCol="0" anchor="ctr"/>
+          <a:lstStyle/>
+          <a:p>
+            <a:pPr algn="ctr" indent="0" marL="0">
+              <a:buNone/>
+            </a:pPr>
+            <a:r>
+              <a:rPr lang="en-US" sz="900" b="1" dirty="0">
+                <a:solidFill>
+                  <a:srgbClr val="FFFFFF"/>
+                </a:solidFill>
+                <a:latin typeface="Calibri" pitchFamily="34" charset="0"/>
+                <a:ea typeface="Calibri" pitchFamily="34" charset="-122"/>
+                <a:cs typeface="Calibri" pitchFamily="34" charset="-120"/>
+              </a:rPr>
+              <a:t>3</a:t>
+            </a:r>
+            <a:endParaRPr lang="en-US" sz="900" dirty="0"/>
+          </a:p>
+        </p:txBody>
+      </p:sp>
+      <p:sp>
+        <p:nvSpPr>
+          <p:cNvPr id="18" name="Text 16"/>
+          <p:cNvSpPr/>
+          <p:nvPr/>
+        </p:nvSpPr>
+        <p:spPr>
+          <a:xfrm>
+            <a:off x="6675120" y="1335024"/>
+            <a:ext cx="1975104" cy="1353312"/>
+          </a:xfrm>
+          <a:prstGeom prst="rect">
+            <a:avLst/>
+          </a:prstGeom>
+          <a:noFill/>
+          <a:ln/>
+        </p:spPr>
+        <p:txBody>
+          <a:bodyPr wrap="square" lIns="0" tIns="0" rIns="0" bIns="0" rtlCol="0" anchor="ctr">
+            <a:normAutofit/>
+          </a:bodyPr>
+          <a:lstStyle/>
+          <a:p>
+            <a:pPr indent="0" marL="0">
+              <a:buNone/>
+            </a:pPr>
+            <a:r>
+              <a:rPr lang="en-US" sz="1500" b="1" dirty="0">
+                <a:solidFill>
+                  <a:srgbClr val="1E2761"/>
+                </a:solidFill>
+                <a:latin typeface="Calibri" pitchFamily="34" charset="0"/>
+                <a:ea typeface="Calibri" pitchFamily="34" charset="-122"/>
+                <a:cs typeface="Calibri" pitchFamily="34" charset="-120"/>
+              </a:rPr>
+              <a:t>Open agent</a:t>
+            </a:r>
+            <a:endParaRPr lang="en-US" sz="1500" dirty="0"/>
+          </a:p>
+        </p:txBody>
+      </p:sp>
+      <p:sp>
+        <p:nvSpPr>
+          <p:cNvPr id="19" name="Shape 17"/>
+          <p:cNvSpPr/>
+          <p:nvPr/>
+        </p:nvSpPr>
+        <p:spPr>
+          <a:xfrm>
+            <a:off x="365760" y="3044952"/>
+            <a:ext cx="2633472" cy="1572768"/>
+          </a:xfrm>
+          <a:prstGeom prst="roundRect">
+            <a:avLst>
+              <a:gd name="adj" fmla="val 3488"/>
+            </a:avLst>
+          </a:prstGeom>
+          <a:solidFill>
+            <a:srgbClr val="F3F4F6"/>
+          </a:solidFill>
+          <a:ln w="10160">
+            <a:solidFill>
+              <a:srgbClr val="D1D5DB"/>
+            </a:solidFill>
+            <a:prstDash val="solid"/>
+          </a:ln>
+        </p:spPr>
+      </p:sp>
+      <p:sp>
+        <p:nvSpPr>
+          <p:cNvPr id="20" name="Shape 18"/>
+          <p:cNvSpPr/>
+          <p:nvPr/>
+        </p:nvSpPr>
+        <p:spPr>
+          <a:xfrm>
+            <a:off x="475488" y="3163824"/>
+            <a:ext cx="320040" cy="320040"/>
+          </a:xfrm>
+          <a:prstGeom prst="ellipse">
+            <a:avLst/>
+          </a:prstGeom>
+          <a:solidFill>
+            <a:srgbClr val="1E2761"/>
+          </a:solidFill>
+          <a:ln/>
+        </p:spPr>
+      </p:sp>
+      <p:sp>
+        <p:nvSpPr>
+          <p:cNvPr id="21" name="Text 19"/>
+          <p:cNvSpPr/>
+          <p:nvPr/>
+        </p:nvSpPr>
+        <p:spPr>
+          <a:xfrm>
+            <a:off x="475488" y="3214116"/>
+            <a:ext cx="320040" cy="146304"/>
+          </a:xfrm>
+          <a:prstGeom prst="rect">
+            <a:avLst/>
+          </a:prstGeom>
+          <a:noFill/>
+          <a:ln/>
+        </p:spPr>
+        <p:txBody>
+          <a:bodyPr wrap="square" lIns="0" tIns="0" rIns="0" bIns="0" rtlCol="0" anchor="ctr"/>
+          <a:lstStyle/>
+          <a:p>
+            <a:pPr algn="ctr" indent="0" marL="0">
+              <a:buNone/>
+            </a:pPr>
+            <a:r>
+              <a:rPr lang="en-US" sz="900" b="1" dirty="0">
+                <a:solidFill>
+                  <a:srgbClr val="FFFFFF"/>
+                </a:solidFill>
+                <a:latin typeface="Calibri" pitchFamily="34" charset="0"/>
+                <a:ea typeface="Calibri" pitchFamily="34" charset="-122"/>
+                <a:cs typeface="Calibri" pitchFamily="34" charset="-120"/>
+              </a:rPr>
+              <a:t>4</a:t>
+            </a:r>
+            <a:endParaRPr lang="en-US" sz="900" dirty="0"/>
+          </a:p>
+        </p:txBody>
+      </p:sp>
+      <p:sp>
+        <p:nvSpPr>
+          <p:cNvPr id="22" name="Text 20"/>
+          <p:cNvSpPr/>
+          <p:nvPr/>
+        </p:nvSpPr>
+        <p:spPr>
+          <a:xfrm>
+            <a:off x="896112" y="3163824"/>
+            <a:ext cx="1975104" cy="1353312"/>
+          </a:xfrm>
+          <a:prstGeom prst="rect">
+            <a:avLst/>
+          </a:prstGeom>
+          <a:noFill/>
+          <a:ln/>
+        </p:spPr>
+        <p:txBody>
+          <a:bodyPr wrap="square" lIns="0" tIns="0" rIns="0" bIns="0" rtlCol="0" anchor="ctr">
+            <a:normAutofit/>
+          </a:bodyPr>
+          <a:lstStyle/>
+          <a:p>
+            <a:pPr indent="0" marL="0">
+              <a:buNone/>
+            </a:pPr>
+            <a:r>
+              <a:rPr lang="en-US" sz="1500" b="1" dirty="0">
+                <a:solidFill>
+                  <a:srgbClr val="1E2761"/>
+                </a:solidFill>
+                <a:latin typeface="Calibri" pitchFamily="34" charset="0"/>
+                <a:ea typeface="Calibri" pitchFamily="34" charset="-122"/>
+                <a:cs typeface="Calibri" pitchFamily="34" charset="-120"/>
+              </a:rPr>
+              <a:t>Run and handle approvals</a:t>
+            </a:r>
+            <a:endParaRPr lang="en-US" sz="1500" dirty="0"/>
+          </a:p>
+        </p:txBody>
+      </p:sp>
+      <p:sp>
+        <p:nvSpPr>
+          <p:cNvPr id="23" name="Shape 21"/>
+          <p:cNvSpPr/>
+          <p:nvPr/>
+        </p:nvSpPr>
+        <p:spPr>
+          <a:xfrm>
+            <a:off x="3035808" y="3721608"/>
+            <a:ext cx="164592" cy="219456"/>
+          </a:xfrm>
+          <a:prstGeom prst="chevron">
+            <a:avLst/>
+          </a:prstGeom>
+          <a:solidFill>
+            <a:srgbClr val="E8A87C"/>
+          </a:solidFill>
+          <a:ln/>
+        </p:spPr>
+      </p:sp>
+      <p:sp>
+        <p:nvSpPr>
+          <p:cNvPr id="24" name="Shape 22"/>
+          <p:cNvSpPr/>
+          <p:nvPr/>
+        </p:nvSpPr>
+        <p:spPr>
+          <a:xfrm>
+            <a:off x="3255264" y="3044952"/>
+            <a:ext cx="2633472" cy="1572768"/>
+          </a:xfrm>
+          <a:prstGeom prst="roundRect">
+            <a:avLst>
+              <a:gd name="adj" fmla="val 3488"/>
+            </a:avLst>
+          </a:prstGeom>
+          <a:solidFill>
+            <a:srgbClr val="CADCFC"/>
+          </a:solidFill>
+          <a:ln w="10160">
+            <a:solidFill>
+              <a:srgbClr val="1E2761"/>
+            </a:solidFill>
+            <a:prstDash val="solid"/>
+          </a:ln>
+        </p:spPr>
+      </p:sp>
+      <p:sp>
+        <p:nvSpPr>
+          <p:cNvPr id="25" name="Shape 23"/>
+          <p:cNvSpPr/>
+          <p:nvPr/>
+        </p:nvSpPr>
+        <p:spPr>
+          <a:xfrm>
+            <a:off x="3364992" y="3163824"/>
+            <a:ext cx="320040" cy="320040"/>
+          </a:xfrm>
+          <a:prstGeom prst="ellipse">
+            <a:avLst/>
+          </a:prstGeom>
+          <a:solidFill>
+            <a:srgbClr val="1E2761"/>
+          </a:solidFill>
+          <a:ln/>
+        </p:spPr>
+      </p:sp>
+      <p:sp>
+        <p:nvSpPr>
+          <p:cNvPr id="26" name="Text 24"/>
+          <p:cNvSpPr/>
+          <p:nvPr/>
+        </p:nvSpPr>
+        <p:spPr>
+          <a:xfrm>
+            <a:off x="3364992" y="3214116"/>
+            <a:ext cx="320040" cy="146304"/>
+          </a:xfrm>
+          <a:prstGeom prst="rect">
+            <a:avLst/>
+          </a:prstGeom>
+          <a:noFill/>
+          <a:ln/>
+        </p:spPr>
+        <p:txBody>
+          <a:bodyPr wrap="square" lIns="0" tIns="0" rIns="0" bIns="0" rtlCol="0" anchor="ctr"/>
+          <a:lstStyle/>
+          <a:p>
+            <a:pPr algn="ctr" indent="0" marL="0">
+              <a:buNone/>
+            </a:pPr>
+            <a:r>
+              <a:rPr lang="en-US" sz="900" b="1" dirty="0">
+                <a:solidFill>
+                  <a:srgbClr val="FFFFFF"/>
+                </a:solidFill>
+                <a:latin typeface="Calibri" pitchFamily="34" charset="0"/>
+                <a:ea typeface="Calibri" pitchFamily="34" charset="-122"/>
+                <a:cs typeface="Calibri" pitchFamily="34" charset="-120"/>
+              </a:rPr>
+              <a:t>5</a:t>
+            </a:r>
+            <a:endParaRPr lang="en-US" sz="900" dirty="0"/>
+          </a:p>
+        </p:txBody>
+      </p:sp>
+      <p:sp>
+        <p:nvSpPr>
+          <p:cNvPr id="27" name="Text 25"/>
+          <p:cNvSpPr/>
+          <p:nvPr/>
+        </p:nvSpPr>
+        <p:spPr>
+          <a:xfrm>
+            <a:off x="3785616" y="3163824"/>
+            <a:ext cx="1975104" cy="1353312"/>
+          </a:xfrm>
+          <a:prstGeom prst="rect">
+            <a:avLst/>
+          </a:prstGeom>
+          <a:noFill/>
+          <a:ln/>
+        </p:spPr>
+        <p:txBody>
+          <a:bodyPr wrap="square" lIns="0" tIns="0" rIns="0" bIns="0" rtlCol="0" anchor="ctr">
+            <a:normAutofit/>
+          </a:bodyPr>
+          <a:lstStyle/>
+          <a:p>
+            <a:pPr indent="0" marL="0">
+              <a:buNone/>
+            </a:pPr>
+            <a:r>
+              <a:rPr lang="en-US" sz="1500" b="1" dirty="0">
+                <a:solidFill>
+                  <a:srgbClr val="1E2761"/>
+                </a:solidFill>
+                <a:latin typeface="Calibri" pitchFamily="34" charset="0"/>
+                <a:ea typeface="Calibri" pitchFamily="34" charset="-122"/>
+                <a:cs typeface="Calibri" pitchFamily="34" charset="-120"/>
+              </a:rPr>
+              <a:t>Exit contexts in reverse order</a:t>
+            </a:r>
+            <a:endParaRPr lang="en-US" sz="1500" dirty="0"/>
+          </a:p>
+        </p:txBody>
+      </p:sp>
+      <p:sp>
+        <p:nvSpPr>
+          <p:cNvPr id="28" name="Shape 26"/>
+          <p:cNvSpPr/>
+          <p:nvPr/>
+        </p:nvSpPr>
+        <p:spPr>
+          <a:xfrm>
+            <a:off x="365760" y="4773168"/>
+            <a:ext cx="8412480" cy="0"/>
+          </a:xfrm>
+          <a:prstGeom prst="line">
+            <a:avLst/>
+          </a:prstGeom>
+          <a:noFill/>
+          <a:ln w="6350">
+            <a:solidFill>
+              <a:srgbClr val="D1D5DB"/>
+            </a:solidFill>
+            <a:prstDash val="solid"/>
+          </a:ln>
+        </p:spPr>
+      </p:sp>
+      <p:sp>
+        <p:nvSpPr>
+          <p:cNvPr id="29" name="Text 27"/>
+          <p:cNvSpPr/>
+          <p:nvPr/>
+        </p:nvSpPr>
+        <p:spPr>
+          <a:xfrm>
+            <a:off x="384048" y="4818888"/>
+            <a:ext cx="8275320" cy="182880"/>
+          </a:xfrm>
+          <a:prstGeom prst="rect">
+            <a:avLst/>
+          </a:prstGeom>
+          <a:noFill/>
+          <a:ln/>
+        </p:spPr>
+        <p:txBody>
+          <a:bodyPr wrap="square" lIns="0" tIns="0" rIns="0" bIns="0" rtlCol="0" anchor="ctr">
+            <a:normAutofit/>
+          </a:bodyPr>
+          <a:lstStyle/>
+          <a:p>
+            <a:pPr indent="0" marL="0">
+              <a:buNone/>
+            </a:pPr>
+            <a:r>
+              <a:rPr lang="en-US" sz="820" dirty="0">
+                <a:solidFill>
+                  <a:srgbClr val="6B7280"/>
+                </a:solidFill>
+                <a:latin typeface="Calibri" pitchFamily="34" charset="0"/>
+                <a:ea typeface="Calibri" pitchFamily="34" charset="-122"/>
+                <a:cs typeface="Calibri" pitchFamily="34" charset="-120"/>
+              </a:rPr>
+              <a:t>Source: https://learn.microsoft.com/en-us/agent-framework/agents/tools/local-mcp-tools?tabs=python</a:t>
+            </a:r>
+            <a:endParaRPr lang="en-US" sz="820" dirty="0"/>
+          </a:p>
+        </p:txBody>
+      </p:sp>
+    </p:spTree>
+  </p:cSld>
+  <p:clrMapOvr>
+    <a:masterClrMapping/>
+  </p:clrMapOvr>
+</p:sld>
+</file>
+
+<file path=ppt/slides/slide13.xml><?xml version="1.0" encoding="utf-8"?>
+<p:sld xmlns:a="http://schemas.openxmlformats.org/drawingml/2006/main" xmlns:r="http://schemas.openxmlformats.org/officeDocument/2006/relationships" xmlns:p="http://schemas.openxmlformats.org/presentationml/2006/main">
+  <p:cSld name="Slide 13">
+    <p:bg>
+      <p:bgPr>
+        <a:solidFill>
+          <a:srgbClr val="FFFFFF"/>
+        </a:solidFill>
+      </p:bgPr>
+    </p:bg>
+    <p:spTree>
+      <p:nvGrpSpPr>
+        <p:cNvPr id="1" name=""/>
+        <p:cNvGrpSpPr/>
+        <p:nvPr/>
+      </p:nvGrpSpPr>
+      <p:grpSpPr>
+        <a:xfrm>
+          <a:off x="0" y="0"/>
+          <a:ext cx="0" cy="0"/>
+          <a:chOff x="0" y="0"/>
+          <a:chExt cx="0" cy="0"/>
+        </a:xfrm>
+      </p:grpSpPr>
+      <p:sp>
+        <p:nvSpPr>
+          <p:cNvPr id="2" name="Shape 0"/>
+          <p:cNvSpPr/>
+          <p:nvPr/>
+        </p:nvSpPr>
+        <p:spPr>
+          <a:xfrm>
+            <a:off x="0" y="0"/>
+            <a:ext cx="54864" cy="5143500"/>
+          </a:xfrm>
+          <a:prstGeom prst="rect">
+            <a:avLst/>
+          </a:prstGeom>
+          <a:solidFill>
+            <a:srgbClr val="1E2761"/>
+          </a:solidFill>
+          <a:ln/>
+        </p:spPr>
+      </p:sp>
+      <p:sp>
+        <p:nvSpPr>
+          <p:cNvPr id="3" name="Text 1"/>
+          <p:cNvSpPr/>
+          <p:nvPr/>
+        </p:nvSpPr>
+        <p:spPr>
+          <a:xfrm>
+            <a:off x="5486400" y="256032"/>
+            <a:ext cx="3337560" cy="228600"/>
+          </a:xfrm>
+          <a:prstGeom prst="rect">
+            <a:avLst/>
+          </a:prstGeom>
+          <a:noFill/>
+          <a:ln/>
+        </p:spPr>
+        <p:txBody>
+          <a:bodyPr wrap="square" lIns="0" tIns="0" rIns="0" bIns="0" rtlCol="0" anchor="ctr">
+            <a:normAutofit/>
+          </a:bodyPr>
+          <a:lstStyle/>
+          <a:p>
+            <a:pPr algn="r" indent="0" marL="0">
+              <a:buNone/>
+            </a:pPr>
+            <a:r>
+              <a:rPr lang="en-US" sz="950" dirty="0">
+                <a:solidFill>
+                  <a:srgbClr val="6B7280"/>
+                </a:solidFill>
+                <a:latin typeface="Calibri" pitchFamily="34" charset="0"/>
+                <a:ea typeface="Calibri" pitchFamily="34" charset="-122"/>
+                <a:cs typeface="Calibri" pitchFamily="34" charset="-120"/>
+              </a:rPr>
+              <a:t>Day 3 · Module 5</a:t>
+            </a:r>
+            <a:endParaRPr lang="en-US" sz="950" dirty="0"/>
+          </a:p>
+        </p:txBody>
+      </p:sp>
+      <p:sp>
+        <p:nvSpPr>
+          <p:cNvPr id="4" name="Text 2"/>
+          <p:cNvSpPr/>
+          <p:nvPr/>
+        </p:nvSpPr>
+        <p:spPr>
+          <a:xfrm>
+            <a:off x="365760" y="310896"/>
+            <a:ext cx="6583680" cy="603504"/>
+          </a:xfrm>
+          <a:prstGeom prst="rect">
+            <a:avLst/>
+          </a:prstGeom>
+          <a:noFill/>
+          <a:ln/>
+        </p:spPr>
+        <p:txBody>
+          <a:bodyPr wrap="square" lIns="0" tIns="0" rIns="0" bIns="0" rtlCol="0" anchor="ctr">
+            <a:normAutofit/>
+          </a:bodyPr>
+          <a:lstStyle/>
+          <a:p>
+            <a:pPr indent="0" marL="0">
+              <a:buNone/>
+            </a:pPr>
+            <a:r>
+              <a:rPr lang="en-US" sz="2800" b="1" dirty="0">
+                <a:solidFill>
+                  <a:srgbClr val="1E2761"/>
+                </a:solidFill>
+                <a:latin typeface="Calibri" pitchFamily="34" charset="0"/>
+                <a:ea typeface="Calibri" pitchFamily="34" charset="-122"/>
+                <a:cs typeface="Calibri" pitchFamily="34" charset="-120"/>
+              </a:rPr>
               <a:t>Local or remote?</a:t>
             </a:r>
             <a:endParaRPr lang="en-US" sz="2800" dirty="0"/>
@@ -3118,7 +4286,7 @@
       </p:sp>
       <p:graphicFrame>
         <p:nvGraphicFramePr>
-          <p:cNvPr id="12" name="Table 0"/>
+          <p:cNvPr id="14" name="Table 0"/>
           <p:cNvGraphicFramePr>
             <a:graphicFrameLocks noGrp="1"/>
           </p:cNvGraphicFramePr>
@@ -4455,9 +5623,9 @@
 </p:sld>
 </file>
 
-<file path=ppt/slides/slide12.xml><?xml version="1.0" encoding="utf-8"?>
+<file path=ppt/slides/slide14.xml><?xml version="1.0" encoding="utf-8"?>
 <p:sld xmlns:a="http://schemas.openxmlformats.org/drawingml/2006/main" xmlns:r="http://schemas.openxmlformats.org/officeDocument/2006/relationships" xmlns:p="http://schemas.openxmlformats.org/presentationml/2006/main">
-  <p:cSld name="Slide 12">
+  <p:cSld name="Slide 14">
     <p:bg>
       <p:bgPr>
         <a:solidFill>
@@ -7833,7 +9001,7 @@
     <p:bg>
       <p:bgPr>
         <a:solidFill>
-          <a:srgbClr val="FFFFFF"/>
+          <a:srgbClr val="CADCFC"/>
         </a:solidFill>
       </p:bgPr>
     </p:bg>
@@ -7860,7 +9028,7 @@
         <p:spPr>
           <a:xfrm>
             <a:off x="0" y="0"/>
-            <a:ext cx="54864" cy="5143500"/>
+            <a:ext cx="146304" cy="5143500"/>
           </a:xfrm>
           <a:prstGeom prst="rect">
             <a:avLst/>
@@ -7879,26 +9047,24 @@
         </p:nvSpPr>
         <p:spPr>
           <a:xfrm>
-            <a:off x="5486400" y="256032"/>
-            <a:ext cx="3337560" cy="228600"/>
-          </a:xfrm>
-          <a:prstGeom prst="rect">
-            <a:avLst/>
-          </a:prstGeom>
-          <a:noFill/>
-          <a:ln/>
-        </p:spPr>
-        <p:txBody>
-          <a:bodyPr wrap="square" lIns="0" tIns="0" rIns="0" bIns="0" rtlCol="0" anchor="ctr">
-            <a:normAutofit/>
-          </a:bodyPr>
+            <a:off x="5669280" y="274320"/>
+            <a:ext cx="3291840" cy="274320"/>
+          </a:xfrm>
+          <a:prstGeom prst="rect">
+            <a:avLst/>
+          </a:prstGeom>
+          <a:noFill/>
+          <a:ln/>
+        </p:spPr>
+        <p:txBody>
+          <a:bodyPr wrap="square" lIns="0" tIns="0" rIns="0" bIns="0" rtlCol="0" anchor="ctr"/>
           <a:lstStyle/>
           <a:p>
             <a:pPr algn="r" indent="0" marL="0">
               <a:buNone/>
             </a:pPr>
             <a:r>
-              <a:rPr lang="en-US" sz="950" dirty="0">
+              <a:rPr lang="en-US" sz="1000" dirty="0">
                 <a:solidFill>
                   <a:srgbClr val="6B7280"/>
                 </a:solidFill>
@@ -7906,9 +9072,9 @@
                 <a:ea typeface="Calibri" pitchFamily="34" charset="-122"/>
                 <a:cs typeface="Calibri" pitchFamily="34" charset="-120"/>
               </a:rPr>
-              <a:t>Day 3 · Module 5</a:t>
-            </a:r>
-            <a:endParaRPr lang="en-US" sz="950" dirty="0"/>
+              <a:t>Day 3 · Module 5 · Demo</a:t>
+            </a:r>
+            <a:endParaRPr lang="en-US" sz="1000" dirty="0"/>
           </a:p>
         </p:txBody>
       </p:sp>
@@ -7920,26 +9086,24 @@
         </p:nvSpPr>
         <p:spPr>
           <a:xfrm>
-            <a:off x="365760" y="310896"/>
-            <a:ext cx="6583680" cy="603504"/>
-          </a:xfrm>
-          <a:prstGeom prst="rect">
-            <a:avLst/>
-          </a:prstGeom>
-          <a:noFill/>
-          <a:ln/>
-        </p:spPr>
-        <p:txBody>
-          <a:bodyPr wrap="square" lIns="0" tIns="0" rIns="0" bIns="0" rtlCol="0" anchor="ctr">
-            <a:normAutofit/>
-          </a:bodyPr>
+            <a:off x="548640" y="1051560"/>
+            <a:ext cx="5486400" cy="502920"/>
+          </a:xfrm>
+          <a:prstGeom prst="rect">
+            <a:avLst/>
+          </a:prstGeom>
+          <a:noFill/>
+          <a:ln/>
+        </p:spPr>
+        <p:txBody>
+          <a:bodyPr wrap="square" lIns="0" tIns="0" rIns="0" bIns="0" rtlCol="0" anchor="ctr"/>
           <a:lstStyle/>
           <a:p>
             <a:pPr indent="0" marL="0">
               <a:buNone/>
             </a:pPr>
             <a:r>
-              <a:rPr lang="en-US" sz="2500" b="1" dirty="0">
+              <a:rPr lang="en-US" sz="3200" b="1" spc="800" kern="0" dirty="0">
                 <a:solidFill>
                   <a:srgbClr val="1E2761"/>
                 </a:solidFill>
@@ -7947,29 +9111,186 @@
                 <a:ea typeface="Calibri" pitchFamily="34" charset="-122"/>
                 <a:cs typeface="Calibri" pitchFamily="34" charset="-120"/>
               </a:rPr>
-              <a:t>Remote HTTP belongs behind explicit auth</a:t>
-            </a:r>
-            <a:endParaRPr lang="en-US" sz="2500" dirty="0"/>
-          </a:p>
-        </p:txBody>
-      </p:sp>
-      <p:sp>
-        <p:nvSpPr>
-          <p:cNvPr id="5" name="Shape 3"/>
-          <p:cNvSpPr/>
-          <p:nvPr/>
-        </p:nvSpPr>
-        <p:spPr>
-          <a:xfrm>
-            <a:off x="365760" y="1115568"/>
-            <a:ext cx="8412480" cy="2350008"/>
-          </a:xfrm>
-          <a:prstGeom prst="rect">
-            <a:avLst/>
-          </a:prstGeom>
-          <a:solidFill>
-            <a:srgbClr val="F3F4F6"/>
-          </a:solidFill>
+              <a:t>DEMO</a:t>
+            </a:r>
+            <a:endParaRPr lang="en-US" sz="3200" dirty="0"/>
+          </a:p>
+        </p:txBody>
+      </p:sp>
+      <p:sp>
+        <p:nvSpPr>
+          <p:cNvPr id="5" name="Text 3"/>
+          <p:cNvSpPr/>
+          <p:nvPr/>
+        </p:nvSpPr>
+        <p:spPr>
+          <a:xfrm>
+            <a:off x="548640" y="1691640"/>
+            <a:ext cx="8046720" cy="914400"/>
+          </a:xfrm>
+          <a:prstGeom prst="rect">
+            <a:avLst/>
+          </a:prstGeom>
+          <a:noFill/>
+          <a:ln/>
+        </p:spPr>
+        <p:txBody>
+          <a:bodyPr wrap="square" lIns="0" tIns="0" rIns="0" bIns="0" rtlCol="0" anchor="ctr"/>
+          <a:lstStyle/>
+          <a:p>
+            <a:pPr indent="0" marL="0">
+              <a:buNone/>
+            </a:pPr>
+            <a:r>
+              <a:rPr lang="en-US" sz="3000" b="1" dirty="0">
+                <a:solidFill>
+                  <a:srgbClr val="1E2761"/>
+                </a:solidFill>
+                <a:latin typeface="Calibri" pitchFamily="34" charset="0"/>
+                <a:ea typeface="Calibri" pitchFamily="34" charset="-122"/>
+                <a:cs typeface="Calibri" pitchFamily="34" charset="-120"/>
+              </a:rPr>
+              <a:t>Local stdio MCP tool call, end to end</a:t>
+            </a:r>
+            <a:endParaRPr lang="en-US" sz="3000" dirty="0"/>
+          </a:p>
+        </p:txBody>
+      </p:sp>
+      <p:sp>
+        <p:nvSpPr>
+          <p:cNvPr id="6" name="Text 4"/>
+          <p:cNvSpPr/>
+          <p:nvPr/>
+        </p:nvSpPr>
+        <p:spPr>
+          <a:xfrm>
+            <a:off x="6583680" y="1051560"/>
+            <a:ext cx="2194560" cy="502920"/>
+          </a:xfrm>
+          <a:prstGeom prst="rect">
+            <a:avLst/>
+          </a:prstGeom>
+          <a:noFill/>
+          <a:ln/>
+        </p:spPr>
+        <p:txBody>
+          <a:bodyPr wrap="square" lIns="0" tIns="0" rIns="0" bIns="0" rtlCol="0" anchor="ctr"/>
+          <a:lstStyle/>
+          <a:p>
+            <a:pPr algn="r" indent="0" marL="0">
+              <a:buNone/>
+            </a:pPr>
+            <a:r>
+              <a:rPr lang="en-US" sz="1800" i="1" dirty="0">
+                <a:solidFill>
+                  <a:srgbClr val="6B7280"/>
+                </a:solidFill>
+                <a:latin typeface="Calibri" pitchFamily="34" charset="0"/>
+                <a:ea typeface="Calibri" pitchFamily="34" charset="-122"/>
+                <a:cs typeface="Calibri" pitchFamily="34" charset="-120"/>
+              </a:rPr>
+              <a:t>~5 min</a:t>
+            </a:r>
+            <a:endParaRPr lang="en-US" sz="1800" dirty="0"/>
+          </a:p>
+        </p:txBody>
+      </p:sp>
+      <p:sp>
+        <p:nvSpPr>
+          <p:cNvPr id="7" name="Text 5"/>
+          <p:cNvSpPr/>
+          <p:nvPr/>
+        </p:nvSpPr>
+        <p:spPr>
+          <a:xfrm>
+            <a:off x="548640" y="2788920"/>
+            <a:ext cx="8046720" cy="1371600"/>
+          </a:xfrm>
+          <a:prstGeom prst="rect">
+            <a:avLst/>
+          </a:prstGeom>
+          <a:noFill/>
+          <a:ln/>
+        </p:spPr>
+        <p:txBody>
+          <a:bodyPr wrap="square" lIns="0" tIns="0" rIns="0" bIns="0" rtlCol="0" anchor="ctr"/>
+          <a:lstStyle/>
+          <a:p>
+            <a:pPr indent="0" marL="0">
+              <a:spcAft>
+                <a:spcPts val="600"/>
+              </a:spcAft>
+              <a:buNone/>
+            </a:pPr>
+            <a:r>
+              <a:rPr lang="en-US" sz="1600" dirty="0">
+                <a:solidFill>
+                  <a:srgbClr val="212121"/>
+                </a:solidFill>
+                <a:latin typeface="Calibri" pitchFamily="34" charset="0"/>
+                <a:ea typeface="Calibri" pitchFamily="34" charset="-122"/>
+                <a:cs typeface="Calibri" pitchFamily="34" charset="-120"/>
+              </a:rPr>
+              <a:t>Run the previous slide's exact code live: connect to a local mcp-server-calculator child process, watch the agent discover and invoke a tool through it, and close the connection — client/server loop end to end.</a:t>
+            </a:r>
+            <a:endParaRPr lang="en-US" sz="1600" dirty="0"/>
+          </a:p>
+        </p:txBody>
+      </p:sp>
+      <p:sp>
+        <p:nvSpPr>
+          <p:cNvPr id="8" name="Text 6"/>
+          <p:cNvSpPr/>
+          <p:nvPr/>
+        </p:nvSpPr>
+        <p:spPr>
+          <a:xfrm>
+            <a:off x="548640" y="4434840"/>
+            <a:ext cx="8046720" cy="320040"/>
+          </a:xfrm>
+          <a:prstGeom prst="rect">
+            <a:avLst/>
+          </a:prstGeom>
+          <a:noFill/>
+          <a:ln/>
+        </p:spPr>
+        <p:txBody>
+          <a:bodyPr wrap="square" lIns="0" tIns="0" rIns="0" bIns="0" rtlCol="0" anchor="ctr"/>
+          <a:lstStyle/>
+          <a:p>
+            <a:pPr indent="0" marL="0">
+              <a:buNone/>
+            </a:pPr>
+            <a:r>
+              <a:rPr lang="en-US" sz="1100" i="1" dirty="0">
+                <a:solidFill>
+                  <a:srgbClr val="6B7280"/>
+                </a:solidFill>
+                <a:latin typeface="Calibri" pitchFamily="34" charset="0"/>
+                <a:ea typeface="Calibri" pitchFamily="34" charset="-122"/>
+                <a:cs typeface="Calibri" pitchFamily="34" charset="-120"/>
+              </a:rPr>
+              <a:t>Runbook: demos/day3/module-5-demo-1-stdio-mcp.md</a:t>
+            </a:r>
+            <a:endParaRPr lang="en-US" sz="1100" dirty="0"/>
+          </a:p>
+        </p:txBody>
+      </p:sp>
+      <p:sp>
+        <p:nvSpPr>
+          <p:cNvPr id="9" name="Shape 7"/>
+          <p:cNvSpPr/>
+          <p:nvPr/>
+        </p:nvSpPr>
+        <p:spPr>
+          <a:xfrm>
+            <a:off x="365760" y="4773168"/>
+            <a:ext cx="8412480" cy="0"/>
+          </a:xfrm>
+          <a:prstGeom prst="line">
+            <a:avLst/>
+          </a:prstGeom>
+          <a:noFill/>
           <a:ln w="6350">
             <a:solidFill>
               <a:srgbClr val="D1D5DB"/>
@@ -7980,205 +9301,7 @@
       </p:sp>
       <p:sp>
         <p:nvSpPr>
-          <p:cNvPr id="6" name="Text 4"/>
-          <p:cNvSpPr/>
-          <p:nvPr/>
-        </p:nvSpPr>
-        <p:spPr>
-          <a:xfrm>
-            <a:off x="502920" y="1207008"/>
-            <a:ext cx="8138160" cy="2167128"/>
-          </a:xfrm>
-          <a:prstGeom prst="rect">
-            <a:avLst/>
-          </a:prstGeom>
-          <a:noFill/>
-          <a:ln/>
-        </p:spPr>
-        <p:txBody>
-          <a:bodyPr wrap="square" lIns="0" tIns="0" rIns="0" bIns="0" rtlCol="0" anchor="t"/>
-          <a:lstStyle/>
-          <a:p>
-            <a:pPr indent="0" marL="0">
-              <a:buNone/>
-            </a:pPr>
-            <a:r>
-              <a:rPr lang="en-US" sz="1280" dirty="0">
-                <a:solidFill>
-                  <a:srgbClr val="212121"/>
-                </a:solidFill>
-                <a:latin typeface="Consolas" pitchFamily="34" charset="0"/>
-                <a:ea typeface="Consolas" pitchFamily="34" charset="-122"/>
-                <a:cs typeface="Consolas" pitchFamily="34" charset="-120"/>
-              </a:rPr>
-              <a:t>async with MCPStreamableHTTPTool(</a:t>
-            </a:r>
-            <a:endParaRPr lang="en-US" sz="1280" dirty="0"/>
-          </a:p>
-          <a:p>
-            <a:pPr indent="0" marL="0">
-              <a:buNone/>
-            </a:pPr>
-            <a:r>
-              <a:rPr lang="en-US" sz="1280" dirty="0">
-                <a:solidFill>
-                  <a:srgbClr val="212121"/>
-                </a:solidFill>
-                <a:latin typeface="Consolas" pitchFamily="34" charset="0"/>
-                <a:ea typeface="Consolas" pitchFamily="34" charset="-122"/>
-                <a:cs typeface="Consolas" pitchFamily="34" charset="-120"/>
-              </a:rPr>
-              <a:t>    name="docs",</a:t>
-            </a:r>
-            <a:endParaRPr lang="en-US" sz="1280" dirty="0"/>
-          </a:p>
-          <a:p>
-            <a:pPr indent="0" marL="0">
-              <a:buNone/>
-            </a:pPr>
-            <a:r>
-              <a:rPr lang="en-US" sz="1280" dirty="0">
-                <a:solidFill>
-                  <a:srgbClr val="212121"/>
-                </a:solidFill>
-                <a:latin typeface="Consolas" pitchFamily="34" charset="0"/>
-                <a:ea typeface="Consolas" pitchFamily="34" charset="-122"/>
-                <a:cs typeface="Consolas" pitchFamily="34" charset="-120"/>
-              </a:rPr>
-              <a:t>    url="https://learn.microsoft.com/api/mcp",</a:t>
-            </a:r>
-            <a:endParaRPr lang="en-US" sz="1280" dirty="0"/>
-          </a:p>
-          <a:p>
-            <a:pPr indent="0" marL="0">
-              <a:buNone/>
-            </a:pPr>
-            <a:r>
-              <a:rPr lang="en-US" sz="1280" dirty="0">
-                <a:solidFill>
-                  <a:srgbClr val="212121"/>
-                </a:solidFill>
-                <a:latin typeface="Consolas" pitchFamily="34" charset="0"/>
-                <a:ea typeface="Consolas" pitchFamily="34" charset="-122"/>
-                <a:cs typeface="Consolas" pitchFamily="34" charset="-120"/>
-              </a:rPr>
-              <a:t>    allowed_tools=["microsoft_docs_search"],</a:t>
-            </a:r>
-            <a:endParaRPr lang="en-US" sz="1280" dirty="0"/>
-          </a:p>
-          <a:p>
-            <a:pPr indent="0" marL="0">
-              <a:buNone/>
-            </a:pPr>
-            <a:r>
-              <a:rPr lang="en-US" sz="1280" dirty="0">
-                <a:solidFill>
-                  <a:srgbClr val="212121"/>
-                </a:solidFill>
-                <a:latin typeface="Consolas" pitchFamily="34" charset="0"/>
-                <a:ea typeface="Consolas" pitchFamily="34" charset="-122"/>
-                <a:cs typeface="Consolas" pitchFamily="34" charset="-120"/>
-              </a:rPr>
-              <a:t>) as mcp:</a:t>
-            </a:r>
-            <a:endParaRPr lang="en-US" sz="1280" dirty="0"/>
-          </a:p>
-          <a:p>
-            <a:pPr indent="0" marL="0">
-              <a:buNone/>
-            </a:pPr>
-            <a:r>
-              <a:rPr lang="en-US" sz="1280" dirty="0">
-                <a:solidFill>
-                  <a:srgbClr val="212121"/>
-                </a:solidFill>
-                <a:latin typeface="Consolas" pitchFamily="34" charset="0"/>
-                <a:ea typeface="Consolas" pitchFamily="34" charset="-122"/>
-                <a:cs typeface="Consolas" pitchFamily="34" charset="-120"/>
-              </a:rPr>
-              <a:t>    result = await agent.run(</a:t>
-            </a:r>
-            <a:endParaRPr lang="en-US" sz="1280" dirty="0"/>
-          </a:p>
-          <a:p>
-            <a:pPr indent="0" marL="0">
-              <a:buNone/>
-            </a:pPr>
-            <a:r>
-              <a:rPr lang="en-US" sz="1280" dirty="0">
-                <a:solidFill>
-                  <a:srgbClr val="212121"/>
-                </a:solidFill>
-                <a:latin typeface="Consolas" pitchFamily="34" charset="0"/>
-                <a:ea typeface="Consolas" pitchFamily="34" charset="-122"/>
-                <a:cs typeface="Consolas" pitchFamily="34" charset="-120"/>
-              </a:rPr>
-              <a:t>        "Find the current guidance.",</a:t>
-            </a:r>
-            <a:endParaRPr lang="en-US" sz="1280" dirty="0"/>
-          </a:p>
-          <a:p>
-            <a:pPr indent="0" marL="0">
-              <a:buNone/>
-            </a:pPr>
-            <a:r>
-              <a:rPr lang="en-US" sz="1280" dirty="0">
-                <a:solidFill>
-                  <a:srgbClr val="212121"/>
-                </a:solidFill>
-                <a:latin typeface="Consolas" pitchFamily="34" charset="0"/>
-                <a:ea typeface="Consolas" pitchFamily="34" charset="-122"/>
-                <a:cs typeface="Consolas" pitchFamily="34" charset="-120"/>
-              </a:rPr>
-              <a:t>        tools=mcp,</a:t>
-            </a:r>
-            <a:endParaRPr lang="en-US" sz="1280" dirty="0"/>
-          </a:p>
-          <a:p>
-            <a:pPr indent="0" marL="0">
-              <a:buNone/>
-            </a:pPr>
-            <a:r>
-              <a:rPr lang="en-US" sz="1280" dirty="0">
-                <a:solidFill>
-                  <a:srgbClr val="212121"/>
-                </a:solidFill>
-                <a:latin typeface="Consolas" pitchFamily="34" charset="0"/>
-                <a:ea typeface="Consolas" pitchFamily="34" charset="-122"/>
-                <a:cs typeface="Consolas" pitchFamily="34" charset="-120"/>
-              </a:rPr>
-              <a:t>    )</a:t>
-            </a:r>
-            <a:endParaRPr lang="en-US" sz="1280" dirty="0"/>
-          </a:p>
-        </p:txBody>
-      </p:sp>
-      <p:sp>
-        <p:nvSpPr>
-          <p:cNvPr id="7" name="Shape 5"/>
-          <p:cNvSpPr/>
-          <p:nvPr/>
-        </p:nvSpPr>
-        <p:spPr>
-          <a:xfrm>
-            <a:off x="365760" y="4773168"/>
-            <a:ext cx="8412480" cy="0"/>
-          </a:xfrm>
-          <a:prstGeom prst="line">
-            <a:avLst/>
-          </a:prstGeom>
-          <a:noFill/>
-          <a:ln w="6350">
-            <a:solidFill>
-              <a:srgbClr val="D1D5DB"/>
-            </a:solidFill>
-            <a:prstDash val="solid"/>
-          </a:ln>
-        </p:spPr>
-      </p:sp>
-      <p:sp>
-        <p:nvSpPr>
-          <p:cNvPr id="8" name="Text 6"/>
+          <p:cNvPr id="10" name="Text 8"/>
           <p:cNvSpPr/>
           <p:nvPr/>
         </p:nvSpPr>
@@ -8211,7 +9334,7 @@
                 <a:ea typeface="Calibri" pitchFamily="34" charset="-122"/>
                 <a:cs typeface="Calibri" pitchFamily="34" charset="-120"/>
               </a:rPr>
-              <a:t>Source: https://learn.microsoft.com/en-us/agent-framework/agents/tools/local-mcp-tools?tabs=python  ·  +1 in notes</a:t>
+              <a:t>Source: https://learn.microsoft.com/en-us/agent-framework/agents/tools/local-mcp-tools?tabs=python</a:t>
             </a:r>
             <a:endParaRPr lang="en-US" sz="820" dirty="0"/>
           </a:p>
@@ -8345,7 +9468,7 @@
                 <a:ea typeface="Calibri" pitchFamily="34" charset="-122"/>
                 <a:cs typeface="Calibri" pitchFamily="34" charset="-120"/>
               </a:rPr>
-              <a:t>header_provider has two call shapes</a:t>
+              <a:t>Remote HTTP belongs behind explicit auth</a:t>
             </a:r>
             <a:endParaRPr lang="en-US" sz="2500" dirty="0"/>
           </a:p>
@@ -8359,301 +9482,15 @@
         </p:nvSpPr>
         <p:spPr>
           <a:xfrm>
-            <a:off x="365760" y="1078992"/>
-            <a:ext cx="4114800" cy="3493008"/>
-          </a:xfrm>
-          <a:prstGeom prst="roundRect">
+            <a:off x="365760" y="1115568"/>
+            <a:ext cx="8412480" cy="2350008"/>
+          </a:xfrm>
+          <a:prstGeom prst="rect">
             <a:avLst/>
           </a:prstGeom>
           <a:solidFill>
             <a:srgbClr val="F3F4F6"/>
           </a:solidFill>
-          <a:ln w="11430">
-            <a:solidFill>
-              <a:srgbClr val="D1D5DB"/>
-            </a:solidFill>
-            <a:prstDash val="solid"/>
-          </a:ln>
-        </p:spPr>
-      </p:sp>
-      <p:sp>
-        <p:nvSpPr>
-          <p:cNvPr id="6" name="Text 4"/>
-          <p:cNvSpPr/>
-          <p:nvPr/>
-        </p:nvSpPr>
-        <p:spPr>
-          <a:xfrm>
-            <a:off x="566928" y="1298448"/>
-            <a:ext cx="3712464" cy="411480"/>
-          </a:xfrm>
-          <a:prstGeom prst="rect">
-            <a:avLst/>
-          </a:prstGeom>
-          <a:noFill/>
-          <a:ln/>
-        </p:spPr>
-        <p:txBody>
-          <a:bodyPr wrap="square" lIns="0" tIns="0" rIns="0" bIns="0" rtlCol="0" anchor="ctr">
-            <a:normAutofit/>
-          </a:bodyPr>
-          <a:lstStyle/>
-          <a:p>
-            <a:pPr indent="0" marL="0">
-              <a:buNone/>
-            </a:pPr>
-            <a:r>
-              <a:rPr lang="en-US" sz="2000" b="1" dirty="0">
-                <a:solidFill>
-                  <a:srgbClr val="1E2761"/>
-                </a:solidFill>
-                <a:latin typeface="Calibri" pitchFamily="34" charset="0"/>
-                <a:ea typeface="Calibri" pitchFamily="34" charset="-122"/>
-                <a:cs typeface="Calibri" pitchFamily="34" charset="-120"/>
-              </a:rPr>
-              <a:t>Tool-call request</a:t>
-            </a:r>
-            <a:endParaRPr lang="en-US" sz="2000" dirty="0"/>
-          </a:p>
-        </p:txBody>
-      </p:sp>
-      <p:sp>
-        <p:nvSpPr>
-          <p:cNvPr id="7" name="Text 5"/>
-          <p:cNvSpPr/>
-          <p:nvPr/>
-        </p:nvSpPr>
-        <p:spPr>
-          <a:xfrm>
-            <a:off x="594360" y="1828800"/>
-            <a:ext cx="3639312" cy="2395728"/>
-          </a:xfrm>
-          <a:prstGeom prst="rect">
-            <a:avLst/>
-          </a:prstGeom>
-          <a:noFill/>
-          <a:ln/>
-        </p:spPr>
-        <p:txBody>
-          <a:bodyPr wrap="square" lIns="381" tIns="381" rIns="381" bIns="381" rtlCol="0" anchor="ctr">
-            <a:normAutofit/>
-          </a:bodyPr>
-          <a:lstStyle/>
-          <a:p>
-            <a:pPr marL="342900" indent="-342900">
-              <a:buSzPct val="100000"/>
-              <a:buChar char="•"/>
-            </a:pPr>
-            <a:r>
-              <a:rPr lang="en-US" sz="1300" dirty="0">
-                <a:solidFill>
-                  <a:srgbClr val="212121"/>
-                </a:solidFill>
-                <a:latin typeface="Calibri" pitchFamily="34" charset="0"/>
-                <a:ea typeface="Calibri" pitchFamily="34" charset="-122"/>
-                <a:cs typeface="Calibri" pitchFamily="34" charset="-120"/>
-              </a:rPr>
-              <a:t>Receives function_invocation_kwargs</a:t>
-            </a:r>
-            <a:endParaRPr lang="en-US" sz="1300" dirty="0"/>
-          </a:p>
-          <a:p>
-            <a:pPr marL="342900" indent="-342900">
-              <a:buSzPct val="100000"/>
-              <a:buChar char="•"/>
-            </a:pPr>
-            <a:r>
-              <a:rPr lang="en-US" sz="1300" dirty="0">
-                <a:solidFill>
-                  <a:srgbClr val="212121"/>
-                </a:solidFill>
-                <a:latin typeface="Calibri" pitchFamily="34" charset="0"/>
-                <a:ea typeface="Calibri" pitchFamily="34" charset="-122"/>
-                <a:cs typeface="Calibri" pitchFamily="34" charset="-120"/>
-              </a:rPr>
-              <a:t>Can derive request-scoped headers</a:t>
-            </a:r>
-            <a:endParaRPr lang="en-US" sz="1300" dirty="0"/>
-          </a:p>
-          <a:p>
-            <a:pPr marL="342900" indent="-342900">
-              <a:buSzPct val="100000"/>
-              <a:buChar char="•"/>
-            </a:pPr>
-            <a:r>
-              <a:rPr lang="en-US" sz="1300" dirty="0">
-                <a:solidFill>
-                  <a:srgbClr val="212121"/>
-                </a:solidFill>
-                <a:latin typeface="Calibri" pitchFamily="34" charset="0"/>
-                <a:ea typeface="Calibri" pitchFamily="34" charset="-122"/>
-                <a:cs typeface="Calibri" pitchFamily="34" charset="-120"/>
-              </a:rPr>
-              <a:t>Keep secrets outside model-visible arguments</a:t>
-            </a:r>
-            <a:endParaRPr lang="en-US" sz="1300" dirty="0"/>
-          </a:p>
-        </p:txBody>
-      </p:sp>
-      <p:sp>
-        <p:nvSpPr>
-          <p:cNvPr id="8" name="Shape 6"/>
-          <p:cNvSpPr/>
-          <p:nvPr/>
-        </p:nvSpPr>
-        <p:spPr>
-          <a:xfrm>
-            <a:off x="4663440" y="1078992"/>
-            <a:ext cx="4114800" cy="3493008"/>
-          </a:xfrm>
-          <a:prstGeom prst="roundRect">
-            <a:avLst/>
-          </a:prstGeom>
-          <a:solidFill>
-            <a:srgbClr val="CADCFC"/>
-          </a:solidFill>
-          <a:ln w="11430">
-            <a:solidFill>
-              <a:srgbClr val="1E2761"/>
-            </a:solidFill>
-            <a:prstDash val="solid"/>
-          </a:ln>
-        </p:spPr>
-      </p:sp>
-      <p:sp>
-        <p:nvSpPr>
-          <p:cNvPr id="9" name="Text 7"/>
-          <p:cNvSpPr/>
-          <p:nvPr/>
-        </p:nvSpPr>
-        <p:spPr>
-          <a:xfrm>
-            <a:off x="4864608" y="1298448"/>
-            <a:ext cx="3712464" cy="411480"/>
-          </a:xfrm>
-          <a:prstGeom prst="rect">
-            <a:avLst/>
-          </a:prstGeom>
-          <a:noFill/>
-          <a:ln/>
-        </p:spPr>
-        <p:txBody>
-          <a:bodyPr wrap="square" lIns="0" tIns="0" rIns="0" bIns="0" rtlCol="0" anchor="ctr">
-            <a:normAutofit/>
-          </a:bodyPr>
-          <a:lstStyle/>
-          <a:p>
-            <a:pPr indent="0" marL="0">
-              <a:buNone/>
-            </a:pPr>
-            <a:r>
-              <a:rPr lang="en-US" sz="2000" b="1" dirty="0">
-                <a:solidFill>
-                  <a:srgbClr val="1E2761"/>
-                </a:solidFill>
-                <a:latin typeface="Calibri" pitchFamily="34" charset="0"/>
-                <a:ea typeface="Calibri" pitchFamily="34" charset="-122"/>
-                <a:cs typeface="Calibri" pitchFamily="34" charset="-120"/>
-              </a:rPr>
-              <a:t>Ambient request</a:t>
-            </a:r>
-            <a:endParaRPr lang="en-US" sz="2000" dirty="0"/>
-          </a:p>
-        </p:txBody>
-      </p:sp>
-      <p:sp>
-        <p:nvSpPr>
-          <p:cNvPr id="10" name="Text 8"/>
-          <p:cNvSpPr/>
-          <p:nvPr/>
-        </p:nvSpPr>
-        <p:spPr>
-          <a:xfrm>
-            <a:off x="4892040" y="1828800"/>
-            <a:ext cx="3639312" cy="2395728"/>
-          </a:xfrm>
-          <a:prstGeom prst="rect">
-            <a:avLst/>
-          </a:prstGeom>
-          <a:noFill/>
-          <a:ln/>
-        </p:spPr>
-        <p:txBody>
-          <a:bodyPr wrap="square" lIns="381" tIns="381" rIns="381" bIns="381" rtlCol="0" anchor="ctr">
-            <a:normAutofit/>
-          </a:bodyPr>
-          <a:lstStyle/>
-          <a:p>
-            <a:pPr marL="342900" indent="-342900">
-              <a:buSzPct val="100000"/>
-              <a:buChar char="•"/>
-            </a:pPr>
-            <a:r>
-              <a:rPr lang="en-US" sz="1300" dirty="0">
-                <a:solidFill>
-                  <a:srgbClr val="212121"/>
-                </a:solidFill>
-                <a:latin typeface="Calibri" pitchFamily="34" charset="0"/>
-                <a:ea typeface="Calibri" pitchFamily="34" charset="-122"/>
-                <a:cs typeface="Calibri" pitchFamily="34" charset="-120"/>
-              </a:rPr>
-              <a:t>Receives {}</a:t>
-            </a:r>
-            <a:endParaRPr lang="en-US" sz="1300" dirty="0"/>
-          </a:p>
-          <a:p>
-            <a:pPr marL="342900" indent="-342900">
-              <a:buSzPct val="100000"/>
-              <a:buChar char="•"/>
-            </a:pPr>
-            <a:r>
-              <a:rPr lang="en-US" sz="1300" dirty="0">
-                <a:solidFill>
-                  <a:srgbClr val="212121"/>
-                </a:solidFill>
-                <a:latin typeface="Calibri" pitchFamily="34" charset="0"/>
-                <a:ea typeface="Calibri" pitchFamily="34" charset="-122"/>
-                <a:cs typeface="Calibri" pitchFamily="34" charset="-120"/>
-              </a:rPr>
-              <a:t>Includes initialization, discovery, and pings</a:t>
-            </a:r>
-            <a:endParaRPr lang="en-US" sz="1300" dirty="0"/>
-          </a:p>
-          <a:p>
-            <a:pPr marL="342900" indent="-342900">
-              <a:buSzPct val="100000"/>
-              <a:buChar char="•"/>
-            </a:pPr>
-            <a:r>
-              <a:rPr lang="en-US" sz="1300" dirty="0">
-                <a:solidFill>
-                  <a:srgbClr val="212121"/>
-                </a:solidFill>
-                <a:latin typeface="Calibri" pitchFamily="34" charset="0"/>
-                <a:ea typeface="Calibri" pitchFamily="34" charset="-122"/>
-                <a:cs typeface="Calibri" pitchFamily="34" charset="-120"/>
-              </a:rPr>
-              <a:t>Provider must still acquire required connection auth</a:t>
-            </a:r>
-            <a:endParaRPr lang="en-US" sz="1300" dirty="0"/>
-          </a:p>
-        </p:txBody>
-      </p:sp>
-      <p:sp>
-        <p:nvSpPr>
-          <p:cNvPr id="11" name="Shape 9"/>
-          <p:cNvSpPr/>
-          <p:nvPr/>
-        </p:nvSpPr>
-        <p:spPr>
-          <a:xfrm>
-            <a:off x="365760" y="4773168"/>
-            <a:ext cx="8412480" cy="0"/>
-          </a:xfrm>
-          <a:prstGeom prst="line">
-            <a:avLst/>
-          </a:prstGeom>
-          <a:noFill/>
           <a:ln w="6350">
             <a:solidFill>
               <a:srgbClr val="D1D5DB"/>
@@ -8664,7 +9501,205 @@
       </p:sp>
       <p:sp>
         <p:nvSpPr>
-          <p:cNvPr id="12" name="Text 10"/>
+          <p:cNvPr id="6" name="Text 4"/>
+          <p:cNvSpPr/>
+          <p:nvPr/>
+        </p:nvSpPr>
+        <p:spPr>
+          <a:xfrm>
+            <a:off x="502920" y="1207008"/>
+            <a:ext cx="8138160" cy="2167128"/>
+          </a:xfrm>
+          <a:prstGeom prst="rect">
+            <a:avLst/>
+          </a:prstGeom>
+          <a:noFill/>
+          <a:ln/>
+        </p:spPr>
+        <p:txBody>
+          <a:bodyPr wrap="square" lIns="0" tIns="0" rIns="0" bIns="0" rtlCol="0" anchor="t"/>
+          <a:lstStyle/>
+          <a:p>
+            <a:pPr indent="0" marL="0">
+              <a:buNone/>
+            </a:pPr>
+            <a:r>
+              <a:rPr lang="en-US" sz="1280" dirty="0">
+                <a:solidFill>
+                  <a:srgbClr val="212121"/>
+                </a:solidFill>
+                <a:latin typeface="Consolas" pitchFamily="34" charset="0"/>
+                <a:ea typeface="Consolas" pitchFamily="34" charset="-122"/>
+                <a:cs typeface="Consolas" pitchFamily="34" charset="-120"/>
+              </a:rPr>
+              <a:t>async with MCPStreamableHTTPTool(</a:t>
+            </a:r>
+            <a:endParaRPr lang="en-US" sz="1280" dirty="0"/>
+          </a:p>
+          <a:p>
+            <a:pPr indent="0" marL="0">
+              <a:buNone/>
+            </a:pPr>
+            <a:r>
+              <a:rPr lang="en-US" sz="1280" dirty="0">
+                <a:solidFill>
+                  <a:srgbClr val="212121"/>
+                </a:solidFill>
+                <a:latin typeface="Consolas" pitchFamily="34" charset="0"/>
+                <a:ea typeface="Consolas" pitchFamily="34" charset="-122"/>
+                <a:cs typeface="Consolas" pitchFamily="34" charset="-120"/>
+              </a:rPr>
+              <a:t>    name="docs",</a:t>
+            </a:r>
+            <a:endParaRPr lang="en-US" sz="1280" dirty="0"/>
+          </a:p>
+          <a:p>
+            <a:pPr indent="0" marL="0">
+              <a:buNone/>
+            </a:pPr>
+            <a:r>
+              <a:rPr lang="en-US" sz="1280" dirty="0">
+                <a:solidFill>
+                  <a:srgbClr val="212121"/>
+                </a:solidFill>
+                <a:latin typeface="Consolas" pitchFamily="34" charset="0"/>
+                <a:ea typeface="Consolas" pitchFamily="34" charset="-122"/>
+                <a:cs typeface="Consolas" pitchFamily="34" charset="-120"/>
+              </a:rPr>
+              <a:t>    url="https://learn.microsoft.com/api/mcp",</a:t>
+            </a:r>
+            <a:endParaRPr lang="en-US" sz="1280" dirty="0"/>
+          </a:p>
+          <a:p>
+            <a:pPr indent="0" marL="0">
+              <a:buNone/>
+            </a:pPr>
+            <a:r>
+              <a:rPr lang="en-US" sz="1280" dirty="0">
+                <a:solidFill>
+                  <a:srgbClr val="212121"/>
+                </a:solidFill>
+                <a:latin typeface="Consolas" pitchFamily="34" charset="0"/>
+                <a:ea typeface="Consolas" pitchFamily="34" charset="-122"/>
+                <a:cs typeface="Consolas" pitchFamily="34" charset="-120"/>
+              </a:rPr>
+              <a:t>    allowed_tools=["microsoft_docs_search"],</a:t>
+            </a:r>
+            <a:endParaRPr lang="en-US" sz="1280" dirty="0"/>
+          </a:p>
+          <a:p>
+            <a:pPr indent="0" marL="0">
+              <a:buNone/>
+            </a:pPr>
+            <a:r>
+              <a:rPr lang="en-US" sz="1280" dirty="0">
+                <a:solidFill>
+                  <a:srgbClr val="212121"/>
+                </a:solidFill>
+                <a:latin typeface="Consolas" pitchFamily="34" charset="0"/>
+                <a:ea typeface="Consolas" pitchFamily="34" charset="-122"/>
+                <a:cs typeface="Consolas" pitchFamily="34" charset="-120"/>
+              </a:rPr>
+              <a:t>) as mcp:</a:t>
+            </a:r>
+            <a:endParaRPr lang="en-US" sz="1280" dirty="0"/>
+          </a:p>
+          <a:p>
+            <a:pPr indent="0" marL="0">
+              <a:buNone/>
+            </a:pPr>
+            <a:r>
+              <a:rPr lang="en-US" sz="1280" dirty="0">
+                <a:solidFill>
+                  <a:srgbClr val="212121"/>
+                </a:solidFill>
+                <a:latin typeface="Consolas" pitchFamily="34" charset="0"/>
+                <a:ea typeface="Consolas" pitchFamily="34" charset="-122"/>
+                <a:cs typeface="Consolas" pitchFamily="34" charset="-120"/>
+              </a:rPr>
+              <a:t>    result = await agent.run(</a:t>
+            </a:r>
+            <a:endParaRPr lang="en-US" sz="1280" dirty="0"/>
+          </a:p>
+          <a:p>
+            <a:pPr indent="0" marL="0">
+              <a:buNone/>
+            </a:pPr>
+            <a:r>
+              <a:rPr lang="en-US" sz="1280" dirty="0">
+                <a:solidFill>
+                  <a:srgbClr val="212121"/>
+                </a:solidFill>
+                <a:latin typeface="Consolas" pitchFamily="34" charset="0"/>
+                <a:ea typeface="Consolas" pitchFamily="34" charset="-122"/>
+                <a:cs typeface="Consolas" pitchFamily="34" charset="-120"/>
+              </a:rPr>
+              <a:t>        "Find the current guidance.",</a:t>
+            </a:r>
+            <a:endParaRPr lang="en-US" sz="1280" dirty="0"/>
+          </a:p>
+          <a:p>
+            <a:pPr indent="0" marL="0">
+              <a:buNone/>
+            </a:pPr>
+            <a:r>
+              <a:rPr lang="en-US" sz="1280" dirty="0">
+                <a:solidFill>
+                  <a:srgbClr val="212121"/>
+                </a:solidFill>
+                <a:latin typeface="Consolas" pitchFamily="34" charset="0"/>
+                <a:ea typeface="Consolas" pitchFamily="34" charset="-122"/>
+                <a:cs typeface="Consolas" pitchFamily="34" charset="-120"/>
+              </a:rPr>
+              <a:t>        tools=mcp,</a:t>
+            </a:r>
+            <a:endParaRPr lang="en-US" sz="1280" dirty="0"/>
+          </a:p>
+          <a:p>
+            <a:pPr indent="0" marL="0">
+              <a:buNone/>
+            </a:pPr>
+            <a:r>
+              <a:rPr lang="en-US" sz="1280" dirty="0">
+                <a:solidFill>
+                  <a:srgbClr val="212121"/>
+                </a:solidFill>
+                <a:latin typeface="Consolas" pitchFamily="34" charset="0"/>
+                <a:ea typeface="Consolas" pitchFamily="34" charset="-122"/>
+                <a:cs typeface="Consolas" pitchFamily="34" charset="-120"/>
+              </a:rPr>
+              <a:t>    )</a:t>
+            </a:r>
+            <a:endParaRPr lang="en-US" sz="1280" dirty="0"/>
+          </a:p>
+        </p:txBody>
+      </p:sp>
+      <p:sp>
+        <p:nvSpPr>
+          <p:cNvPr id="7" name="Shape 5"/>
+          <p:cNvSpPr/>
+          <p:nvPr/>
+        </p:nvSpPr>
+        <p:spPr>
+          <a:xfrm>
+            <a:off x="365760" y="4773168"/>
+            <a:ext cx="8412480" cy="0"/>
+          </a:xfrm>
+          <a:prstGeom prst="line">
+            <a:avLst/>
+          </a:prstGeom>
+          <a:noFill/>
+          <a:ln w="6350">
+            <a:solidFill>
+              <a:srgbClr val="D1D5DB"/>
+            </a:solidFill>
+            <a:prstDash val="solid"/>
+          </a:ln>
+        </p:spPr>
+      </p:sp>
+      <p:sp>
+        <p:nvSpPr>
+          <p:cNvPr id="8" name="Text 6"/>
           <p:cNvSpPr/>
           <p:nvPr/>
         </p:nvSpPr>
@@ -8697,7 +9732,7 @@
                 <a:ea typeface="Calibri" pitchFamily="34" charset="-122"/>
                 <a:cs typeface="Calibri" pitchFamily="34" charset="-120"/>
               </a:rPr>
-              <a:t>Source: https://learn.microsoft.com/en-us/agent-framework/agents/tools/local-mcp-tools?tabs=python</a:t>
+              <a:t>Source: https://learn.microsoft.com/en-us/agent-framework/agents/tools/local-mcp-tools?tabs=python  ·  +1 in notes</a:t>
             </a:r>
             <a:endParaRPr lang="en-US" sz="820" dirty="0"/>
           </a:p>
@@ -8823,7 +9858,7 @@
               <a:buNone/>
             </a:pPr>
             <a:r>
-              <a:rPr lang="en-US" sz="2800" b="1" dirty="0">
+              <a:rPr lang="en-US" sz="2500" b="1" dirty="0">
                 <a:solidFill>
                   <a:srgbClr val="1E2761"/>
                 </a:solidFill>
@@ -8831,9 +9866,9 @@
                 <a:ea typeface="Calibri" pitchFamily="34" charset="-122"/>
                 <a:cs typeface="Calibri" pitchFamily="34" charset="-120"/>
               </a:rPr>
-              <a:t>Reduce the model's tool surface</a:t>
-            </a:r>
-            <a:endParaRPr lang="en-US" sz="2800" dirty="0"/>
+              <a:t>header_provider has two call shapes</a:t>
+            </a:r>
+            <a:endParaRPr lang="en-US" sz="2500" dirty="0"/>
           </a:p>
         </p:txBody>
       </p:sp>
@@ -8846,17 +9881,159 @@
         <p:spPr>
           <a:xfrm>
             <a:off x="365760" y="1078992"/>
-            <a:ext cx="4105656" cy="1655064"/>
+            <a:ext cx="4114800" cy="3493008"/>
           </a:xfrm>
           <a:prstGeom prst="roundRect">
-            <a:avLst>
-              <a:gd name="adj" fmla="val 3315"/>
-            </a:avLst>
+            <a:avLst/>
+          </a:prstGeom>
+          <a:solidFill>
+            <a:srgbClr val="F3F4F6"/>
+          </a:solidFill>
+          <a:ln w="11430">
+            <a:solidFill>
+              <a:srgbClr val="D1D5DB"/>
+            </a:solidFill>
+            <a:prstDash val="solid"/>
+          </a:ln>
+        </p:spPr>
+      </p:sp>
+      <p:sp>
+        <p:nvSpPr>
+          <p:cNvPr id="6" name="Text 4"/>
+          <p:cNvSpPr/>
+          <p:nvPr/>
+        </p:nvSpPr>
+        <p:spPr>
+          <a:xfrm>
+            <a:off x="566928" y="1298448"/>
+            <a:ext cx="3712464" cy="411480"/>
+          </a:xfrm>
+          <a:prstGeom prst="rect">
+            <a:avLst/>
+          </a:prstGeom>
+          <a:noFill/>
+          <a:ln/>
+        </p:spPr>
+        <p:txBody>
+          <a:bodyPr wrap="square" lIns="0" tIns="0" rIns="0" bIns="0" rtlCol="0" anchor="ctr">
+            <a:normAutofit/>
+          </a:bodyPr>
+          <a:lstStyle/>
+          <a:p>
+            <a:pPr indent="0" marL="0">
+              <a:buNone/>
+            </a:pPr>
+            <a:r>
+              <a:rPr lang="en-US" sz="2000" b="1" dirty="0">
+                <a:solidFill>
+                  <a:srgbClr val="1E2761"/>
+                </a:solidFill>
+                <a:latin typeface="Calibri" pitchFamily="34" charset="0"/>
+                <a:ea typeface="Calibri" pitchFamily="34" charset="-122"/>
+                <a:cs typeface="Calibri" pitchFamily="34" charset="-120"/>
+              </a:rPr>
+              <a:t>Tool-call request</a:t>
+            </a:r>
+            <a:endParaRPr lang="en-US" sz="2000" dirty="0"/>
+          </a:p>
+        </p:txBody>
+      </p:sp>
+      <p:sp>
+        <p:nvSpPr>
+          <p:cNvPr id="7" name="Text 5"/>
+          <p:cNvSpPr/>
+          <p:nvPr/>
+        </p:nvSpPr>
+        <p:spPr>
+          <a:xfrm>
+            <a:off x="594360" y="1828800"/>
+            <a:ext cx="3639312" cy="2395728"/>
+          </a:xfrm>
+          <a:prstGeom prst="rect">
+            <a:avLst/>
+          </a:prstGeom>
+          <a:noFill/>
+          <a:ln/>
+        </p:spPr>
+        <p:txBody>
+          <a:bodyPr wrap="square" lIns="381" tIns="381" rIns="381" bIns="381" rtlCol="0" anchor="ctr">
+            <a:normAutofit/>
+          </a:bodyPr>
+          <a:lstStyle/>
+          <a:p>
+            <a:pPr marL="342900" indent="-342900">
+              <a:buSzPct val="100000"/>
+              <a:buChar char="•"/>
+            </a:pPr>
+            <a:r>
+              <a:rPr lang="en-US" sz="1300" dirty="0">
+                <a:solidFill>
+                  <a:srgbClr val="212121"/>
+                </a:solidFill>
+                <a:latin typeface="Calibri" pitchFamily="34" charset="0"/>
+                <a:ea typeface="Calibri" pitchFamily="34" charset="-122"/>
+                <a:cs typeface="Calibri" pitchFamily="34" charset="-120"/>
+              </a:rPr>
+              <a:t>Receives function_invocation_kwargs</a:t>
+            </a:r>
+            <a:endParaRPr lang="en-US" sz="1300" dirty="0"/>
+          </a:p>
+          <a:p>
+            <a:pPr marL="342900" indent="-342900">
+              <a:buSzPct val="100000"/>
+              <a:buChar char="•"/>
+            </a:pPr>
+            <a:r>
+              <a:rPr lang="en-US" sz="1300" dirty="0">
+                <a:solidFill>
+                  <a:srgbClr val="212121"/>
+                </a:solidFill>
+                <a:latin typeface="Calibri" pitchFamily="34" charset="0"/>
+                <a:ea typeface="Calibri" pitchFamily="34" charset="-122"/>
+                <a:cs typeface="Calibri" pitchFamily="34" charset="-120"/>
+              </a:rPr>
+              <a:t>Can derive request-scoped headers</a:t>
+            </a:r>
+            <a:endParaRPr lang="en-US" sz="1300" dirty="0"/>
+          </a:p>
+          <a:p>
+            <a:pPr marL="342900" indent="-342900">
+              <a:buSzPct val="100000"/>
+              <a:buChar char="•"/>
+            </a:pPr>
+            <a:r>
+              <a:rPr lang="en-US" sz="1300" dirty="0">
+                <a:solidFill>
+                  <a:srgbClr val="212121"/>
+                </a:solidFill>
+                <a:latin typeface="Calibri" pitchFamily="34" charset="0"/>
+                <a:ea typeface="Calibri" pitchFamily="34" charset="-122"/>
+                <a:cs typeface="Calibri" pitchFamily="34" charset="-120"/>
+              </a:rPr>
+              <a:t>Keep secrets outside model-visible arguments</a:t>
+            </a:r>
+            <a:endParaRPr lang="en-US" sz="1300" dirty="0"/>
+          </a:p>
+        </p:txBody>
+      </p:sp>
+      <p:sp>
+        <p:nvSpPr>
+          <p:cNvPr id="8" name="Shape 6"/>
+          <p:cNvSpPr/>
+          <p:nvPr/>
+        </p:nvSpPr>
+        <p:spPr>
+          <a:xfrm>
+            <a:off x="4663440" y="1078992"/>
+            <a:ext cx="4114800" cy="3493008"/>
+          </a:xfrm>
+          <a:prstGeom prst="roundRect">
+            <a:avLst/>
           </a:prstGeom>
           <a:solidFill>
             <a:srgbClr val="CADCFC"/>
           </a:solidFill>
-          <a:ln w="10160">
+          <a:ln w="11430">
             <a:solidFill>
               <a:srgbClr val="1E2761"/>
             </a:solidFill>
@@ -8866,14 +10043,14 @@
       </p:sp>
       <p:sp>
         <p:nvSpPr>
-          <p:cNvPr id="6" name="Text 4"/>
-          <p:cNvSpPr/>
-          <p:nvPr/>
-        </p:nvSpPr>
-        <p:spPr>
-          <a:xfrm>
-            <a:off x="512064" y="1197864"/>
-            <a:ext cx="3813048" cy="310896"/>
+          <p:cNvPr id="9" name="Text 7"/>
+          <p:cNvSpPr/>
+          <p:nvPr/>
+        </p:nvSpPr>
+        <p:spPr>
+          <a:xfrm>
+            <a:off x="4864608" y="1298448"/>
+            <a:ext cx="3712464" cy="411480"/>
           </a:xfrm>
           <a:prstGeom prst="rect">
             <a:avLst/>
@@ -8891,7 +10068,7 @@
               <a:buNone/>
             </a:pPr>
             <a:r>
-              <a:rPr lang="en-US" sz="1500" b="1" dirty="0">
+              <a:rPr lang="en-US" sz="2000" b="1" dirty="0">
                 <a:solidFill>
                   <a:srgbClr val="1E2761"/>
                 </a:solidFill>
@@ -8899,40 +10076,41 @@
                 <a:ea typeface="Calibri" pitchFamily="34" charset="-122"/>
                 <a:cs typeface="Calibri" pitchFamily="34" charset="-120"/>
               </a:rPr>
-              <a:t>allowed_tools</a:t>
-            </a:r>
-            <a:endParaRPr lang="en-US" sz="1500" dirty="0"/>
-          </a:p>
-        </p:txBody>
-      </p:sp>
-      <p:sp>
-        <p:nvSpPr>
-          <p:cNvPr id="7" name="Text 5"/>
-          <p:cNvSpPr/>
-          <p:nvPr/>
-        </p:nvSpPr>
-        <p:spPr>
-          <a:xfrm>
-            <a:off x="512064" y="1581912"/>
-            <a:ext cx="3813048" cy="1033272"/>
-          </a:xfrm>
-          <a:prstGeom prst="rect">
-            <a:avLst/>
-          </a:prstGeom>
-          <a:noFill/>
-          <a:ln/>
-        </p:spPr>
-        <p:txBody>
-          <a:bodyPr wrap="square" lIns="0" tIns="0" rIns="0" bIns="0" rtlCol="0" anchor="t">
+              <a:t>Ambient request</a:t>
+            </a:r>
+            <a:endParaRPr lang="en-US" sz="2000" dirty="0"/>
+          </a:p>
+        </p:txBody>
+      </p:sp>
+      <p:sp>
+        <p:nvSpPr>
+          <p:cNvPr id="10" name="Text 8"/>
+          <p:cNvSpPr/>
+          <p:nvPr/>
+        </p:nvSpPr>
+        <p:spPr>
+          <a:xfrm>
+            <a:off x="4892040" y="1828800"/>
+            <a:ext cx="3639312" cy="2395728"/>
+          </a:xfrm>
+          <a:prstGeom prst="rect">
+            <a:avLst/>
+          </a:prstGeom>
+          <a:noFill/>
+          <a:ln/>
+        </p:spPr>
+        <p:txBody>
+          <a:bodyPr wrap="square" lIns="381" tIns="381" rIns="381" bIns="381" rtlCol="0" anchor="ctr">
             <a:normAutofit/>
           </a:bodyPr>
           <a:lstStyle/>
           <a:p>
-            <a:pPr indent="0" marL="0">
-              <a:buNone/>
-            </a:pPr>
-            <a:r>
-              <a:rPr lang="en-US" sz="1150" dirty="0">
+            <a:pPr marL="342900" indent="-342900">
+              <a:buSzPct val="100000"/>
+              <a:buChar char="•"/>
+            </a:pPr>
+            <a:r>
+              <a:rPr lang="en-US" sz="1300" dirty="0">
                 <a:solidFill>
                   <a:srgbClr val="212121"/>
                 </a:solidFill>
@@ -8940,108 +10118,35 @@
                 <a:ea typeface="Calibri" pitchFamily="34" charset="-122"/>
                 <a:cs typeface="Calibri" pitchFamily="34" charset="-120"/>
               </a:rPr>
-              <a:t>Expose an explicit MCP allow-list</a:t>
-            </a:r>
-            <a:endParaRPr lang="en-US" sz="1150" dirty="0"/>
-          </a:p>
-        </p:txBody>
-      </p:sp>
-      <p:sp>
-        <p:nvSpPr>
-          <p:cNvPr id="8" name="Shape 6"/>
-          <p:cNvSpPr/>
-          <p:nvPr/>
-        </p:nvSpPr>
-        <p:spPr>
-          <a:xfrm>
-            <a:off x="4672584" y="1078992"/>
-            <a:ext cx="4105656" cy="1655064"/>
-          </a:xfrm>
-          <a:prstGeom prst="roundRect">
-            <a:avLst>
-              <a:gd name="adj" fmla="val 3315"/>
-            </a:avLst>
-          </a:prstGeom>
-          <a:solidFill>
-            <a:srgbClr val="F3F4F6"/>
-          </a:solidFill>
-          <a:ln w="10160">
-            <a:solidFill>
-              <a:srgbClr val="D1D5DB"/>
-            </a:solidFill>
-            <a:prstDash val="solid"/>
-          </a:ln>
-        </p:spPr>
-      </p:sp>
-      <p:sp>
-        <p:nvSpPr>
-          <p:cNvPr id="9" name="Text 7"/>
-          <p:cNvSpPr/>
-          <p:nvPr/>
-        </p:nvSpPr>
-        <p:spPr>
-          <a:xfrm>
-            <a:off x="4818888" y="1197864"/>
-            <a:ext cx="3813048" cy="310896"/>
-          </a:xfrm>
-          <a:prstGeom prst="rect">
-            <a:avLst/>
-          </a:prstGeom>
-          <a:noFill/>
-          <a:ln/>
-        </p:spPr>
-        <p:txBody>
-          <a:bodyPr wrap="square" lIns="0" tIns="0" rIns="0" bIns="0" rtlCol="0" anchor="ctr">
-            <a:normAutofit/>
-          </a:bodyPr>
-          <a:lstStyle/>
-          <a:p>
-            <a:pPr indent="0" marL="0">
-              <a:buNone/>
-            </a:pPr>
-            <a:r>
-              <a:rPr lang="en-US" sz="1500" b="1" dirty="0">
-                <a:solidFill>
-                  <a:srgbClr val="1E2761"/>
+              <a:t>Receives {}</a:t>
+            </a:r>
+            <a:endParaRPr lang="en-US" sz="1300" dirty="0"/>
+          </a:p>
+          <a:p>
+            <a:pPr marL="342900" indent="-342900">
+              <a:buSzPct val="100000"/>
+              <a:buChar char="•"/>
+            </a:pPr>
+            <a:r>
+              <a:rPr lang="en-US" sz="1300" dirty="0">
+                <a:solidFill>
+                  <a:srgbClr val="212121"/>
                 </a:solidFill>
                 <a:latin typeface="Calibri" pitchFamily="34" charset="0"/>
                 <a:ea typeface="Calibri" pitchFamily="34" charset="-122"/>
                 <a:cs typeface="Calibri" pitchFamily="34" charset="-120"/>
               </a:rPr>
-              <a:t>Clear names</a:t>
-            </a:r>
-            <a:endParaRPr lang="en-US" sz="1500" dirty="0"/>
-          </a:p>
-        </p:txBody>
-      </p:sp>
-      <p:sp>
-        <p:nvSpPr>
-          <p:cNvPr id="10" name="Text 8"/>
-          <p:cNvSpPr/>
-          <p:nvPr/>
-        </p:nvSpPr>
-        <p:spPr>
-          <a:xfrm>
-            <a:off x="4818888" y="1581912"/>
-            <a:ext cx="3813048" cy="1033272"/>
-          </a:xfrm>
-          <a:prstGeom prst="rect">
-            <a:avLst/>
-          </a:prstGeom>
-          <a:noFill/>
-          <a:ln/>
-        </p:spPr>
-        <p:txBody>
-          <a:bodyPr wrap="square" lIns="0" tIns="0" rIns="0" bIns="0" rtlCol="0" anchor="t">
-            <a:normAutofit/>
-          </a:bodyPr>
-          <a:lstStyle/>
-          <a:p>
-            <a:pPr indent="0" marL="0">
-              <a:buNone/>
-            </a:pPr>
-            <a:r>
-              <a:rPr lang="en-US" sz="1150" dirty="0">
+              <a:t>Includes initialization, discovery, and pings</a:t>
+            </a:r>
+            <a:endParaRPr lang="en-US" sz="1300" dirty="0"/>
+          </a:p>
+          <a:p>
+            <a:pPr marL="342900" indent="-342900">
+              <a:buSzPct val="100000"/>
+              <a:buChar char="•"/>
+            </a:pPr>
+            <a:r>
+              <a:rPr lang="en-US" sz="1300" dirty="0">
                 <a:solidFill>
                   <a:srgbClr val="212121"/>
                 </a:solidFill>
@@ -9049,233 +10154,15 @@
                 <a:ea typeface="Calibri" pitchFamily="34" charset="-122"/>
                 <a:cs typeface="Calibri" pitchFamily="34" charset="-120"/>
               </a:rPr>
-              <a:t>Avoid collisions by selecting or wrapping distinct tool names</a:t>
-            </a:r>
-            <a:endParaRPr lang="en-US" sz="1150" dirty="0"/>
+              <a:t>Provider must still acquire required connection auth</a:t>
+            </a:r>
+            <a:endParaRPr lang="en-US" sz="1300" dirty="0"/>
           </a:p>
         </p:txBody>
       </p:sp>
       <p:sp>
         <p:nvSpPr>
           <p:cNvPr id="11" name="Shape 9"/>
-          <p:cNvSpPr/>
-          <p:nvPr/>
-        </p:nvSpPr>
-        <p:spPr>
-          <a:xfrm>
-            <a:off x="365760" y="2935224"/>
-            <a:ext cx="4105656" cy="1655064"/>
-          </a:xfrm>
-          <a:prstGeom prst="roundRect">
-            <a:avLst>
-              <a:gd name="adj" fmla="val 3315"/>
-            </a:avLst>
-          </a:prstGeom>
-          <a:solidFill>
-            <a:srgbClr val="F3F4F6"/>
-          </a:solidFill>
-          <a:ln w="10160">
-            <a:solidFill>
-              <a:srgbClr val="D1D5DB"/>
-            </a:solidFill>
-            <a:prstDash val="solid"/>
-          </a:ln>
-        </p:spPr>
-      </p:sp>
-      <p:sp>
-        <p:nvSpPr>
-          <p:cNvPr id="12" name="Text 10"/>
-          <p:cNvSpPr/>
-          <p:nvPr/>
-        </p:nvSpPr>
-        <p:spPr>
-          <a:xfrm>
-            <a:off x="512064" y="3054096"/>
-            <a:ext cx="3813048" cy="310896"/>
-          </a:xfrm>
-          <a:prstGeom prst="rect">
-            <a:avLst/>
-          </a:prstGeom>
-          <a:noFill/>
-          <a:ln/>
-        </p:spPr>
-        <p:txBody>
-          <a:bodyPr wrap="square" lIns="0" tIns="0" rIns="0" bIns="0" rtlCol="0" anchor="ctr">
-            <a:normAutofit/>
-          </a:bodyPr>
-          <a:lstStyle/>
-          <a:p>
-            <a:pPr indent="0" marL="0">
-              <a:buNone/>
-            </a:pPr>
-            <a:r>
-              <a:rPr lang="en-US" sz="1500" b="1" dirty="0">
-                <a:solidFill>
-                  <a:srgbClr val="1E2761"/>
-                </a:solidFill>
-                <a:latin typeface="Calibri" pitchFamily="34" charset="0"/>
-                <a:ea typeface="Calibri" pitchFamily="34" charset="-122"/>
-                <a:cs typeface="Calibri" pitchFamily="34" charset="-120"/>
-              </a:rPr>
-              <a:t>Progressive exposure — EXPERIMENTAL</a:t>
-            </a:r>
-            <a:endParaRPr lang="en-US" sz="1500" dirty="0"/>
-          </a:p>
-        </p:txBody>
-      </p:sp>
-      <p:sp>
-        <p:nvSpPr>
-          <p:cNvPr id="13" name="Text 11"/>
-          <p:cNvSpPr/>
-          <p:nvPr/>
-        </p:nvSpPr>
-        <p:spPr>
-          <a:xfrm>
-            <a:off x="512064" y="3438144"/>
-            <a:ext cx="3813048" cy="1033272"/>
-          </a:xfrm>
-          <a:prstGeom prst="rect">
-            <a:avLst/>
-          </a:prstGeom>
-          <a:noFill/>
-          <a:ln/>
-        </p:spPr>
-        <p:txBody>
-          <a:bodyPr wrap="square" lIns="0" tIns="0" rIns="0" bIns="0" rtlCol="0" anchor="t">
-            <a:normAutofit/>
-          </a:bodyPr>
-          <a:lstStyle/>
-          <a:p>
-            <a:pPr indent="0" marL="0">
-              <a:buNone/>
-            </a:pPr>
-            <a:r>
-              <a:rPr lang="en-US" sz="1150" dirty="0">
-                <a:solidFill>
-                  <a:srgbClr val="212121"/>
-                </a:solidFill>
-                <a:latin typeface="Calibri" pitchFamily="34" charset="0"/>
-                <a:ea typeface="Calibri" pitchFamily="34" charset="-122"/>
-                <a:cs typeface="Calibri" pitchFamily="34" charset="-120"/>
-              </a:rPr>
-              <a:t>Add tools for the next loop iteration only</a:t>
-            </a:r>
-            <a:endParaRPr lang="en-US" sz="1150" dirty="0"/>
-          </a:p>
-        </p:txBody>
-      </p:sp>
-      <p:sp>
-        <p:nvSpPr>
-          <p:cNvPr id="14" name="Shape 12"/>
-          <p:cNvSpPr/>
-          <p:nvPr/>
-        </p:nvSpPr>
-        <p:spPr>
-          <a:xfrm>
-            <a:off x="4672584" y="2935224"/>
-            <a:ext cx="4105656" cy="1655064"/>
-          </a:xfrm>
-          <a:prstGeom prst="roundRect">
-            <a:avLst>
-              <a:gd name="adj" fmla="val 3315"/>
-            </a:avLst>
-          </a:prstGeom>
-          <a:solidFill>
-            <a:srgbClr val="F3F4F6"/>
-          </a:solidFill>
-          <a:ln w="10160">
-            <a:solidFill>
-              <a:srgbClr val="D1D5DB"/>
-            </a:solidFill>
-            <a:prstDash val="solid"/>
-          </a:ln>
-        </p:spPr>
-      </p:sp>
-      <p:sp>
-        <p:nvSpPr>
-          <p:cNvPr id="15" name="Text 13"/>
-          <p:cNvSpPr/>
-          <p:nvPr/>
-        </p:nvSpPr>
-        <p:spPr>
-          <a:xfrm>
-            <a:off x="4818888" y="3054096"/>
-            <a:ext cx="3813048" cy="310896"/>
-          </a:xfrm>
-          <a:prstGeom prst="rect">
-            <a:avLst/>
-          </a:prstGeom>
-          <a:noFill/>
-          <a:ln/>
-        </p:spPr>
-        <p:txBody>
-          <a:bodyPr wrap="square" lIns="0" tIns="0" rIns="0" bIns="0" rtlCol="0" anchor="ctr">
-            <a:normAutofit/>
-          </a:bodyPr>
-          <a:lstStyle/>
-          <a:p>
-            <a:pPr indent="0" marL="0">
-              <a:buNone/>
-            </a:pPr>
-            <a:r>
-              <a:rPr lang="en-US" sz="1500" b="1" dirty="0">
-                <a:solidFill>
-                  <a:srgbClr val="1E2761"/>
-                </a:solidFill>
-                <a:latin typeface="Calibri" pitchFamily="34" charset="0"/>
-                <a:ea typeface="Calibri" pitchFamily="34" charset="-122"/>
-                <a:cs typeface="Calibri" pitchFamily="34" charset="-120"/>
-              </a:rPr>
-              <a:t>Reset</a:t>
-            </a:r>
-            <a:endParaRPr lang="en-US" sz="1500" dirty="0"/>
-          </a:p>
-        </p:txBody>
-      </p:sp>
-      <p:sp>
-        <p:nvSpPr>
-          <p:cNvPr id="16" name="Text 14"/>
-          <p:cNvSpPr/>
-          <p:nvPr/>
-        </p:nvSpPr>
-        <p:spPr>
-          <a:xfrm>
-            <a:off x="4818888" y="3438144"/>
-            <a:ext cx="3813048" cy="1033272"/>
-          </a:xfrm>
-          <a:prstGeom prst="rect">
-            <a:avLst/>
-          </a:prstGeom>
-          <a:noFill/>
-          <a:ln/>
-        </p:spPr>
-        <p:txBody>
-          <a:bodyPr wrap="square" lIns="0" tIns="0" rIns="0" bIns="0" rtlCol="0" anchor="t">
-            <a:normAutofit/>
-          </a:bodyPr>
-          <a:lstStyle/>
-          <a:p>
-            <a:pPr indent="0" marL="0">
-              <a:buNone/>
-            </a:pPr>
-            <a:r>
-              <a:rPr lang="en-US" sz="1150" dirty="0">
-                <a:solidFill>
-                  <a:srgbClr val="212121"/>
-                </a:solidFill>
-                <a:latin typeface="Calibri" pitchFamily="34" charset="0"/>
-                <a:ea typeface="Calibri" pitchFamily="34" charset="-122"/>
-                <a:cs typeface="Calibri" pitchFamily="34" charset="-120"/>
-              </a:rPr>
-              <a:t>Progressive tool changes re-arm on each new agent run</a:t>
-            </a:r>
-            <a:endParaRPr lang="en-US" sz="1150" dirty="0"/>
-          </a:p>
-        </p:txBody>
-      </p:sp>
-      <p:sp>
-        <p:nvSpPr>
-          <p:cNvPr id="17" name="Shape 15"/>
           <p:cNvSpPr/>
           <p:nvPr/>
         </p:nvSpPr>
@@ -9298,7 +10185,7 @@
       </p:sp>
       <p:sp>
         <p:nvSpPr>
-          <p:cNvPr id="18" name="Text 16"/>
+          <p:cNvPr id="12" name="Text 10"/>
           <p:cNvSpPr/>
           <p:nvPr/>
         </p:nvSpPr>
@@ -9331,7 +10218,7 @@
                 <a:ea typeface="Calibri" pitchFamily="34" charset="-122"/>
                 <a:cs typeface="Calibri" pitchFamily="34" charset="-120"/>
               </a:rPr>
-              <a:t>Source: https://learn.microsoft.com/en-us/python/api/agent-framework-core/agent_framework.mcpstreamablehttptool?view=agent-framework-python-latest  ·  +1 in notes</a:t>
+              <a:t>Source: https://learn.microsoft.com/en-us/agent-framework/agents/tools/local-mcp-tools?tabs=python</a:t>
             </a:r>
             <a:endParaRPr lang="en-US" sz="820" dirty="0"/>
           </a:p>
@@ -9457,7 +10344,7 @@
               <a:buNone/>
             </a:pPr>
             <a:r>
-              <a:rPr lang="en-US" sz="2500" b="1" dirty="0">
+              <a:rPr lang="en-US" sz="2800" b="1" dirty="0">
                 <a:solidFill>
                   <a:srgbClr val="1E2761"/>
                 </a:solidFill>
@@ -9465,6 +10352,640 @@
                 <a:ea typeface="Calibri" pitchFamily="34" charset="-122"/>
                 <a:cs typeface="Calibri" pitchFamily="34" charset="-120"/>
               </a:rPr>
+              <a:t>Reduce the model's tool surface</a:t>
+            </a:r>
+            <a:endParaRPr lang="en-US" sz="2800" dirty="0"/>
+          </a:p>
+        </p:txBody>
+      </p:sp>
+      <p:sp>
+        <p:nvSpPr>
+          <p:cNvPr id="5" name="Shape 3"/>
+          <p:cNvSpPr/>
+          <p:nvPr/>
+        </p:nvSpPr>
+        <p:spPr>
+          <a:xfrm>
+            <a:off x="365760" y="1078992"/>
+            <a:ext cx="4105656" cy="1655064"/>
+          </a:xfrm>
+          <a:prstGeom prst="roundRect">
+            <a:avLst>
+              <a:gd name="adj" fmla="val 3315"/>
+            </a:avLst>
+          </a:prstGeom>
+          <a:solidFill>
+            <a:srgbClr val="CADCFC"/>
+          </a:solidFill>
+          <a:ln w="10160">
+            <a:solidFill>
+              <a:srgbClr val="1E2761"/>
+            </a:solidFill>
+            <a:prstDash val="solid"/>
+          </a:ln>
+        </p:spPr>
+      </p:sp>
+      <p:sp>
+        <p:nvSpPr>
+          <p:cNvPr id="6" name="Text 4"/>
+          <p:cNvSpPr/>
+          <p:nvPr/>
+        </p:nvSpPr>
+        <p:spPr>
+          <a:xfrm>
+            <a:off x="512064" y="1197864"/>
+            <a:ext cx="3813048" cy="310896"/>
+          </a:xfrm>
+          <a:prstGeom prst="rect">
+            <a:avLst/>
+          </a:prstGeom>
+          <a:noFill/>
+          <a:ln/>
+        </p:spPr>
+        <p:txBody>
+          <a:bodyPr wrap="square" lIns="0" tIns="0" rIns="0" bIns="0" rtlCol="0" anchor="ctr">
+            <a:normAutofit/>
+          </a:bodyPr>
+          <a:lstStyle/>
+          <a:p>
+            <a:pPr indent="0" marL="0">
+              <a:buNone/>
+            </a:pPr>
+            <a:r>
+              <a:rPr lang="en-US" sz="1500" b="1" dirty="0">
+                <a:solidFill>
+                  <a:srgbClr val="1E2761"/>
+                </a:solidFill>
+                <a:latin typeface="Calibri" pitchFamily="34" charset="0"/>
+                <a:ea typeface="Calibri" pitchFamily="34" charset="-122"/>
+                <a:cs typeface="Calibri" pitchFamily="34" charset="-120"/>
+              </a:rPr>
+              <a:t>allowed_tools</a:t>
+            </a:r>
+            <a:endParaRPr lang="en-US" sz="1500" dirty="0"/>
+          </a:p>
+        </p:txBody>
+      </p:sp>
+      <p:sp>
+        <p:nvSpPr>
+          <p:cNvPr id="7" name="Text 5"/>
+          <p:cNvSpPr/>
+          <p:nvPr/>
+        </p:nvSpPr>
+        <p:spPr>
+          <a:xfrm>
+            <a:off x="512064" y="1581912"/>
+            <a:ext cx="3813048" cy="1033272"/>
+          </a:xfrm>
+          <a:prstGeom prst="rect">
+            <a:avLst/>
+          </a:prstGeom>
+          <a:noFill/>
+          <a:ln/>
+        </p:spPr>
+        <p:txBody>
+          <a:bodyPr wrap="square" lIns="0" tIns="0" rIns="0" bIns="0" rtlCol="0" anchor="t">
+            <a:normAutofit/>
+          </a:bodyPr>
+          <a:lstStyle/>
+          <a:p>
+            <a:pPr indent="0" marL="0">
+              <a:buNone/>
+            </a:pPr>
+            <a:r>
+              <a:rPr lang="en-US" sz="1150" dirty="0">
+                <a:solidFill>
+                  <a:srgbClr val="212121"/>
+                </a:solidFill>
+                <a:latin typeface="Calibri" pitchFamily="34" charset="0"/>
+                <a:ea typeface="Calibri" pitchFamily="34" charset="-122"/>
+                <a:cs typeface="Calibri" pitchFamily="34" charset="-120"/>
+              </a:rPr>
+              <a:t>Expose an explicit MCP allow-list</a:t>
+            </a:r>
+            <a:endParaRPr lang="en-US" sz="1150" dirty="0"/>
+          </a:p>
+        </p:txBody>
+      </p:sp>
+      <p:sp>
+        <p:nvSpPr>
+          <p:cNvPr id="8" name="Shape 6"/>
+          <p:cNvSpPr/>
+          <p:nvPr/>
+        </p:nvSpPr>
+        <p:spPr>
+          <a:xfrm>
+            <a:off x="4672584" y="1078992"/>
+            <a:ext cx="4105656" cy="1655064"/>
+          </a:xfrm>
+          <a:prstGeom prst="roundRect">
+            <a:avLst>
+              <a:gd name="adj" fmla="val 3315"/>
+            </a:avLst>
+          </a:prstGeom>
+          <a:solidFill>
+            <a:srgbClr val="F3F4F6"/>
+          </a:solidFill>
+          <a:ln w="10160">
+            <a:solidFill>
+              <a:srgbClr val="D1D5DB"/>
+            </a:solidFill>
+            <a:prstDash val="solid"/>
+          </a:ln>
+        </p:spPr>
+      </p:sp>
+      <p:sp>
+        <p:nvSpPr>
+          <p:cNvPr id="9" name="Text 7"/>
+          <p:cNvSpPr/>
+          <p:nvPr/>
+        </p:nvSpPr>
+        <p:spPr>
+          <a:xfrm>
+            <a:off x="4818888" y="1197864"/>
+            <a:ext cx="3813048" cy="310896"/>
+          </a:xfrm>
+          <a:prstGeom prst="rect">
+            <a:avLst/>
+          </a:prstGeom>
+          <a:noFill/>
+          <a:ln/>
+        </p:spPr>
+        <p:txBody>
+          <a:bodyPr wrap="square" lIns="0" tIns="0" rIns="0" bIns="0" rtlCol="0" anchor="ctr">
+            <a:normAutofit/>
+          </a:bodyPr>
+          <a:lstStyle/>
+          <a:p>
+            <a:pPr indent="0" marL="0">
+              <a:buNone/>
+            </a:pPr>
+            <a:r>
+              <a:rPr lang="en-US" sz="1500" b="1" dirty="0">
+                <a:solidFill>
+                  <a:srgbClr val="1E2761"/>
+                </a:solidFill>
+                <a:latin typeface="Calibri" pitchFamily="34" charset="0"/>
+                <a:ea typeface="Calibri" pitchFamily="34" charset="-122"/>
+                <a:cs typeface="Calibri" pitchFamily="34" charset="-120"/>
+              </a:rPr>
+              <a:t>Clear names</a:t>
+            </a:r>
+            <a:endParaRPr lang="en-US" sz="1500" dirty="0"/>
+          </a:p>
+        </p:txBody>
+      </p:sp>
+      <p:sp>
+        <p:nvSpPr>
+          <p:cNvPr id="10" name="Text 8"/>
+          <p:cNvSpPr/>
+          <p:nvPr/>
+        </p:nvSpPr>
+        <p:spPr>
+          <a:xfrm>
+            <a:off x="4818888" y="1581912"/>
+            <a:ext cx="3813048" cy="1033272"/>
+          </a:xfrm>
+          <a:prstGeom prst="rect">
+            <a:avLst/>
+          </a:prstGeom>
+          <a:noFill/>
+          <a:ln/>
+        </p:spPr>
+        <p:txBody>
+          <a:bodyPr wrap="square" lIns="0" tIns="0" rIns="0" bIns="0" rtlCol="0" anchor="t">
+            <a:normAutofit/>
+          </a:bodyPr>
+          <a:lstStyle/>
+          <a:p>
+            <a:pPr indent="0" marL="0">
+              <a:buNone/>
+            </a:pPr>
+            <a:r>
+              <a:rPr lang="en-US" sz="1150" dirty="0">
+                <a:solidFill>
+                  <a:srgbClr val="212121"/>
+                </a:solidFill>
+                <a:latin typeface="Calibri" pitchFamily="34" charset="0"/>
+                <a:ea typeface="Calibri" pitchFamily="34" charset="-122"/>
+                <a:cs typeface="Calibri" pitchFamily="34" charset="-120"/>
+              </a:rPr>
+              <a:t>Avoid collisions by selecting or wrapping distinct tool names</a:t>
+            </a:r>
+            <a:endParaRPr lang="en-US" sz="1150" dirty="0"/>
+          </a:p>
+        </p:txBody>
+      </p:sp>
+      <p:sp>
+        <p:nvSpPr>
+          <p:cNvPr id="11" name="Shape 9"/>
+          <p:cNvSpPr/>
+          <p:nvPr/>
+        </p:nvSpPr>
+        <p:spPr>
+          <a:xfrm>
+            <a:off x="365760" y="2935224"/>
+            <a:ext cx="4105656" cy="1655064"/>
+          </a:xfrm>
+          <a:prstGeom prst="roundRect">
+            <a:avLst>
+              <a:gd name="adj" fmla="val 3315"/>
+            </a:avLst>
+          </a:prstGeom>
+          <a:solidFill>
+            <a:srgbClr val="F3F4F6"/>
+          </a:solidFill>
+          <a:ln w="10160">
+            <a:solidFill>
+              <a:srgbClr val="D1D5DB"/>
+            </a:solidFill>
+            <a:prstDash val="solid"/>
+          </a:ln>
+        </p:spPr>
+      </p:sp>
+      <p:sp>
+        <p:nvSpPr>
+          <p:cNvPr id="12" name="Text 10"/>
+          <p:cNvSpPr/>
+          <p:nvPr/>
+        </p:nvSpPr>
+        <p:spPr>
+          <a:xfrm>
+            <a:off x="512064" y="3054096"/>
+            <a:ext cx="3813048" cy="310896"/>
+          </a:xfrm>
+          <a:prstGeom prst="rect">
+            <a:avLst/>
+          </a:prstGeom>
+          <a:noFill/>
+          <a:ln/>
+        </p:spPr>
+        <p:txBody>
+          <a:bodyPr wrap="square" lIns="0" tIns="0" rIns="0" bIns="0" rtlCol="0" anchor="ctr">
+            <a:normAutofit/>
+          </a:bodyPr>
+          <a:lstStyle/>
+          <a:p>
+            <a:pPr indent="0" marL="0">
+              <a:buNone/>
+            </a:pPr>
+            <a:r>
+              <a:rPr lang="en-US" sz="1500" b="1" dirty="0">
+                <a:solidFill>
+                  <a:srgbClr val="1E2761"/>
+                </a:solidFill>
+                <a:latin typeface="Calibri" pitchFamily="34" charset="0"/>
+                <a:ea typeface="Calibri" pitchFamily="34" charset="-122"/>
+                <a:cs typeface="Calibri" pitchFamily="34" charset="-120"/>
+              </a:rPr>
+              <a:t>Progressive exposure — EXPERIMENTAL</a:t>
+            </a:r>
+            <a:endParaRPr lang="en-US" sz="1500" dirty="0"/>
+          </a:p>
+        </p:txBody>
+      </p:sp>
+      <p:sp>
+        <p:nvSpPr>
+          <p:cNvPr id="13" name="Text 11"/>
+          <p:cNvSpPr/>
+          <p:nvPr/>
+        </p:nvSpPr>
+        <p:spPr>
+          <a:xfrm>
+            <a:off x="512064" y="3438144"/>
+            <a:ext cx="3813048" cy="1033272"/>
+          </a:xfrm>
+          <a:prstGeom prst="rect">
+            <a:avLst/>
+          </a:prstGeom>
+          <a:noFill/>
+          <a:ln/>
+        </p:spPr>
+        <p:txBody>
+          <a:bodyPr wrap="square" lIns="0" tIns="0" rIns="0" bIns="0" rtlCol="0" anchor="t">
+            <a:normAutofit/>
+          </a:bodyPr>
+          <a:lstStyle/>
+          <a:p>
+            <a:pPr indent="0" marL="0">
+              <a:buNone/>
+            </a:pPr>
+            <a:r>
+              <a:rPr lang="en-US" sz="1150" dirty="0">
+                <a:solidFill>
+                  <a:srgbClr val="212121"/>
+                </a:solidFill>
+                <a:latin typeface="Calibri" pitchFamily="34" charset="0"/>
+                <a:ea typeface="Calibri" pitchFamily="34" charset="-122"/>
+                <a:cs typeface="Calibri" pitchFamily="34" charset="-120"/>
+              </a:rPr>
+              <a:t>Add tools for the next loop iteration only</a:t>
+            </a:r>
+            <a:endParaRPr lang="en-US" sz="1150" dirty="0"/>
+          </a:p>
+        </p:txBody>
+      </p:sp>
+      <p:sp>
+        <p:nvSpPr>
+          <p:cNvPr id="14" name="Shape 12"/>
+          <p:cNvSpPr/>
+          <p:nvPr/>
+        </p:nvSpPr>
+        <p:spPr>
+          <a:xfrm>
+            <a:off x="4672584" y="2935224"/>
+            <a:ext cx="4105656" cy="1655064"/>
+          </a:xfrm>
+          <a:prstGeom prst="roundRect">
+            <a:avLst>
+              <a:gd name="adj" fmla="val 3315"/>
+            </a:avLst>
+          </a:prstGeom>
+          <a:solidFill>
+            <a:srgbClr val="F3F4F6"/>
+          </a:solidFill>
+          <a:ln w="10160">
+            <a:solidFill>
+              <a:srgbClr val="D1D5DB"/>
+            </a:solidFill>
+            <a:prstDash val="solid"/>
+          </a:ln>
+        </p:spPr>
+      </p:sp>
+      <p:sp>
+        <p:nvSpPr>
+          <p:cNvPr id="15" name="Text 13"/>
+          <p:cNvSpPr/>
+          <p:nvPr/>
+        </p:nvSpPr>
+        <p:spPr>
+          <a:xfrm>
+            <a:off x="4818888" y="3054096"/>
+            <a:ext cx="3813048" cy="310896"/>
+          </a:xfrm>
+          <a:prstGeom prst="rect">
+            <a:avLst/>
+          </a:prstGeom>
+          <a:noFill/>
+          <a:ln/>
+        </p:spPr>
+        <p:txBody>
+          <a:bodyPr wrap="square" lIns="0" tIns="0" rIns="0" bIns="0" rtlCol="0" anchor="ctr">
+            <a:normAutofit/>
+          </a:bodyPr>
+          <a:lstStyle/>
+          <a:p>
+            <a:pPr indent="0" marL="0">
+              <a:buNone/>
+            </a:pPr>
+            <a:r>
+              <a:rPr lang="en-US" sz="1500" b="1" dirty="0">
+                <a:solidFill>
+                  <a:srgbClr val="1E2761"/>
+                </a:solidFill>
+                <a:latin typeface="Calibri" pitchFamily="34" charset="0"/>
+                <a:ea typeface="Calibri" pitchFamily="34" charset="-122"/>
+                <a:cs typeface="Calibri" pitchFamily="34" charset="-120"/>
+              </a:rPr>
+              <a:t>Reset</a:t>
+            </a:r>
+            <a:endParaRPr lang="en-US" sz="1500" dirty="0"/>
+          </a:p>
+        </p:txBody>
+      </p:sp>
+      <p:sp>
+        <p:nvSpPr>
+          <p:cNvPr id="16" name="Text 14"/>
+          <p:cNvSpPr/>
+          <p:nvPr/>
+        </p:nvSpPr>
+        <p:spPr>
+          <a:xfrm>
+            <a:off x="4818888" y="3438144"/>
+            <a:ext cx="3813048" cy="1033272"/>
+          </a:xfrm>
+          <a:prstGeom prst="rect">
+            <a:avLst/>
+          </a:prstGeom>
+          <a:noFill/>
+          <a:ln/>
+        </p:spPr>
+        <p:txBody>
+          <a:bodyPr wrap="square" lIns="0" tIns="0" rIns="0" bIns="0" rtlCol="0" anchor="t">
+            <a:normAutofit/>
+          </a:bodyPr>
+          <a:lstStyle/>
+          <a:p>
+            <a:pPr indent="0" marL="0">
+              <a:buNone/>
+            </a:pPr>
+            <a:r>
+              <a:rPr lang="en-US" sz="1150" dirty="0">
+                <a:solidFill>
+                  <a:srgbClr val="212121"/>
+                </a:solidFill>
+                <a:latin typeface="Calibri" pitchFamily="34" charset="0"/>
+                <a:ea typeface="Calibri" pitchFamily="34" charset="-122"/>
+                <a:cs typeface="Calibri" pitchFamily="34" charset="-120"/>
+              </a:rPr>
+              <a:t>Progressive tool changes re-arm on each new agent run</a:t>
+            </a:r>
+            <a:endParaRPr lang="en-US" sz="1150" dirty="0"/>
+          </a:p>
+        </p:txBody>
+      </p:sp>
+      <p:sp>
+        <p:nvSpPr>
+          <p:cNvPr id="17" name="Shape 15"/>
+          <p:cNvSpPr/>
+          <p:nvPr/>
+        </p:nvSpPr>
+        <p:spPr>
+          <a:xfrm>
+            <a:off x="365760" y="4773168"/>
+            <a:ext cx="8412480" cy="0"/>
+          </a:xfrm>
+          <a:prstGeom prst="line">
+            <a:avLst/>
+          </a:prstGeom>
+          <a:noFill/>
+          <a:ln w="6350">
+            <a:solidFill>
+              <a:srgbClr val="D1D5DB"/>
+            </a:solidFill>
+            <a:prstDash val="solid"/>
+          </a:ln>
+        </p:spPr>
+      </p:sp>
+      <p:sp>
+        <p:nvSpPr>
+          <p:cNvPr id="18" name="Text 16"/>
+          <p:cNvSpPr/>
+          <p:nvPr/>
+        </p:nvSpPr>
+        <p:spPr>
+          <a:xfrm>
+            <a:off x="384048" y="4818888"/>
+            <a:ext cx="8275320" cy="182880"/>
+          </a:xfrm>
+          <a:prstGeom prst="rect">
+            <a:avLst/>
+          </a:prstGeom>
+          <a:noFill/>
+          <a:ln/>
+        </p:spPr>
+        <p:txBody>
+          <a:bodyPr wrap="square" lIns="0" tIns="0" rIns="0" bIns="0" rtlCol="0" anchor="ctr">
+            <a:normAutofit/>
+          </a:bodyPr>
+          <a:lstStyle/>
+          <a:p>
+            <a:pPr indent="0" marL="0">
+              <a:buNone/>
+            </a:pPr>
+            <a:r>
+              <a:rPr lang="en-US" sz="820" dirty="0">
+                <a:solidFill>
+                  <a:srgbClr val="6B7280"/>
+                </a:solidFill>
+                <a:latin typeface="Calibri" pitchFamily="34" charset="0"/>
+                <a:ea typeface="Calibri" pitchFamily="34" charset="-122"/>
+                <a:cs typeface="Calibri" pitchFamily="34" charset="-120"/>
+              </a:rPr>
+              <a:t>Source: https://learn.microsoft.com/en-us/python/api/agent-framework-core/agent_framework.mcpstreamablehttptool?view=agent-framework-python-latest  ·  +1 in notes</a:t>
+            </a:r>
+            <a:endParaRPr lang="en-US" sz="820" dirty="0"/>
+          </a:p>
+        </p:txBody>
+      </p:sp>
+    </p:spTree>
+  </p:cSld>
+  <p:clrMapOvr>
+    <a:masterClrMapping/>
+  </p:clrMapOvr>
+</p:sld>
+</file>
+
+<file path=ppt/slides/slide9.xml><?xml version="1.0" encoding="utf-8"?>
+<p:sld xmlns:a="http://schemas.openxmlformats.org/drawingml/2006/main" xmlns:r="http://schemas.openxmlformats.org/officeDocument/2006/relationships" xmlns:p="http://schemas.openxmlformats.org/presentationml/2006/main">
+  <p:cSld name="Slide 9">
+    <p:bg>
+      <p:bgPr>
+        <a:solidFill>
+          <a:srgbClr val="FFFFFF"/>
+        </a:solidFill>
+      </p:bgPr>
+    </p:bg>
+    <p:spTree>
+      <p:nvGrpSpPr>
+        <p:cNvPr id="1" name=""/>
+        <p:cNvGrpSpPr/>
+        <p:nvPr/>
+      </p:nvGrpSpPr>
+      <p:grpSpPr>
+        <a:xfrm>
+          <a:off x="0" y="0"/>
+          <a:ext cx="0" cy="0"/>
+          <a:chOff x="0" y="0"/>
+          <a:chExt cx="0" cy="0"/>
+        </a:xfrm>
+      </p:grpSpPr>
+      <p:sp>
+        <p:nvSpPr>
+          <p:cNvPr id="2" name="Shape 0"/>
+          <p:cNvSpPr/>
+          <p:nvPr/>
+        </p:nvSpPr>
+        <p:spPr>
+          <a:xfrm>
+            <a:off x="0" y="0"/>
+            <a:ext cx="54864" cy="5143500"/>
+          </a:xfrm>
+          <a:prstGeom prst="rect">
+            <a:avLst/>
+          </a:prstGeom>
+          <a:solidFill>
+            <a:srgbClr val="1E2761"/>
+          </a:solidFill>
+          <a:ln/>
+        </p:spPr>
+      </p:sp>
+      <p:sp>
+        <p:nvSpPr>
+          <p:cNvPr id="3" name="Text 1"/>
+          <p:cNvSpPr/>
+          <p:nvPr/>
+        </p:nvSpPr>
+        <p:spPr>
+          <a:xfrm>
+            <a:off x="5486400" y="256032"/>
+            <a:ext cx="3337560" cy="228600"/>
+          </a:xfrm>
+          <a:prstGeom prst="rect">
+            <a:avLst/>
+          </a:prstGeom>
+          <a:noFill/>
+          <a:ln/>
+        </p:spPr>
+        <p:txBody>
+          <a:bodyPr wrap="square" lIns="0" tIns="0" rIns="0" bIns="0" rtlCol="0" anchor="ctr">
+            <a:normAutofit/>
+          </a:bodyPr>
+          <a:lstStyle/>
+          <a:p>
+            <a:pPr algn="r" indent="0" marL="0">
+              <a:buNone/>
+            </a:pPr>
+            <a:r>
+              <a:rPr lang="en-US" sz="950" dirty="0">
+                <a:solidFill>
+                  <a:srgbClr val="6B7280"/>
+                </a:solidFill>
+                <a:latin typeface="Calibri" pitchFamily="34" charset="0"/>
+                <a:ea typeface="Calibri" pitchFamily="34" charset="-122"/>
+                <a:cs typeface="Calibri" pitchFamily="34" charset="-120"/>
+              </a:rPr>
+              <a:t>Day 3 · Module 5</a:t>
+            </a:r>
+            <a:endParaRPr lang="en-US" sz="950" dirty="0"/>
+          </a:p>
+        </p:txBody>
+      </p:sp>
+      <p:sp>
+        <p:nvSpPr>
+          <p:cNvPr id="4" name="Text 2"/>
+          <p:cNvSpPr/>
+          <p:nvPr/>
+        </p:nvSpPr>
+        <p:spPr>
+          <a:xfrm>
+            <a:off x="365760" y="310896"/>
+            <a:ext cx="6583680" cy="603504"/>
+          </a:xfrm>
+          <a:prstGeom prst="rect">
+            <a:avLst/>
+          </a:prstGeom>
+          <a:noFill/>
+          <a:ln/>
+        </p:spPr>
+        <p:txBody>
+          <a:bodyPr wrap="square" lIns="0" tIns="0" rIns="0" bIns="0" rtlCol="0" anchor="ctr">
+            <a:normAutofit/>
+          </a:bodyPr>
+          <a:lstStyle/>
+          <a:p>
+            <a:pPr indent="0" marL="0">
+              <a:buNone/>
+            </a:pPr>
+            <a:r>
+              <a:rPr lang="en-US" sz="2500" b="1" dirty="0">
+                <a:solidFill>
+                  <a:srgbClr val="1E2761"/>
+                </a:solidFill>
+                <a:latin typeface="Calibri" pitchFamily="34" charset="0"/>
+                <a:ea typeface="Calibri" pitchFamily="34" charset="-122"/>
+                <a:cs typeface="Calibri" pitchFamily="34" charset="-120"/>
+              </a:rPr>
               <a:t>approval_mode creates a human boundary</a:t>
             </a:r>
             <a:endParaRPr lang="en-US" sz="2500" dirty="0"/>
@@ -9473,7 +10994,7 @@
       </p:sp>
       <p:graphicFrame>
         <p:nvGraphicFramePr>
-          <p:cNvPr id="9" name="Table 0"/>
+          <p:cNvPr id="10" name="Table 0"/>
           <p:cNvGraphicFramePr>
             <a:graphicFrameLocks noGrp="1"/>
           </p:cNvGraphicFramePr>
@@ -10385,640 +11906,6 @@
                 <a:cs typeface="Calibri" pitchFamily="34" charset="-120"/>
               </a:rPr>
               <a:t>Source: https://learn.microsoft.com/en-us/python/api/agent-framework-core/agent_framework.mcpstreamablehttptool?view=agent-framework-python-latest  ·  +1 in notes</a:t>
-            </a:r>
-            <a:endParaRPr lang="en-US" sz="820" dirty="0"/>
-          </a:p>
-        </p:txBody>
-      </p:sp>
-    </p:spTree>
-  </p:cSld>
-  <p:clrMapOvr>
-    <a:masterClrMapping/>
-  </p:clrMapOvr>
-</p:sld>
-</file>
-
-<file path=ppt/slides/slide9.xml><?xml version="1.0" encoding="utf-8"?>
-<p:sld xmlns:a="http://schemas.openxmlformats.org/drawingml/2006/main" xmlns:r="http://schemas.openxmlformats.org/officeDocument/2006/relationships" xmlns:p="http://schemas.openxmlformats.org/presentationml/2006/main">
-  <p:cSld name="Slide 9">
-    <p:bg>
-      <p:bgPr>
-        <a:solidFill>
-          <a:srgbClr val="FFFFFF"/>
-        </a:solidFill>
-      </p:bgPr>
-    </p:bg>
-    <p:spTree>
-      <p:nvGrpSpPr>
-        <p:cNvPr id="1" name=""/>
-        <p:cNvGrpSpPr/>
-        <p:nvPr/>
-      </p:nvGrpSpPr>
-      <p:grpSpPr>
-        <a:xfrm>
-          <a:off x="0" y="0"/>
-          <a:ext cx="0" cy="0"/>
-          <a:chOff x="0" y="0"/>
-          <a:chExt cx="0" cy="0"/>
-        </a:xfrm>
-      </p:grpSpPr>
-      <p:sp>
-        <p:nvSpPr>
-          <p:cNvPr id="2" name="Shape 0"/>
-          <p:cNvSpPr/>
-          <p:nvPr/>
-        </p:nvSpPr>
-        <p:spPr>
-          <a:xfrm>
-            <a:off x="0" y="0"/>
-            <a:ext cx="54864" cy="5143500"/>
-          </a:xfrm>
-          <a:prstGeom prst="rect">
-            <a:avLst/>
-          </a:prstGeom>
-          <a:solidFill>
-            <a:srgbClr val="1E2761"/>
-          </a:solidFill>
-          <a:ln/>
-        </p:spPr>
-      </p:sp>
-      <p:sp>
-        <p:nvSpPr>
-          <p:cNvPr id="3" name="Text 1"/>
-          <p:cNvSpPr/>
-          <p:nvPr/>
-        </p:nvSpPr>
-        <p:spPr>
-          <a:xfrm>
-            <a:off x="5486400" y="256032"/>
-            <a:ext cx="3337560" cy="228600"/>
-          </a:xfrm>
-          <a:prstGeom prst="rect">
-            <a:avLst/>
-          </a:prstGeom>
-          <a:noFill/>
-          <a:ln/>
-        </p:spPr>
-        <p:txBody>
-          <a:bodyPr wrap="square" lIns="0" tIns="0" rIns="0" bIns="0" rtlCol="0" anchor="ctr">
-            <a:normAutofit/>
-          </a:bodyPr>
-          <a:lstStyle/>
-          <a:p>
-            <a:pPr algn="r" indent="0" marL="0">
-              <a:buNone/>
-            </a:pPr>
-            <a:r>
-              <a:rPr lang="en-US" sz="950" dirty="0">
-                <a:solidFill>
-                  <a:srgbClr val="6B7280"/>
-                </a:solidFill>
-                <a:latin typeface="Calibri" pitchFamily="34" charset="0"/>
-                <a:ea typeface="Calibri" pitchFamily="34" charset="-122"/>
-                <a:cs typeface="Calibri" pitchFamily="34" charset="-120"/>
-              </a:rPr>
-              <a:t>Day 3 · Module 5</a:t>
-            </a:r>
-            <a:endParaRPr lang="en-US" sz="950" dirty="0"/>
-          </a:p>
-        </p:txBody>
-      </p:sp>
-      <p:sp>
-        <p:nvSpPr>
-          <p:cNvPr id="4" name="Text 2"/>
-          <p:cNvSpPr/>
-          <p:nvPr/>
-        </p:nvSpPr>
-        <p:spPr>
-          <a:xfrm>
-            <a:off x="365760" y="310896"/>
-            <a:ext cx="6583680" cy="603504"/>
-          </a:xfrm>
-          <a:prstGeom prst="rect">
-            <a:avLst/>
-          </a:prstGeom>
-          <a:noFill/>
-          <a:ln/>
-        </p:spPr>
-        <p:txBody>
-          <a:bodyPr wrap="square" lIns="0" tIns="0" rIns="0" bIns="0" rtlCol="0" anchor="ctr">
-            <a:normAutofit/>
-          </a:bodyPr>
-          <a:lstStyle/>
-          <a:p>
-            <a:pPr indent="0" marL="0">
-              <a:buNone/>
-            </a:pPr>
-            <a:r>
-              <a:rPr lang="en-US" sz="2500" b="1" dirty="0">
-                <a:solidFill>
-                  <a:srgbClr val="1E2761"/>
-                </a:solidFill>
-                <a:latin typeface="Calibri" pitchFamily="34" charset="0"/>
-                <a:ea typeface="Calibri" pitchFamily="34" charset="-122"/>
-                <a:cs typeface="Calibri" pitchFamily="34" charset="-120"/>
-              </a:rPr>
-              <a:t>Security is broader than authentication</a:t>
-            </a:r>
-            <a:endParaRPr lang="en-US" sz="2500" dirty="0"/>
-          </a:p>
-        </p:txBody>
-      </p:sp>
-      <p:sp>
-        <p:nvSpPr>
-          <p:cNvPr id="5" name="Shape 3"/>
-          <p:cNvSpPr/>
-          <p:nvPr/>
-        </p:nvSpPr>
-        <p:spPr>
-          <a:xfrm>
-            <a:off x="365760" y="1078992"/>
-            <a:ext cx="4105656" cy="1655064"/>
-          </a:xfrm>
-          <a:prstGeom prst="roundRect">
-            <a:avLst>
-              <a:gd name="adj" fmla="val 3315"/>
-            </a:avLst>
-          </a:prstGeom>
-          <a:solidFill>
-            <a:srgbClr val="CADCFC"/>
-          </a:solidFill>
-          <a:ln w="10160">
-            <a:solidFill>
-              <a:srgbClr val="1E2761"/>
-            </a:solidFill>
-            <a:prstDash val="solid"/>
-          </a:ln>
-        </p:spPr>
-      </p:sp>
-      <p:sp>
-        <p:nvSpPr>
-          <p:cNvPr id="6" name="Text 4"/>
-          <p:cNvSpPr/>
-          <p:nvPr/>
-        </p:nvSpPr>
-        <p:spPr>
-          <a:xfrm>
-            <a:off x="512064" y="1197864"/>
-            <a:ext cx="3813048" cy="310896"/>
-          </a:xfrm>
-          <a:prstGeom prst="rect">
-            <a:avLst/>
-          </a:prstGeom>
-          <a:noFill/>
-          <a:ln/>
-        </p:spPr>
-        <p:txBody>
-          <a:bodyPr wrap="square" lIns="0" tIns="0" rIns="0" bIns="0" rtlCol="0" anchor="ctr">
-            <a:normAutofit/>
-          </a:bodyPr>
-          <a:lstStyle/>
-          <a:p>
-            <a:pPr indent="0" marL="0">
-              <a:buNone/>
-            </a:pPr>
-            <a:r>
-              <a:rPr lang="en-US" sz="1500" b="1" dirty="0">
-                <a:solidFill>
-                  <a:srgbClr val="1E2761"/>
-                </a:solidFill>
-                <a:latin typeface="Calibri" pitchFamily="34" charset="0"/>
-                <a:ea typeface="Calibri" pitchFamily="34" charset="-122"/>
-                <a:cs typeface="Calibri" pitchFamily="34" charset="-120"/>
-              </a:rPr>
-              <a:t>Trust</a:t>
-            </a:r>
-            <a:endParaRPr lang="en-US" sz="1500" dirty="0"/>
-          </a:p>
-        </p:txBody>
-      </p:sp>
-      <p:sp>
-        <p:nvSpPr>
-          <p:cNvPr id="7" name="Text 5"/>
-          <p:cNvSpPr/>
-          <p:nvPr/>
-        </p:nvSpPr>
-        <p:spPr>
-          <a:xfrm>
-            <a:off x="512064" y="1581912"/>
-            <a:ext cx="3813048" cy="1033272"/>
-          </a:xfrm>
-          <a:prstGeom prst="rect">
-            <a:avLst/>
-          </a:prstGeom>
-          <a:noFill/>
-          <a:ln/>
-        </p:spPr>
-        <p:txBody>
-          <a:bodyPr wrap="square" lIns="0" tIns="0" rIns="0" bIns="0" rtlCol="0" anchor="t">
-            <a:normAutofit/>
-          </a:bodyPr>
-          <a:lstStyle/>
-          <a:p>
-            <a:pPr indent="0" marL="0">
-              <a:buNone/>
-            </a:pPr>
-            <a:r>
-              <a:rPr lang="en-US" sz="1150" dirty="0">
-                <a:solidFill>
-                  <a:srgbClr val="212121"/>
-                </a:solidFill>
-                <a:latin typeface="Calibri" pitchFamily="34" charset="0"/>
-                <a:ea typeface="Calibri" pitchFamily="34" charset="-122"/>
-                <a:cs typeface="Calibri" pitchFamily="34" charset="-120"/>
-              </a:rPr>
-              <a:t>Review the server operator and package provenance</a:t>
-            </a:r>
-            <a:endParaRPr lang="en-US" sz="1150" dirty="0"/>
-          </a:p>
-        </p:txBody>
-      </p:sp>
-      <p:sp>
-        <p:nvSpPr>
-          <p:cNvPr id="8" name="Shape 6"/>
-          <p:cNvSpPr/>
-          <p:nvPr/>
-        </p:nvSpPr>
-        <p:spPr>
-          <a:xfrm>
-            <a:off x="4672584" y="1078992"/>
-            <a:ext cx="4105656" cy="1655064"/>
-          </a:xfrm>
-          <a:prstGeom prst="roundRect">
-            <a:avLst>
-              <a:gd name="adj" fmla="val 3315"/>
-            </a:avLst>
-          </a:prstGeom>
-          <a:solidFill>
-            <a:srgbClr val="F3F4F6"/>
-          </a:solidFill>
-          <a:ln w="10160">
-            <a:solidFill>
-              <a:srgbClr val="D1D5DB"/>
-            </a:solidFill>
-            <a:prstDash val="solid"/>
-          </a:ln>
-        </p:spPr>
-      </p:sp>
-      <p:sp>
-        <p:nvSpPr>
-          <p:cNvPr id="9" name="Text 7"/>
-          <p:cNvSpPr/>
-          <p:nvPr/>
-        </p:nvSpPr>
-        <p:spPr>
-          <a:xfrm>
-            <a:off x="4818888" y="1197864"/>
-            <a:ext cx="3813048" cy="310896"/>
-          </a:xfrm>
-          <a:prstGeom prst="rect">
-            <a:avLst/>
-          </a:prstGeom>
-          <a:noFill/>
-          <a:ln/>
-        </p:spPr>
-        <p:txBody>
-          <a:bodyPr wrap="square" lIns="0" tIns="0" rIns="0" bIns="0" rtlCol="0" anchor="ctr">
-            <a:normAutofit/>
-          </a:bodyPr>
-          <a:lstStyle/>
-          <a:p>
-            <a:pPr indent="0" marL="0">
-              <a:buNone/>
-            </a:pPr>
-            <a:r>
-              <a:rPr lang="en-US" sz="1500" b="1" dirty="0">
-                <a:solidFill>
-                  <a:srgbClr val="1E2761"/>
-                </a:solidFill>
-                <a:latin typeface="Calibri" pitchFamily="34" charset="0"/>
-                <a:ea typeface="Calibri" pitchFamily="34" charset="-122"/>
-                <a:cs typeface="Calibri" pitchFamily="34" charset="-120"/>
-              </a:rPr>
-              <a:t>Least privilege</a:t>
-            </a:r>
-            <a:endParaRPr lang="en-US" sz="1500" dirty="0"/>
-          </a:p>
-        </p:txBody>
-      </p:sp>
-      <p:sp>
-        <p:nvSpPr>
-          <p:cNvPr id="10" name="Text 8"/>
-          <p:cNvSpPr/>
-          <p:nvPr/>
-        </p:nvSpPr>
-        <p:spPr>
-          <a:xfrm>
-            <a:off x="4818888" y="1581912"/>
-            <a:ext cx="3813048" cy="1033272"/>
-          </a:xfrm>
-          <a:prstGeom prst="rect">
-            <a:avLst/>
-          </a:prstGeom>
-          <a:noFill/>
-          <a:ln/>
-        </p:spPr>
-        <p:txBody>
-          <a:bodyPr wrap="square" lIns="0" tIns="0" rIns="0" bIns="0" rtlCol="0" anchor="t">
-            <a:normAutofit/>
-          </a:bodyPr>
-          <a:lstStyle/>
-          <a:p>
-            <a:pPr indent="0" marL="0">
-              <a:buNone/>
-            </a:pPr>
-            <a:r>
-              <a:rPr lang="en-US" sz="1150" dirty="0">
-                <a:solidFill>
-                  <a:srgbClr val="212121"/>
-                </a:solidFill>
-                <a:latin typeface="Calibri" pitchFamily="34" charset="0"/>
-                <a:ea typeface="Calibri" pitchFamily="34" charset="-122"/>
-                <a:cs typeface="Calibri" pitchFamily="34" charset="-120"/>
-              </a:rPr>
-              <a:t>Narrow identity scopes and allowed_tools</a:t>
-            </a:r>
-            <a:endParaRPr lang="en-US" sz="1150" dirty="0"/>
-          </a:p>
-        </p:txBody>
-      </p:sp>
-      <p:sp>
-        <p:nvSpPr>
-          <p:cNvPr id="11" name="Shape 9"/>
-          <p:cNvSpPr/>
-          <p:nvPr/>
-        </p:nvSpPr>
-        <p:spPr>
-          <a:xfrm>
-            <a:off x="365760" y="2935224"/>
-            <a:ext cx="4105656" cy="1655064"/>
-          </a:xfrm>
-          <a:prstGeom prst="roundRect">
-            <a:avLst>
-              <a:gd name="adj" fmla="val 3315"/>
-            </a:avLst>
-          </a:prstGeom>
-          <a:solidFill>
-            <a:srgbClr val="F3F4F6"/>
-          </a:solidFill>
-          <a:ln w="10160">
-            <a:solidFill>
-              <a:srgbClr val="D1D5DB"/>
-            </a:solidFill>
-            <a:prstDash val="solid"/>
-          </a:ln>
-        </p:spPr>
-      </p:sp>
-      <p:sp>
-        <p:nvSpPr>
-          <p:cNvPr id="12" name="Text 10"/>
-          <p:cNvSpPr/>
-          <p:nvPr/>
-        </p:nvSpPr>
-        <p:spPr>
-          <a:xfrm>
-            <a:off x="512064" y="3054096"/>
-            <a:ext cx="3813048" cy="310896"/>
-          </a:xfrm>
-          <a:prstGeom prst="rect">
-            <a:avLst/>
-          </a:prstGeom>
-          <a:noFill/>
-          <a:ln/>
-        </p:spPr>
-        <p:txBody>
-          <a:bodyPr wrap="square" lIns="0" tIns="0" rIns="0" bIns="0" rtlCol="0" anchor="ctr">
-            <a:normAutofit/>
-          </a:bodyPr>
-          <a:lstStyle/>
-          <a:p>
-            <a:pPr indent="0" marL="0">
-              <a:buNone/>
-            </a:pPr>
-            <a:r>
-              <a:rPr lang="en-US" sz="1500" b="1" dirty="0">
-                <a:solidFill>
-                  <a:srgbClr val="1E2761"/>
-                </a:solidFill>
-                <a:latin typeface="Calibri" pitchFamily="34" charset="0"/>
-                <a:ea typeface="Calibri" pitchFamily="34" charset="-122"/>
-                <a:cs typeface="Calibri" pitchFamily="34" charset="-120"/>
-              </a:rPr>
-              <a:t>Prompt injection</a:t>
-            </a:r>
-            <a:endParaRPr lang="en-US" sz="1500" dirty="0"/>
-          </a:p>
-        </p:txBody>
-      </p:sp>
-      <p:sp>
-        <p:nvSpPr>
-          <p:cNvPr id="13" name="Text 11"/>
-          <p:cNvSpPr/>
-          <p:nvPr/>
-        </p:nvSpPr>
-        <p:spPr>
-          <a:xfrm>
-            <a:off x="512064" y="3438144"/>
-            <a:ext cx="3813048" cy="1033272"/>
-          </a:xfrm>
-          <a:prstGeom prst="rect">
-            <a:avLst/>
-          </a:prstGeom>
-          <a:noFill/>
-          <a:ln/>
-        </p:spPr>
-        <p:txBody>
-          <a:bodyPr wrap="square" lIns="0" tIns="0" rIns="0" bIns="0" rtlCol="0" anchor="t">
-            <a:normAutofit/>
-          </a:bodyPr>
-          <a:lstStyle/>
-          <a:p>
-            <a:pPr indent="0" marL="0">
-              <a:buNone/>
-            </a:pPr>
-            <a:r>
-              <a:rPr lang="en-US" sz="1150" dirty="0">
-                <a:solidFill>
-                  <a:srgbClr val="212121"/>
-                </a:solidFill>
-                <a:latin typeface="Calibri" pitchFamily="34" charset="0"/>
-                <a:ea typeface="Calibri" pitchFamily="34" charset="-122"/>
-                <a:cs typeface="Calibri" pitchFamily="34" charset="-120"/>
-              </a:rPr>
-              <a:t>Treat tool metadata and results as untrusted</a:t>
-            </a:r>
-            <a:endParaRPr lang="en-US" sz="1150" dirty="0"/>
-          </a:p>
-        </p:txBody>
-      </p:sp>
-      <p:sp>
-        <p:nvSpPr>
-          <p:cNvPr id="14" name="Shape 12"/>
-          <p:cNvSpPr/>
-          <p:nvPr/>
-        </p:nvSpPr>
-        <p:spPr>
-          <a:xfrm>
-            <a:off x="4672584" y="2935224"/>
-            <a:ext cx="4105656" cy="1655064"/>
-          </a:xfrm>
-          <a:prstGeom prst="roundRect">
-            <a:avLst>
-              <a:gd name="adj" fmla="val 3315"/>
-            </a:avLst>
-          </a:prstGeom>
-          <a:solidFill>
-            <a:srgbClr val="F3F4F6"/>
-          </a:solidFill>
-          <a:ln w="10160">
-            <a:solidFill>
-              <a:srgbClr val="D1D5DB"/>
-            </a:solidFill>
-            <a:prstDash val="solid"/>
-          </a:ln>
-        </p:spPr>
-      </p:sp>
-      <p:sp>
-        <p:nvSpPr>
-          <p:cNvPr id="15" name="Text 13"/>
-          <p:cNvSpPr/>
-          <p:nvPr/>
-        </p:nvSpPr>
-        <p:spPr>
-          <a:xfrm>
-            <a:off x="4818888" y="3054096"/>
-            <a:ext cx="3813048" cy="310896"/>
-          </a:xfrm>
-          <a:prstGeom prst="rect">
-            <a:avLst/>
-          </a:prstGeom>
-          <a:noFill/>
-          <a:ln/>
-        </p:spPr>
-        <p:txBody>
-          <a:bodyPr wrap="square" lIns="0" tIns="0" rIns="0" bIns="0" rtlCol="0" anchor="ctr">
-            <a:normAutofit/>
-          </a:bodyPr>
-          <a:lstStyle/>
-          <a:p>
-            <a:pPr indent="0" marL="0">
-              <a:buNone/>
-            </a:pPr>
-            <a:r>
-              <a:rPr lang="en-US" sz="1500" b="1" dirty="0">
-                <a:solidFill>
-                  <a:srgbClr val="1E2761"/>
-                </a:solidFill>
-                <a:latin typeface="Calibri" pitchFamily="34" charset="0"/>
-                <a:ea typeface="Calibri" pitchFamily="34" charset="-122"/>
-                <a:cs typeface="Calibri" pitchFamily="34" charset="-120"/>
-              </a:rPr>
-              <a:t>Audit</a:t>
-            </a:r>
-            <a:endParaRPr lang="en-US" sz="1500" dirty="0"/>
-          </a:p>
-        </p:txBody>
-      </p:sp>
-      <p:sp>
-        <p:nvSpPr>
-          <p:cNvPr id="16" name="Text 14"/>
-          <p:cNvSpPr/>
-          <p:nvPr/>
-        </p:nvSpPr>
-        <p:spPr>
-          <a:xfrm>
-            <a:off x="4818888" y="3438144"/>
-            <a:ext cx="3813048" cy="1033272"/>
-          </a:xfrm>
-          <a:prstGeom prst="rect">
-            <a:avLst/>
-          </a:prstGeom>
-          <a:noFill/>
-          <a:ln/>
-        </p:spPr>
-        <p:txBody>
-          <a:bodyPr wrap="square" lIns="0" tIns="0" rIns="0" bIns="0" rtlCol="0" anchor="t">
-            <a:normAutofit/>
-          </a:bodyPr>
-          <a:lstStyle/>
-          <a:p>
-            <a:pPr indent="0" marL="0">
-              <a:buNone/>
-            </a:pPr>
-            <a:r>
-              <a:rPr lang="en-US" sz="1150" dirty="0">
-                <a:solidFill>
-                  <a:srgbClr val="212121"/>
-                </a:solidFill>
-                <a:latin typeface="Calibri" pitchFamily="34" charset="0"/>
-                <a:ea typeface="Calibri" pitchFamily="34" charset="-122"/>
-                <a:cs typeface="Calibri" pitchFamily="34" charset="-120"/>
-              </a:rPr>
-              <a:t>Log selected tool, arguments, approval, result status, and caller</a:t>
-            </a:r>
-            <a:endParaRPr lang="en-US" sz="1150" dirty="0"/>
-          </a:p>
-        </p:txBody>
-      </p:sp>
-      <p:sp>
-        <p:nvSpPr>
-          <p:cNvPr id="17" name="Shape 15"/>
-          <p:cNvSpPr/>
-          <p:nvPr/>
-        </p:nvSpPr>
-        <p:spPr>
-          <a:xfrm>
-            <a:off x="365760" y="4773168"/>
-            <a:ext cx="8412480" cy="0"/>
-          </a:xfrm>
-          <a:prstGeom prst="line">
-            <a:avLst/>
-          </a:prstGeom>
-          <a:noFill/>
-          <a:ln w="6350">
-            <a:solidFill>
-              <a:srgbClr val="D1D5DB"/>
-            </a:solidFill>
-            <a:prstDash val="solid"/>
-          </a:ln>
-        </p:spPr>
-      </p:sp>
-      <p:sp>
-        <p:nvSpPr>
-          <p:cNvPr id="18" name="Text 16"/>
-          <p:cNvSpPr/>
-          <p:nvPr/>
-        </p:nvSpPr>
-        <p:spPr>
-          <a:xfrm>
-            <a:off x="384048" y="4818888"/>
-            <a:ext cx="8275320" cy="182880"/>
-          </a:xfrm>
-          <a:prstGeom prst="rect">
-            <a:avLst/>
-          </a:prstGeom>
-          <a:noFill/>
-          <a:ln/>
-        </p:spPr>
-        <p:txBody>
-          <a:bodyPr wrap="square" lIns="0" tIns="0" rIns="0" bIns="0" rtlCol="0" anchor="ctr">
-            <a:normAutofit/>
-          </a:bodyPr>
-          <a:lstStyle/>
-          <a:p>
-            <a:pPr indent="0" marL="0">
-              <a:buNone/>
-            </a:pPr>
-            <a:r>
-              <a:rPr lang="en-US" sz="820" dirty="0">
-                <a:solidFill>
-                  <a:srgbClr val="6B7280"/>
-                </a:solidFill>
-                <a:latin typeface="Calibri" pitchFamily="34" charset="0"/>
-                <a:ea typeface="Calibri" pitchFamily="34" charset="-122"/>
-                <a:cs typeface="Calibri" pitchFamily="34" charset="-120"/>
-              </a:rPr>
-              <a:t>Source: https://learn.microsoft.com/en-us/agent-framework/agents/tools/local-mcp-tools?tabs=python</a:t>
             </a:r>
             <a:endParaRPr lang="en-US" sz="820" dirty="0"/>
           </a:p>

--- a/decks/day3/module-5-mcp.pptx
+++ b/decks/day3/module-5-mcp.pptx
@@ -8775,17 +8775,14 @@
             <a:r>
               <a:rPr lang="en-US" sz="1280" dirty="0">
                 <a:solidFill>
-                  <a:srgbClr val="212121"/>
+                  <a:srgbClr val="1E2761"/>
                 </a:solidFill>
                 <a:latin typeface="Consolas" pitchFamily="34" charset="0"/>
                 <a:ea typeface="Consolas" pitchFamily="34" charset="-122"/>
                 <a:cs typeface="Consolas" pitchFamily="34" charset="-120"/>
               </a:rPr>
-              <a:t>async with MCPStdioTool(</a:t>
-            </a:r>
-            <a:endParaRPr lang="en-US" sz="1280" dirty="0"/>
-          </a:p>
-          <a:p>
+              <a:t>async</a:t>
+            </a:r>
             <a:pPr indent="0" marL="0">
               <a:buNone/>
             </a:pPr>
@@ -8798,28 +8795,22 @@
                 <a:ea typeface="Consolas" pitchFamily="34" charset="-122"/>
                 <a:cs typeface="Consolas" pitchFamily="34" charset="-120"/>
               </a:rPr>
-              <a:t>    name="calculator",</a:t>
-            </a:r>
-            <a:endParaRPr lang="en-US" sz="1280" dirty="0"/>
-          </a:p>
-          <a:p>
+              <a:t> </a:t>
+            </a:r>
             <a:pPr indent="0" marL="0">
               <a:buNone/>
             </a:pPr>
             <a:r>
               <a:rPr lang="en-US" sz="1280" dirty="0">
                 <a:solidFill>
-                  <a:srgbClr val="212121"/>
+                  <a:srgbClr val="1E2761"/>
                 </a:solidFill>
                 <a:latin typeface="Consolas" pitchFamily="34" charset="0"/>
                 <a:ea typeface="Consolas" pitchFamily="34" charset="-122"/>
                 <a:cs typeface="Consolas" pitchFamily="34" charset="-120"/>
               </a:rPr>
-              <a:t>    command="uvx",</a:t>
-            </a:r>
-            <a:endParaRPr lang="en-US" sz="1280" dirty="0"/>
-          </a:p>
-          <a:p>
+              <a:t>with</a:t>
+            </a:r>
             <a:pPr indent="0" marL="0">
               <a:buNone/>
             </a:pPr>
@@ -8832,7 +8823,7 @@
                 <a:ea typeface="Consolas" pitchFamily="34" charset="-122"/>
                 <a:cs typeface="Consolas" pitchFamily="34" charset="-120"/>
               </a:rPr>
-              <a:t>    args=["mcp-server-calculator"],</a:t>
+              <a:t> MCPStdioTool(</a:t>
             </a:r>
             <a:endParaRPr lang="en-US" sz="1280" dirty="0"/>
           </a:p>
@@ -8849,7 +8840,7 @@
                 <a:ea typeface="Consolas" pitchFamily="34" charset="-122"/>
                 <a:cs typeface="Consolas" pitchFamily="34" charset="-120"/>
               </a:rPr>
-              <a:t>) as mcp:</a:t>
+              <a:t>    name=</a:t>
             </a:r>
             <a:endParaRPr lang="en-US" sz="1280" dirty="0"/>
           </a:p>
@@ -8860,17 +8851,14 @@
             <a:r>
               <a:rPr lang="en-US" sz="1280" dirty="0">
                 <a:solidFill>
-                  <a:srgbClr val="212121"/>
+                  <a:srgbClr val="1F7A4D"/>
                 </a:solidFill>
                 <a:latin typeface="Consolas" pitchFamily="34" charset="0"/>
                 <a:ea typeface="Consolas" pitchFamily="34" charset="-122"/>
                 <a:cs typeface="Consolas" pitchFamily="34" charset="-120"/>
               </a:rPr>
-              <a:t>    result = await agent.run(</a:t>
-            </a:r>
-            <a:endParaRPr lang="en-US" sz="1280" dirty="0"/>
-          </a:p>
-          <a:p>
+              <a:t>"calculator"</a:t>
+            </a:r>
             <a:pPr indent="0" marL="0">
               <a:buNone/>
             </a:pPr>
@@ -8883,7 +8871,247 @@
                 <a:ea typeface="Consolas" pitchFamily="34" charset="-122"/>
                 <a:cs typeface="Consolas" pitchFamily="34" charset="-120"/>
               </a:rPr>
-              <a:t>        "Calculate the total.",</a:t>
+              <a:t>,</a:t>
+            </a:r>
+            <a:endParaRPr lang="en-US" sz="1280" dirty="0"/>
+          </a:p>
+          <a:p>
+            <a:pPr indent="0" marL="0">
+              <a:buNone/>
+            </a:pPr>
+            <a:r>
+              <a:rPr lang="en-US" sz="1280" dirty="0">
+                <a:solidFill>
+                  <a:srgbClr val="212121"/>
+                </a:solidFill>
+                <a:latin typeface="Consolas" pitchFamily="34" charset="0"/>
+                <a:ea typeface="Consolas" pitchFamily="34" charset="-122"/>
+                <a:cs typeface="Consolas" pitchFamily="34" charset="-120"/>
+              </a:rPr>
+              <a:t>    command=</a:t>
+            </a:r>
+            <a:endParaRPr lang="en-US" sz="1280" dirty="0"/>
+          </a:p>
+          <a:p>
+            <a:pPr indent="0" marL="0">
+              <a:buNone/>
+            </a:pPr>
+            <a:r>
+              <a:rPr lang="en-US" sz="1280" dirty="0">
+                <a:solidFill>
+                  <a:srgbClr val="1F7A4D"/>
+                </a:solidFill>
+                <a:latin typeface="Consolas" pitchFamily="34" charset="0"/>
+                <a:ea typeface="Consolas" pitchFamily="34" charset="-122"/>
+                <a:cs typeface="Consolas" pitchFamily="34" charset="-120"/>
+              </a:rPr>
+              <a:t>"uvx"</a:t>
+            </a:r>
+            <a:pPr indent="0" marL="0">
+              <a:buNone/>
+            </a:pPr>
+            <a:r>
+              <a:rPr lang="en-US" sz="1280" dirty="0">
+                <a:solidFill>
+                  <a:srgbClr val="212121"/>
+                </a:solidFill>
+                <a:latin typeface="Consolas" pitchFamily="34" charset="0"/>
+                <a:ea typeface="Consolas" pitchFamily="34" charset="-122"/>
+                <a:cs typeface="Consolas" pitchFamily="34" charset="-120"/>
+              </a:rPr>
+              <a:t>,</a:t>
+            </a:r>
+            <a:endParaRPr lang="en-US" sz="1280" dirty="0"/>
+          </a:p>
+          <a:p>
+            <a:pPr indent="0" marL="0">
+              <a:buNone/>
+            </a:pPr>
+            <a:r>
+              <a:rPr lang="en-US" sz="1280" dirty="0">
+                <a:solidFill>
+                  <a:srgbClr val="212121"/>
+                </a:solidFill>
+                <a:latin typeface="Consolas" pitchFamily="34" charset="0"/>
+                <a:ea typeface="Consolas" pitchFamily="34" charset="-122"/>
+                <a:cs typeface="Consolas" pitchFamily="34" charset="-120"/>
+              </a:rPr>
+              <a:t>    args=[</a:t>
+            </a:r>
+            <a:endParaRPr lang="en-US" sz="1280" dirty="0"/>
+          </a:p>
+          <a:p>
+            <a:pPr indent="0" marL="0">
+              <a:buNone/>
+            </a:pPr>
+            <a:r>
+              <a:rPr lang="en-US" sz="1280" dirty="0">
+                <a:solidFill>
+                  <a:srgbClr val="1F7A4D"/>
+                </a:solidFill>
+                <a:latin typeface="Consolas" pitchFamily="34" charset="0"/>
+                <a:ea typeface="Consolas" pitchFamily="34" charset="-122"/>
+                <a:cs typeface="Consolas" pitchFamily="34" charset="-120"/>
+              </a:rPr>
+              <a:t>"mcp-server-calculator"</a:t>
+            </a:r>
+            <a:pPr indent="0" marL="0">
+              <a:buNone/>
+            </a:pPr>
+            <a:r>
+              <a:rPr lang="en-US" sz="1280" dirty="0">
+                <a:solidFill>
+                  <a:srgbClr val="212121"/>
+                </a:solidFill>
+                <a:latin typeface="Consolas" pitchFamily="34" charset="0"/>
+                <a:ea typeface="Consolas" pitchFamily="34" charset="-122"/>
+                <a:cs typeface="Consolas" pitchFamily="34" charset="-120"/>
+              </a:rPr>
+              <a:t>],</a:t>
+            </a:r>
+            <a:endParaRPr lang="en-US" sz="1280" dirty="0"/>
+          </a:p>
+          <a:p>
+            <a:pPr indent="0" marL="0">
+              <a:buNone/>
+            </a:pPr>
+            <a:r>
+              <a:rPr lang="en-US" sz="1280" dirty="0">
+                <a:solidFill>
+                  <a:srgbClr val="212121"/>
+                </a:solidFill>
+                <a:latin typeface="Consolas" pitchFamily="34" charset="0"/>
+                <a:ea typeface="Consolas" pitchFamily="34" charset="-122"/>
+                <a:cs typeface="Consolas" pitchFamily="34" charset="-120"/>
+              </a:rPr>
+              <a:t>) </a:t>
+            </a:r>
+            <a:endParaRPr lang="en-US" sz="1280" dirty="0"/>
+          </a:p>
+          <a:p>
+            <a:pPr indent="0" marL="0">
+              <a:buNone/>
+            </a:pPr>
+            <a:r>
+              <a:rPr lang="en-US" sz="1280" dirty="0">
+                <a:solidFill>
+                  <a:srgbClr val="1E2761"/>
+                </a:solidFill>
+                <a:latin typeface="Consolas" pitchFamily="34" charset="0"/>
+                <a:ea typeface="Consolas" pitchFamily="34" charset="-122"/>
+                <a:cs typeface="Consolas" pitchFamily="34" charset="-120"/>
+              </a:rPr>
+              <a:t>as</a:t>
+            </a:r>
+            <a:pPr indent="0" marL="0">
+              <a:buNone/>
+            </a:pPr>
+            <a:r>
+              <a:rPr lang="en-US" sz="1280" dirty="0">
+                <a:solidFill>
+                  <a:srgbClr val="212121"/>
+                </a:solidFill>
+                <a:latin typeface="Consolas" pitchFamily="34" charset="0"/>
+                <a:ea typeface="Consolas" pitchFamily="34" charset="-122"/>
+                <a:cs typeface="Consolas" pitchFamily="34" charset="-120"/>
+              </a:rPr>
+              <a:t> mcp:</a:t>
+            </a:r>
+            <a:endParaRPr lang="en-US" sz="1280" dirty="0"/>
+          </a:p>
+          <a:p>
+            <a:pPr indent="0" marL="0">
+              <a:buNone/>
+            </a:pPr>
+            <a:r>
+              <a:rPr lang="en-US" sz="1280" dirty="0">
+                <a:solidFill>
+                  <a:srgbClr val="212121"/>
+                </a:solidFill>
+                <a:latin typeface="Consolas" pitchFamily="34" charset="0"/>
+                <a:ea typeface="Consolas" pitchFamily="34" charset="-122"/>
+                <a:cs typeface="Consolas" pitchFamily="34" charset="-120"/>
+              </a:rPr>
+              <a:t>    result = </a:t>
+            </a:r>
+            <a:endParaRPr lang="en-US" sz="1280" dirty="0"/>
+          </a:p>
+          <a:p>
+            <a:pPr indent="0" marL="0">
+              <a:buNone/>
+            </a:pPr>
+            <a:r>
+              <a:rPr lang="en-US" sz="1280" dirty="0">
+                <a:solidFill>
+                  <a:srgbClr val="1E2761"/>
+                </a:solidFill>
+                <a:latin typeface="Consolas" pitchFamily="34" charset="0"/>
+                <a:ea typeface="Consolas" pitchFamily="34" charset="-122"/>
+                <a:cs typeface="Consolas" pitchFamily="34" charset="-120"/>
+              </a:rPr>
+              <a:t>await</a:t>
+            </a:r>
+            <a:pPr indent="0" marL="0">
+              <a:buNone/>
+            </a:pPr>
+            <a:r>
+              <a:rPr lang="en-US" sz="1280" dirty="0">
+                <a:solidFill>
+                  <a:srgbClr val="212121"/>
+                </a:solidFill>
+                <a:latin typeface="Consolas" pitchFamily="34" charset="0"/>
+                <a:ea typeface="Consolas" pitchFamily="34" charset="-122"/>
+                <a:cs typeface="Consolas" pitchFamily="34" charset="-120"/>
+              </a:rPr>
+              <a:t> agent.run(</a:t>
+            </a:r>
+            <a:endParaRPr lang="en-US" sz="1280" dirty="0"/>
+          </a:p>
+          <a:p>
+            <a:pPr indent="0" marL="0">
+              <a:buNone/>
+            </a:pPr>
+            <a:r>
+              <a:rPr lang="en-US" sz="1280" dirty="0">
+                <a:solidFill>
+                  <a:srgbClr val="212121"/>
+                </a:solidFill>
+                <a:latin typeface="Consolas" pitchFamily="34" charset="0"/>
+                <a:ea typeface="Consolas" pitchFamily="34" charset="-122"/>
+                <a:cs typeface="Consolas" pitchFamily="34" charset="-120"/>
+              </a:rPr>
+              <a:t>        </a:t>
+            </a:r>
+            <a:endParaRPr lang="en-US" sz="1280" dirty="0"/>
+          </a:p>
+          <a:p>
+            <a:pPr indent="0" marL="0">
+              <a:buNone/>
+            </a:pPr>
+            <a:r>
+              <a:rPr lang="en-US" sz="1280" dirty="0">
+                <a:solidFill>
+                  <a:srgbClr val="1F7A4D"/>
+                </a:solidFill>
+                <a:latin typeface="Consolas" pitchFamily="34" charset="0"/>
+                <a:ea typeface="Consolas" pitchFamily="34" charset="-122"/>
+                <a:cs typeface="Consolas" pitchFamily="34" charset="-120"/>
+              </a:rPr>
+              <a:t>"Calculate the total."</a:t>
+            </a:r>
+            <a:pPr indent="0" marL="0">
+              <a:buNone/>
+            </a:pPr>
+            <a:r>
+              <a:rPr lang="en-US" sz="1280" dirty="0">
+                <a:solidFill>
+                  <a:srgbClr val="212121"/>
+                </a:solidFill>
+                <a:latin typeface="Consolas" pitchFamily="34" charset="0"/>
+                <a:ea typeface="Consolas" pitchFamily="34" charset="-122"/>
+                <a:cs typeface="Consolas" pitchFamily="34" charset="-120"/>
+              </a:rPr>
+              <a:t>,</a:t>
             </a:r>
             <a:endParaRPr lang="en-US" sz="1280" dirty="0"/>
           </a:p>
@@ -9526,17 +9754,14 @@
             <a:r>
               <a:rPr lang="en-US" sz="1280" dirty="0">
                 <a:solidFill>
-                  <a:srgbClr val="212121"/>
+                  <a:srgbClr val="1E2761"/>
                 </a:solidFill>
                 <a:latin typeface="Consolas" pitchFamily="34" charset="0"/>
                 <a:ea typeface="Consolas" pitchFamily="34" charset="-122"/>
                 <a:cs typeface="Consolas" pitchFamily="34" charset="-120"/>
               </a:rPr>
-              <a:t>async with MCPStreamableHTTPTool(</a:t>
-            </a:r>
-            <a:endParaRPr lang="en-US" sz="1280" dirty="0"/>
-          </a:p>
-          <a:p>
+              <a:t>async</a:t>
+            </a:r>
             <a:pPr indent="0" marL="0">
               <a:buNone/>
             </a:pPr>
@@ -9549,28 +9774,22 @@
                 <a:ea typeface="Consolas" pitchFamily="34" charset="-122"/>
                 <a:cs typeface="Consolas" pitchFamily="34" charset="-120"/>
               </a:rPr>
-              <a:t>    name="docs",</a:t>
-            </a:r>
-            <a:endParaRPr lang="en-US" sz="1280" dirty="0"/>
-          </a:p>
-          <a:p>
+              <a:t> </a:t>
+            </a:r>
             <a:pPr indent="0" marL="0">
               <a:buNone/>
             </a:pPr>
             <a:r>
               <a:rPr lang="en-US" sz="1280" dirty="0">
                 <a:solidFill>
-                  <a:srgbClr val="212121"/>
+                  <a:srgbClr val="1E2761"/>
                 </a:solidFill>
                 <a:latin typeface="Consolas" pitchFamily="34" charset="0"/>
                 <a:ea typeface="Consolas" pitchFamily="34" charset="-122"/>
                 <a:cs typeface="Consolas" pitchFamily="34" charset="-120"/>
               </a:rPr>
-              <a:t>    url="https://learn.microsoft.com/api/mcp",</a:t>
-            </a:r>
-            <a:endParaRPr lang="en-US" sz="1280" dirty="0"/>
-          </a:p>
-          <a:p>
+              <a:t>with</a:t>
+            </a:r>
             <a:pPr indent="0" marL="0">
               <a:buNone/>
             </a:pPr>
@@ -9583,7 +9802,7 @@
                 <a:ea typeface="Consolas" pitchFamily="34" charset="-122"/>
                 <a:cs typeface="Consolas" pitchFamily="34" charset="-120"/>
               </a:rPr>
-              <a:t>    allowed_tools=["microsoft_docs_search"],</a:t>
+              <a:t> MCPStreamableHTTPTool(</a:t>
             </a:r>
             <a:endParaRPr lang="en-US" sz="1280" dirty="0"/>
           </a:p>
@@ -9600,7 +9819,7 @@
                 <a:ea typeface="Consolas" pitchFamily="34" charset="-122"/>
                 <a:cs typeface="Consolas" pitchFamily="34" charset="-120"/>
               </a:rPr>
-              <a:t>) as mcp:</a:t>
+              <a:t>    name=</a:t>
             </a:r>
             <a:endParaRPr lang="en-US" sz="1280" dirty="0"/>
           </a:p>
@@ -9611,17 +9830,14 @@
             <a:r>
               <a:rPr lang="en-US" sz="1280" dirty="0">
                 <a:solidFill>
-                  <a:srgbClr val="212121"/>
+                  <a:srgbClr val="1F7A4D"/>
                 </a:solidFill>
                 <a:latin typeface="Consolas" pitchFamily="34" charset="0"/>
                 <a:ea typeface="Consolas" pitchFamily="34" charset="-122"/>
                 <a:cs typeface="Consolas" pitchFamily="34" charset="-120"/>
               </a:rPr>
-              <a:t>    result = await agent.run(</a:t>
-            </a:r>
-            <a:endParaRPr lang="en-US" sz="1280" dirty="0"/>
-          </a:p>
-          <a:p>
+              <a:t>"docs"</a:t>
+            </a:r>
             <a:pPr indent="0" marL="0">
               <a:buNone/>
             </a:pPr>
@@ -9634,7 +9850,247 @@
                 <a:ea typeface="Consolas" pitchFamily="34" charset="-122"/>
                 <a:cs typeface="Consolas" pitchFamily="34" charset="-120"/>
               </a:rPr>
-              <a:t>        "Find the current guidance.",</a:t>
+              <a:t>,</a:t>
+            </a:r>
+            <a:endParaRPr lang="en-US" sz="1280" dirty="0"/>
+          </a:p>
+          <a:p>
+            <a:pPr indent="0" marL="0">
+              <a:buNone/>
+            </a:pPr>
+            <a:r>
+              <a:rPr lang="en-US" sz="1280" dirty="0">
+                <a:solidFill>
+                  <a:srgbClr val="212121"/>
+                </a:solidFill>
+                <a:latin typeface="Consolas" pitchFamily="34" charset="0"/>
+                <a:ea typeface="Consolas" pitchFamily="34" charset="-122"/>
+                <a:cs typeface="Consolas" pitchFamily="34" charset="-120"/>
+              </a:rPr>
+              <a:t>    url=</a:t>
+            </a:r>
+            <a:endParaRPr lang="en-US" sz="1280" dirty="0"/>
+          </a:p>
+          <a:p>
+            <a:pPr indent="0" marL="0">
+              <a:buNone/>
+            </a:pPr>
+            <a:r>
+              <a:rPr lang="en-US" sz="1280" dirty="0">
+                <a:solidFill>
+                  <a:srgbClr val="1F7A4D"/>
+                </a:solidFill>
+                <a:latin typeface="Consolas" pitchFamily="34" charset="0"/>
+                <a:ea typeface="Consolas" pitchFamily="34" charset="-122"/>
+                <a:cs typeface="Consolas" pitchFamily="34" charset="-120"/>
+              </a:rPr>
+              <a:t>"https://learn.microsoft.com/api/mcp"</a:t>
+            </a:r>
+            <a:pPr indent="0" marL="0">
+              <a:buNone/>
+            </a:pPr>
+            <a:r>
+              <a:rPr lang="en-US" sz="1280" dirty="0">
+                <a:solidFill>
+                  <a:srgbClr val="212121"/>
+                </a:solidFill>
+                <a:latin typeface="Consolas" pitchFamily="34" charset="0"/>
+                <a:ea typeface="Consolas" pitchFamily="34" charset="-122"/>
+                <a:cs typeface="Consolas" pitchFamily="34" charset="-120"/>
+              </a:rPr>
+              <a:t>,</a:t>
+            </a:r>
+            <a:endParaRPr lang="en-US" sz="1280" dirty="0"/>
+          </a:p>
+          <a:p>
+            <a:pPr indent="0" marL="0">
+              <a:buNone/>
+            </a:pPr>
+            <a:r>
+              <a:rPr lang="en-US" sz="1280" dirty="0">
+                <a:solidFill>
+                  <a:srgbClr val="212121"/>
+                </a:solidFill>
+                <a:latin typeface="Consolas" pitchFamily="34" charset="0"/>
+                <a:ea typeface="Consolas" pitchFamily="34" charset="-122"/>
+                <a:cs typeface="Consolas" pitchFamily="34" charset="-120"/>
+              </a:rPr>
+              <a:t>    allowed_tools=[</a:t>
+            </a:r>
+            <a:endParaRPr lang="en-US" sz="1280" dirty="0"/>
+          </a:p>
+          <a:p>
+            <a:pPr indent="0" marL="0">
+              <a:buNone/>
+            </a:pPr>
+            <a:r>
+              <a:rPr lang="en-US" sz="1280" dirty="0">
+                <a:solidFill>
+                  <a:srgbClr val="1F7A4D"/>
+                </a:solidFill>
+                <a:latin typeface="Consolas" pitchFamily="34" charset="0"/>
+                <a:ea typeface="Consolas" pitchFamily="34" charset="-122"/>
+                <a:cs typeface="Consolas" pitchFamily="34" charset="-120"/>
+              </a:rPr>
+              <a:t>"microsoft_docs_search"</a:t>
+            </a:r>
+            <a:pPr indent="0" marL="0">
+              <a:buNone/>
+            </a:pPr>
+            <a:r>
+              <a:rPr lang="en-US" sz="1280" dirty="0">
+                <a:solidFill>
+                  <a:srgbClr val="212121"/>
+                </a:solidFill>
+                <a:latin typeface="Consolas" pitchFamily="34" charset="0"/>
+                <a:ea typeface="Consolas" pitchFamily="34" charset="-122"/>
+                <a:cs typeface="Consolas" pitchFamily="34" charset="-120"/>
+              </a:rPr>
+              <a:t>],</a:t>
+            </a:r>
+            <a:endParaRPr lang="en-US" sz="1280" dirty="0"/>
+          </a:p>
+          <a:p>
+            <a:pPr indent="0" marL="0">
+              <a:buNone/>
+            </a:pPr>
+            <a:r>
+              <a:rPr lang="en-US" sz="1280" dirty="0">
+                <a:solidFill>
+                  <a:srgbClr val="212121"/>
+                </a:solidFill>
+                <a:latin typeface="Consolas" pitchFamily="34" charset="0"/>
+                <a:ea typeface="Consolas" pitchFamily="34" charset="-122"/>
+                <a:cs typeface="Consolas" pitchFamily="34" charset="-120"/>
+              </a:rPr>
+              <a:t>) </a:t>
+            </a:r>
+            <a:endParaRPr lang="en-US" sz="1280" dirty="0"/>
+          </a:p>
+          <a:p>
+            <a:pPr indent="0" marL="0">
+              <a:buNone/>
+            </a:pPr>
+            <a:r>
+              <a:rPr lang="en-US" sz="1280" dirty="0">
+                <a:solidFill>
+                  <a:srgbClr val="1E2761"/>
+                </a:solidFill>
+                <a:latin typeface="Consolas" pitchFamily="34" charset="0"/>
+                <a:ea typeface="Consolas" pitchFamily="34" charset="-122"/>
+                <a:cs typeface="Consolas" pitchFamily="34" charset="-120"/>
+              </a:rPr>
+              <a:t>as</a:t>
+            </a:r>
+            <a:pPr indent="0" marL="0">
+              <a:buNone/>
+            </a:pPr>
+            <a:r>
+              <a:rPr lang="en-US" sz="1280" dirty="0">
+                <a:solidFill>
+                  <a:srgbClr val="212121"/>
+                </a:solidFill>
+                <a:latin typeface="Consolas" pitchFamily="34" charset="0"/>
+                <a:ea typeface="Consolas" pitchFamily="34" charset="-122"/>
+                <a:cs typeface="Consolas" pitchFamily="34" charset="-120"/>
+              </a:rPr>
+              <a:t> mcp:</a:t>
+            </a:r>
+            <a:endParaRPr lang="en-US" sz="1280" dirty="0"/>
+          </a:p>
+          <a:p>
+            <a:pPr indent="0" marL="0">
+              <a:buNone/>
+            </a:pPr>
+            <a:r>
+              <a:rPr lang="en-US" sz="1280" dirty="0">
+                <a:solidFill>
+                  <a:srgbClr val="212121"/>
+                </a:solidFill>
+                <a:latin typeface="Consolas" pitchFamily="34" charset="0"/>
+                <a:ea typeface="Consolas" pitchFamily="34" charset="-122"/>
+                <a:cs typeface="Consolas" pitchFamily="34" charset="-120"/>
+              </a:rPr>
+              <a:t>    result = </a:t>
+            </a:r>
+            <a:endParaRPr lang="en-US" sz="1280" dirty="0"/>
+          </a:p>
+          <a:p>
+            <a:pPr indent="0" marL="0">
+              <a:buNone/>
+            </a:pPr>
+            <a:r>
+              <a:rPr lang="en-US" sz="1280" dirty="0">
+                <a:solidFill>
+                  <a:srgbClr val="1E2761"/>
+                </a:solidFill>
+                <a:latin typeface="Consolas" pitchFamily="34" charset="0"/>
+                <a:ea typeface="Consolas" pitchFamily="34" charset="-122"/>
+                <a:cs typeface="Consolas" pitchFamily="34" charset="-120"/>
+              </a:rPr>
+              <a:t>await</a:t>
+            </a:r>
+            <a:pPr indent="0" marL="0">
+              <a:buNone/>
+            </a:pPr>
+            <a:r>
+              <a:rPr lang="en-US" sz="1280" dirty="0">
+                <a:solidFill>
+                  <a:srgbClr val="212121"/>
+                </a:solidFill>
+                <a:latin typeface="Consolas" pitchFamily="34" charset="0"/>
+                <a:ea typeface="Consolas" pitchFamily="34" charset="-122"/>
+                <a:cs typeface="Consolas" pitchFamily="34" charset="-120"/>
+              </a:rPr>
+              <a:t> agent.run(</a:t>
+            </a:r>
+            <a:endParaRPr lang="en-US" sz="1280" dirty="0"/>
+          </a:p>
+          <a:p>
+            <a:pPr indent="0" marL="0">
+              <a:buNone/>
+            </a:pPr>
+            <a:r>
+              <a:rPr lang="en-US" sz="1280" dirty="0">
+                <a:solidFill>
+                  <a:srgbClr val="212121"/>
+                </a:solidFill>
+                <a:latin typeface="Consolas" pitchFamily="34" charset="0"/>
+                <a:ea typeface="Consolas" pitchFamily="34" charset="-122"/>
+                <a:cs typeface="Consolas" pitchFamily="34" charset="-120"/>
+              </a:rPr>
+              <a:t>        </a:t>
+            </a:r>
+            <a:endParaRPr lang="en-US" sz="1280" dirty="0"/>
+          </a:p>
+          <a:p>
+            <a:pPr indent="0" marL="0">
+              <a:buNone/>
+            </a:pPr>
+            <a:r>
+              <a:rPr lang="en-US" sz="1280" dirty="0">
+                <a:solidFill>
+                  <a:srgbClr val="1F7A4D"/>
+                </a:solidFill>
+                <a:latin typeface="Consolas" pitchFamily="34" charset="0"/>
+                <a:ea typeface="Consolas" pitchFamily="34" charset="-122"/>
+                <a:cs typeface="Consolas" pitchFamily="34" charset="-120"/>
+              </a:rPr>
+              <a:t>"Find the current guidance."</a:t>
+            </a:r>
+            <a:pPr indent="0" marL="0">
+              <a:buNone/>
+            </a:pPr>
+            <a:r>
+              <a:rPr lang="en-US" sz="1280" dirty="0">
+                <a:solidFill>
+                  <a:srgbClr val="212121"/>
+                </a:solidFill>
+                <a:latin typeface="Consolas" pitchFamily="34" charset="0"/>
+                <a:ea typeface="Consolas" pitchFamily="34" charset="-122"/>
+                <a:cs typeface="Consolas" pitchFamily="34" charset="-120"/>
+              </a:rPr>
+              <a:t>,</a:t>
             </a:r>
             <a:endParaRPr lang="en-US" sz="1280" dirty="0"/>
           </a:p>

--- a/decks/day3/module-5-mcp.pptx
+++ b/decks/day3/module-5-mcp.pptx
@@ -8738,11 +8738,11 @@
             <a:avLst/>
           </a:prstGeom>
           <a:solidFill>
-            <a:srgbClr val="F3F4F6"/>
+            <a:srgbClr val="1D1E22"/>
           </a:solidFill>
-          <a:ln w="6350">
+          <a:ln w="9525">
             <a:solidFill>
-              <a:srgbClr val="D1D5DB"/>
+              <a:srgbClr val="2A2B2E"/>
             </a:solidFill>
             <a:prstDash val="solid"/>
           </a:ln>
@@ -8775,7 +8775,7 @@
             <a:r>
               <a:rPr lang="en-US" sz="1280" dirty="0">
                 <a:solidFill>
-                  <a:srgbClr val="1E2761"/>
+                  <a:srgbClr val="A996B6"/>
                 </a:solidFill>
                 <a:latin typeface="Consolas" pitchFamily="34" charset="0"/>
                 <a:ea typeface="Consolas" pitchFamily="34" charset="-122"/>
@@ -8789,7 +8789,7 @@
             <a:r>
               <a:rPr lang="en-US" sz="1280" dirty="0">
                 <a:solidFill>
-                  <a:srgbClr val="212121"/>
+                  <a:srgbClr val="FFFFFF"/>
                 </a:solidFill>
                 <a:latin typeface="Consolas" pitchFamily="34" charset="0"/>
                 <a:ea typeface="Consolas" pitchFamily="34" charset="-122"/>
@@ -8803,7 +8803,7 @@
             <a:r>
               <a:rPr lang="en-US" sz="1280" dirty="0">
                 <a:solidFill>
-                  <a:srgbClr val="1E2761"/>
+                  <a:srgbClr val="A996B6"/>
                 </a:solidFill>
                 <a:latin typeface="Consolas" pitchFamily="34" charset="0"/>
                 <a:ea typeface="Consolas" pitchFamily="34" charset="-122"/>
@@ -8817,7 +8817,7 @@
             <a:r>
               <a:rPr lang="en-US" sz="1280" dirty="0">
                 <a:solidFill>
-                  <a:srgbClr val="212121"/>
+                  <a:srgbClr val="FFFFFF"/>
                 </a:solidFill>
                 <a:latin typeface="Consolas" pitchFamily="34" charset="0"/>
                 <a:ea typeface="Consolas" pitchFamily="34" charset="-122"/>
@@ -8834,7 +8834,7 @@
             <a:r>
               <a:rPr lang="en-US" sz="1280" dirty="0">
                 <a:solidFill>
-                  <a:srgbClr val="212121"/>
+                  <a:srgbClr val="FFFFFF"/>
                 </a:solidFill>
                 <a:latin typeface="Consolas" pitchFamily="34" charset="0"/>
                 <a:ea typeface="Consolas" pitchFamily="34" charset="-122"/>
@@ -8851,7 +8851,7 @@
             <a:r>
               <a:rPr lang="en-US" sz="1280" dirty="0">
                 <a:solidFill>
-                  <a:srgbClr val="1F7A4D"/>
+                  <a:srgbClr val="E4C98A"/>
                 </a:solidFill>
                 <a:latin typeface="Consolas" pitchFamily="34" charset="0"/>
                 <a:ea typeface="Consolas" pitchFamily="34" charset="-122"/>
@@ -8865,7 +8865,7 @@
             <a:r>
               <a:rPr lang="en-US" sz="1280" dirty="0">
                 <a:solidFill>
-                  <a:srgbClr val="212121"/>
+                  <a:srgbClr val="FFFFFF"/>
                 </a:solidFill>
                 <a:latin typeface="Consolas" pitchFamily="34" charset="0"/>
                 <a:ea typeface="Consolas" pitchFamily="34" charset="-122"/>
@@ -8882,7 +8882,7 @@
             <a:r>
               <a:rPr lang="en-US" sz="1280" dirty="0">
                 <a:solidFill>
-                  <a:srgbClr val="212121"/>
+                  <a:srgbClr val="FFFFFF"/>
                 </a:solidFill>
                 <a:latin typeface="Consolas" pitchFamily="34" charset="0"/>
                 <a:ea typeface="Consolas" pitchFamily="34" charset="-122"/>
@@ -8899,7 +8899,7 @@
             <a:r>
               <a:rPr lang="en-US" sz="1280" dirty="0">
                 <a:solidFill>
-                  <a:srgbClr val="1F7A4D"/>
+                  <a:srgbClr val="E4C98A"/>
                 </a:solidFill>
                 <a:latin typeface="Consolas" pitchFamily="34" charset="0"/>
                 <a:ea typeface="Consolas" pitchFamily="34" charset="-122"/>
@@ -8913,7 +8913,7 @@
             <a:r>
               <a:rPr lang="en-US" sz="1280" dirty="0">
                 <a:solidFill>
-                  <a:srgbClr val="212121"/>
+                  <a:srgbClr val="FFFFFF"/>
                 </a:solidFill>
                 <a:latin typeface="Consolas" pitchFamily="34" charset="0"/>
                 <a:ea typeface="Consolas" pitchFamily="34" charset="-122"/>
@@ -8930,7 +8930,7 @@
             <a:r>
               <a:rPr lang="en-US" sz="1280" dirty="0">
                 <a:solidFill>
-                  <a:srgbClr val="212121"/>
+                  <a:srgbClr val="FFFFFF"/>
                 </a:solidFill>
                 <a:latin typeface="Consolas" pitchFamily="34" charset="0"/>
                 <a:ea typeface="Consolas" pitchFamily="34" charset="-122"/>
@@ -8947,7 +8947,7 @@
             <a:r>
               <a:rPr lang="en-US" sz="1280" dirty="0">
                 <a:solidFill>
-                  <a:srgbClr val="1F7A4D"/>
+                  <a:srgbClr val="E4C98A"/>
                 </a:solidFill>
                 <a:latin typeface="Consolas" pitchFamily="34" charset="0"/>
                 <a:ea typeface="Consolas" pitchFamily="34" charset="-122"/>
@@ -8961,7 +8961,7 @@
             <a:r>
               <a:rPr lang="en-US" sz="1280" dirty="0">
                 <a:solidFill>
-                  <a:srgbClr val="212121"/>
+                  <a:srgbClr val="FFFFFF"/>
                 </a:solidFill>
                 <a:latin typeface="Consolas" pitchFamily="34" charset="0"/>
                 <a:ea typeface="Consolas" pitchFamily="34" charset="-122"/>
@@ -8978,7 +8978,7 @@
             <a:r>
               <a:rPr lang="en-US" sz="1280" dirty="0">
                 <a:solidFill>
-                  <a:srgbClr val="212121"/>
+                  <a:srgbClr val="FFFFFF"/>
                 </a:solidFill>
                 <a:latin typeface="Consolas" pitchFamily="34" charset="0"/>
                 <a:ea typeface="Consolas" pitchFamily="34" charset="-122"/>
@@ -8995,7 +8995,7 @@
             <a:r>
               <a:rPr lang="en-US" sz="1280" dirty="0">
                 <a:solidFill>
-                  <a:srgbClr val="1E2761"/>
+                  <a:srgbClr val="A996B6"/>
                 </a:solidFill>
                 <a:latin typeface="Consolas" pitchFamily="34" charset="0"/>
                 <a:ea typeface="Consolas" pitchFamily="34" charset="-122"/>
@@ -9009,7 +9009,7 @@
             <a:r>
               <a:rPr lang="en-US" sz="1280" dirty="0">
                 <a:solidFill>
-                  <a:srgbClr val="212121"/>
+                  <a:srgbClr val="FFFFFF"/>
                 </a:solidFill>
                 <a:latin typeface="Consolas" pitchFamily="34" charset="0"/>
                 <a:ea typeface="Consolas" pitchFamily="34" charset="-122"/>
@@ -9026,7 +9026,7 @@
             <a:r>
               <a:rPr lang="en-US" sz="1280" dirty="0">
                 <a:solidFill>
-                  <a:srgbClr val="212121"/>
+                  <a:srgbClr val="FFFFFF"/>
                 </a:solidFill>
                 <a:latin typeface="Consolas" pitchFamily="34" charset="0"/>
                 <a:ea typeface="Consolas" pitchFamily="34" charset="-122"/>
@@ -9043,7 +9043,7 @@
             <a:r>
               <a:rPr lang="en-US" sz="1280" dirty="0">
                 <a:solidFill>
-                  <a:srgbClr val="1E2761"/>
+                  <a:srgbClr val="A996B6"/>
                 </a:solidFill>
                 <a:latin typeface="Consolas" pitchFamily="34" charset="0"/>
                 <a:ea typeface="Consolas" pitchFamily="34" charset="-122"/>
@@ -9057,7 +9057,7 @@
             <a:r>
               <a:rPr lang="en-US" sz="1280" dirty="0">
                 <a:solidFill>
-                  <a:srgbClr val="212121"/>
+                  <a:srgbClr val="FFFFFF"/>
                 </a:solidFill>
                 <a:latin typeface="Consolas" pitchFamily="34" charset="0"/>
                 <a:ea typeface="Consolas" pitchFamily="34" charset="-122"/>
@@ -9074,7 +9074,7 @@
             <a:r>
               <a:rPr lang="en-US" sz="1280" dirty="0">
                 <a:solidFill>
-                  <a:srgbClr val="212121"/>
+                  <a:srgbClr val="FFFFFF"/>
                 </a:solidFill>
                 <a:latin typeface="Consolas" pitchFamily="34" charset="0"/>
                 <a:ea typeface="Consolas" pitchFamily="34" charset="-122"/>
@@ -9091,7 +9091,7 @@
             <a:r>
               <a:rPr lang="en-US" sz="1280" dirty="0">
                 <a:solidFill>
-                  <a:srgbClr val="1F7A4D"/>
+                  <a:srgbClr val="E4C98A"/>
                 </a:solidFill>
                 <a:latin typeface="Consolas" pitchFamily="34" charset="0"/>
                 <a:ea typeface="Consolas" pitchFamily="34" charset="-122"/>
@@ -9105,7 +9105,7 @@
             <a:r>
               <a:rPr lang="en-US" sz="1280" dirty="0">
                 <a:solidFill>
-                  <a:srgbClr val="212121"/>
+                  <a:srgbClr val="FFFFFF"/>
                 </a:solidFill>
                 <a:latin typeface="Consolas" pitchFamily="34" charset="0"/>
                 <a:ea typeface="Consolas" pitchFamily="34" charset="-122"/>
@@ -9122,7 +9122,7 @@
             <a:r>
               <a:rPr lang="en-US" sz="1280" dirty="0">
                 <a:solidFill>
-                  <a:srgbClr val="212121"/>
+                  <a:srgbClr val="FFFFFF"/>
                 </a:solidFill>
                 <a:latin typeface="Consolas" pitchFamily="34" charset="0"/>
                 <a:ea typeface="Consolas" pitchFamily="34" charset="-122"/>
@@ -9139,7 +9139,7 @@
             <a:r>
               <a:rPr lang="en-US" sz="1280" dirty="0">
                 <a:solidFill>
-                  <a:srgbClr val="212121"/>
+                  <a:srgbClr val="FFFFFF"/>
                 </a:solidFill>
                 <a:latin typeface="Consolas" pitchFamily="34" charset="0"/>
                 <a:ea typeface="Consolas" pitchFamily="34" charset="-122"/>
@@ -9717,11 +9717,11 @@
             <a:avLst/>
           </a:prstGeom>
           <a:solidFill>
-            <a:srgbClr val="F3F4F6"/>
+            <a:srgbClr val="1D1E22"/>
           </a:solidFill>
-          <a:ln w="6350">
+          <a:ln w="9525">
             <a:solidFill>
-              <a:srgbClr val="D1D5DB"/>
+              <a:srgbClr val="2A2B2E"/>
             </a:solidFill>
             <a:prstDash val="solid"/>
           </a:ln>
@@ -9754,7 +9754,7 @@
             <a:r>
               <a:rPr lang="en-US" sz="1280" dirty="0">
                 <a:solidFill>
-                  <a:srgbClr val="1E2761"/>
+                  <a:srgbClr val="A996B6"/>
                 </a:solidFill>
                 <a:latin typeface="Consolas" pitchFamily="34" charset="0"/>
                 <a:ea typeface="Consolas" pitchFamily="34" charset="-122"/>
@@ -9768,7 +9768,7 @@
             <a:r>
               <a:rPr lang="en-US" sz="1280" dirty="0">
                 <a:solidFill>
-                  <a:srgbClr val="212121"/>
+                  <a:srgbClr val="FFFFFF"/>
                 </a:solidFill>
                 <a:latin typeface="Consolas" pitchFamily="34" charset="0"/>
                 <a:ea typeface="Consolas" pitchFamily="34" charset="-122"/>
@@ -9782,7 +9782,7 @@
             <a:r>
               <a:rPr lang="en-US" sz="1280" dirty="0">
                 <a:solidFill>
-                  <a:srgbClr val="1E2761"/>
+                  <a:srgbClr val="A996B6"/>
                 </a:solidFill>
                 <a:latin typeface="Consolas" pitchFamily="34" charset="0"/>
                 <a:ea typeface="Consolas" pitchFamily="34" charset="-122"/>
@@ -9796,7 +9796,7 @@
             <a:r>
               <a:rPr lang="en-US" sz="1280" dirty="0">
                 <a:solidFill>
-                  <a:srgbClr val="212121"/>
+                  <a:srgbClr val="FFFFFF"/>
                 </a:solidFill>
                 <a:latin typeface="Consolas" pitchFamily="34" charset="0"/>
                 <a:ea typeface="Consolas" pitchFamily="34" charset="-122"/>
@@ -9813,7 +9813,7 @@
             <a:r>
               <a:rPr lang="en-US" sz="1280" dirty="0">
                 <a:solidFill>
-                  <a:srgbClr val="212121"/>
+                  <a:srgbClr val="FFFFFF"/>
                 </a:solidFill>
                 <a:latin typeface="Consolas" pitchFamily="34" charset="0"/>
                 <a:ea typeface="Consolas" pitchFamily="34" charset="-122"/>
@@ -9830,7 +9830,7 @@
             <a:r>
               <a:rPr lang="en-US" sz="1280" dirty="0">
                 <a:solidFill>
-                  <a:srgbClr val="1F7A4D"/>
+                  <a:srgbClr val="E4C98A"/>
                 </a:solidFill>
                 <a:latin typeface="Consolas" pitchFamily="34" charset="0"/>
                 <a:ea typeface="Consolas" pitchFamily="34" charset="-122"/>
@@ -9844,7 +9844,7 @@
             <a:r>
               <a:rPr lang="en-US" sz="1280" dirty="0">
                 <a:solidFill>
-                  <a:srgbClr val="212121"/>
+                  <a:srgbClr val="FFFFFF"/>
                 </a:solidFill>
                 <a:latin typeface="Consolas" pitchFamily="34" charset="0"/>
                 <a:ea typeface="Consolas" pitchFamily="34" charset="-122"/>
@@ -9861,7 +9861,7 @@
             <a:r>
               <a:rPr lang="en-US" sz="1280" dirty="0">
                 <a:solidFill>
-                  <a:srgbClr val="212121"/>
+                  <a:srgbClr val="FFFFFF"/>
                 </a:solidFill>
                 <a:latin typeface="Consolas" pitchFamily="34" charset="0"/>
                 <a:ea typeface="Consolas" pitchFamily="34" charset="-122"/>
@@ -9878,7 +9878,7 @@
             <a:r>
               <a:rPr lang="en-US" sz="1280" dirty="0">
                 <a:solidFill>
-                  <a:srgbClr val="1F7A4D"/>
+                  <a:srgbClr val="E4C98A"/>
                 </a:solidFill>
                 <a:latin typeface="Consolas" pitchFamily="34" charset="0"/>
                 <a:ea typeface="Consolas" pitchFamily="34" charset="-122"/>
@@ -9892,7 +9892,7 @@
             <a:r>
               <a:rPr lang="en-US" sz="1280" dirty="0">
                 <a:solidFill>
-                  <a:srgbClr val="212121"/>
+                  <a:srgbClr val="FFFFFF"/>
                 </a:solidFill>
                 <a:latin typeface="Consolas" pitchFamily="34" charset="0"/>
                 <a:ea typeface="Consolas" pitchFamily="34" charset="-122"/>
@@ -9909,7 +9909,7 @@
             <a:r>
               <a:rPr lang="en-US" sz="1280" dirty="0">
                 <a:solidFill>
-                  <a:srgbClr val="212121"/>
+                  <a:srgbClr val="FFFFFF"/>
                 </a:solidFill>
                 <a:latin typeface="Consolas" pitchFamily="34" charset="0"/>
                 <a:ea typeface="Consolas" pitchFamily="34" charset="-122"/>
@@ -9926,7 +9926,7 @@
             <a:r>
               <a:rPr lang="en-US" sz="1280" dirty="0">
                 <a:solidFill>
-                  <a:srgbClr val="1F7A4D"/>
+                  <a:srgbClr val="E4C98A"/>
                 </a:solidFill>
                 <a:latin typeface="Consolas" pitchFamily="34" charset="0"/>
                 <a:ea typeface="Consolas" pitchFamily="34" charset="-122"/>
@@ -9940,7 +9940,7 @@
             <a:r>
               <a:rPr lang="en-US" sz="1280" dirty="0">
                 <a:solidFill>
-                  <a:srgbClr val="212121"/>
+                  <a:srgbClr val="FFFFFF"/>
                 </a:solidFill>
                 <a:latin typeface="Consolas" pitchFamily="34" charset="0"/>
                 <a:ea typeface="Consolas" pitchFamily="34" charset="-122"/>
@@ -9957,7 +9957,7 @@
             <a:r>
               <a:rPr lang="en-US" sz="1280" dirty="0">
                 <a:solidFill>
-                  <a:srgbClr val="212121"/>
+                  <a:srgbClr val="FFFFFF"/>
                 </a:solidFill>
                 <a:latin typeface="Consolas" pitchFamily="34" charset="0"/>
                 <a:ea typeface="Consolas" pitchFamily="34" charset="-122"/>
@@ -9974,7 +9974,7 @@
             <a:r>
               <a:rPr lang="en-US" sz="1280" dirty="0">
                 <a:solidFill>
-                  <a:srgbClr val="1E2761"/>
+                  <a:srgbClr val="A996B6"/>
                 </a:solidFill>
                 <a:latin typeface="Consolas" pitchFamily="34" charset="0"/>
                 <a:ea typeface="Consolas" pitchFamily="34" charset="-122"/>
@@ -9988,7 +9988,7 @@
             <a:r>
               <a:rPr lang="en-US" sz="1280" dirty="0">
                 <a:solidFill>
-                  <a:srgbClr val="212121"/>
+                  <a:srgbClr val="FFFFFF"/>
                 </a:solidFill>
                 <a:latin typeface="Consolas" pitchFamily="34" charset="0"/>
                 <a:ea typeface="Consolas" pitchFamily="34" charset="-122"/>
@@ -10005,7 +10005,7 @@
             <a:r>
               <a:rPr lang="en-US" sz="1280" dirty="0">
                 <a:solidFill>
-                  <a:srgbClr val="212121"/>
+                  <a:srgbClr val="FFFFFF"/>
                 </a:solidFill>
                 <a:latin typeface="Consolas" pitchFamily="34" charset="0"/>
                 <a:ea typeface="Consolas" pitchFamily="34" charset="-122"/>
@@ -10022,7 +10022,7 @@
             <a:r>
               <a:rPr lang="en-US" sz="1280" dirty="0">
                 <a:solidFill>
-                  <a:srgbClr val="1E2761"/>
+                  <a:srgbClr val="A996B6"/>
                 </a:solidFill>
                 <a:latin typeface="Consolas" pitchFamily="34" charset="0"/>
                 <a:ea typeface="Consolas" pitchFamily="34" charset="-122"/>
@@ -10036,7 +10036,7 @@
             <a:r>
               <a:rPr lang="en-US" sz="1280" dirty="0">
                 <a:solidFill>
-                  <a:srgbClr val="212121"/>
+                  <a:srgbClr val="FFFFFF"/>
                 </a:solidFill>
                 <a:latin typeface="Consolas" pitchFamily="34" charset="0"/>
                 <a:ea typeface="Consolas" pitchFamily="34" charset="-122"/>
@@ -10053,7 +10053,7 @@
             <a:r>
               <a:rPr lang="en-US" sz="1280" dirty="0">
                 <a:solidFill>
-                  <a:srgbClr val="212121"/>
+                  <a:srgbClr val="FFFFFF"/>
                 </a:solidFill>
                 <a:latin typeface="Consolas" pitchFamily="34" charset="0"/>
                 <a:ea typeface="Consolas" pitchFamily="34" charset="-122"/>
@@ -10070,7 +10070,7 @@
             <a:r>
               <a:rPr lang="en-US" sz="1280" dirty="0">
                 <a:solidFill>
-                  <a:srgbClr val="1F7A4D"/>
+                  <a:srgbClr val="E4C98A"/>
                 </a:solidFill>
                 <a:latin typeface="Consolas" pitchFamily="34" charset="0"/>
                 <a:ea typeface="Consolas" pitchFamily="34" charset="-122"/>
@@ -10084,7 +10084,7 @@
             <a:r>
               <a:rPr lang="en-US" sz="1280" dirty="0">
                 <a:solidFill>
-                  <a:srgbClr val="212121"/>
+                  <a:srgbClr val="FFFFFF"/>
                 </a:solidFill>
                 <a:latin typeface="Consolas" pitchFamily="34" charset="0"/>
                 <a:ea typeface="Consolas" pitchFamily="34" charset="-122"/>
@@ -10101,7 +10101,7 @@
             <a:r>
               <a:rPr lang="en-US" sz="1280" dirty="0">
                 <a:solidFill>
-                  <a:srgbClr val="212121"/>
+                  <a:srgbClr val="FFFFFF"/>
                 </a:solidFill>
                 <a:latin typeface="Consolas" pitchFamily="34" charset="0"/>
                 <a:ea typeface="Consolas" pitchFamily="34" charset="-122"/>
@@ -10118,7 +10118,7 @@
             <a:r>
               <a:rPr lang="en-US" sz="1280" dirty="0">
                 <a:solidFill>
-                  <a:srgbClr val="212121"/>
+                  <a:srgbClr val="FFFFFF"/>
                 </a:solidFill>
                 <a:latin typeface="Consolas" pitchFamily="34" charset="0"/>
                 <a:ea typeface="Consolas" pitchFamily="34" charset="-122"/>

--- a/decks/day3/module-5-mcp.pptx
+++ b/decks/day3/module-5-mcp.pptx
@@ -19,9 +19,11 @@
     <p:sldId id="267" r:id="rId13"/>
     <p:sldId id="268" r:id="rId14"/>
     <p:sldId id="269" r:id="rId15"/>
+    <p:sldId id="270" r:id="rId16"/>
+    <p:sldId id="271" r:id="rId17"/>
   </p:sldIdLst>
   <p:notesMasterIdLst>
-    <p:notesMasterId r:id="rId16"/>
+    <p:notesMasterId r:id="rId18"/>
   </p:notesMasterIdLst>
   <p:sldSz cx="9144000" cy="5143500"/>
   <p:notesSz cx="5143500" cy="9144000"/>
@@ -604,9 +606,8 @@
           <a:p>
             <a:r>
               <a:rPr lang="en-US" dirty="0"/>
-              <a:t>• Placeholder marker slide — the runbook has full narration, setup, and fallback plan. Adapts the approval pause/resume mechanic from function_tool_with_approval.py onto an MCP tool's approval_mode constructor option; no MCP-specific approval sample exists in the repo yet, so the API reference is the primary grounding source for the MCP-side wiring.
-• GROUNDING SOURCE: https://learn.microsoft.com/en-us/python/api/agent-framework-core/agent_framework.mcpstreamablehttptool?view=agent-framework-python-latest
-• GROUNDING SOURCE: https://github.com/microsoft/agent-framework/blob/main/python/samples/02-agents/tools/function_tool_with_approval.py</a:t>
+              <a:t>• During a tool call, header_provider receives function_invocation_kwargs. Ambient requests such as initialization, discovery, and pings receive an empty dictionary. Therefore connection-time auth cannot depend only on a per-run value.
+• GROUNDING SOURCE: https://learn.microsoft.com/en-us/agent-framework/agents/tools/local-mcp-tools?tabs=python</a:t>
             </a:r>
             <a:endParaRPr lang="en-US" dirty="0"/>
           </a:p>
@@ -694,8 +695,9 @@
           <a:p>
             <a:r>
               <a:rPr lang="en-US" dirty="0"/>
-              <a:t>• Treat remote tool descriptions, annotations, and results as untrusted input. Review the operator, data sharing, retention, costs, and permissions. Prefer first-party hosted servers over proxies when available.
-• GROUNDING SOURCE: https://learn.microsoft.com/en-us/agent-framework/agents/tools/local-mcp-tools?tabs=python</a:t>
+              <a:t>• allowed_tools is a documented MCP constructor option. Progressive exposure is a separate experimental Python function-loop feature, not an MCP transport feature. Use it only if you need staged discovery and accept its experimental status.
+• GROUNDING SOURCE: https://learn.microsoft.com/en-us/python/api/agent-framework-core/agent_framework.mcpstreamablehttptool?view=agent-framework-python-latest
+• GROUNDING SOURCE: https://learn.microsoft.com/en-us/agent-framework/agents/tools/controlling-tool-availability?tabs=python</a:t>
             </a:r>
             <a:endParaRPr lang="en-US" dirty="0"/>
           </a:p>
@@ -783,8 +785,9 @@
           <a:p>
             <a:r>
               <a:rPr lang="en-US" dirty="0"/>
-              <a:t>• Async context managers are not cosmetic. They close transports, sessions, and local child processes even when an exception occurs. Nest credential, MCP tool, and agent lifecycles deliberately.
-• GROUNDING SOURCE: https://learn.microsoft.com/en-us/agent-framework/agents/tools/local-mcp-tools?tabs=python</a:t>
+              <a:t>• approval_mode can require approval for all tools, waive it for all tools, or apply a per-tool mapping on the MCP tool. A run that needs approval returns a user-input request; the application displays the name and arguments and resumes with the decision.
+• GROUNDING SOURCE: https://learn.microsoft.com/en-us/python/api/agent-framework-core/agent_framework.mcpstreamablehttptool?view=agent-framework-python-latest
+• GROUNDING SOURCE: https://learn.microsoft.com/en-us/agent-framework/agents/tools/tool-approval?tabs=python</a:t>
             </a:r>
             <a:endParaRPr lang="en-US" dirty="0"/>
           </a:p>
@@ -872,8 +875,9 @@
           <a:p>
             <a:r>
               <a:rPr lang="en-US" dirty="0"/>
-              <a:t>• Choose remote when a trusted service hosts and updates the endpoint. Choose local when the server is local-only or the client cannot complete remote authentication. Local means you own package and process security.
-• GROUNDING SOURCE: https://learn.microsoft.com/en-us/agent-framework/agents/tools/local-mcp-tools?tabs=python</a:t>
+              <a:t>• Placeholder marker slide — the runbook has full narration, setup, and fallback plan. Adapts the approval pause/resume mechanic from function_tool_with_approval.py onto an MCP tool's approval_mode constructor option; no MCP-specific approval sample exists in the repo yet, so the API reference is the primary grounding source for the MCP-side wiring.
+• GROUNDING SOURCE: https://learn.microsoft.com/en-us/python/api/agent-framework-core/agent_framework.mcpstreamablehttptool?view=agent-framework-python-latest
+• GROUNDING SOURCE: https://github.com/microsoft/agent-framework/blob/main/python/samples/02-agents/tools/function_tool_with_approval.py</a:t>
             </a:r>
             <a:endParaRPr lang="en-US" dirty="0"/>
           </a:p>
@@ -961,7 +965,7 @@
           <a:p>
             <a:r>
               <a:rPr lang="en-US" dirty="0"/>
-              <a:t>• Transition to the official Azure DevOps remote server. It is a strong example of remote-first hosting, Entra authentication, server-side filtering, and distinct read/write tools.
+              <a:t>• Treat remote tool descriptions, annotations, and results as untrusted input. Review the operator, data sharing, retention, costs, and permissions. Prefer first-party hosted servers over proxies when available.
 • GROUNDING SOURCE: https://learn.microsoft.com/en-us/agent-framework/agents/tools/local-mcp-tools?tabs=python</a:t>
             </a:r>
             <a:endParaRPr lang="en-US" dirty="0"/>
@@ -986,6 +990,184 @@
             <a:fld id="{F7021451-1387-4CA6-816F-3879F97B5CBC}" type="slidenum">
               <a:rPr lang="en-US"/>
               <a:t>14</a:t>
+            </a:fld>
+            <a:endParaRPr lang="en-US"/>
+          </a:p>
+        </p:txBody>
+      </p:sp>
+    </p:spTree>
+    <p:extLst>
+      <p:ext uri="{BB962C8B-B14F-4D97-AF65-F5344CB8AC3E}">
+        <p14:creationId xmlns:p14="http://schemas.microsoft.com/office/powerpoint/2010/main" val="1024086991"/>
+      </p:ext>
+    </p:extLst>
+  </p:cSld>
+  <p:clrMapOvr>
+    <a:masterClrMapping/>
+  </p:clrMapOvr>
+</p:notes>
+</file>
+
+<file path=ppt/notesSlides/notesSlide15.xml><?xml version="1.0" encoding="utf-8"?>
+<p:notes xmlns:a="http://schemas.openxmlformats.org/drawingml/2006/main" xmlns:r="http://schemas.openxmlformats.org/officeDocument/2006/relationships" xmlns:p="http://schemas.openxmlformats.org/presentationml/2006/main">
+  <p:cSld>
+    <p:spTree>
+      <p:nvGrpSpPr>
+        <p:cNvPr id="1" name=""/>
+        <p:cNvGrpSpPr/>
+        <p:nvPr/>
+      </p:nvGrpSpPr>
+      <p:grpSpPr>
+        <a:xfrm>
+          <a:off x="0" y="0"/>
+          <a:ext cx="0" cy="0"/>
+          <a:chOff x="0" y="0"/>
+          <a:chExt cx="0" cy="0"/>
+        </a:xfrm>
+      </p:grpSpPr>
+      <p:sp>
+        <p:nvSpPr>
+          <p:cNvPr id="2" name="Slide Image Placeholder 1"/>
+          <p:cNvSpPr>
+            <a:spLocks noGrp="1" noRot="1" noChangeAspect="1"/>
+          </p:cNvSpPr>
+          <p:nvPr>
+            <p:ph type="sldImg"/>
+          </p:nvPr>
+        </p:nvSpPr>
+        <p:spPr/>
+      </p:sp>
+      <p:sp>
+        <p:nvSpPr>
+          <p:cNvPr id="3" name="Notes Placeholder 2"/>
+          <p:cNvSpPr>
+            <a:spLocks noGrp="1"/>
+          </p:cNvSpPr>
+          <p:nvPr>
+            <p:ph type="body" idx="1"/>
+          </p:nvPr>
+        </p:nvSpPr>
+        <p:spPr/>
+        <p:txBody>
+          <a:bodyPr/>
+          <a:lstStyle/>
+          <a:p>
+            <a:r>
+              <a:rPr lang="en-US" dirty="0"/>
+              <a:t>• Choose remote when a trusted service hosts and updates the endpoint. Choose local when the server is local-only or the client cannot complete remote authentication. Local means you own package and process security.
+• GROUNDING SOURCE: https://learn.microsoft.com/en-us/agent-framework/agents/tools/local-mcp-tools?tabs=python</a:t>
+            </a:r>
+            <a:endParaRPr lang="en-US" dirty="0"/>
+          </a:p>
+        </p:txBody>
+      </p:sp>
+      <p:sp>
+        <p:nvSpPr>
+          <p:cNvPr id="4" name="Slide Number Placeholder 3"/>
+          <p:cNvSpPr>
+            <a:spLocks noGrp="1"/>
+          </p:cNvSpPr>
+          <p:nvPr>
+            <p:ph type="sldNum" sz="quarter" idx="10"/>
+          </p:nvPr>
+        </p:nvSpPr>
+        <p:spPr/>
+        <p:txBody>
+          <a:bodyPr/>
+          <a:lstStyle/>
+          <a:p>
+            <a:fld id="{F7021451-1387-4CA6-816F-3879F97B5CBC}" type="slidenum">
+              <a:rPr lang="en-US"/>
+              <a:t>15</a:t>
+            </a:fld>
+            <a:endParaRPr lang="en-US"/>
+          </a:p>
+        </p:txBody>
+      </p:sp>
+    </p:spTree>
+    <p:extLst>
+      <p:ext uri="{BB962C8B-B14F-4D97-AF65-F5344CB8AC3E}">
+        <p14:creationId xmlns:p14="http://schemas.microsoft.com/office/powerpoint/2010/main" val="1024086991"/>
+      </p:ext>
+    </p:extLst>
+  </p:cSld>
+  <p:clrMapOvr>
+    <a:masterClrMapping/>
+  </p:clrMapOvr>
+</p:notes>
+</file>
+
+<file path=ppt/notesSlides/notesSlide16.xml><?xml version="1.0" encoding="utf-8"?>
+<p:notes xmlns:a="http://schemas.openxmlformats.org/drawingml/2006/main" xmlns:r="http://schemas.openxmlformats.org/officeDocument/2006/relationships" xmlns:p="http://schemas.openxmlformats.org/presentationml/2006/main">
+  <p:cSld>
+    <p:spTree>
+      <p:nvGrpSpPr>
+        <p:cNvPr id="1" name=""/>
+        <p:cNvGrpSpPr/>
+        <p:nvPr/>
+      </p:nvGrpSpPr>
+      <p:grpSpPr>
+        <a:xfrm>
+          <a:off x="0" y="0"/>
+          <a:ext cx="0" cy="0"/>
+          <a:chOff x="0" y="0"/>
+          <a:chExt cx="0" cy="0"/>
+        </a:xfrm>
+      </p:grpSpPr>
+      <p:sp>
+        <p:nvSpPr>
+          <p:cNvPr id="2" name="Slide Image Placeholder 1"/>
+          <p:cNvSpPr>
+            <a:spLocks noGrp="1" noRot="1" noChangeAspect="1"/>
+          </p:cNvSpPr>
+          <p:nvPr>
+            <p:ph type="sldImg"/>
+          </p:nvPr>
+        </p:nvSpPr>
+        <p:spPr/>
+      </p:sp>
+      <p:sp>
+        <p:nvSpPr>
+          <p:cNvPr id="3" name="Notes Placeholder 2"/>
+          <p:cNvSpPr>
+            <a:spLocks noGrp="1"/>
+          </p:cNvSpPr>
+          <p:nvPr>
+            <p:ph type="body" idx="1"/>
+          </p:nvPr>
+        </p:nvSpPr>
+        <p:spPr/>
+        <p:txBody>
+          <a:bodyPr/>
+          <a:lstStyle/>
+          <a:p>
+            <a:r>
+              <a:rPr lang="en-US" dirty="0"/>
+              <a:t>• Transition to the official Azure DevOps remote server. It is a strong example of remote-first hosting, Entra authentication, server-side filtering, and distinct read/write tools.
+• GROUNDING SOURCE: https://learn.microsoft.com/en-us/agent-framework/agents/tools/local-mcp-tools?tabs=python</a:t>
+            </a:r>
+            <a:endParaRPr lang="en-US" dirty="0"/>
+          </a:p>
+        </p:txBody>
+      </p:sp>
+      <p:sp>
+        <p:nvSpPr>
+          <p:cNvPr id="4" name="Slide Number Placeholder 3"/>
+          <p:cNvSpPr>
+            <a:spLocks noGrp="1"/>
+          </p:cNvSpPr>
+          <p:nvPr>
+            <p:ph type="sldNum" sz="quarter" idx="10"/>
+          </p:nvPr>
+        </p:nvSpPr>
+        <p:spPr/>
+        <p:txBody>
+          <a:bodyPr/>
+          <a:lstStyle/>
+          <a:p>
+            <a:fld id="{F7021451-1387-4CA6-816F-3879F97B5CBC}" type="slidenum">
+              <a:rPr lang="en-US"/>
+              <a:t>16</a:t>
             </a:fld>
             <a:endParaRPr lang="en-US"/>
           </a:p>
@@ -1050,8 +1232,11 @@
           <a:p>
             <a:r>
               <a:rPr lang="en-US" dirty="0"/>
-              <a:t>• The MAF MCP tool is the client. It connects, discovers server tools, converts them into agent-callable functions, invokes selected tools, and returns typed results to the agent loop.
-• GROUNDING SOURCE: https://learn.microsoft.com/en-us/agent-framework/agents/tools/local-mcp-tools?tabs=python</a:t>
+              <a:t>• Maps to the spec's "Base Protocol" section and its Utilities sub-pages (ping, cancellation, progress). All implementations MUST support Messages and Lifecycle; Authorization and the individual Utilities are optional. This is the layer MAF's MCP tools sit on top of — worth grounding once so later slides about tool calls make sense in context.
+• GROUNDING SOURCE: https://modelcontextprotocol.io/specification/2025-06-18/basic
+• GROUNDING SOURCE: https://modelcontextprotocol.io/specification/2025-06-18/basic/lifecycle
+• GROUNDING SOURCE: https://modelcontextprotocol.io/specification/2025-06-18/basic/transports
+• GROUNDING SOURCE: https://modelcontextprotocol.io/specification/2025-06-18/basic/authorization</a:t>
             </a:r>
             <a:endParaRPr lang="en-US" dirty="0"/>
           </a:p>
@@ -1139,8 +1324,10 @@
           <a:p>
             <a:r>
               <a:rPr lang="en-US" dirty="0"/>
-              <a:t>• These are the three documented Python classes. WebSocket support requires the mcp[ws] optional package. Transport choice follows the server; it is not an application preference you can swap unilaterally.
-• GROUNDING SOURCE: https://learn.microsoft.com/en-us/agent-framework/agents/tools/local-mcp-tools?tabs=python</a:t>
+              <a:t>• Maps to the spec's "Client Features" section. These are capabilities a client (the MAF MCP tool, in our case) may optionally offer back to servers — all three require the client to declare the matching capability during initialization, and all three keep a human in the loop by design (the spec is explicit about this for sampling and elicitation).
+• GROUNDING SOURCE: https://modelcontextprotocol.io/specification/2025-06-18/client/roots
+• GROUNDING SOURCE: https://modelcontextprotocol.io/specification/2025-06-18/client/sampling
+• GROUNDING SOURCE: https://modelcontextprotocol.io/specification/2025-06-18/client/elicitation</a:t>
             </a:r>
             <a:endParaRPr lang="en-US" dirty="0"/>
           </a:p>
@@ -1228,8 +1415,11 @@
           <a:p>
             <a:r>
               <a:rPr lang="en-US" dirty="0"/>
-              <a:t>• Use only commands and packages you have reviewed and pinned. The official pattern uses an async context manager so the local process and connection are closed.
-• GROUNDING SOURCE: https://learn.microsoft.com/en-us/agent-framework/agents/tools/local-mcp-tools?tabs=python</a:t>
+              <a:t>• Maps to the spec's "Server Features" section and its Utilities sub-pages (completion, logging, pagination). Tools is the one this module focuses on end to end; Resources and Prompts are the other two things a server can expose, each with a different user-interaction model (application-driven vs. user-invoked).
+• GROUNDING SOURCE: https://modelcontextprotocol.io/specification/2025-06-18/server/tools
+• GROUNDING SOURCE: https://modelcontextprotocol.io/specification/2025-06-18/server/resources
+• GROUNDING SOURCE: https://modelcontextprotocol.io/specification/2025-06-18/server/prompts
+• GROUNDING SOURCE: https://modelcontextprotocol.io/specification/2025-06-18/server/utilities/logging</a:t>
             </a:r>
             <a:endParaRPr lang="en-US" dirty="0"/>
           </a:p>
@@ -1317,8 +1507,8 @@
           <a:p>
             <a:r>
               <a:rPr lang="en-US" dirty="0"/>
-              <a:t>• Placeholder marker slide — the runbook has full narration, setup, and fallback plan. Runs the previous slide's exact MCPStdioTool + mcp-server-calculator pattern live; no matching sample file exists in the repo's 02-agents/mcp folder, so this demo is grounded directly in the Learn doc's own documented code.
-• GROUNDING SOURCE: https://learn.microsoft.com/en-us/agent-framework/agents/tools/local-mcp-tools?tabs=python</a:t>
+              <a:t>• This is the MCP specification's own sequence diagram for the tools message flow, reproduced verbatim (not redrawn) from the Tools page at modelcontextprotocol.io. The MAF MCP tool plays the "Client" role. Note this diagram starts at Discovery — the earlier connection-level handshake (capability negotiation) is defined separately on the spec's Lifecycle page and isn't shown here.
+• GROUNDING SOURCE: https://modelcontextprotocol.io/specification/2025-06-18/server/tools</a:t>
             </a:r>
             <a:endParaRPr lang="en-US" dirty="0"/>
           </a:p>
@@ -1406,9 +1596,8 @@
           <a:p>
             <a:r>
               <a:rPr lang="en-US" dirty="0"/>
-              <a:t>• The documented FoundryChatClient sample uses MCPStreamableHTTPTool for a remote endpoint. Do not put tokens in slide code or source control; use a provider that acquires or refreshes credentials.
-• GROUNDING SOURCE: https://learn.microsoft.com/en-us/agent-framework/agents/tools/local-mcp-tools?tabs=python
-• GROUNDING SOURCE: https://learn.microsoft.com/en-us/python/api/agent-framework-core/agent_framework.mcpstreamablehttptool?view=agent-framework-python-latest</a:t>
+              <a:t>• These are the three documented Python classes. WebSocket support requires the mcp[ws] optional package. Transport choice follows the server; it is not an application preference you can swap unilaterally.
+• GROUNDING SOURCE: https://learn.microsoft.com/en-us/agent-framework/agents/tools/local-mcp-tools?tabs=python</a:t>
             </a:r>
             <a:endParaRPr lang="en-US" dirty="0"/>
           </a:p>
@@ -1496,7 +1685,7 @@
           <a:p>
             <a:r>
               <a:rPr lang="en-US" dirty="0"/>
-              <a:t>• During a tool call, header_provider receives function_invocation_kwargs. Ambient requests such as initialization, discovery, and pings receive an empty dictionary. Therefore connection-time auth cannot depend only on a per-run value.
+              <a:t>• Use only commands and packages you have reviewed and pinned. The official pattern uses an async context manager so the local process and connection are closed.
 • GROUNDING SOURCE: https://learn.microsoft.com/en-us/agent-framework/agents/tools/local-mcp-tools?tabs=python</a:t>
             </a:r>
             <a:endParaRPr lang="en-US" dirty="0"/>
@@ -1585,9 +1774,8 @@
           <a:p>
             <a:r>
               <a:rPr lang="en-US" dirty="0"/>
-              <a:t>• allowed_tools is a documented MCP constructor option. Progressive exposure is a separate experimental Python function-loop feature, not an MCP transport feature. Use it only if you need staged discovery and accept its experimental status.
-• GROUNDING SOURCE: https://learn.microsoft.com/en-us/python/api/agent-framework-core/agent_framework.mcpstreamablehttptool?view=agent-framework-python-latest
-• GROUNDING SOURCE: https://learn.microsoft.com/en-us/agent-framework/agents/tools/controlling-tool-availability?tabs=python</a:t>
+              <a:t>• Placeholder marker slide — the runbook has full narration, setup, and fallback plan. Runs the previous slide's exact MCPStdioTool + mcp-server-calculator pattern live; no matching sample file exists in the repo's 02-agents/mcp folder, so this demo is grounded directly in the Learn doc's own documented code.
+• GROUNDING SOURCE: https://learn.microsoft.com/en-us/agent-framework/agents/tools/local-mcp-tools?tabs=python</a:t>
             </a:r>
             <a:endParaRPr lang="en-US" dirty="0"/>
           </a:p>
@@ -1675,9 +1863,9 @@
           <a:p>
             <a:r>
               <a:rPr lang="en-US" dirty="0"/>
-              <a:t>• approval_mode can require approval for all tools, waive it for all tools, or apply a per-tool mapping on the MCP tool. A run that needs approval returns a user-input request; the application displays the name and arguments and resumes with the decision.
-• GROUNDING SOURCE: https://learn.microsoft.com/en-us/python/api/agent-framework-core/agent_framework.mcpstreamablehttptool?view=agent-framework-python-latest
-• GROUNDING SOURCE: https://learn.microsoft.com/en-us/agent-framework/agents/tools/tool-approval?tabs=python</a:t>
+              <a:t>• The documented FoundryChatClient sample uses MCPStreamableHTTPTool for a remote endpoint. Do not put tokens in slide code or source control; use a provider that acquires or refreshes credentials.
+• GROUNDING SOURCE: https://learn.microsoft.com/en-us/agent-framework/agents/tools/local-mcp-tools?tabs=python
+• GROUNDING SOURCE: https://learn.microsoft.com/en-us/python/api/agent-framework-core/agent_framework.mcpstreamablehttptool?view=agent-framework-python-latest</a:t>
             </a:r>
             <a:endParaRPr lang="en-US" dirty="0"/>
           </a:p>
@@ -2284,7 +2472,7 @@
     <p:bg>
       <p:bgPr>
         <a:solidFill>
-          <a:srgbClr val="CADCFC"/>
+          <a:srgbClr val="FFFFFF"/>
         </a:solidFill>
       </p:bgPr>
     </p:bg>
@@ -2311,7 +2499,7 @@
         <p:spPr>
           <a:xfrm>
             <a:off x="0" y="0"/>
-            <a:ext cx="146304" cy="5143500"/>
+            <a:ext cx="54864" cy="5143500"/>
           </a:xfrm>
           <a:prstGeom prst="rect">
             <a:avLst/>
@@ -2330,8 +2518,8 @@
         </p:nvSpPr>
         <p:spPr>
           <a:xfrm>
-            <a:off x="5669280" y="274320"/>
-            <a:ext cx="3291840" cy="274320"/>
+            <a:off x="5486400" y="256032"/>
+            <a:ext cx="3337560" cy="228600"/>
           </a:xfrm>
           <a:prstGeom prst="rect">
             <a:avLst/>
@@ -2340,14 +2528,16 @@
           <a:ln/>
         </p:spPr>
         <p:txBody>
-          <a:bodyPr wrap="square" lIns="0" tIns="0" rIns="0" bIns="0" rtlCol="0" anchor="ctr"/>
+          <a:bodyPr wrap="square" lIns="0" tIns="0" rIns="0" bIns="0" rtlCol="0" anchor="ctr">
+            <a:normAutofit/>
+          </a:bodyPr>
           <a:lstStyle/>
           <a:p>
             <a:pPr algn="r" indent="0" marL="0">
               <a:buNone/>
             </a:pPr>
             <a:r>
-              <a:rPr lang="en-US" sz="1000" dirty="0">
+              <a:rPr lang="en-US" sz="950" dirty="0">
                 <a:solidFill>
                   <a:srgbClr val="6B7280"/>
                 </a:solidFill>
@@ -2355,9 +2545,9 @@
                 <a:ea typeface="Calibri" pitchFamily="34" charset="-122"/>
                 <a:cs typeface="Calibri" pitchFamily="34" charset="-120"/>
               </a:rPr>
-              <a:t>Day 3 · Module 5 · Demo</a:t>
-            </a:r>
-            <a:endParaRPr lang="en-US" sz="1000" dirty="0"/>
+              <a:t>Day 3 · Module 5</a:t>
+            </a:r>
+            <a:endParaRPr lang="en-US" sz="950" dirty="0"/>
           </a:p>
         </p:txBody>
       </p:sp>
@@ -2369,8 +2559,8 @@
         </p:nvSpPr>
         <p:spPr>
           <a:xfrm>
-            <a:off x="548640" y="1051560"/>
-            <a:ext cx="5486400" cy="502920"/>
+            <a:off x="365760" y="310896"/>
+            <a:ext cx="6583680" cy="603504"/>
           </a:xfrm>
           <a:prstGeom prst="rect">
             <a:avLst/>
@@ -2379,14 +2569,16 @@
           <a:ln/>
         </p:spPr>
         <p:txBody>
-          <a:bodyPr wrap="square" lIns="0" tIns="0" rIns="0" bIns="0" rtlCol="0" anchor="ctr"/>
-          <a:lstStyle/>
-          <a:p>
-            <a:pPr indent="0" marL="0">
-              <a:buNone/>
-            </a:pPr>
-            <a:r>
-              <a:rPr lang="en-US" sz="3200" b="1" spc="800" kern="0" dirty="0">
+          <a:bodyPr wrap="square" lIns="0" tIns="0" rIns="0" bIns="0" rtlCol="0" anchor="ctr">
+            <a:normAutofit/>
+          </a:bodyPr>
+          <a:lstStyle/>
+          <a:p>
+            <a:pPr indent="0" marL="0">
+              <a:buNone/>
+            </a:pPr>
+            <a:r>
+              <a:rPr lang="en-US" sz="2500" b="1" dirty="0">
                 <a:solidFill>
                   <a:srgbClr val="1E2761"/>
                 </a:solidFill>
@@ -2394,22 +2586,47 @@
                 <a:ea typeface="Calibri" pitchFamily="34" charset="-122"/>
                 <a:cs typeface="Calibri" pitchFamily="34" charset="-120"/>
               </a:rPr>
-              <a:t>DEMO</a:t>
-            </a:r>
-            <a:endParaRPr lang="en-US" sz="3200" dirty="0"/>
-          </a:p>
-        </p:txBody>
-      </p:sp>
-      <p:sp>
-        <p:nvSpPr>
-          <p:cNvPr id="5" name="Text 3"/>
-          <p:cNvSpPr/>
-          <p:nvPr/>
-        </p:nvSpPr>
-        <p:spPr>
-          <a:xfrm>
-            <a:off x="548640" y="1691640"/>
-            <a:ext cx="8046720" cy="914400"/>
+              <a:t>header_provider has two call shapes</a:t>
+            </a:r>
+            <a:endParaRPr lang="en-US" sz="2500" dirty="0"/>
+          </a:p>
+        </p:txBody>
+      </p:sp>
+      <p:sp>
+        <p:nvSpPr>
+          <p:cNvPr id="5" name="Shape 3"/>
+          <p:cNvSpPr/>
+          <p:nvPr/>
+        </p:nvSpPr>
+        <p:spPr>
+          <a:xfrm>
+            <a:off x="365760" y="1078992"/>
+            <a:ext cx="4114800" cy="3493008"/>
+          </a:xfrm>
+          <a:prstGeom prst="roundRect">
+            <a:avLst/>
+          </a:prstGeom>
+          <a:solidFill>
+            <a:srgbClr val="F3F4F6"/>
+          </a:solidFill>
+          <a:ln w="11430">
+            <a:solidFill>
+              <a:srgbClr val="D1D5DB"/>
+            </a:solidFill>
+            <a:prstDash val="solid"/>
+          </a:ln>
+        </p:spPr>
+      </p:sp>
+      <p:sp>
+        <p:nvSpPr>
+          <p:cNvPr id="6" name="Text 4"/>
+          <p:cNvSpPr/>
+          <p:nvPr/>
+        </p:nvSpPr>
+        <p:spPr>
+          <a:xfrm>
+            <a:off x="566928" y="1298448"/>
+            <a:ext cx="3712464" cy="411480"/>
           </a:xfrm>
           <a:prstGeom prst="rect">
             <a:avLst/>
@@ -2418,14 +2635,16 @@
           <a:ln/>
         </p:spPr>
         <p:txBody>
-          <a:bodyPr wrap="square" lIns="0" tIns="0" rIns="0" bIns="0" rtlCol="0" anchor="ctr"/>
-          <a:lstStyle/>
-          <a:p>
-            <a:pPr indent="0" marL="0">
-              <a:buNone/>
-            </a:pPr>
-            <a:r>
-              <a:rPr lang="en-US" sz="3000" b="1" dirty="0">
+          <a:bodyPr wrap="square" lIns="0" tIns="0" rIns="0" bIns="0" rtlCol="0" anchor="ctr">
+            <a:normAutofit/>
+          </a:bodyPr>
+          <a:lstStyle/>
+          <a:p>
+            <a:pPr indent="0" marL="0">
+              <a:buNone/>
+            </a:pPr>
+            <a:r>
+              <a:rPr lang="en-US" sz="2000" b="1" dirty="0">
                 <a:solidFill>
                   <a:srgbClr val="1E2761"/>
                 </a:solidFill>
@@ -2433,22 +2652,22 @@
                 <a:ea typeface="Calibri" pitchFamily="34" charset="-122"/>
                 <a:cs typeface="Calibri" pitchFamily="34" charset="-120"/>
               </a:rPr>
-              <a:t>approval_mode pauses a write tool for review</a:t>
-            </a:r>
-            <a:endParaRPr lang="en-US" sz="3000" dirty="0"/>
-          </a:p>
-        </p:txBody>
-      </p:sp>
-      <p:sp>
-        <p:nvSpPr>
-          <p:cNvPr id="6" name="Text 4"/>
-          <p:cNvSpPr/>
-          <p:nvPr/>
-        </p:nvSpPr>
-        <p:spPr>
-          <a:xfrm>
-            <a:off x="6583680" y="1051560"/>
-            <a:ext cx="2194560" cy="502920"/>
+              <a:t>Tool-call request</a:t>
+            </a:r>
+            <a:endParaRPr lang="en-US" sz="2000" dirty="0"/>
+          </a:p>
+        </p:txBody>
+      </p:sp>
+      <p:sp>
+        <p:nvSpPr>
+          <p:cNvPr id="7" name="Text 5"/>
+          <p:cNvSpPr/>
+          <p:nvPr/>
+        </p:nvSpPr>
+        <p:spPr>
+          <a:xfrm>
+            <a:off x="594360" y="1828800"/>
+            <a:ext cx="3639312" cy="2395728"/>
           </a:xfrm>
           <a:prstGeom prst="rect">
             <a:avLst/>
@@ -2457,56 +2676,35 @@
           <a:ln/>
         </p:spPr>
         <p:txBody>
-          <a:bodyPr wrap="square" lIns="0" tIns="0" rIns="0" bIns="0" rtlCol="0" anchor="ctr"/>
-          <a:lstStyle/>
-          <a:p>
-            <a:pPr algn="r" indent="0" marL="0">
-              <a:buNone/>
-            </a:pPr>
-            <a:r>
-              <a:rPr lang="en-US" sz="1800" i="1" dirty="0">
-                <a:solidFill>
-                  <a:srgbClr val="6B7280"/>
+          <a:bodyPr wrap="square" lIns="381" tIns="381" rIns="381" bIns="381" rtlCol="0" anchor="ctr">
+            <a:normAutofit/>
+          </a:bodyPr>
+          <a:lstStyle/>
+          <a:p>
+            <a:pPr marL="342900" indent="-342900">
+              <a:buSzPct val="100000"/>
+              <a:buChar char="•"/>
+            </a:pPr>
+            <a:r>
+              <a:rPr lang="en-US" sz="1300" dirty="0">
+                <a:solidFill>
+                  <a:srgbClr val="212121"/>
                 </a:solidFill>
                 <a:latin typeface="Calibri" pitchFamily="34" charset="0"/>
                 <a:ea typeface="Calibri" pitchFamily="34" charset="-122"/>
                 <a:cs typeface="Calibri" pitchFamily="34" charset="-120"/>
               </a:rPr>
-              <a:t>~5 min</a:t>
-            </a:r>
-            <a:endParaRPr lang="en-US" sz="1800" dirty="0"/>
-          </a:p>
-        </p:txBody>
-      </p:sp>
-      <p:sp>
-        <p:nvSpPr>
-          <p:cNvPr id="7" name="Text 5"/>
-          <p:cNvSpPr/>
-          <p:nvPr/>
-        </p:nvSpPr>
-        <p:spPr>
-          <a:xfrm>
-            <a:off x="548640" y="2788920"/>
-            <a:ext cx="8046720" cy="1371600"/>
-          </a:xfrm>
-          <a:prstGeom prst="rect">
-            <a:avLst/>
-          </a:prstGeom>
-          <a:noFill/>
-          <a:ln/>
-        </p:spPr>
-        <p:txBody>
-          <a:bodyPr wrap="square" lIns="0" tIns="0" rIns="0" bIns="0" rtlCol="0" anchor="ctr"/>
-          <a:lstStyle/>
-          <a:p>
-            <a:pPr indent="0" marL="0">
-              <a:spcAft>
-                <a:spcPts val="600"/>
-              </a:spcAft>
-              <a:buNone/>
-            </a:pPr>
-            <a:r>
-              <a:rPr lang="en-US" sz="1600" dirty="0">
+              <a:t>Receives function_invocation_kwargs</a:t>
+            </a:r>
+            <a:endParaRPr lang="en-US" sz="1300" dirty="0"/>
+          </a:p>
+          <a:p>
+            <a:pPr marL="342900" indent="-342900">
+              <a:buSzPct val="100000"/>
+              <a:buChar char="•"/>
+            </a:pPr>
+            <a:r>
+              <a:rPr lang="en-US" sz="1300" dirty="0">
                 <a:solidFill>
                   <a:srgbClr val="212121"/>
                 </a:solidFill>
@@ -2514,54 +2712,177 @@
                 <a:ea typeface="Calibri" pitchFamily="34" charset="-122"/>
                 <a:cs typeface="Calibri" pitchFamily="34" charset="-120"/>
               </a:rPr>
-              <a:t>Set approval_mode="always_require" on the MCP tool and run a request that needs it: the run pauses with a user-input request naming the tool and arguments, and only resumes after an explicit approval decision — the same pause/resume mechanic the official function-tool sample demonstrates, wired onto an MCP tool.</a:t>
-            </a:r>
-            <a:endParaRPr lang="en-US" sz="1600" dirty="0"/>
-          </a:p>
-        </p:txBody>
-      </p:sp>
-      <p:sp>
-        <p:nvSpPr>
-          <p:cNvPr id="8" name="Text 6"/>
-          <p:cNvSpPr/>
-          <p:nvPr/>
-        </p:nvSpPr>
-        <p:spPr>
-          <a:xfrm>
-            <a:off x="548640" y="4434840"/>
-            <a:ext cx="8046720" cy="320040"/>
-          </a:xfrm>
-          <a:prstGeom prst="rect">
-            <a:avLst/>
-          </a:prstGeom>
-          <a:noFill/>
-          <a:ln/>
-        </p:spPr>
-        <p:txBody>
-          <a:bodyPr wrap="square" lIns="0" tIns="0" rIns="0" bIns="0" rtlCol="0" anchor="ctr"/>
-          <a:lstStyle/>
-          <a:p>
-            <a:pPr indent="0" marL="0">
-              <a:buNone/>
-            </a:pPr>
-            <a:r>
-              <a:rPr lang="en-US" sz="1100" i="1" dirty="0">
-                <a:solidFill>
-                  <a:srgbClr val="6B7280"/>
+              <a:t>Can derive request-scoped headers</a:t>
+            </a:r>
+            <a:endParaRPr lang="en-US" sz="1300" dirty="0"/>
+          </a:p>
+          <a:p>
+            <a:pPr marL="342900" indent="-342900">
+              <a:buSzPct val="100000"/>
+              <a:buChar char="•"/>
+            </a:pPr>
+            <a:r>
+              <a:rPr lang="en-US" sz="1300" dirty="0">
+                <a:solidFill>
+                  <a:srgbClr val="212121"/>
                 </a:solidFill>
                 <a:latin typeface="Calibri" pitchFamily="34" charset="0"/>
                 <a:ea typeface="Calibri" pitchFamily="34" charset="-122"/>
                 <a:cs typeface="Calibri" pitchFamily="34" charset="-120"/>
               </a:rPr>
-              <a:t>Runbook: demos/day3/module-5-demo-2-approval-mode.md</a:t>
-            </a:r>
-            <a:endParaRPr lang="en-US" sz="1100" dirty="0"/>
-          </a:p>
-        </p:txBody>
-      </p:sp>
-      <p:sp>
-        <p:nvSpPr>
-          <p:cNvPr id="9" name="Shape 7"/>
+              <a:t>Keep secrets outside model-visible arguments</a:t>
+            </a:r>
+            <a:endParaRPr lang="en-US" sz="1300" dirty="0"/>
+          </a:p>
+        </p:txBody>
+      </p:sp>
+      <p:sp>
+        <p:nvSpPr>
+          <p:cNvPr id="8" name="Shape 6"/>
+          <p:cNvSpPr/>
+          <p:nvPr/>
+        </p:nvSpPr>
+        <p:spPr>
+          <a:xfrm>
+            <a:off x="4663440" y="1078992"/>
+            <a:ext cx="4114800" cy="3493008"/>
+          </a:xfrm>
+          <a:prstGeom prst="roundRect">
+            <a:avLst/>
+          </a:prstGeom>
+          <a:solidFill>
+            <a:srgbClr val="CADCFC"/>
+          </a:solidFill>
+          <a:ln w="11430">
+            <a:solidFill>
+              <a:srgbClr val="1E2761"/>
+            </a:solidFill>
+            <a:prstDash val="solid"/>
+          </a:ln>
+        </p:spPr>
+      </p:sp>
+      <p:sp>
+        <p:nvSpPr>
+          <p:cNvPr id="9" name="Text 7"/>
+          <p:cNvSpPr/>
+          <p:nvPr/>
+        </p:nvSpPr>
+        <p:spPr>
+          <a:xfrm>
+            <a:off x="4864608" y="1298448"/>
+            <a:ext cx="3712464" cy="411480"/>
+          </a:xfrm>
+          <a:prstGeom prst="rect">
+            <a:avLst/>
+          </a:prstGeom>
+          <a:noFill/>
+          <a:ln/>
+        </p:spPr>
+        <p:txBody>
+          <a:bodyPr wrap="square" lIns="0" tIns="0" rIns="0" bIns="0" rtlCol="0" anchor="ctr">
+            <a:normAutofit/>
+          </a:bodyPr>
+          <a:lstStyle/>
+          <a:p>
+            <a:pPr indent="0" marL="0">
+              <a:buNone/>
+            </a:pPr>
+            <a:r>
+              <a:rPr lang="en-US" sz="2000" b="1" dirty="0">
+                <a:solidFill>
+                  <a:srgbClr val="1E2761"/>
+                </a:solidFill>
+                <a:latin typeface="Calibri" pitchFamily="34" charset="0"/>
+                <a:ea typeface="Calibri" pitchFamily="34" charset="-122"/>
+                <a:cs typeface="Calibri" pitchFamily="34" charset="-120"/>
+              </a:rPr>
+              <a:t>Ambient request</a:t>
+            </a:r>
+            <a:endParaRPr lang="en-US" sz="2000" dirty="0"/>
+          </a:p>
+        </p:txBody>
+      </p:sp>
+      <p:sp>
+        <p:nvSpPr>
+          <p:cNvPr id="10" name="Text 8"/>
+          <p:cNvSpPr/>
+          <p:nvPr/>
+        </p:nvSpPr>
+        <p:spPr>
+          <a:xfrm>
+            <a:off x="4892040" y="1828800"/>
+            <a:ext cx="3639312" cy="2395728"/>
+          </a:xfrm>
+          <a:prstGeom prst="rect">
+            <a:avLst/>
+          </a:prstGeom>
+          <a:noFill/>
+          <a:ln/>
+        </p:spPr>
+        <p:txBody>
+          <a:bodyPr wrap="square" lIns="381" tIns="381" rIns="381" bIns="381" rtlCol="0" anchor="ctr">
+            <a:normAutofit/>
+          </a:bodyPr>
+          <a:lstStyle/>
+          <a:p>
+            <a:pPr marL="342900" indent="-342900">
+              <a:buSzPct val="100000"/>
+              <a:buChar char="•"/>
+            </a:pPr>
+            <a:r>
+              <a:rPr lang="en-US" sz="1300" dirty="0">
+                <a:solidFill>
+                  <a:srgbClr val="212121"/>
+                </a:solidFill>
+                <a:latin typeface="Calibri" pitchFamily="34" charset="0"/>
+                <a:ea typeface="Calibri" pitchFamily="34" charset="-122"/>
+                <a:cs typeface="Calibri" pitchFamily="34" charset="-120"/>
+              </a:rPr>
+              <a:t>Receives {}</a:t>
+            </a:r>
+            <a:endParaRPr lang="en-US" sz="1300" dirty="0"/>
+          </a:p>
+          <a:p>
+            <a:pPr marL="342900" indent="-342900">
+              <a:buSzPct val="100000"/>
+              <a:buChar char="•"/>
+            </a:pPr>
+            <a:r>
+              <a:rPr lang="en-US" sz="1300" dirty="0">
+                <a:solidFill>
+                  <a:srgbClr val="212121"/>
+                </a:solidFill>
+                <a:latin typeface="Calibri" pitchFamily="34" charset="0"/>
+                <a:ea typeface="Calibri" pitchFamily="34" charset="-122"/>
+                <a:cs typeface="Calibri" pitchFamily="34" charset="-120"/>
+              </a:rPr>
+              <a:t>Includes initialization, discovery, and pings</a:t>
+            </a:r>
+            <a:endParaRPr lang="en-US" sz="1300" dirty="0"/>
+          </a:p>
+          <a:p>
+            <a:pPr marL="342900" indent="-342900">
+              <a:buSzPct val="100000"/>
+              <a:buChar char="•"/>
+            </a:pPr>
+            <a:r>
+              <a:rPr lang="en-US" sz="1300" dirty="0">
+                <a:solidFill>
+                  <a:srgbClr val="212121"/>
+                </a:solidFill>
+                <a:latin typeface="Calibri" pitchFamily="34" charset="0"/>
+                <a:ea typeface="Calibri" pitchFamily="34" charset="-122"/>
+                <a:cs typeface="Calibri" pitchFamily="34" charset="-120"/>
+              </a:rPr>
+              <a:t>Provider must still acquire required connection auth</a:t>
+            </a:r>
+            <a:endParaRPr lang="en-US" sz="1300" dirty="0"/>
+          </a:p>
+        </p:txBody>
+      </p:sp>
+      <p:sp>
+        <p:nvSpPr>
+          <p:cNvPr id="11" name="Shape 9"/>
           <p:cNvSpPr/>
           <p:nvPr/>
         </p:nvSpPr>
@@ -2584,7 +2905,7 @@
       </p:sp>
       <p:sp>
         <p:nvSpPr>
-          <p:cNvPr id="10" name="Text 8"/>
+          <p:cNvPr id="12" name="Text 10"/>
           <p:cNvSpPr/>
           <p:nvPr/>
         </p:nvSpPr>
@@ -2617,7 +2938,7 @@
                 <a:ea typeface="Calibri" pitchFamily="34" charset="-122"/>
                 <a:cs typeface="Calibri" pitchFamily="34" charset="-120"/>
               </a:rPr>
-              <a:t>Source: https://learn.microsoft.com/en-us/python/api/agent-framework-core/agent_framework.mcpstreamablehttptool?view=agent-framework-python-latest  ·  +1 in notes</a:t>
+              <a:t>Source: https://learn.microsoft.com/en-us/agent-framework/agents/tools/local-mcp-tools?tabs=python</a:t>
             </a:r>
             <a:endParaRPr lang="en-US" sz="820" dirty="0"/>
           </a:p>
@@ -2743,7 +3064,7 @@
               <a:buNone/>
             </a:pPr>
             <a:r>
-              <a:rPr lang="en-US" sz="2500" b="1" dirty="0">
+              <a:rPr lang="en-US" sz="2800" b="1" dirty="0">
                 <a:solidFill>
                   <a:srgbClr val="1E2761"/>
                 </a:solidFill>
@@ -2751,9 +3072,9 @@
                 <a:ea typeface="Calibri" pitchFamily="34" charset="-122"/>
                 <a:cs typeface="Calibri" pitchFamily="34" charset="-120"/>
               </a:rPr>
-              <a:t>Security is broader than authentication</a:t>
-            </a:r>
-            <a:endParaRPr lang="en-US" sz="2500" dirty="0"/>
+              <a:t>Reduce the model's tool surface</a:t>
+            </a:r>
+            <a:endParaRPr lang="en-US" sz="2800" dirty="0"/>
           </a:p>
         </p:txBody>
       </p:sp>
@@ -2819,7 +3140,7 @@
                 <a:ea typeface="Calibri" pitchFamily="34" charset="-122"/>
                 <a:cs typeface="Calibri" pitchFamily="34" charset="-120"/>
               </a:rPr>
-              <a:t>Trust</a:t>
+              <a:t>allowed_tools</a:t>
             </a:r>
             <a:endParaRPr lang="en-US" sz="1500" dirty="0"/>
           </a:p>
@@ -2860,7 +3181,7 @@
                 <a:ea typeface="Calibri" pitchFamily="34" charset="-122"/>
                 <a:cs typeface="Calibri" pitchFamily="34" charset="-120"/>
               </a:rPr>
-              <a:t>Review the server operator and package provenance</a:t>
+              <a:t>Expose an explicit MCP allow-list</a:t>
             </a:r>
             <a:endParaRPr lang="en-US" sz="1150" dirty="0"/>
           </a:p>
@@ -2928,7 +3249,7 @@
                 <a:ea typeface="Calibri" pitchFamily="34" charset="-122"/>
                 <a:cs typeface="Calibri" pitchFamily="34" charset="-120"/>
               </a:rPr>
-              <a:t>Least privilege</a:t>
+              <a:t>Clear names</a:t>
             </a:r>
             <a:endParaRPr lang="en-US" sz="1500" dirty="0"/>
           </a:p>
@@ -2969,7 +3290,7 @@
                 <a:ea typeface="Calibri" pitchFamily="34" charset="-122"/>
                 <a:cs typeface="Calibri" pitchFamily="34" charset="-120"/>
               </a:rPr>
-              <a:t>Narrow identity scopes and allowed_tools</a:t>
+              <a:t>Avoid collisions by selecting or wrapping distinct tool names</a:t>
             </a:r>
             <a:endParaRPr lang="en-US" sz="1150" dirty="0"/>
           </a:p>
@@ -3037,7 +3358,7 @@
                 <a:ea typeface="Calibri" pitchFamily="34" charset="-122"/>
                 <a:cs typeface="Calibri" pitchFamily="34" charset="-120"/>
               </a:rPr>
-              <a:t>Prompt injection</a:t>
+              <a:t>Progressive exposure — EXPERIMENTAL</a:t>
             </a:r>
             <a:endParaRPr lang="en-US" sz="1500" dirty="0"/>
           </a:p>
@@ -3078,7 +3399,7 @@
                 <a:ea typeface="Calibri" pitchFamily="34" charset="-122"/>
                 <a:cs typeface="Calibri" pitchFamily="34" charset="-120"/>
               </a:rPr>
-              <a:t>Treat tool metadata and results as untrusted</a:t>
+              <a:t>Add tools for the next loop iteration only</a:t>
             </a:r>
             <a:endParaRPr lang="en-US" sz="1150" dirty="0"/>
           </a:p>
@@ -3146,7 +3467,7 @@
                 <a:ea typeface="Calibri" pitchFamily="34" charset="-122"/>
                 <a:cs typeface="Calibri" pitchFamily="34" charset="-120"/>
               </a:rPr>
-              <a:t>Audit</a:t>
+              <a:t>Reset</a:t>
             </a:r>
             <a:endParaRPr lang="en-US" sz="1500" dirty="0"/>
           </a:p>
@@ -3187,7 +3508,7 @@
                 <a:ea typeface="Calibri" pitchFamily="34" charset="-122"/>
                 <a:cs typeface="Calibri" pitchFamily="34" charset="-120"/>
               </a:rPr>
-              <a:t>Log selected tool, arguments, approval, result status, and caller</a:t>
+              <a:t>Progressive tool changes re-arm on each new agent run</a:t>
             </a:r>
             <a:endParaRPr lang="en-US" sz="1150" dirty="0"/>
           </a:p>
@@ -3251,7 +3572,7 @@
                 <a:ea typeface="Calibri" pitchFamily="34" charset="-122"/>
                 <a:cs typeface="Calibri" pitchFamily="34" charset="-120"/>
               </a:rPr>
-              <a:t>Source: https://learn.microsoft.com/en-us/agent-framework/agents/tools/local-mcp-tools?tabs=python</a:t>
+              <a:t>Source: https://learn.microsoft.com/en-us/python/api/agent-framework-core/agent_framework.mcpstreamablehttptool?view=agent-framework-python-latest  ·  +1 in notes</a:t>
             </a:r>
             <a:endParaRPr lang="en-US" sz="820" dirty="0"/>
           </a:p>
@@ -3377,7 +3698,7 @@
               <a:buNone/>
             </a:pPr>
             <a:r>
-              <a:rPr lang="en-US" sz="2800" b="1" dirty="0">
+              <a:rPr lang="en-US" sz="2500" b="1" dirty="0">
                 <a:solidFill>
                   <a:srgbClr val="1E2761"/>
                 </a:solidFill>
@@ -3385,710 +3706,870 @@
                 <a:ea typeface="Calibri" pitchFamily="34" charset="-122"/>
                 <a:cs typeface="Calibri" pitchFamily="34" charset="-120"/>
               </a:rPr>
-              <a:t>Always close the lifecycle</a:t>
-            </a:r>
-            <a:endParaRPr lang="en-US" sz="2800" dirty="0"/>
-          </a:p>
-        </p:txBody>
-      </p:sp>
-      <p:sp>
-        <p:nvSpPr>
-          <p:cNvPr id="5" name="Shape 3"/>
-          <p:cNvSpPr/>
-          <p:nvPr/>
-        </p:nvSpPr>
-        <p:spPr>
-          <a:xfrm>
-            <a:off x="365760" y="1216152"/>
-            <a:ext cx="2633472" cy="1572768"/>
-          </a:xfrm>
-          <a:prstGeom prst="roundRect">
-            <a:avLst>
-              <a:gd name="adj" fmla="val 3488"/>
-            </a:avLst>
-          </a:prstGeom>
-          <a:solidFill>
-            <a:srgbClr val="CADCFC"/>
-          </a:solidFill>
-          <a:ln w="10160">
-            <a:solidFill>
-              <a:srgbClr val="1E2761"/>
-            </a:solidFill>
-            <a:prstDash val="solid"/>
-          </a:ln>
-        </p:spPr>
-      </p:sp>
-      <p:sp>
-        <p:nvSpPr>
-          <p:cNvPr id="6" name="Shape 4"/>
-          <p:cNvSpPr/>
-          <p:nvPr/>
-        </p:nvSpPr>
-        <p:spPr>
-          <a:xfrm>
-            <a:off x="475488" y="1335024"/>
-            <a:ext cx="320040" cy="320040"/>
-          </a:xfrm>
-          <a:prstGeom prst="ellipse">
-            <a:avLst/>
-          </a:prstGeom>
-          <a:solidFill>
-            <a:srgbClr val="1E2761"/>
-          </a:solidFill>
-          <a:ln/>
-        </p:spPr>
-      </p:sp>
-      <p:sp>
-        <p:nvSpPr>
-          <p:cNvPr id="7" name="Text 5"/>
-          <p:cNvSpPr/>
-          <p:nvPr/>
-        </p:nvSpPr>
-        <p:spPr>
-          <a:xfrm>
-            <a:off x="475488" y="1385316"/>
-            <a:ext cx="320040" cy="146304"/>
-          </a:xfrm>
-          <a:prstGeom prst="rect">
-            <a:avLst/>
-          </a:prstGeom>
-          <a:noFill/>
-          <a:ln/>
-        </p:spPr>
-        <p:txBody>
-          <a:bodyPr wrap="square" lIns="0" tIns="0" rIns="0" bIns="0" rtlCol="0" anchor="ctr"/>
-          <a:lstStyle/>
-          <a:p>
-            <a:pPr algn="ctr" indent="0" marL="0">
-              <a:buNone/>
-            </a:pPr>
-            <a:r>
-              <a:rPr lang="en-US" sz="900" b="1" dirty="0">
-                <a:solidFill>
-                  <a:srgbClr val="FFFFFF"/>
-                </a:solidFill>
-                <a:latin typeface="Calibri" pitchFamily="34" charset="0"/>
-                <a:ea typeface="Calibri" pitchFamily="34" charset="-122"/>
-                <a:cs typeface="Calibri" pitchFamily="34" charset="-120"/>
-              </a:rPr>
-              <a:t>1</a:t>
-            </a:r>
-            <a:endParaRPr lang="en-US" sz="900" dirty="0"/>
-          </a:p>
-        </p:txBody>
-      </p:sp>
-      <p:sp>
-        <p:nvSpPr>
-          <p:cNvPr id="8" name="Text 6"/>
-          <p:cNvSpPr/>
-          <p:nvPr/>
-        </p:nvSpPr>
-        <p:spPr>
-          <a:xfrm>
-            <a:off x="896112" y="1335024"/>
-            <a:ext cx="1975104" cy="1353312"/>
-          </a:xfrm>
-          <a:prstGeom prst="rect">
-            <a:avLst/>
-          </a:prstGeom>
-          <a:noFill/>
-          <a:ln/>
-        </p:spPr>
-        <p:txBody>
-          <a:bodyPr wrap="square" lIns="0" tIns="0" rIns="0" bIns="0" rtlCol="0" anchor="ctr">
-            <a:normAutofit/>
-          </a:bodyPr>
-          <a:lstStyle/>
-          <a:p>
-            <a:pPr indent="0" marL="0">
-              <a:buNone/>
-            </a:pPr>
-            <a:r>
-              <a:rPr lang="en-US" sz="1500" b="1" dirty="0">
-                <a:solidFill>
-                  <a:srgbClr val="1E2761"/>
-                </a:solidFill>
-                <a:latin typeface="Calibri" pitchFamily="34" charset="0"/>
-                <a:ea typeface="Calibri" pitchFamily="34" charset="-122"/>
-                <a:cs typeface="Calibri" pitchFamily="34" charset="-120"/>
-              </a:rPr>
-              <a:t>Acquire credential</a:t>
-            </a:r>
-            <a:endParaRPr lang="en-US" sz="1500" dirty="0"/>
-          </a:p>
-        </p:txBody>
-      </p:sp>
-      <p:sp>
-        <p:nvSpPr>
-          <p:cNvPr id="9" name="Shape 7"/>
-          <p:cNvSpPr/>
-          <p:nvPr/>
-        </p:nvSpPr>
-        <p:spPr>
-          <a:xfrm>
-            <a:off x="3035808" y="1892808"/>
-            <a:ext cx="164592" cy="219456"/>
-          </a:xfrm>
-          <a:prstGeom prst="chevron">
-            <a:avLst/>
-          </a:prstGeom>
-          <a:solidFill>
-            <a:srgbClr val="E8A87C"/>
-          </a:solidFill>
-          <a:ln/>
-        </p:spPr>
-      </p:sp>
-      <p:sp>
-        <p:nvSpPr>
-          <p:cNvPr id="10" name="Shape 8"/>
-          <p:cNvSpPr/>
-          <p:nvPr/>
-        </p:nvSpPr>
-        <p:spPr>
-          <a:xfrm>
-            <a:off x="3255264" y="1216152"/>
-            <a:ext cx="2633472" cy="1572768"/>
-          </a:xfrm>
-          <a:prstGeom prst="roundRect">
-            <a:avLst>
-              <a:gd name="adj" fmla="val 3488"/>
-            </a:avLst>
-          </a:prstGeom>
-          <a:solidFill>
-            <a:srgbClr val="F3F4F6"/>
-          </a:solidFill>
-          <a:ln w="10160">
-            <a:solidFill>
-              <a:srgbClr val="D1D5DB"/>
-            </a:solidFill>
-            <a:prstDash val="solid"/>
-          </a:ln>
-        </p:spPr>
-      </p:sp>
-      <p:sp>
-        <p:nvSpPr>
-          <p:cNvPr id="11" name="Shape 9"/>
-          <p:cNvSpPr/>
-          <p:nvPr/>
-        </p:nvSpPr>
-        <p:spPr>
-          <a:xfrm>
-            <a:off x="3364992" y="1335024"/>
-            <a:ext cx="320040" cy="320040"/>
-          </a:xfrm>
-          <a:prstGeom prst="ellipse">
-            <a:avLst/>
-          </a:prstGeom>
-          <a:solidFill>
-            <a:srgbClr val="1E2761"/>
-          </a:solidFill>
-          <a:ln/>
-        </p:spPr>
-      </p:sp>
-      <p:sp>
-        <p:nvSpPr>
-          <p:cNvPr id="12" name="Text 10"/>
-          <p:cNvSpPr/>
-          <p:nvPr/>
-        </p:nvSpPr>
-        <p:spPr>
-          <a:xfrm>
-            <a:off x="3364992" y="1385316"/>
-            <a:ext cx="320040" cy="146304"/>
-          </a:xfrm>
-          <a:prstGeom prst="rect">
-            <a:avLst/>
-          </a:prstGeom>
-          <a:noFill/>
-          <a:ln/>
-        </p:spPr>
-        <p:txBody>
-          <a:bodyPr wrap="square" lIns="0" tIns="0" rIns="0" bIns="0" rtlCol="0" anchor="ctr"/>
-          <a:lstStyle/>
-          <a:p>
-            <a:pPr algn="ctr" indent="0" marL="0">
-              <a:buNone/>
-            </a:pPr>
-            <a:r>
-              <a:rPr lang="en-US" sz="900" b="1" dirty="0">
-                <a:solidFill>
-                  <a:srgbClr val="FFFFFF"/>
-                </a:solidFill>
-                <a:latin typeface="Calibri" pitchFamily="34" charset="0"/>
-                <a:ea typeface="Calibri" pitchFamily="34" charset="-122"/>
-                <a:cs typeface="Calibri" pitchFamily="34" charset="-120"/>
-              </a:rPr>
-              <a:t>2</a:t>
-            </a:r>
-            <a:endParaRPr lang="en-US" sz="900" dirty="0"/>
-          </a:p>
-        </p:txBody>
-      </p:sp>
-      <p:sp>
-        <p:nvSpPr>
-          <p:cNvPr id="13" name="Text 11"/>
-          <p:cNvSpPr/>
-          <p:nvPr/>
-        </p:nvSpPr>
-        <p:spPr>
-          <a:xfrm>
-            <a:off x="3785616" y="1335024"/>
-            <a:ext cx="1975104" cy="1353312"/>
-          </a:xfrm>
-          <a:prstGeom prst="rect">
-            <a:avLst/>
-          </a:prstGeom>
-          <a:noFill/>
-          <a:ln/>
-        </p:spPr>
-        <p:txBody>
-          <a:bodyPr wrap="square" lIns="0" tIns="0" rIns="0" bIns="0" rtlCol="0" anchor="ctr">
-            <a:normAutofit/>
-          </a:bodyPr>
-          <a:lstStyle/>
-          <a:p>
-            <a:pPr indent="0" marL="0">
-              <a:buNone/>
-            </a:pPr>
-            <a:r>
-              <a:rPr lang="en-US" sz="1500" b="1" dirty="0">
-                <a:solidFill>
-                  <a:srgbClr val="1E2761"/>
-                </a:solidFill>
-                <a:latin typeface="Calibri" pitchFamily="34" charset="0"/>
-                <a:ea typeface="Calibri" pitchFamily="34" charset="-122"/>
-                <a:cs typeface="Calibri" pitchFamily="34" charset="-120"/>
-              </a:rPr>
-              <a:t>Open MCP tool</a:t>
-            </a:r>
-            <a:endParaRPr lang="en-US" sz="1500" dirty="0"/>
-          </a:p>
-        </p:txBody>
-      </p:sp>
-      <p:sp>
-        <p:nvSpPr>
-          <p:cNvPr id="14" name="Shape 12"/>
-          <p:cNvSpPr/>
-          <p:nvPr/>
-        </p:nvSpPr>
-        <p:spPr>
-          <a:xfrm>
-            <a:off x="5925312" y="1892808"/>
-            <a:ext cx="164592" cy="219456"/>
-          </a:xfrm>
-          <a:prstGeom prst="chevron">
-            <a:avLst/>
-          </a:prstGeom>
-          <a:solidFill>
-            <a:srgbClr val="E8A87C"/>
-          </a:solidFill>
-          <a:ln/>
-        </p:spPr>
-      </p:sp>
-      <p:sp>
-        <p:nvSpPr>
-          <p:cNvPr id="15" name="Shape 13"/>
-          <p:cNvSpPr/>
-          <p:nvPr/>
-        </p:nvSpPr>
-        <p:spPr>
-          <a:xfrm>
-            <a:off x="6144768" y="1216152"/>
-            <a:ext cx="2633472" cy="1572768"/>
-          </a:xfrm>
-          <a:prstGeom prst="roundRect">
-            <a:avLst>
-              <a:gd name="adj" fmla="val 3488"/>
-            </a:avLst>
-          </a:prstGeom>
-          <a:solidFill>
-            <a:srgbClr val="F3F4F6"/>
-          </a:solidFill>
-          <a:ln w="10160">
-            <a:solidFill>
-              <a:srgbClr val="D1D5DB"/>
-            </a:solidFill>
-            <a:prstDash val="solid"/>
-          </a:ln>
-        </p:spPr>
-      </p:sp>
-      <p:sp>
-        <p:nvSpPr>
-          <p:cNvPr id="16" name="Shape 14"/>
-          <p:cNvSpPr/>
-          <p:nvPr/>
-        </p:nvSpPr>
-        <p:spPr>
-          <a:xfrm>
-            <a:off x="6254496" y="1335024"/>
-            <a:ext cx="320040" cy="320040"/>
-          </a:xfrm>
-          <a:prstGeom prst="ellipse">
-            <a:avLst/>
-          </a:prstGeom>
-          <a:solidFill>
-            <a:srgbClr val="1E2761"/>
-          </a:solidFill>
-          <a:ln/>
-        </p:spPr>
-      </p:sp>
-      <p:sp>
-        <p:nvSpPr>
-          <p:cNvPr id="17" name="Text 15"/>
-          <p:cNvSpPr/>
-          <p:nvPr/>
-        </p:nvSpPr>
-        <p:spPr>
-          <a:xfrm>
-            <a:off x="6254496" y="1385316"/>
-            <a:ext cx="320040" cy="146304"/>
-          </a:xfrm>
-          <a:prstGeom prst="rect">
-            <a:avLst/>
-          </a:prstGeom>
-          <a:noFill/>
-          <a:ln/>
-        </p:spPr>
-        <p:txBody>
-          <a:bodyPr wrap="square" lIns="0" tIns="0" rIns="0" bIns="0" rtlCol="0" anchor="ctr"/>
-          <a:lstStyle/>
-          <a:p>
-            <a:pPr algn="ctr" indent="0" marL="0">
-              <a:buNone/>
-            </a:pPr>
-            <a:r>
-              <a:rPr lang="en-US" sz="900" b="1" dirty="0">
-                <a:solidFill>
-                  <a:srgbClr val="FFFFFF"/>
-                </a:solidFill>
-                <a:latin typeface="Calibri" pitchFamily="34" charset="0"/>
-                <a:ea typeface="Calibri" pitchFamily="34" charset="-122"/>
-                <a:cs typeface="Calibri" pitchFamily="34" charset="-120"/>
-              </a:rPr>
-              <a:t>3</a:t>
-            </a:r>
-            <a:endParaRPr lang="en-US" sz="900" dirty="0"/>
-          </a:p>
-        </p:txBody>
-      </p:sp>
-      <p:sp>
-        <p:nvSpPr>
-          <p:cNvPr id="18" name="Text 16"/>
-          <p:cNvSpPr/>
-          <p:nvPr/>
-        </p:nvSpPr>
-        <p:spPr>
-          <a:xfrm>
-            <a:off x="6675120" y="1335024"/>
-            <a:ext cx="1975104" cy="1353312"/>
-          </a:xfrm>
-          <a:prstGeom prst="rect">
-            <a:avLst/>
-          </a:prstGeom>
-          <a:noFill/>
-          <a:ln/>
-        </p:spPr>
-        <p:txBody>
-          <a:bodyPr wrap="square" lIns="0" tIns="0" rIns="0" bIns="0" rtlCol="0" anchor="ctr">
-            <a:normAutofit/>
-          </a:bodyPr>
-          <a:lstStyle/>
-          <a:p>
-            <a:pPr indent="0" marL="0">
-              <a:buNone/>
-            </a:pPr>
-            <a:r>
-              <a:rPr lang="en-US" sz="1500" b="1" dirty="0">
-                <a:solidFill>
-                  <a:srgbClr val="1E2761"/>
-                </a:solidFill>
-                <a:latin typeface="Calibri" pitchFamily="34" charset="0"/>
-                <a:ea typeface="Calibri" pitchFamily="34" charset="-122"/>
-                <a:cs typeface="Calibri" pitchFamily="34" charset="-120"/>
-              </a:rPr>
-              <a:t>Open agent</a:t>
-            </a:r>
-            <a:endParaRPr lang="en-US" sz="1500" dirty="0"/>
-          </a:p>
-        </p:txBody>
-      </p:sp>
-      <p:sp>
-        <p:nvSpPr>
-          <p:cNvPr id="19" name="Shape 17"/>
-          <p:cNvSpPr/>
-          <p:nvPr/>
-        </p:nvSpPr>
-        <p:spPr>
-          <a:xfrm>
-            <a:off x="365760" y="3044952"/>
-            <a:ext cx="2633472" cy="1572768"/>
-          </a:xfrm>
-          <a:prstGeom prst="roundRect">
-            <a:avLst>
-              <a:gd name="adj" fmla="val 3488"/>
-            </a:avLst>
-          </a:prstGeom>
-          <a:solidFill>
-            <a:srgbClr val="F3F4F6"/>
-          </a:solidFill>
-          <a:ln w="10160">
-            <a:solidFill>
-              <a:srgbClr val="D1D5DB"/>
-            </a:solidFill>
-            <a:prstDash val="solid"/>
-          </a:ln>
-        </p:spPr>
-      </p:sp>
-      <p:sp>
-        <p:nvSpPr>
-          <p:cNvPr id="20" name="Shape 18"/>
-          <p:cNvSpPr/>
-          <p:nvPr/>
-        </p:nvSpPr>
-        <p:spPr>
-          <a:xfrm>
-            <a:off x="475488" y="3163824"/>
-            <a:ext cx="320040" cy="320040"/>
-          </a:xfrm>
-          <a:prstGeom prst="ellipse">
-            <a:avLst/>
-          </a:prstGeom>
-          <a:solidFill>
-            <a:srgbClr val="1E2761"/>
-          </a:solidFill>
-          <a:ln/>
-        </p:spPr>
-      </p:sp>
-      <p:sp>
-        <p:nvSpPr>
-          <p:cNvPr id="21" name="Text 19"/>
-          <p:cNvSpPr/>
-          <p:nvPr/>
-        </p:nvSpPr>
-        <p:spPr>
-          <a:xfrm>
-            <a:off x="475488" y="3214116"/>
-            <a:ext cx="320040" cy="146304"/>
-          </a:xfrm>
-          <a:prstGeom prst="rect">
-            <a:avLst/>
-          </a:prstGeom>
-          <a:noFill/>
-          <a:ln/>
-        </p:spPr>
-        <p:txBody>
-          <a:bodyPr wrap="square" lIns="0" tIns="0" rIns="0" bIns="0" rtlCol="0" anchor="ctr"/>
-          <a:lstStyle/>
-          <a:p>
-            <a:pPr algn="ctr" indent="0" marL="0">
-              <a:buNone/>
-            </a:pPr>
-            <a:r>
-              <a:rPr lang="en-US" sz="900" b="1" dirty="0">
-                <a:solidFill>
-                  <a:srgbClr val="FFFFFF"/>
-                </a:solidFill>
-                <a:latin typeface="Calibri" pitchFamily="34" charset="0"/>
-                <a:ea typeface="Calibri" pitchFamily="34" charset="-122"/>
-                <a:cs typeface="Calibri" pitchFamily="34" charset="-120"/>
-              </a:rPr>
-              <a:t>4</a:t>
-            </a:r>
-            <a:endParaRPr lang="en-US" sz="900" dirty="0"/>
-          </a:p>
-        </p:txBody>
-      </p:sp>
-      <p:sp>
-        <p:nvSpPr>
-          <p:cNvPr id="22" name="Text 20"/>
-          <p:cNvSpPr/>
-          <p:nvPr/>
-        </p:nvSpPr>
-        <p:spPr>
-          <a:xfrm>
-            <a:off x="896112" y="3163824"/>
-            <a:ext cx="1975104" cy="1353312"/>
-          </a:xfrm>
-          <a:prstGeom prst="rect">
-            <a:avLst/>
-          </a:prstGeom>
-          <a:noFill/>
-          <a:ln/>
-        </p:spPr>
-        <p:txBody>
-          <a:bodyPr wrap="square" lIns="0" tIns="0" rIns="0" bIns="0" rtlCol="0" anchor="ctr">
-            <a:normAutofit/>
-          </a:bodyPr>
-          <a:lstStyle/>
-          <a:p>
-            <a:pPr indent="0" marL="0">
-              <a:buNone/>
-            </a:pPr>
-            <a:r>
-              <a:rPr lang="en-US" sz="1500" b="1" dirty="0">
-                <a:solidFill>
-                  <a:srgbClr val="1E2761"/>
-                </a:solidFill>
-                <a:latin typeface="Calibri" pitchFamily="34" charset="0"/>
-                <a:ea typeface="Calibri" pitchFamily="34" charset="-122"/>
-                <a:cs typeface="Calibri" pitchFamily="34" charset="-120"/>
-              </a:rPr>
-              <a:t>Run and handle approvals</a:t>
-            </a:r>
-            <a:endParaRPr lang="en-US" sz="1500" dirty="0"/>
-          </a:p>
-        </p:txBody>
-      </p:sp>
-      <p:sp>
-        <p:nvSpPr>
-          <p:cNvPr id="23" name="Shape 21"/>
-          <p:cNvSpPr/>
-          <p:nvPr/>
-        </p:nvSpPr>
-        <p:spPr>
-          <a:xfrm>
-            <a:off x="3035808" y="3721608"/>
-            <a:ext cx="164592" cy="219456"/>
-          </a:xfrm>
-          <a:prstGeom prst="chevron">
-            <a:avLst/>
-          </a:prstGeom>
-          <a:solidFill>
-            <a:srgbClr val="E8A87C"/>
-          </a:solidFill>
-          <a:ln/>
-        </p:spPr>
-      </p:sp>
-      <p:sp>
-        <p:nvSpPr>
-          <p:cNvPr id="24" name="Shape 22"/>
-          <p:cNvSpPr/>
-          <p:nvPr/>
-        </p:nvSpPr>
-        <p:spPr>
-          <a:xfrm>
-            <a:off x="3255264" y="3044952"/>
-            <a:ext cx="2633472" cy="1572768"/>
-          </a:xfrm>
-          <a:prstGeom prst="roundRect">
-            <a:avLst>
-              <a:gd name="adj" fmla="val 3488"/>
-            </a:avLst>
-          </a:prstGeom>
-          <a:solidFill>
-            <a:srgbClr val="CADCFC"/>
-          </a:solidFill>
-          <a:ln w="10160">
-            <a:solidFill>
-              <a:srgbClr val="1E2761"/>
-            </a:solidFill>
-            <a:prstDash val="solid"/>
-          </a:ln>
-        </p:spPr>
-      </p:sp>
-      <p:sp>
-        <p:nvSpPr>
-          <p:cNvPr id="25" name="Shape 23"/>
-          <p:cNvSpPr/>
-          <p:nvPr/>
-        </p:nvSpPr>
-        <p:spPr>
-          <a:xfrm>
-            <a:off x="3364992" y="3163824"/>
-            <a:ext cx="320040" cy="320040"/>
-          </a:xfrm>
-          <a:prstGeom prst="ellipse">
-            <a:avLst/>
-          </a:prstGeom>
-          <a:solidFill>
-            <a:srgbClr val="1E2761"/>
-          </a:solidFill>
-          <a:ln/>
-        </p:spPr>
-      </p:sp>
-      <p:sp>
-        <p:nvSpPr>
-          <p:cNvPr id="26" name="Text 24"/>
-          <p:cNvSpPr/>
-          <p:nvPr/>
-        </p:nvSpPr>
-        <p:spPr>
-          <a:xfrm>
-            <a:off x="3364992" y="3214116"/>
-            <a:ext cx="320040" cy="146304"/>
-          </a:xfrm>
-          <a:prstGeom prst="rect">
-            <a:avLst/>
-          </a:prstGeom>
-          <a:noFill/>
-          <a:ln/>
-        </p:spPr>
-        <p:txBody>
-          <a:bodyPr wrap="square" lIns="0" tIns="0" rIns="0" bIns="0" rtlCol="0" anchor="ctr"/>
-          <a:lstStyle/>
-          <a:p>
-            <a:pPr algn="ctr" indent="0" marL="0">
-              <a:buNone/>
-            </a:pPr>
-            <a:r>
-              <a:rPr lang="en-US" sz="900" b="1" dirty="0">
-                <a:solidFill>
-                  <a:srgbClr val="FFFFFF"/>
-                </a:solidFill>
-                <a:latin typeface="Calibri" pitchFamily="34" charset="0"/>
-                <a:ea typeface="Calibri" pitchFamily="34" charset="-122"/>
-                <a:cs typeface="Calibri" pitchFamily="34" charset="-120"/>
-              </a:rPr>
-              <a:t>5</a:t>
-            </a:r>
-            <a:endParaRPr lang="en-US" sz="900" dirty="0"/>
-          </a:p>
-        </p:txBody>
-      </p:sp>
-      <p:sp>
-        <p:nvSpPr>
-          <p:cNvPr id="27" name="Text 25"/>
-          <p:cNvSpPr/>
-          <p:nvPr/>
-        </p:nvSpPr>
-        <p:spPr>
-          <a:xfrm>
-            <a:off x="3785616" y="3163824"/>
-            <a:ext cx="1975104" cy="1353312"/>
-          </a:xfrm>
-          <a:prstGeom prst="rect">
-            <a:avLst/>
-          </a:prstGeom>
-          <a:noFill/>
-          <a:ln/>
-        </p:spPr>
-        <p:txBody>
-          <a:bodyPr wrap="square" lIns="0" tIns="0" rIns="0" bIns="0" rtlCol="0" anchor="ctr">
-            <a:normAutofit/>
-          </a:bodyPr>
-          <a:lstStyle/>
-          <a:p>
-            <a:pPr indent="0" marL="0">
-              <a:buNone/>
-            </a:pPr>
-            <a:r>
-              <a:rPr lang="en-US" sz="1500" b="1" dirty="0">
-                <a:solidFill>
-                  <a:srgbClr val="1E2761"/>
-                </a:solidFill>
-                <a:latin typeface="Calibri" pitchFamily="34" charset="0"/>
-                <a:ea typeface="Calibri" pitchFamily="34" charset="-122"/>
-                <a:cs typeface="Calibri" pitchFamily="34" charset="-120"/>
-              </a:rPr>
-              <a:t>Exit contexts in reverse order</a:t>
-            </a:r>
-            <a:endParaRPr lang="en-US" sz="1500" dirty="0"/>
-          </a:p>
-        </p:txBody>
-      </p:sp>
-      <p:sp>
-        <p:nvSpPr>
-          <p:cNvPr id="28" name="Shape 26"/>
+              <a:t>approval_mode creates a human boundary</a:t>
+            </a:r>
+            <a:endParaRPr lang="en-US" sz="2500" dirty="0"/>
+          </a:p>
+        </p:txBody>
+      </p:sp>
+      <p:graphicFrame>
+        <p:nvGraphicFramePr>
+          <p:cNvPr id="13" name="Table 0"/>
+          <p:cNvGraphicFramePr>
+            <a:graphicFrameLocks noGrp="1"/>
+          </p:cNvGraphicFramePr>
+          <p:nvPr>
+            <p:extLst>
+              <p:ext uri="{D42A27DB-BD31-4B8C-83A1-F6EECF244321}">
+                <p14:modId xmlns:p14="http://schemas.microsoft.com/office/powerpoint/2010/main" val="1579011935"/>
+              </p:ext>
+            </p:extLst>
+          </p:nvPr>
+        </p:nvGraphicFramePr>
+        <p:xfrm>
+          <a:off x="365760" y="1078992"/>
+          <a:ext cx="8412480" cy="914400"/>
+        </p:xfrm>
+        <a:graphic>
+          <a:graphicData uri="http://schemas.openxmlformats.org/drawingml/2006/table">
+            <a:tbl>
+              <a:tblPr/>
+              <a:tblGrid>
+                <a:gridCol w="2804160"/>
+                <a:gridCol w="2804160"/>
+                <a:gridCol w="2804160"/>
+              </a:tblGrid>
+              <a:tr h="658368">
+                <a:tc>
+                  <a:txBody>
+                    <a:bodyPr/>
+                    <a:lstStyle/>
+                    <a:p>
+                      <a:pPr indent="0" marL="0">
+                        <a:buNone/>
+                      </a:pPr>
+                      <a:r>
+                        <a:rPr lang="en-US" sz="1100" b="1" dirty="0">
+                          <a:solidFill>
+                            <a:srgbClr val="FFFFFF"/>
+                          </a:solidFill>
+                          <a:latin typeface="Calibri" pitchFamily="34" charset="0"/>
+                          <a:ea typeface="Calibri" pitchFamily="34" charset="-122"/>
+                          <a:cs typeface="Calibri" pitchFamily="34" charset="-120"/>
+                        </a:rPr>
+                        <a:t>Setting</a:t>
+                      </a:r>
+                      <a:endParaRPr lang="en-US" sz="1100" dirty="0">
+                        <a:latin typeface="Calibri" charset="0"/>
+                        <a:ea typeface="Calibri" charset="0"/>
+                        <a:cs typeface="Calibri" charset="0"/>
+                      </a:endParaRPr>
+                    </a:p>
+                  </a:txBody>
+                  <a:tcPr marL="54864" marR="54864" marT="54864" marB="54864" anchor="ctr">
+                    <a:lnL w="6350" cap="flat" cmpd="sng" algn="ctr">
+                      <a:solidFill>
+                        <a:srgbClr val="D1D5DB"/>
+                      </a:solidFill>
+                      <a:prstDash val="solid"/>
+                      <a:round/>
+                      <a:headEnd type="none" w="med" len="med"/>
+                      <a:tailEnd type="none" w="med" len="med"/>
+                    </a:lnL>
+                    <a:lnR w="6350" cap="flat" cmpd="sng" algn="ctr">
+                      <a:solidFill>
+                        <a:srgbClr val="D1D5DB"/>
+                      </a:solidFill>
+                      <a:prstDash val="solid"/>
+                      <a:round/>
+                      <a:headEnd type="none" w="med" len="med"/>
+                      <a:tailEnd type="none" w="med" len="med"/>
+                    </a:lnR>
+                    <a:lnT w="6350" cap="flat" cmpd="sng" algn="ctr">
+                      <a:solidFill>
+                        <a:srgbClr val="D1D5DB"/>
+                      </a:solidFill>
+                      <a:prstDash val="solid"/>
+                      <a:round/>
+                      <a:headEnd type="none" w="med" len="med"/>
+                      <a:tailEnd type="none" w="med" len="med"/>
+                    </a:lnT>
+                    <a:lnB w="6350" cap="flat" cmpd="sng" algn="ctr">
+                      <a:solidFill>
+                        <a:srgbClr val="D1D5DB"/>
+                      </a:solidFill>
+                      <a:prstDash val="solid"/>
+                      <a:round/>
+                      <a:headEnd type="none" w="med" len="med"/>
+                      <a:tailEnd type="none" w="med" len="med"/>
+                    </a:lnB>
+                    <a:solidFill>
+                      <a:srgbClr val="1E2761"/>
+                    </a:solidFill>
+                  </a:tcPr>
+                </a:tc>
+                <a:tc>
+                  <a:txBody>
+                    <a:bodyPr/>
+                    <a:lstStyle/>
+                    <a:p>
+                      <a:pPr indent="0" marL="0">
+                        <a:buNone/>
+                      </a:pPr>
+                      <a:r>
+                        <a:rPr lang="en-US" sz="1100" b="1" dirty="0">
+                          <a:solidFill>
+                            <a:srgbClr val="FFFFFF"/>
+                          </a:solidFill>
+                          <a:latin typeface="Calibri" pitchFamily="34" charset="0"/>
+                          <a:ea typeface="Calibri" pitchFamily="34" charset="-122"/>
+                          <a:cs typeface="Calibri" pitchFamily="34" charset="-120"/>
+                        </a:rPr>
+                        <a:t>Effect</a:t>
+                      </a:r>
+                      <a:endParaRPr lang="en-US" sz="1100" dirty="0">
+                        <a:latin typeface="Calibri" charset="0"/>
+                        <a:ea typeface="Calibri" charset="0"/>
+                        <a:cs typeface="Calibri" charset="0"/>
+                      </a:endParaRPr>
+                    </a:p>
+                  </a:txBody>
+                  <a:tcPr marL="54864" marR="54864" marT="54864" marB="54864" anchor="ctr">
+                    <a:lnL w="6350" cap="flat" cmpd="sng" algn="ctr">
+                      <a:solidFill>
+                        <a:srgbClr val="D1D5DB"/>
+                      </a:solidFill>
+                      <a:prstDash val="solid"/>
+                      <a:round/>
+                      <a:headEnd type="none" w="med" len="med"/>
+                      <a:tailEnd type="none" w="med" len="med"/>
+                    </a:lnL>
+                    <a:lnR w="6350" cap="flat" cmpd="sng" algn="ctr">
+                      <a:solidFill>
+                        <a:srgbClr val="D1D5DB"/>
+                      </a:solidFill>
+                      <a:prstDash val="solid"/>
+                      <a:round/>
+                      <a:headEnd type="none" w="med" len="med"/>
+                      <a:tailEnd type="none" w="med" len="med"/>
+                    </a:lnR>
+                    <a:lnT w="6350" cap="flat" cmpd="sng" algn="ctr">
+                      <a:solidFill>
+                        <a:srgbClr val="D1D5DB"/>
+                      </a:solidFill>
+                      <a:prstDash val="solid"/>
+                      <a:round/>
+                      <a:headEnd type="none" w="med" len="med"/>
+                      <a:tailEnd type="none" w="med" len="med"/>
+                    </a:lnT>
+                    <a:lnB w="6350" cap="flat" cmpd="sng" algn="ctr">
+                      <a:solidFill>
+                        <a:srgbClr val="D1D5DB"/>
+                      </a:solidFill>
+                      <a:prstDash val="solid"/>
+                      <a:round/>
+                      <a:headEnd type="none" w="med" len="med"/>
+                      <a:tailEnd type="none" w="med" len="med"/>
+                    </a:lnB>
+                    <a:solidFill>
+                      <a:srgbClr val="1E2761"/>
+                    </a:solidFill>
+                  </a:tcPr>
+                </a:tc>
+                <a:tc>
+                  <a:txBody>
+                    <a:bodyPr/>
+                    <a:lstStyle/>
+                    <a:p>
+                      <a:pPr indent="0" marL="0">
+                        <a:buNone/>
+                      </a:pPr>
+                      <a:r>
+                        <a:rPr lang="en-US" sz="1100" b="1" dirty="0">
+                          <a:solidFill>
+                            <a:srgbClr val="FFFFFF"/>
+                          </a:solidFill>
+                          <a:latin typeface="Calibri" pitchFamily="34" charset="0"/>
+                          <a:ea typeface="Calibri" pitchFamily="34" charset="-122"/>
+                          <a:cs typeface="Calibri" pitchFamily="34" charset="-120"/>
+                        </a:rPr>
+                        <a:t>Appropriate use</a:t>
+                      </a:r>
+                      <a:endParaRPr lang="en-US" sz="1100" dirty="0">
+                        <a:latin typeface="Calibri" charset="0"/>
+                        <a:ea typeface="Calibri" charset="0"/>
+                        <a:cs typeface="Calibri" charset="0"/>
+                      </a:endParaRPr>
+                    </a:p>
+                  </a:txBody>
+                  <a:tcPr marL="54864" marR="54864" marT="54864" marB="54864" anchor="ctr">
+                    <a:lnL w="6350" cap="flat" cmpd="sng" algn="ctr">
+                      <a:solidFill>
+                        <a:srgbClr val="D1D5DB"/>
+                      </a:solidFill>
+                      <a:prstDash val="solid"/>
+                      <a:round/>
+                      <a:headEnd type="none" w="med" len="med"/>
+                      <a:tailEnd type="none" w="med" len="med"/>
+                    </a:lnL>
+                    <a:lnR w="6350" cap="flat" cmpd="sng" algn="ctr">
+                      <a:solidFill>
+                        <a:srgbClr val="D1D5DB"/>
+                      </a:solidFill>
+                      <a:prstDash val="solid"/>
+                      <a:round/>
+                      <a:headEnd type="none" w="med" len="med"/>
+                      <a:tailEnd type="none" w="med" len="med"/>
+                    </a:lnR>
+                    <a:lnT w="6350" cap="flat" cmpd="sng" algn="ctr">
+                      <a:solidFill>
+                        <a:srgbClr val="D1D5DB"/>
+                      </a:solidFill>
+                      <a:prstDash val="solid"/>
+                      <a:round/>
+                      <a:headEnd type="none" w="med" len="med"/>
+                      <a:tailEnd type="none" w="med" len="med"/>
+                    </a:lnT>
+                    <a:lnB w="6350" cap="flat" cmpd="sng" algn="ctr">
+                      <a:solidFill>
+                        <a:srgbClr val="D1D5DB"/>
+                      </a:solidFill>
+                      <a:prstDash val="solid"/>
+                      <a:round/>
+                      <a:headEnd type="none" w="med" len="med"/>
+                      <a:tailEnd type="none" w="med" len="med"/>
+                    </a:lnB>
+                    <a:solidFill>
+                      <a:srgbClr val="1E2761"/>
+                    </a:solidFill>
+                  </a:tcPr>
+                </a:tc>
+              </a:tr>
+              <a:tr h="658368">
+                <a:tc>
+                  <a:txBody>
+                    <a:bodyPr/>
+                    <a:lstStyle/>
+                    <a:p>
+                      <a:pPr indent="0" marL="0">
+                        <a:buNone/>
+                      </a:pPr>
+                      <a:r>
+                        <a:rPr lang="en-US" sz="1100" dirty="0">
+                          <a:solidFill>
+                            <a:srgbClr val="212121"/>
+                          </a:solidFill>
+                          <a:latin typeface="Calibri" pitchFamily="34" charset="0"/>
+                          <a:ea typeface="Calibri" pitchFamily="34" charset="-122"/>
+                          <a:cs typeface="Calibri" pitchFamily="34" charset="-120"/>
+                        </a:rPr>
+                        <a:t>always_require</a:t>
+                      </a:r>
+                      <a:endParaRPr lang="en-US" sz="1100" dirty="0">
+                        <a:latin typeface="Calibri" charset="0"/>
+                        <a:ea typeface="Calibri" charset="0"/>
+                        <a:cs typeface="Calibri" charset="0"/>
+                      </a:endParaRPr>
+                    </a:p>
+                  </a:txBody>
+                  <a:tcPr marL="54864" marR="54864" marT="54864" marB="54864" anchor="ctr">
+                    <a:lnL w="6350" cap="flat" cmpd="sng" algn="ctr">
+                      <a:solidFill>
+                        <a:srgbClr val="D1D5DB"/>
+                      </a:solidFill>
+                      <a:prstDash val="solid"/>
+                      <a:round/>
+                      <a:headEnd type="none" w="med" len="med"/>
+                      <a:tailEnd type="none" w="med" len="med"/>
+                    </a:lnL>
+                    <a:lnR w="6350" cap="flat" cmpd="sng" algn="ctr">
+                      <a:solidFill>
+                        <a:srgbClr val="D1D5DB"/>
+                      </a:solidFill>
+                      <a:prstDash val="solid"/>
+                      <a:round/>
+                      <a:headEnd type="none" w="med" len="med"/>
+                      <a:tailEnd type="none" w="med" len="med"/>
+                    </a:lnR>
+                    <a:lnT w="6350" cap="flat" cmpd="sng" algn="ctr">
+                      <a:solidFill>
+                        <a:srgbClr val="D1D5DB"/>
+                      </a:solidFill>
+                      <a:prstDash val="solid"/>
+                      <a:round/>
+                      <a:headEnd type="none" w="med" len="med"/>
+                      <a:tailEnd type="none" w="med" len="med"/>
+                    </a:lnT>
+                    <a:lnB w="6350" cap="flat" cmpd="sng" algn="ctr">
+                      <a:solidFill>
+                        <a:srgbClr val="D1D5DB"/>
+                      </a:solidFill>
+                      <a:prstDash val="solid"/>
+                      <a:round/>
+                      <a:headEnd type="none" w="med" len="med"/>
+                      <a:tailEnd type="none" w="med" len="med"/>
+                    </a:lnB>
+                    <a:solidFill>
+                      <a:srgbClr val="FFFFFF"/>
+                    </a:solidFill>
+                  </a:tcPr>
+                </a:tc>
+                <a:tc>
+                  <a:txBody>
+                    <a:bodyPr/>
+                    <a:lstStyle/>
+                    <a:p>
+                      <a:pPr indent="0" marL="0">
+                        <a:buNone/>
+                      </a:pPr>
+                      <a:r>
+                        <a:rPr lang="en-US" sz="1100" dirty="0">
+                          <a:solidFill>
+                            <a:srgbClr val="212121"/>
+                          </a:solidFill>
+                          <a:latin typeface="Calibri" pitchFamily="34" charset="0"/>
+                          <a:ea typeface="Calibri" pitchFamily="34" charset="-122"/>
+                          <a:cs typeface="Calibri" pitchFamily="34" charset="-120"/>
+                        </a:rPr>
+                        <a:t>Every exposed MCP tool needs approval</a:t>
+                      </a:r>
+                      <a:endParaRPr lang="en-US" sz="1100" dirty="0">
+                        <a:latin typeface="Calibri" charset="0"/>
+                        <a:ea typeface="Calibri" charset="0"/>
+                        <a:cs typeface="Calibri" charset="0"/>
+                      </a:endParaRPr>
+                    </a:p>
+                  </a:txBody>
+                  <a:tcPr marL="54864" marR="54864" marT="54864" marB="54864" anchor="ctr">
+                    <a:lnL w="6350" cap="flat" cmpd="sng" algn="ctr">
+                      <a:solidFill>
+                        <a:srgbClr val="D1D5DB"/>
+                      </a:solidFill>
+                      <a:prstDash val="solid"/>
+                      <a:round/>
+                      <a:headEnd type="none" w="med" len="med"/>
+                      <a:tailEnd type="none" w="med" len="med"/>
+                    </a:lnL>
+                    <a:lnR w="6350" cap="flat" cmpd="sng" algn="ctr">
+                      <a:solidFill>
+                        <a:srgbClr val="D1D5DB"/>
+                      </a:solidFill>
+                      <a:prstDash val="solid"/>
+                      <a:round/>
+                      <a:headEnd type="none" w="med" len="med"/>
+                      <a:tailEnd type="none" w="med" len="med"/>
+                    </a:lnR>
+                    <a:lnT w="6350" cap="flat" cmpd="sng" algn="ctr">
+                      <a:solidFill>
+                        <a:srgbClr val="D1D5DB"/>
+                      </a:solidFill>
+                      <a:prstDash val="solid"/>
+                      <a:round/>
+                      <a:headEnd type="none" w="med" len="med"/>
+                      <a:tailEnd type="none" w="med" len="med"/>
+                    </a:lnT>
+                    <a:lnB w="6350" cap="flat" cmpd="sng" algn="ctr">
+                      <a:solidFill>
+                        <a:srgbClr val="D1D5DB"/>
+                      </a:solidFill>
+                      <a:prstDash val="solid"/>
+                      <a:round/>
+                      <a:headEnd type="none" w="med" len="med"/>
+                      <a:tailEnd type="none" w="med" len="med"/>
+                    </a:lnB>
+                    <a:solidFill>
+                      <a:srgbClr val="FFFFFF"/>
+                    </a:solidFill>
+                  </a:tcPr>
+                </a:tc>
+                <a:tc>
+                  <a:txBody>
+                    <a:bodyPr/>
+                    <a:lstStyle/>
+                    <a:p>
+                      <a:pPr indent="0" marL="0">
+                        <a:buNone/>
+                      </a:pPr>
+                      <a:r>
+                        <a:rPr lang="en-US" sz="1100" dirty="0">
+                          <a:solidFill>
+                            <a:srgbClr val="212121"/>
+                          </a:solidFill>
+                          <a:latin typeface="Calibri" pitchFamily="34" charset="0"/>
+                          <a:ea typeface="Calibri" pitchFamily="34" charset="-122"/>
+                          <a:cs typeface="Calibri" pitchFamily="34" charset="-120"/>
+                        </a:rPr>
+                        <a:t>Unknown or high-risk server</a:t>
+                      </a:r>
+                      <a:endParaRPr lang="en-US" sz="1100" dirty="0">
+                        <a:latin typeface="Calibri" charset="0"/>
+                        <a:ea typeface="Calibri" charset="0"/>
+                        <a:cs typeface="Calibri" charset="0"/>
+                      </a:endParaRPr>
+                    </a:p>
+                  </a:txBody>
+                  <a:tcPr marL="54864" marR="54864" marT="54864" marB="54864" anchor="ctr">
+                    <a:lnL w="6350" cap="flat" cmpd="sng" algn="ctr">
+                      <a:solidFill>
+                        <a:srgbClr val="D1D5DB"/>
+                      </a:solidFill>
+                      <a:prstDash val="solid"/>
+                      <a:round/>
+                      <a:headEnd type="none" w="med" len="med"/>
+                      <a:tailEnd type="none" w="med" len="med"/>
+                    </a:lnL>
+                    <a:lnR w="6350" cap="flat" cmpd="sng" algn="ctr">
+                      <a:solidFill>
+                        <a:srgbClr val="D1D5DB"/>
+                      </a:solidFill>
+                      <a:prstDash val="solid"/>
+                      <a:round/>
+                      <a:headEnd type="none" w="med" len="med"/>
+                      <a:tailEnd type="none" w="med" len="med"/>
+                    </a:lnR>
+                    <a:lnT w="6350" cap="flat" cmpd="sng" algn="ctr">
+                      <a:solidFill>
+                        <a:srgbClr val="D1D5DB"/>
+                      </a:solidFill>
+                      <a:prstDash val="solid"/>
+                      <a:round/>
+                      <a:headEnd type="none" w="med" len="med"/>
+                      <a:tailEnd type="none" w="med" len="med"/>
+                    </a:lnT>
+                    <a:lnB w="6350" cap="flat" cmpd="sng" algn="ctr">
+                      <a:solidFill>
+                        <a:srgbClr val="D1D5DB"/>
+                      </a:solidFill>
+                      <a:prstDash val="solid"/>
+                      <a:round/>
+                      <a:headEnd type="none" w="med" len="med"/>
+                      <a:tailEnd type="none" w="med" len="med"/>
+                    </a:lnB>
+                    <a:solidFill>
+                      <a:srgbClr val="FFFFFF"/>
+                    </a:solidFill>
+                  </a:tcPr>
+                </a:tc>
+              </a:tr>
+              <a:tr h="658368">
+                <a:tc>
+                  <a:txBody>
+                    <a:bodyPr/>
+                    <a:lstStyle/>
+                    <a:p>
+                      <a:pPr indent="0" marL="0">
+                        <a:buNone/>
+                      </a:pPr>
+                      <a:r>
+                        <a:rPr lang="en-US" sz="1100" dirty="0">
+                          <a:solidFill>
+                            <a:srgbClr val="212121"/>
+                          </a:solidFill>
+                          <a:latin typeface="Calibri" pitchFamily="34" charset="0"/>
+                          <a:ea typeface="Calibri" pitchFamily="34" charset="-122"/>
+                          <a:cs typeface="Calibri" pitchFamily="34" charset="-120"/>
+                        </a:rPr>
+                        <a:t>never_require</a:t>
+                      </a:r>
+                      <a:endParaRPr lang="en-US" sz="1100" dirty="0">
+                        <a:latin typeface="Calibri" charset="0"/>
+                        <a:ea typeface="Calibri" charset="0"/>
+                        <a:cs typeface="Calibri" charset="0"/>
+                      </a:endParaRPr>
+                    </a:p>
+                  </a:txBody>
+                  <a:tcPr marL="54864" marR="54864" marT="54864" marB="54864" anchor="ctr">
+                    <a:lnL w="6350" cap="flat" cmpd="sng" algn="ctr">
+                      <a:solidFill>
+                        <a:srgbClr val="D1D5DB"/>
+                      </a:solidFill>
+                      <a:prstDash val="solid"/>
+                      <a:round/>
+                      <a:headEnd type="none" w="med" len="med"/>
+                      <a:tailEnd type="none" w="med" len="med"/>
+                    </a:lnL>
+                    <a:lnR w="6350" cap="flat" cmpd="sng" algn="ctr">
+                      <a:solidFill>
+                        <a:srgbClr val="D1D5DB"/>
+                      </a:solidFill>
+                      <a:prstDash val="solid"/>
+                      <a:round/>
+                      <a:headEnd type="none" w="med" len="med"/>
+                      <a:tailEnd type="none" w="med" len="med"/>
+                    </a:lnR>
+                    <a:lnT w="6350" cap="flat" cmpd="sng" algn="ctr">
+                      <a:solidFill>
+                        <a:srgbClr val="D1D5DB"/>
+                      </a:solidFill>
+                      <a:prstDash val="solid"/>
+                      <a:round/>
+                      <a:headEnd type="none" w="med" len="med"/>
+                      <a:tailEnd type="none" w="med" len="med"/>
+                    </a:lnT>
+                    <a:lnB w="6350" cap="flat" cmpd="sng" algn="ctr">
+                      <a:solidFill>
+                        <a:srgbClr val="D1D5DB"/>
+                      </a:solidFill>
+                      <a:prstDash val="solid"/>
+                      <a:round/>
+                      <a:headEnd type="none" w="med" len="med"/>
+                      <a:tailEnd type="none" w="med" len="med"/>
+                    </a:lnB>
+                    <a:solidFill>
+                      <a:srgbClr val="F3F4F6"/>
+                    </a:solidFill>
+                  </a:tcPr>
+                </a:tc>
+                <a:tc>
+                  <a:txBody>
+                    <a:bodyPr/>
+                    <a:lstStyle/>
+                    <a:p>
+                      <a:pPr indent="0" marL="0">
+                        <a:buNone/>
+                      </a:pPr>
+                      <a:r>
+                        <a:rPr lang="en-US" sz="1100" dirty="0">
+                          <a:solidFill>
+                            <a:srgbClr val="212121"/>
+                          </a:solidFill>
+                          <a:latin typeface="Calibri" pitchFamily="34" charset="0"/>
+                          <a:ea typeface="Calibri" pitchFamily="34" charset="-122"/>
+                          <a:cs typeface="Calibri" pitchFamily="34" charset="-120"/>
+                        </a:rPr>
+                        <a:t>Calls proceed without approval</a:t>
+                      </a:r>
+                      <a:endParaRPr lang="en-US" sz="1100" dirty="0">
+                        <a:latin typeface="Calibri" charset="0"/>
+                        <a:ea typeface="Calibri" charset="0"/>
+                        <a:cs typeface="Calibri" charset="0"/>
+                      </a:endParaRPr>
+                    </a:p>
+                  </a:txBody>
+                  <a:tcPr marL="54864" marR="54864" marT="54864" marB="54864" anchor="ctr">
+                    <a:lnL w="6350" cap="flat" cmpd="sng" algn="ctr">
+                      <a:solidFill>
+                        <a:srgbClr val="D1D5DB"/>
+                      </a:solidFill>
+                      <a:prstDash val="solid"/>
+                      <a:round/>
+                      <a:headEnd type="none" w="med" len="med"/>
+                      <a:tailEnd type="none" w="med" len="med"/>
+                    </a:lnL>
+                    <a:lnR w="6350" cap="flat" cmpd="sng" algn="ctr">
+                      <a:solidFill>
+                        <a:srgbClr val="D1D5DB"/>
+                      </a:solidFill>
+                      <a:prstDash val="solid"/>
+                      <a:round/>
+                      <a:headEnd type="none" w="med" len="med"/>
+                      <a:tailEnd type="none" w="med" len="med"/>
+                    </a:lnR>
+                    <a:lnT w="6350" cap="flat" cmpd="sng" algn="ctr">
+                      <a:solidFill>
+                        <a:srgbClr val="D1D5DB"/>
+                      </a:solidFill>
+                      <a:prstDash val="solid"/>
+                      <a:round/>
+                      <a:headEnd type="none" w="med" len="med"/>
+                      <a:tailEnd type="none" w="med" len="med"/>
+                    </a:lnT>
+                    <a:lnB w="6350" cap="flat" cmpd="sng" algn="ctr">
+                      <a:solidFill>
+                        <a:srgbClr val="D1D5DB"/>
+                      </a:solidFill>
+                      <a:prstDash val="solid"/>
+                      <a:round/>
+                      <a:headEnd type="none" w="med" len="med"/>
+                      <a:tailEnd type="none" w="med" len="med"/>
+                    </a:lnB>
+                    <a:solidFill>
+                      <a:srgbClr val="F3F4F6"/>
+                    </a:solidFill>
+                  </a:tcPr>
+                </a:tc>
+                <a:tc>
+                  <a:txBody>
+                    <a:bodyPr/>
+                    <a:lstStyle/>
+                    <a:p>
+                      <a:pPr indent="0" marL="0">
+                        <a:buNone/>
+                      </a:pPr>
+                      <a:r>
+                        <a:rPr lang="en-US" sz="1100" dirty="0">
+                          <a:solidFill>
+                            <a:srgbClr val="212121"/>
+                          </a:solidFill>
+                          <a:latin typeface="Calibri" pitchFamily="34" charset="0"/>
+                          <a:ea typeface="Calibri" pitchFamily="34" charset="-122"/>
+                          <a:cs typeface="Calibri" pitchFamily="34" charset="-120"/>
+                        </a:rPr>
+                        <a:t>Trusted, low-risk read tools</a:t>
+                      </a:r>
+                      <a:endParaRPr lang="en-US" sz="1100" dirty="0">
+                        <a:latin typeface="Calibri" charset="0"/>
+                        <a:ea typeface="Calibri" charset="0"/>
+                        <a:cs typeface="Calibri" charset="0"/>
+                      </a:endParaRPr>
+                    </a:p>
+                  </a:txBody>
+                  <a:tcPr marL="54864" marR="54864" marT="54864" marB="54864" anchor="ctr">
+                    <a:lnL w="6350" cap="flat" cmpd="sng" algn="ctr">
+                      <a:solidFill>
+                        <a:srgbClr val="D1D5DB"/>
+                      </a:solidFill>
+                      <a:prstDash val="solid"/>
+                      <a:round/>
+                      <a:headEnd type="none" w="med" len="med"/>
+                      <a:tailEnd type="none" w="med" len="med"/>
+                    </a:lnL>
+                    <a:lnR w="6350" cap="flat" cmpd="sng" algn="ctr">
+                      <a:solidFill>
+                        <a:srgbClr val="D1D5DB"/>
+                      </a:solidFill>
+                      <a:prstDash val="solid"/>
+                      <a:round/>
+                      <a:headEnd type="none" w="med" len="med"/>
+                      <a:tailEnd type="none" w="med" len="med"/>
+                    </a:lnR>
+                    <a:lnT w="6350" cap="flat" cmpd="sng" algn="ctr">
+                      <a:solidFill>
+                        <a:srgbClr val="D1D5DB"/>
+                      </a:solidFill>
+                      <a:prstDash val="solid"/>
+                      <a:round/>
+                      <a:headEnd type="none" w="med" len="med"/>
+                      <a:tailEnd type="none" w="med" len="med"/>
+                    </a:lnT>
+                    <a:lnB w="6350" cap="flat" cmpd="sng" algn="ctr">
+                      <a:solidFill>
+                        <a:srgbClr val="D1D5DB"/>
+                      </a:solidFill>
+                      <a:prstDash val="solid"/>
+                      <a:round/>
+                      <a:headEnd type="none" w="med" len="med"/>
+                      <a:tailEnd type="none" w="med" len="med"/>
+                    </a:lnB>
+                    <a:solidFill>
+                      <a:srgbClr val="F3F4F6"/>
+                    </a:solidFill>
+                  </a:tcPr>
+                </a:tc>
+              </a:tr>
+              <a:tr h="658368">
+                <a:tc>
+                  <a:txBody>
+                    <a:bodyPr/>
+                    <a:lstStyle/>
+                    <a:p>
+                      <a:pPr indent="0" marL="0">
+                        <a:buNone/>
+                      </a:pPr>
+                      <a:r>
+                        <a:rPr lang="en-US" sz="1100" dirty="0">
+                          <a:solidFill>
+                            <a:srgbClr val="212121"/>
+                          </a:solidFill>
+                          <a:latin typeface="Calibri" pitchFamily="34" charset="0"/>
+                          <a:ea typeface="Calibri" pitchFamily="34" charset="-122"/>
+                          <a:cs typeface="Calibri" pitchFamily="34" charset="-120"/>
+                        </a:rPr>
+                        <a:t>Per-tool mapping</a:t>
+                      </a:r>
+                      <a:endParaRPr lang="en-US" sz="1100" dirty="0">
+                        <a:latin typeface="Calibri" charset="0"/>
+                        <a:ea typeface="Calibri" charset="0"/>
+                        <a:cs typeface="Calibri" charset="0"/>
+                      </a:endParaRPr>
+                    </a:p>
+                  </a:txBody>
+                  <a:tcPr marL="54864" marR="54864" marT="54864" marB="54864" anchor="ctr">
+                    <a:lnL w="6350" cap="flat" cmpd="sng" algn="ctr">
+                      <a:solidFill>
+                        <a:srgbClr val="D1D5DB"/>
+                      </a:solidFill>
+                      <a:prstDash val="solid"/>
+                      <a:round/>
+                      <a:headEnd type="none" w="med" len="med"/>
+                      <a:tailEnd type="none" w="med" len="med"/>
+                    </a:lnL>
+                    <a:lnR w="6350" cap="flat" cmpd="sng" algn="ctr">
+                      <a:solidFill>
+                        <a:srgbClr val="D1D5DB"/>
+                      </a:solidFill>
+                      <a:prstDash val="solid"/>
+                      <a:round/>
+                      <a:headEnd type="none" w="med" len="med"/>
+                      <a:tailEnd type="none" w="med" len="med"/>
+                    </a:lnR>
+                    <a:lnT w="6350" cap="flat" cmpd="sng" algn="ctr">
+                      <a:solidFill>
+                        <a:srgbClr val="D1D5DB"/>
+                      </a:solidFill>
+                      <a:prstDash val="solid"/>
+                      <a:round/>
+                      <a:headEnd type="none" w="med" len="med"/>
+                      <a:tailEnd type="none" w="med" len="med"/>
+                    </a:lnT>
+                    <a:lnB w="6350" cap="flat" cmpd="sng" algn="ctr">
+                      <a:solidFill>
+                        <a:srgbClr val="D1D5DB"/>
+                      </a:solidFill>
+                      <a:prstDash val="solid"/>
+                      <a:round/>
+                      <a:headEnd type="none" w="med" len="med"/>
+                      <a:tailEnd type="none" w="med" len="med"/>
+                    </a:lnB>
+                    <a:solidFill>
+                      <a:srgbClr val="FFFFFF"/>
+                    </a:solidFill>
+                  </a:tcPr>
+                </a:tc>
+                <a:tc>
+                  <a:txBody>
+                    <a:bodyPr/>
+                    <a:lstStyle/>
+                    <a:p>
+                      <a:pPr indent="0" marL="0">
+                        <a:buNone/>
+                      </a:pPr>
+                      <a:r>
+                        <a:rPr lang="en-US" sz="1100" dirty="0">
+                          <a:solidFill>
+                            <a:srgbClr val="212121"/>
+                          </a:solidFill>
+                          <a:latin typeface="Calibri" pitchFamily="34" charset="0"/>
+                          <a:ea typeface="Calibri" pitchFamily="34" charset="-122"/>
+                          <a:cs typeface="Calibri" pitchFamily="34" charset="-120"/>
+                        </a:rPr>
+                        <a:t>Different rules by tool name</a:t>
+                      </a:r>
+                      <a:endParaRPr lang="en-US" sz="1100" dirty="0">
+                        <a:latin typeface="Calibri" charset="0"/>
+                        <a:ea typeface="Calibri" charset="0"/>
+                        <a:cs typeface="Calibri" charset="0"/>
+                      </a:endParaRPr>
+                    </a:p>
+                  </a:txBody>
+                  <a:tcPr marL="54864" marR="54864" marT="54864" marB="54864" anchor="ctr">
+                    <a:lnL w="6350" cap="flat" cmpd="sng" algn="ctr">
+                      <a:solidFill>
+                        <a:srgbClr val="D1D5DB"/>
+                      </a:solidFill>
+                      <a:prstDash val="solid"/>
+                      <a:round/>
+                      <a:headEnd type="none" w="med" len="med"/>
+                      <a:tailEnd type="none" w="med" len="med"/>
+                    </a:lnL>
+                    <a:lnR w="6350" cap="flat" cmpd="sng" algn="ctr">
+                      <a:solidFill>
+                        <a:srgbClr val="D1D5DB"/>
+                      </a:solidFill>
+                      <a:prstDash val="solid"/>
+                      <a:round/>
+                      <a:headEnd type="none" w="med" len="med"/>
+                      <a:tailEnd type="none" w="med" len="med"/>
+                    </a:lnR>
+                    <a:lnT w="6350" cap="flat" cmpd="sng" algn="ctr">
+                      <a:solidFill>
+                        <a:srgbClr val="D1D5DB"/>
+                      </a:solidFill>
+                      <a:prstDash val="solid"/>
+                      <a:round/>
+                      <a:headEnd type="none" w="med" len="med"/>
+                      <a:tailEnd type="none" w="med" len="med"/>
+                    </a:lnT>
+                    <a:lnB w="6350" cap="flat" cmpd="sng" algn="ctr">
+                      <a:solidFill>
+                        <a:srgbClr val="D1D5DB"/>
+                      </a:solidFill>
+                      <a:prstDash val="solid"/>
+                      <a:round/>
+                      <a:headEnd type="none" w="med" len="med"/>
+                      <a:tailEnd type="none" w="med" len="med"/>
+                    </a:lnB>
+                    <a:solidFill>
+                      <a:srgbClr val="FFFFFF"/>
+                    </a:solidFill>
+                  </a:tcPr>
+                </a:tc>
+                <a:tc>
+                  <a:txBody>
+                    <a:bodyPr/>
+                    <a:lstStyle/>
+                    <a:p>
+                      <a:pPr indent="0" marL="0">
+                        <a:buNone/>
+                      </a:pPr>
+                      <a:r>
+                        <a:rPr lang="en-US" sz="1100" dirty="0">
+                          <a:solidFill>
+                            <a:srgbClr val="212121"/>
+                          </a:solidFill>
+                          <a:latin typeface="Calibri" pitchFamily="34" charset="0"/>
+                          <a:ea typeface="Calibri" pitchFamily="34" charset="-122"/>
+                          <a:cs typeface="Calibri" pitchFamily="34" charset="-120"/>
+                        </a:rPr>
+                        <a:t>Read automatically; review writes</a:t>
+                      </a:r>
+                      <a:endParaRPr lang="en-US" sz="1100" dirty="0">
+                        <a:latin typeface="Calibri" charset="0"/>
+                        <a:ea typeface="Calibri" charset="0"/>
+                        <a:cs typeface="Calibri" charset="0"/>
+                      </a:endParaRPr>
+                    </a:p>
+                  </a:txBody>
+                  <a:tcPr marL="54864" marR="54864" marT="54864" marB="54864" anchor="ctr">
+                    <a:lnL w="6350" cap="flat" cmpd="sng" algn="ctr">
+                      <a:solidFill>
+                        <a:srgbClr val="D1D5DB"/>
+                      </a:solidFill>
+                      <a:prstDash val="solid"/>
+                      <a:round/>
+                      <a:headEnd type="none" w="med" len="med"/>
+                      <a:tailEnd type="none" w="med" len="med"/>
+                    </a:lnL>
+                    <a:lnR w="6350" cap="flat" cmpd="sng" algn="ctr">
+                      <a:solidFill>
+                        <a:srgbClr val="D1D5DB"/>
+                      </a:solidFill>
+                      <a:prstDash val="solid"/>
+                      <a:round/>
+                      <a:headEnd type="none" w="med" len="med"/>
+                      <a:tailEnd type="none" w="med" len="med"/>
+                    </a:lnR>
+                    <a:lnT w="6350" cap="flat" cmpd="sng" algn="ctr">
+                      <a:solidFill>
+                        <a:srgbClr val="D1D5DB"/>
+                      </a:solidFill>
+                      <a:prstDash val="solid"/>
+                      <a:round/>
+                      <a:headEnd type="none" w="med" len="med"/>
+                      <a:tailEnd type="none" w="med" len="med"/>
+                    </a:lnT>
+                    <a:lnB w="6350" cap="flat" cmpd="sng" algn="ctr">
+                      <a:solidFill>
+                        <a:srgbClr val="D1D5DB"/>
+                      </a:solidFill>
+                      <a:prstDash val="solid"/>
+                      <a:round/>
+                      <a:headEnd type="none" w="med" len="med"/>
+                      <a:tailEnd type="none" w="med" len="med"/>
+                    </a:lnB>
+                    <a:solidFill>
+                      <a:srgbClr val="FFFFFF"/>
+                    </a:solidFill>
+                  </a:tcPr>
+                </a:tc>
+              </a:tr>
+            </a:tbl>
+          </a:graphicData>
+        </a:graphic>
+      </p:graphicFrame>
+      <p:sp>
+        <p:nvSpPr>
+          <p:cNvPr id="6" name="Shape 3"/>
           <p:cNvSpPr/>
           <p:nvPr/>
         </p:nvSpPr>
@@ -4111,7 +4592,7 @@
       </p:sp>
       <p:sp>
         <p:nvSpPr>
-          <p:cNvPr id="29" name="Text 27"/>
+          <p:cNvPr id="7" name="Text 4"/>
           <p:cNvSpPr/>
           <p:nvPr/>
         </p:nvSpPr>
@@ -4144,7 +4625,7 @@
                 <a:ea typeface="Calibri" pitchFamily="34" charset="-122"/>
                 <a:cs typeface="Calibri" pitchFamily="34" charset="-120"/>
               </a:rPr>
-              <a:t>Source: https://learn.microsoft.com/en-us/agent-framework/agents/tools/local-mcp-tools?tabs=python</a:t>
+              <a:t>Source: https://learn.microsoft.com/en-us/python/api/agent-framework-core/agent_framework.mcpstreamablehttptool?view=agent-framework-python-latest  ·  +1 in notes</a:t>
             </a:r>
             <a:endParaRPr lang="en-US" sz="820" dirty="0"/>
           </a:p>
@@ -4161,6 +4642,359 @@
 <file path=ppt/slides/slide13.xml><?xml version="1.0" encoding="utf-8"?>
 <p:sld xmlns:a="http://schemas.openxmlformats.org/drawingml/2006/main" xmlns:r="http://schemas.openxmlformats.org/officeDocument/2006/relationships" xmlns:p="http://schemas.openxmlformats.org/presentationml/2006/main">
   <p:cSld name="Slide 13">
+    <p:bg>
+      <p:bgPr>
+        <a:solidFill>
+          <a:srgbClr val="CADCFC"/>
+        </a:solidFill>
+      </p:bgPr>
+    </p:bg>
+    <p:spTree>
+      <p:nvGrpSpPr>
+        <p:cNvPr id="1" name=""/>
+        <p:cNvGrpSpPr/>
+        <p:nvPr/>
+      </p:nvGrpSpPr>
+      <p:grpSpPr>
+        <a:xfrm>
+          <a:off x="0" y="0"/>
+          <a:ext cx="0" cy="0"/>
+          <a:chOff x="0" y="0"/>
+          <a:chExt cx="0" cy="0"/>
+        </a:xfrm>
+      </p:grpSpPr>
+      <p:sp>
+        <p:nvSpPr>
+          <p:cNvPr id="2" name="Shape 0"/>
+          <p:cNvSpPr/>
+          <p:nvPr/>
+        </p:nvSpPr>
+        <p:spPr>
+          <a:xfrm>
+            <a:off x="0" y="0"/>
+            <a:ext cx="146304" cy="5143500"/>
+          </a:xfrm>
+          <a:prstGeom prst="rect">
+            <a:avLst/>
+          </a:prstGeom>
+          <a:solidFill>
+            <a:srgbClr val="1E2761"/>
+          </a:solidFill>
+          <a:ln/>
+        </p:spPr>
+      </p:sp>
+      <p:sp>
+        <p:nvSpPr>
+          <p:cNvPr id="3" name="Text 1"/>
+          <p:cNvSpPr/>
+          <p:nvPr/>
+        </p:nvSpPr>
+        <p:spPr>
+          <a:xfrm>
+            <a:off x="5669280" y="274320"/>
+            <a:ext cx="3291840" cy="274320"/>
+          </a:xfrm>
+          <a:prstGeom prst="rect">
+            <a:avLst/>
+          </a:prstGeom>
+          <a:noFill/>
+          <a:ln/>
+        </p:spPr>
+        <p:txBody>
+          <a:bodyPr wrap="square" lIns="0" tIns="0" rIns="0" bIns="0" rtlCol="0" anchor="ctr"/>
+          <a:lstStyle/>
+          <a:p>
+            <a:pPr algn="r" indent="0" marL="0">
+              <a:buNone/>
+            </a:pPr>
+            <a:r>
+              <a:rPr lang="en-US" sz="1000" dirty="0">
+                <a:solidFill>
+                  <a:srgbClr val="6B7280"/>
+                </a:solidFill>
+                <a:latin typeface="Calibri" pitchFamily="34" charset="0"/>
+                <a:ea typeface="Calibri" pitchFamily="34" charset="-122"/>
+                <a:cs typeface="Calibri" pitchFamily="34" charset="-120"/>
+              </a:rPr>
+              <a:t>Day 3 · Module 5 · Demo</a:t>
+            </a:r>
+            <a:endParaRPr lang="en-US" sz="1000" dirty="0"/>
+          </a:p>
+        </p:txBody>
+      </p:sp>
+      <p:sp>
+        <p:nvSpPr>
+          <p:cNvPr id="4" name="Text 2"/>
+          <p:cNvSpPr/>
+          <p:nvPr/>
+        </p:nvSpPr>
+        <p:spPr>
+          <a:xfrm>
+            <a:off x="548640" y="1051560"/>
+            <a:ext cx="5486400" cy="502920"/>
+          </a:xfrm>
+          <a:prstGeom prst="rect">
+            <a:avLst/>
+          </a:prstGeom>
+          <a:noFill/>
+          <a:ln/>
+        </p:spPr>
+        <p:txBody>
+          <a:bodyPr wrap="square" lIns="0" tIns="0" rIns="0" bIns="0" rtlCol="0" anchor="ctr"/>
+          <a:lstStyle/>
+          <a:p>
+            <a:pPr indent="0" marL="0">
+              <a:buNone/>
+            </a:pPr>
+            <a:r>
+              <a:rPr lang="en-US" sz="3200" b="1" spc="800" kern="0" dirty="0">
+                <a:solidFill>
+                  <a:srgbClr val="1E2761"/>
+                </a:solidFill>
+                <a:latin typeface="Calibri" pitchFamily="34" charset="0"/>
+                <a:ea typeface="Calibri" pitchFamily="34" charset="-122"/>
+                <a:cs typeface="Calibri" pitchFamily="34" charset="-120"/>
+              </a:rPr>
+              <a:t>DEMO</a:t>
+            </a:r>
+            <a:endParaRPr lang="en-US" sz="3200" dirty="0"/>
+          </a:p>
+        </p:txBody>
+      </p:sp>
+      <p:sp>
+        <p:nvSpPr>
+          <p:cNvPr id="5" name="Text 3"/>
+          <p:cNvSpPr/>
+          <p:nvPr/>
+        </p:nvSpPr>
+        <p:spPr>
+          <a:xfrm>
+            <a:off x="548640" y="1691640"/>
+            <a:ext cx="8046720" cy="914400"/>
+          </a:xfrm>
+          <a:prstGeom prst="rect">
+            <a:avLst/>
+          </a:prstGeom>
+          <a:noFill/>
+          <a:ln/>
+        </p:spPr>
+        <p:txBody>
+          <a:bodyPr wrap="square" lIns="0" tIns="0" rIns="0" bIns="0" rtlCol="0" anchor="ctr"/>
+          <a:lstStyle/>
+          <a:p>
+            <a:pPr indent="0" marL="0">
+              <a:buNone/>
+            </a:pPr>
+            <a:r>
+              <a:rPr lang="en-US" sz="3000" b="1" dirty="0">
+                <a:solidFill>
+                  <a:srgbClr val="1E2761"/>
+                </a:solidFill>
+                <a:latin typeface="Calibri" pitchFamily="34" charset="0"/>
+                <a:ea typeface="Calibri" pitchFamily="34" charset="-122"/>
+                <a:cs typeface="Calibri" pitchFamily="34" charset="-120"/>
+              </a:rPr>
+              <a:t>approval_mode pauses a write tool for review</a:t>
+            </a:r>
+            <a:endParaRPr lang="en-US" sz="3000" dirty="0"/>
+          </a:p>
+        </p:txBody>
+      </p:sp>
+      <p:sp>
+        <p:nvSpPr>
+          <p:cNvPr id="6" name="Text 4"/>
+          <p:cNvSpPr/>
+          <p:nvPr/>
+        </p:nvSpPr>
+        <p:spPr>
+          <a:xfrm>
+            <a:off x="6583680" y="1051560"/>
+            <a:ext cx="2194560" cy="502920"/>
+          </a:xfrm>
+          <a:prstGeom prst="rect">
+            <a:avLst/>
+          </a:prstGeom>
+          <a:noFill/>
+          <a:ln/>
+        </p:spPr>
+        <p:txBody>
+          <a:bodyPr wrap="square" lIns="0" tIns="0" rIns="0" bIns="0" rtlCol="0" anchor="ctr"/>
+          <a:lstStyle/>
+          <a:p>
+            <a:pPr algn="r" indent="0" marL="0">
+              <a:buNone/>
+            </a:pPr>
+            <a:r>
+              <a:rPr lang="en-US" sz="1800" i="1" dirty="0">
+                <a:solidFill>
+                  <a:srgbClr val="6B7280"/>
+                </a:solidFill>
+                <a:latin typeface="Calibri" pitchFamily="34" charset="0"/>
+                <a:ea typeface="Calibri" pitchFamily="34" charset="-122"/>
+                <a:cs typeface="Calibri" pitchFamily="34" charset="-120"/>
+              </a:rPr>
+              <a:t>~5 min</a:t>
+            </a:r>
+            <a:endParaRPr lang="en-US" sz="1800" dirty="0"/>
+          </a:p>
+        </p:txBody>
+      </p:sp>
+      <p:sp>
+        <p:nvSpPr>
+          <p:cNvPr id="7" name="Text 5"/>
+          <p:cNvSpPr/>
+          <p:nvPr/>
+        </p:nvSpPr>
+        <p:spPr>
+          <a:xfrm>
+            <a:off x="548640" y="2788920"/>
+            <a:ext cx="8046720" cy="1371600"/>
+          </a:xfrm>
+          <a:prstGeom prst="rect">
+            <a:avLst/>
+          </a:prstGeom>
+          <a:noFill/>
+          <a:ln/>
+        </p:spPr>
+        <p:txBody>
+          <a:bodyPr wrap="square" lIns="0" tIns="0" rIns="0" bIns="0" rtlCol="0" anchor="ctr"/>
+          <a:lstStyle/>
+          <a:p>
+            <a:pPr indent="0" marL="0">
+              <a:spcAft>
+                <a:spcPts val="600"/>
+              </a:spcAft>
+              <a:buNone/>
+            </a:pPr>
+            <a:r>
+              <a:rPr lang="en-US" sz="1600" dirty="0">
+                <a:solidFill>
+                  <a:srgbClr val="212121"/>
+                </a:solidFill>
+                <a:latin typeface="Calibri" pitchFamily="34" charset="0"/>
+                <a:ea typeface="Calibri" pitchFamily="34" charset="-122"/>
+                <a:cs typeface="Calibri" pitchFamily="34" charset="-120"/>
+              </a:rPr>
+              <a:t>Set approval_mode="always_require" on the MCP tool and run a request that needs it: the run pauses with a user-input request naming the tool and arguments, and only resumes after an explicit approval decision — the same pause/resume mechanic the official function-tool sample demonstrates, wired onto an MCP tool.</a:t>
+            </a:r>
+            <a:endParaRPr lang="en-US" sz="1600" dirty="0"/>
+          </a:p>
+        </p:txBody>
+      </p:sp>
+      <p:sp>
+        <p:nvSpPr>
+          <p:cNvPr id="8" name="Text 6"/>
+          <p:cNvSpPr/>
+          <p:nvPr/>
+        </p:nvSpPr>
+        <p:spPr>
+          <a:xfrm>
+            <a:off x="548640" y="4434840"/>
+            <a:ext cx="8046720" cy="320040"/>
+          </a:xfrm>
+          <a:prstGeom prst="rect">
+            <a:avLst/>
+          </a:prstGeom>
+          <a:noFill/>
+          <a:ln/>
+        </p:spPr>
+        <p:txBody>
+          <a:bodyPr wrap="square" lIns="0" tIns="0" rIns="0" bIns="0" rtlCol="0" anchor="ctr"/>
+          <a:lstStyle/>
+          <a:p>
+            <a:pPr indent="0" marL="0">
+              <a:buNone/>
+            </a:pPr>
+            <a:r>
+              <a:rPr lang="en-US" sz="1100" i="1" dirty="0">
+                <a:solidFill>
+                  <a:srgbClr val="6B7280"/>
+                </a:solidFill>
+                <a:latin typeface="Calibri" pitchFamily="34" charset="0"/>
+                <a:ea typeface="Calibri" pitchFamily="34" charset="-122"/>
+                <a:cs typeface="Calibri" pitchFamily="34" charset="-120"/>
+              </a:rPr>
+              <a:t>Runbook: demos/day3/module-5-demo-2-approval-mode.md</a:t>
+            </a:r>
+            <a:endParaRPr lang="en-US" sz="1100" dirty="0"/>
+          </a:p>
+        </p:txBody>
+      </p:sp>
+      <p:sp>
+        <p:nvSpPr>
+          <p:cNvPr id="9" name="Shape 7"/>
+          <p:cNvSpPr/>
+          <p:nvPr/>
+        </p:nvSpPr>
+        <p:spPr>
+          <a:xfrm>
+            <a:off x="365760" y="4773168"/>
+            <a:ext cx="8412480" cy="0"/>
+          </a:xfrm>
+          <a:prstGeom prst="line">
+            <a:avLst/>
+          </a:prstGeom>
+          <a:noFill/>
+          <a:ln w="6350">
+            <a:solidFill>
+              <a:srgbClr val="D1D5DB"/>
+            </a:solidFill>
+            <a:prstDash val="solid"/>
+          </a:ln>
+        </p:spPr>
+      </p:sp>
+      <p:sp>
+        <p:nvSpPr>
+          <p:cNvPr id="10" name="Text 8"/>
+          <p:cNvSpPr/>
+          <p:nvPr/>
+        </p:nvSpPr>
+        <p:spPr>
+          <a:xfrm>
+            <a:off x="384048" y="4818888"/>
+            <a:ext cx="8275320" cy="182880"/>
+          </a:xfrm>
+          <a:prstGeom prst="rect">
+            <a:avLst/>
+          </a:prstGeom>
+          <a:noFill/>
+          <a:ln/>
+        </p:spPr>
+        <p:txBody>
+          <a:bodyPr wrap="square" lIns="0" tIns="0" rIns="0" bIns="0" rtlCol="0" anchor="ctr">
+            <a:normAutofit/>
+          </a:bodyPr>
+          <a:lstStyle/>
+          <a:p>
+            <a:pPr indent="0" marL="0">
+              <a:buNone/>
+            </a:pPr>
+            <a:r>
+              <a:rPr lang="en-US" sz="820" dirty="0">
+                <a:solidFill>
+                  <a:srgbClr val="6B7280"/>
+                </a:solidFill>
+                <a:latin typeface="Calibri" pitchFamily="34" charset="0"/>
+                <a:ea typeface="Calibri" pitchFamily="34" charset="-122"/>
+                <a:cs typeface="Calibri" pitchFamily="34" charset="-120"/>
+              </a:rPr>
+              <a:t>Source: https://learn.microsoft.com/en-us/python/api/agent-framework-core/agent_framework.mcpstreamablehttptool?view=agent-framework-python-latest  ·  +1 in notes</a:t>
+            </a:r>
+            <a:endParaRPr lang="en-US" sz="820" dirty="0"/>
+          </a:p>
+        </p:txBody>
+      </p:sp>
+    </p:spTree>
+  </p:cSld>
+  <p:clrMapOvr>
+    <a:masterClrMapping/>
+  </p:clrMapOvr>
+</p:sld>
+</file>
+
+<file path=ppt/slides/slide14.xml><?xml version="1.0" encoding="utf-8"?>
+<p:sld xmlns:a="http://schemas.openxmlformats.org/drawingml/2006/main" xmlns:r="http://schemas.openxmlformats.org/officeDocument/2006/relationships" xmlns:p="http://schemas.openxmlformats.org/presentationml/2006/main">
+  <p:cSld name="Slide 14">
     <p:bg>
       <p:bgPr>
         <a:solidFill>
@@ -4270,7 +5104,7 @@
               <a:buNone/>
             </a:pPr>
             <a:r>
-              <a:rPr lang="en-US" sz="2800" b="1" dirty="0">
+              <a:rPr lang="en-US" sz="2500" b="1" dirty="0">
                 <a:solidFill>
                   <a:srgbClr val="1E2761"/>
                 </a:solidFill>
@@ -4278,6 +5112,640 @@
                 <a:ea typeface="Calibri" pitchFamily="34" charset="-122"/>
                 <a:cs typeface="Calibri" pitchFamily="34" charset="-120"/>
               </a:rPr>
+              <a:t>Security is broader than authentication</a:t>
+            </a:r>
+            <a:endParaRPr lang="en-US" sz="2500" dirty="0"/>
+          </a:p>
+        </p:txBody>
+      </p:sp>
+      <p:sp>
+        <p:nvSpPr>
+          <p:cNvPr id="5" name="Shape 3"/>
+          <p:cNvSpPr/>
+          <p:nvPr/>
+        </p:nvSpPr>
+        <p:spPr>
+          <a:xfrm>
+            <a:off x="365760" y="1078992"/>
+            <a:ext cx="4105656" cy="1655064"/>
+          </a:xfrm>
+          <a:prstGeom prst="roundRect">
+            <a:avLst>
+              <a:gd name="adj" fmla="val 3315"/>
+            </a:avLst>
+          </a:prstGeom>
+          <a:solidFill>
+            <a:srgbClr val="CADCFC"/>
+          </a:solidFill>
+          <a:ln w="10160">
+            <a:solidFill>
+              <a:srgbClr val="1E2761"/>
+            </a:solidFill>
+            <a:prstDash val="solid"/>
+          </a:ln>
+        </p:spPr>
+      </p:sp>
+      <p:sp>
+        <p:nvSpPr>
+          <p:cNvPr id="6" name="Text 4"/>
+          <p:cNvSpPr/>
+          <p:nvPr/>
+        </p:nvSpPr>
+        <p:spPr>
+          <a:xfrm>
+            <a:off x="512064" y="1197864"/>
+            <a:ext cx="3813048" cy="310896"/>
+          </a:xfrm>
+          <a:prstGeom prst="rect">
+            <a:avLst/>
+          </a:prstGeom>
+          <a:noFill/>
+          <a:ln/>
+        </p:spPr>
+        <p:txBody>
+          <a:bodyPr wrap="square" lIns="0" tIns="0" rIns="0" bIns="0" rtlCol="0" anchor="ctr">
+            <a:normAutofit/>
+          </a:bodyPr>
+          <a:lstStyle/>
+          <a:p>
+            <a:pPr indent="0" marL="0">
+              <a:buNone/>
+            </a:pPr>
+            <a:r>
+              <a:rPr lang="en-US" sz="1500" b="1" dirty="0">
+                <a:solidFill>
+                  <a:srgbClr val="1E2761"/>
+                </a:solidFill>
+                <a:latin typeface="Calibri" pitchFamily="34" charset="0"/>
+                <a:ea typeface="Calibri" pitchFamily="34" charset="-122"/>
+                <a:cs typeface="Calibri" pitchFamily="34" charset="-120"/>
+              </a:rPr>
+              <a:t>Trust</a:t>
+            </a:r>
+            <a:endParaRPr lang="en-US" sz="1500" dirty="0"/>
+          </a:p>
+        </p:txBody>
+      </p:sp>
+      <p:sp>
+        <p:nvSpPr>
+          <p:cNvPr id="7" name="Text 5"/>
+          <p:cNvSpPr/>
+          <p:nvPr/>
+        </p:nvSpPr>
+        <p:spPr>
+          <a:xfrm>
+            <a:off x="512064" y="1581912"/>
+            <a:ext cx="3813048" cy="1033272"/>
+          </a:xfrm>
+          <a:prstGeom prst="rect">
+            <a:avLst/>
+          </a:prstGeom>
+          <a:noFill/>
+          <a:ln/>
+        </p:spPr>
+        <p:txBody>
+          <a:bodyPr wrap="square" lIns="0" tIns="0" rIns="0" bIns="0" rtlCol="0" anchor="t">
+            <a:normAutofit/>
+          </a:bodyPr>
+          <a:lstStyle/>
+          <a:p>
+            <a:pPr indent="0" marL="0">
+              <a:buNone/>
+            </a:pPr>
+            <a:r>
+              <a:rPr lang="en-US" sz="1150" dirty="0">
+                <a:solidFill>
+                  <a:srgbClr val="212121"/>
+                </a:solidFill>
+                <a:latin typeface="Calibri" pitchFamily="34" charset="0"/>
+                <a:ea typeface="Calibri" pitchFamily="34" charset="-122"/>
+                <a:cs typeface="Calibri" pitchFamily="34" charset="-120"/>
+              </a:rPr>
+              <a:t>Review the server operator and package provenance</a:t>
+            </a:r>
+            <a:endParaRPr lang="en-US" sz="1150" dirty="0"/>
+          </a:p>
+        </p:txBody>
+      </p:sp>
+      <p:sp>
+        <p:nvSpPr>
+          <p:cNvPr id="8" name="Shape 6"/>
+          <p:cNvSpPr/>
+          <p:nvPr/>
+        </p:nvSpPr>
+        <p:spPr>
+          <a:xfrm>
+            <a:off x="4672584" y="1078992"/>
+            <a:ext cx="4105656" cy="1655064"/>
+          </a:xfrm>
+          <a:prstGeom prst="roundRect">
+            <a:avLst>
+              <a:gd name="adj" fmla="val 3315"/>
+            </a:avLst>
+          </a:prstGeom>
+          <a:solidFill>
+            <a:srgbClr val="F3F4F6"/>
+          </a:solidFill>
+          <a:ln w="10160">
+            <a:solidFill>
+              <a:srgbClr val="D1D5DB"/>
+            </a:solidFill>
+            <a:prstDash val="solid"/>
+          </a:ln>
+        </p:spPr>
+      </p:sp>
+      <p:sp>
+        <p:nvSpPr>
+          <p:cNvPr id="9" name="Text 7"/>
+          <p:cNvSpPr/>
+          <p:nvPr/>
+        </p:nvSpPr>
+        <p:spPr>
+          <a:xfrm>
+            <a:off x="4818888" y="1197864"/>
+            <a:ext cx="3813048" cy="310896"/>
+          </a:xfrm>
+          <a:prstGeom prst="rect">
+            <a:avLst/>
+          </a:prstGeom>
+          <a:noFill/>
+          <a:ln/>
+        </p:spPr>
+        <p:txBody>
+          <a:bodyPr wrap="square" lIns="0" tIns="0" rIns="0" bIns="0" rtlCol="0" anchor="ctr">
+            <a:normAutofit/>
+          </a:bodyPr>
+          <a:lstStyle/>
+          <a:p>
+            <a:pPr indent="0" marL="0">
+              <a:buNone/>
+            </a:pPr>
+            <a:r>
+              <a:rPr lang="en-US" sz="1500" b="1" dirty="0">
+                <a:solidFill>
+                  <a:srgbClr val="1E2761"/>
+                </a:solidFill>
+                <a:latin typeface="Calibri" pitchFamily="34" charset="0"/>
+                <a:ea typeface="Calibri" pitchFamily="34" charset="-122"/>
+                <a:cs typeface="Calibri" pitchFamily="34" charset="-120"/>
+              </a:rPr>
+              <a:t>Least privilege</a:t>
+            </a:r>
+            <a:endParaRPr lang="en-US" sz="1500" dirty="0"/>
+          </a:p>
+        </p:txBody>
+      </p:sp>
+      <p:sp>
+        <p:nvSpPr>
+          <p:cNvPr id="10" name="Text 8"/>
+          <p:cNvSpPr/>
+          <p:nvPr/>
+        </p:nvSpPr>
+        <p:spPr>
+          <a:xfrm>
+            <a:off x="4818888" y="1581912"/>
+            <a:ext cx="3813048" cy="1033272"/>
+          </a:xfrm>
+          <a:prstGeom prst="rect">
+            <a:avLst/>
+          </a:prstGeom>
+          <a:noFill/>
+          <a:ln/>
+        </p:spPr>
+        <p:txBody>
+          <a:bodyPr wrap="square" lIns="0" tIns="0" rIns="0" bIns="0" rtlCol="0" anchor="t">
+            <a:normAutofit/>
+          </a:bodyPr>
+          <a:lstStyle/>
+          <a:p>
+            <a:pPr indent="0" marL="0">
+              <a:buNone/>
+            </a:pPr>
+            <a:r>
+              <a:rPr lang="en-US" sz="1150" dirty="0">
+                <a:solidFill>
+                  <a:srgbClr val="212121"/>
+                </a:solidFill>
+                <a:latin typeface="Calibri" pitchFamily="34" charset="0"/>
+                <a:ea typeface="Calibri" pitchFamily="34" charset="-122"/>
+                <a:cs typeface="Calibri" pitchFamily="34" charset="-120"/>
+              </a:rPr>
+              <a:t>Narrow identity scopes and allowed_tools</a:t>
+            </a:r>
+            <a:endParaRPr lang="en-US" sz="1150" dirty="0"/>
+          </a:p>
+        </p:txBody>
+      </p:sp>
+      <p:sp>
+        <p:nvSpPr>
+          <p:cNvPr id="11" name="Shape 9"/>
+          <p:cNvSpPr/>
+          <p:nvPr/>
+        </p:nvSpPr>
+        <p:spPr>
+          <a:xfrm>
+            <a:off x="365760" y="2935224"/>
+            <a:ext cx="4105656" cy="1655064"/>
+          </a:xfrm>
+          <a:prstGeom prst="roundRect">
+            <a:avLst>
+              <a:gd name="adj" fmla="val 3315"/>
+            </a:avLst>
+          </a:prstGeom>
+          <a:solidFill>
+            <a:srgbClr val="F3F4F6"/>
+          </a:solidFill>
+          <a:ln w="10160">
+            <a:solidFill>
+              <a:srgbClr val="D1D5DB"/>
+            </a:solidFill>
+            <a:prstDash val="solid"/>
+          </a:ln>
+        </p:spPr>
+      </p:sp>
+      <p:sp>
+        <p:nvSpPr>
+          <p:cNvPr id="12" name="Text 10"/>
+          <p:cNvSpPr/>
+          <p:nvPr/>
+        </p:nvSpPr>
+        <p:spPr>
+          <a:xfrm>
+            <a:off x="512064" y="3054096"/>
+            <a:ext cx="3813048" cy="310896"/>
+          </a:xfrm>
+          <a:prstGeom prst="rect">
+            <a:avLst/>
+          </a:prstGeom>
+          <a:noFill/>
+          <a:ln/>
+        </p:spPr>
+        <p:txBody>
+          <a:bodyPr wrap="square" lIns="0" tIns="0" rIns="0" bIns="0" rtlCol="0" anchor="ctr">
+            <a:normAutofit/>
+          </a:bodyPr>
+          <a:lstStyle/>
+          <a:p>
+            <a:pPr indent="0" marL="0">
+              <a:buNone/>
+            </a:pPr>
+            <a:r>
+              <a:rPr lang="en-US" sz="1500" b="1" dirty="0">
+                <a:solidFill>
+                  <a:srgbClr val="1E2761"/>
+                </a:solidFill>
+                <a:latin typeface="Calibri" pitchFamily="34" charset="0"/>
+                <a:ea typeface="Calibri" pitchFamily="34" charset="-122"/>
+                <a:cs typeface="Calibri" pitchFamily="34" charset="-120"/>
+              </a:rPr>
+              <a:t>Prompt injection</a:t>
+            </a:r>
+            <a:endParaRPr lang="en-US" sz="1500" dirty="0"/>
+          </a:p>
+        </p:txBody>
+      </p:sp>
+      <p:sp>
+        <p:nvSpPr>
+          <p:cNvPr id="13" name="Text 11"/>
+          <p:cNvSpPr/>
+          <p:nvPr/>
+        </p:nvSpPr>
+        <p:spPr>
+          <a:xfrm>
+            <a:off x="512064" y="3438144"/>
+            <a:ext cx="3813048" cy="1033272"/>
+          </a:xfrm>
+          <a:prstGeom prst="rect">
+            <a:avLst/>
+          </a:prstGeom>
+          <a:noFill/>
+          <a:ln/>
+        </p:spPr>
+        <p:txBody>
+          <a:bodyPr wrap="square" lIns="0" tIns="0" rIns="0" bIns="0" rtlCol="0" anchor="t">
+            <a:normAutofit/>
+          </a:bodyPr>
+          <a:lstStyle/>
+          <a:p>
+            <a:pPr indent="0" marL="0">
+              <a:buNone/>
+            </a:pPr>
+            <a:r>
+              <a:rPr lang="en-US" sz="1150" dirty="0">
+                <a:solidFill>
+                  <a:srgbClr val="212121"/>
+                </a:solidFill>
+                <a:latin typeface="Calibri" pitchFamily="34" charset="0"/>
+                <a:ea typeface="Calibri" pitchFamily="34" charset="-122"/>
+                <a:cs typeface="Calibri" pitchFamily="34" charset="-120"/>
+              </a:rPr>
+              <a:t>Treat tool metadata and results as untrusted</a:t>
+            </a:r>
+            <a:endParaRPr lang="en-US" sz="1150" dirty="0"/>
+          </a:p>
+        </p:txBody>
+      </p:sp>
+      <p:sp>
+        <p:nvSpPr>
+          <p:cNvPr id="14" name="Shape 12"/>
+          <p:cNvSpPr/>
+          <p:nvPr/>
+        </p:nvSpPr>
+        <p:spPr>
+          <a:xfrm>
+            <a:off x="4672584" y="2935224"/>
+            <a:ext cx="4105656" cy="1655064"/>
+          </a:xfrm>
+          <a:prstGeom prst="roundRect">
+            <a:avLst>
+              <a:gd name="adj" fmla="val 3315"/>
+            </a:avLst>
+          </a:prstGeom>
+          <a:solidFill>
+            <a:srgbClr val="F3F4F6"/>
+          </a:solidFill>
+          <a:ln w="10160">
+            <a:solidFill>
+              <a:srgbClr val="D1D5DB"/>
+            </a:solidFill>
+            <a:prstDash val="solid"/>
+          </a:ln>
+        </p:spPr>
+      </p:sp>
+      <p:sp>
+        <p:nvSpPr>
+          <p:cNvPr id="15" name="Text 13"/>
+          <p:cNvSpPr/>
+          <p:nvPr/>
+        </p:nvSpPr>
+        <p:spPr>
+          <a:xfrm>
+            <a:off x="4818888" y="3054096"/>
+            <a:ext cx="3813048" cy="310896"/>
+          </a:xfrm>
+          <a:prstGeom prst="rect">
+            <a:avLst/>
+          </a:prstGeom>
+          <a:noFill/>
+          <a:ln/>
+        </p:spPr>
+        <p:txBody>
+          <a:bodyPr wrap="square" lIns="0" tIns="0" rIns="0" bIns="0" rtlCol="0" anchor="ctr">
+            <a:normAutofit/>
+          </a:bodyPr>
+          <a:lstStyle/>
+          <a:p>
+            <a:pPr indent="0" marL="0">
+              <a:buNone/>
+            </a:pPr>
+            <a:r>
+              <a:rPr lang="en-US" sz="1500" b="1" dirty="0">
+                <a:solidFill>
+                  <a:srgbClr val="1E2761"/>
+                </a:solidFill>
+                <a:latin typeface="Calibri" pitchFamily="34" charset="0"/>
+                <a:ea typeface="Calibri" pitchFamily="34" charset="-122"/>
+                <a:cs typeface="Calibri" pitchFamily="34" charset="-120"/>
+              </a:rPr>
+              <a:t>Audit</a:t>
+            </a:r>
+            <a:endParaRPr lang="en-US" sz="1500" dirty="0"/>
+          </a:p>
+        </p:txBody>
+      </p:sp>
+      <p:sp>
+        <p:nvSpPr>
+          <p:cNvPr id="16" name="Text 14"/>
+          <p:cNvSpPr/>
+          <p:nvPr/>
+        </p:nvSpPr>
+        <p:spPr>
+          <a:xfrm>
+            <a:off x="4818888" y="3438144"/>
+            <a:ext cx="3813048" cy="1033272"/>
+          </a:xfrm>
+          <a:prstGeom prst="rect">
+            <a:avLst/>
+          </a:prstGeom>
+          <a:noFill/>
+          <a:ln/>
+        </p:spPr>
+        <p:txBody>
+          <a:bodyPr wrap="square" lIns="0" tIns="0" rIns="0" bIns="0" rtlCol="0" anchor="t">
+            <a:normAutofit/>
+          </a:bodyPr>
+          <a:lstStyle/>
+          <a:p>
+            <a:pPr indent="0" marL="0">
+              <a:buNone/>
+            </a:pPr>
+            <a:r>
+              <a:rPr lang="en-US" sz="1150" dirty="0">
+                <a:solidFill>
+                  <a:srgbClr val="212121"/>
+                </a:solidFill>
+                <a:latin typeface="Calibri" pitchFamily="34" charset="0"/>
+                <a:ea typeface="Calibri" pitchFamily="34" charset="-122"/>
+                <a:cs typeface="Calibri" pitchFamily="34" charset="-120"/>
+              </a:rPr>
+              <a:t>Log selected tool, arguments, approval, result status, and caller</a:t>
+            </a:r>
+            <a:endParaRPr lang="en-US" sz="1150" dirty="0"/>
+          </a:p>
+        </p:txBody>
+      </p:sp>
+      <p:sp>
+        <p:nvSpPr>
+          <p:cNvPr id="17" name="Shape 15"/>
+          <p:cNvSpPr/>
+          <p:nvPr/>
+        </p:nvSpPr>
+        <p:spPr>
+          <a:xfrm>
+            <a:off x="365760" y="4773168"/>
+            <a:ext cx="8412480" cy="0"/>
+          </a:xfrm>
+          <a:prstGeom prst="line">
+            <a:avLst/>
+          </a:prstGeom>
+          <a:noFill/>
+          <a:ln w="6350">
+            <a:solidFill>
+              <a:srgbClr val="D1D5DB"/>
+            </a:solidFill>
+            <a:prstDash val="solid"/>
+          </a:ln>
+        </p:spPr>
+      </p:sp>
+      <p:sp>
+        <p:nvSpPr>
+          <p:cNvPr id="18" name="Text 16"/>
+          <p:cNvSpPr/>
+          <p:nvPr/>
+        </p:nvSpPr>
+        <p:spPr>
+          <a:xfrm>
+            <a:off x="384048" y="4818888"/>
+            <a:ext cx="8275320" cy="182880"/>
+          </a:xfrm>
+          <a:prstGeom prst="rect">
+            <a:avLst/>
+          </a:prstGeom>
+          <a:noFill/>
+          <a:ln/>
+        </p:spPr>
+        <p:txBody>
+          <a:bodyPr wrap="square" lIns="0" tIns="0" rIns="0" bIns="0" rtlCol="0" anchor="ctr">
+            <a:normAutofit/>
+          </a:bodyPr>
+          <a:lstStyle/>
+          <a:p>
+            <a:pPr indent="0" marL="0">
+              <a:buNone/>
+            </a:pPr>
+            <a:r>
+              <a:rPr lang="en-US" sz="820" dirty="0">
+                <a:solidFill>
+                  <a:srgbClr val="6B7280"/>
+                </a:solidFill>
+                <a:latin typeface="Calibri" pitchFamily="34" charset="0"/>
+                <a:ea typeface="Calibri" pitchFamily="34" charset="-122"/>
+                <a:cs typeface="Calibri" pitchFamily="34" charset="-120"/>
+              </a:rPr>
+              <a:t>Source: https://learn.microsoft.com/en-us/agent-framework/agents/tools/local-mcp-tools?tabs=python</a:t>
+            </a:r>
+            <a:endParaRPr lang="en-US" sz="820" dirty="0"/>
+          </a:p>
+        </p:txBody>
+      </p:sp>
+    </p:spTree>
+  </p:cSld>
+  <p:clrMapOvr>
+    <a:masterClrMapping/>
+  </p:clrMapOvr>
+</p:sld>
+</file>
+
+<file path=ppt/slides/slide15.xml><?xml version="1.0" encoding="utf-8"?>
+<p:sld xmlns:a="http://schemas.openxmlformats.org/drawingml/2006/main" xmlns:r="http://schemas.openxmlformats.org/officeDocument/2006/relationships" xmlns:p="http://schemas.openxmlformats.org/presentationml/2006/main">
+  <p:cSld name="Slide 15">
+    <p:bg>
+      <p:bgPr>
+        <a:solidFill>
+          <a:srgbClr val="FFFFFF"/>
+        </a:solidFill>
+      </p:bgPr>
+    </p:bg>
+    <p:spTree>
+      <p:nvGrpSpPr>
+        <p:cNvPr id="1" name=""/>
+        <p:cNvGrpSpPr/>
+        <p:nvPr/>
+      </p:nvGrpSpPr>
+      <p:grpSpPr>
+        <a:xfrm>
+          <a:off x="0" y="0"/>
+          <a:ext cx="0" cy="0"/>
+          <a:chOff x="0" y="0"/>
+          <a:chExt cx="0" cy="0"/>
+        </a:xfrm>
+      </p:grpSpPr>
+      <p:sp>
+        <p:nvSpPr>
+          <p:cNvPr id="2" name="Shape 0"/>
+          <p:cNvSpPr/>
+          <p:nvPr/>
+        </p:nvSpPr>
+        <p:spPr>
+          <a:xfrm>
+            <a:off x="0" y="0"/>
+            <a:ext cx="54864" cy="5143500"/>
+          </a:xfrm>
+          <a:prstGeom prst="rect">
+            <a:avLst/>
+          </a:prstGeom>
+          <a:solidFill>
+            <a:srgbClr val="1E2761"/>
+          </a:solidFill>
+          <a:ln/>
+        </p:spPr>
+      </p:sp>
+      <p:sp>
+        <p:nvSpPr>
+          <p:cNvPr id="3" name="Text 1"/>
+          <p:cNvSpPr/>
+          <p:nvPr/>
+        </p:nvSpPr>
+        <p:spPr>
+          <a:xfrm>
+            <a:off x="5486400" y="256032"/>
+            <a:ext cx="3337560" cy="228600"/>
+          </a:xfrm>
+          <a:prstGeom prst="rect">
+            <a:avLst/>
+          </a:prstGeom>
+          <a:noFill/>
+          <a:ln/>
+        </p:spPr>
+        <p:txBody>
+          <a:bodyPr wrap="square" lIns="0" tIns="0" rIns="0" bIns="0" rtlCol="0" anchor="ctr">
+            <a:normAutofit/>
+          </a:bodyPr>
+          <a:lstStyle/>
+          <a:p>
+            <a:pPr algn="r" indent="0" marL="0">
+              <a:buNone/>
+            </a:pPr>
+            <a:r>
+              <a:rPr lang="en-US" sz="950" dirty="0">
+                <a:solidFill>
+                  <a:srgbClr val="6B7280"/>
+                </a:solidFill>
+                <a:latin typeface="Calibri" pitchFamily="34" charset="0"/>
+                <a:ea typeface="Calibri" pitchFamily="34" charset="-122"/>
+                <a:cs typeface="Calibri" pitchFamily="34" charset="-120"/>
+              </a:rPr>
+              <a:t>Day 3 · Module 5</a:t>
+            </a:r>
+            <a:endParaRPr lang="en-US" sz="950" dirty="0"/>
+          </a:p>
+        </p:txBody>
+      </p:sp>
+      <p:sp>
+        <p:nvSpPr>
+          <p:cNvPr id="4" name="Text 2"/>
+          <p:cNvSpPr/>
+          <p:nvPr/>
+        </p:nvSpPr>
+        <p:spPr>
+          <a:xfrm>
+            <a:off x="365760" y="310896"/>
+            <a:ext cx="6583680" cy="603504"/>
+          </a:xfrm>
+          <a:prstGeom prst="rect">
+            <a:avLst/>
+          </a:prstGeom>
+          <a:noFill/>
+          <a:ln/>
+        </p:spPr>
+        <p:txBody>
+          <a:bodyPr wrap="square" lIns="0" tIns="0" rIns="0" bIns="0" rtlCol="0" anchor="ctr">
+            <a:normAutofit/>
+          </a:bodyPr>
+          <a:lstStyle/>
+          <a:p>
+            <a:pPr indent="0" marL="0">
+              <a:buNone/>
+            </a:pPr>
+            <a:r>
+              <a:rPr lang="en-US" sz="2800" b="1" dirty="0">
+                <a:solidFill>
+                  <a:srgbClr val="1E2761"/>
+                </a:solidFill>
+                <a:latin typeface="Calibri" pitchFamily="34" charset="0"/>
+                <a:ea typeface="Calibri" pitchFamily="34" charset="-122"/>
+                <a:cs typeface="Calibri" pitchFamily="34" charset="-120"/>
+              </a:rPr>
               <a:t>Local or remote?</a:t>
             </a:r>
             <a:endParaRPr lang="en-US" sz="2800" dirty="0"/>
@@ -4286,7 +5754,7 @@
       </p:sp>
       <p:graphicFrame>
         <p:nvGraphicFramePr>
-          <p:cNvPr id="14" name="Table 0"/>
+          <p:cNvPr id="16" name="Table 0"/>
           <p:cNvGraphicFramePr>
             <a:graphicFrameLocks noGrp="1"/>
           </p:cNvGraphicFramePr>
@@ -5623,9 +7091,9 @@
 </p:sld>
 </file>
 
-<file path=ppt/slides/slide14.xml><?xml version="1.0" encoding="utf-8"?>
+<file path=ppt/slides/slide16.xml><?xml version="1.0" encoding="utf-8"?>
 <p:sld xmlns:a="http://schemas.openxmlformats.org/drawingml/2006/main" xmlns:r="http://schemas.openxmlformats.org/officeDocument/2006/relationships" xmlns:p="http://schemas.openxmlformats.org/presentationml/2006/main">
-  <p:cSld name="Slide 14">
+  <p:cSld name="Slide 16">
     <p:bg>
       <p:bgPr>
         <a:solidFill>
@@ -6264,7 +7732,7 @@
             <a:avLst/>
           </a:prstGeom>
           <a:solidFill>
-            <a:srgbClr val="CADCFC"/>
+            <a:srgbClr val="F3F4F6"/>
           </a:solidFill>
           <a:ln w="6350">
             <a:solidFill>
@@ -6566,7 +8034,7 @@
                 <a:ea typeface="Calibri" pitchFamily="34" charset="-122"/>
                 <a:cs typeface="Calibri" pitchFamily="34" charset="-120"/>
               </a:rPr>
-              <a:t>The client/server loop</a:t>
+              <a:t>MCP Base Protocol</a:t>
             </a:r>
             <a:endParaRPr lang="en-US" sz="2800" dirty="0"/>
           </a:p>
@@ -6574,61 +8042,14 @@
       </p:sp>
       <p:sp>
         <p:nvSpPr>
-          <p:cNvPr id="5" name="Shape 3"/>
-          <p:cNvSpPr/>
-          <p:nvPr/>
-        </p:nvSpPr>
-        <p:spPr>
-          <a:xfrm>
-            <a:off x="365760" y="1216152"/>
-            <a:ext cx="2633472" cy="1572768"/>
-          </a:xfrm>
-          <a:prstGeom prst="roundRect">
-            <a:avLst>
-              <a:gd name="adj" fmla="val 3488"/>
-            </a:avLst>
-          </a:prstGeom>
-          <a:solidFill>
-            <a:srgbClr val="CADCFC"/>
-          </a:solidFill>
-          <a:ln w="10160">
-            <a:solidFill>
-              <a:srgbClr val="1E2761"/>
-            </a:solidFill>
-            <a:prstDash val="solid"/>
-          </a:ln>
-        </p:spPr>
-      </p:sp>
-      <p:sp>
-        <p:nvSpPr>
-          <p:cNvPr id="6" name="Shape 4"/>
-          <p:cNvSpPr/>
-          <p:nvPr/>
-        </p:nvSpPr>
-        <p:spPr>
-          <a:xfrm>
-            <a:off x="475488" y="1335024"/>
-            <a:ext cx="320040" cy="320040"/>
-          </a:xfrm>
-          <a:prstGeom prst="ellipse">
-            <a:avLst/>
-          </a:prstGeom>
-          <a:solidFill>
-            <a:srgbClr val="1E2761"/>
-          </a:solidFill>
-          <a:ln/>
-        </p:spPr>
-      </p:sp>
-      <p:sp>
-        <p:nvSpPr>
-          <p:cNvPr id="7" name="Text 5"/>
-          <p:cNvSpPr/>
-          <p:nvPr/>
-        </p:nvSpPr>
-        <p:spPr>
-          <a:xfrm>
-            <a:off x="475488" y="1385316"/>
-            <a:ext cx="320040" cy="146304"/>
+          <p:cNvPr id="5" name="Text 3"/>
+          <p:cNvSpPr/>
+          <p:nvPr/>
+        </p:nvSpPr>
+        <p:spPr>
+          <a:xfrm>
+            <a:off x="502920" y="1170432"/>
+            <a:ext cx="7955280" cy="3520440"/>
           </a:xfrm>
           <a:prstGeom prst="rect">
             <a:avLst/>
@@ -6637,243 +8058,96 @@
           <a:ln/>
         </p:spPr>
         <p:txBody>
-          <a:bodyPr wrap="square" lIns="0" tIns="0" rIns="0" bIns="0" rtlCol="0" anchor="ctr"/>
-          <a:lstStyle/>
-          <a:p>
-            <a:pPr algn="ctr" indent="0" marL="0">
-              <a:buNone/>
-            </a:pPr>
-            <a:r>
-              <a:rPr lang="en-US" sz="900" b="1" dirty="0">
-                <a:solidFill>
-                  <a:srgbClr val="FFFFFF"/>
+          <a:bodyPr wrap="square" lIns="0" tIns="0" rIns="0" bIns="0" rtlCol="0" anchor="t">
+            <a:normAutofit/>
+          </a:bodyPr>
+          <a:lstStyle/>
+          <a:p>
+            <a:pPr marL="342900" indent="-342900">
+              <a:spcAft>
+                <a:spcPts val="1000"/>
+              </a:spcAft>
+              <a:buSzPct val="100000"/>
+              <a:buChar char="•"/>
+            </a:pPr>
+            <a:r>
+              <a:rPr lang="en-US" sz="1600" b="1" dirty="0">
+                <a:solidFill>
+                  <a:srgbClr val="1E2761"/>
                 </a:solidFill>
                 <a:latin typeface="Calibri" pitchFamily="34" charset="0"/>
                 <a:ea typeface="Calibri" pitchFamily="34" charset="-122"/>
                 <a:cs typeface="Calibri" pitchFamily="34" charset="-120"/>
               </a:rPr>
-              <a:t>1</a:t>
-            </a:r>
-            <a:endParaRPr lang="en-US" sz="900" dirty="0"/>
-          </a:p>
-        </p:txBody>
-      </p:sp>
-      <p:sp>
-        <p:nvSpPr>
-          <p:cNvPr id="8" name="Text 6"/>
-          <p:cNvSpPr/>
-          <p:nvPr/>
-        </p:nvSpPr>
-        <p:spPr>
-          <a:xfrm>
-            <a:off x="896112" y="1335024"/>
-            <a:ext cx="1975104" cy="310896"/>
-          </a:xfrm>
-          <a:prstGeom prst="rect">
-            <a:avLst/>
-          </a:prstGeom>
-          <a:noFill/>
-          <a:ln/>
-        </p:spPr>
-        <p:txBody>
-          <a:bodyPr wrap="square" lIns="0" tIns="0" rIns="0" bIns="0" rtlCol="0" anchor="ctr">
-            <a:normAutofit/>
-          </a:bodyPr>
-          <a:lstStyle/>
-          <a:p>
-            <a:pPr indent="0" marL="0">
-              <a:buNone/>
-            </a:pPr>
-            <a:r>
-              <a:rPr lang="en-US" sz="1500" b="1" dirty="0">
-                <a:solidFill>
-                  <a:srgbClr val="1E2761"/>
+              <a:t>Messages</a:t>
+            </a:r>
+            <a:pPr indent="0" marL="0">
+              <a:spcAft>
+                <a:spcPts val="1000"/>
+              </a:spcAft>
+              <a:buNone/>
+            </a:pPr>
+            <a:r>
+              <a:rPr lang="en-US" sz="1600" dirty="0">
+                <a:solidFill>
+                  <a:srgbClr val="212121"/>
                 </a:solidFill>
                 <a:latin typeface="Calibri" pitchFamily="34" charset="0"/>
                 <a:ea typeface="Calibri" pitchFamily="34" charset="-122"/>
                 <a:cs typeface="Calibri" pitchFamily="34" charset="-120"/>
               </a:rPr>
-              <a:t>Connect</a:t>
-            </a:r>
-            <a:endParaRPr lang="en-US" sz="1500" dirty="0"/>
-          </a:p>
-        </p:txBody>
-      </p:sp>
-      <p:sp>
-        <p:nvSpPr>
-          <p:cNvPr id="9" name="Text 7"/>
-          <p:cNvSpPr/>
-          <p:nvPr/>
-        </p:nvSpPr>
-        <p:spPr>
-          <a:xfrm>
-            <a:off x="512064" y="1719072"/>
-            <a:ext cx="2340864" cy="950976"/>
-          </a:xfrm>
-          <a:prstGeom prst="rect">
-            <a:avLst/>
-          </a:prstGeom>
-          <a:noFill/>
-          <a:ln/>
-        </p:spPr>
-        <p:txBody>
-          <a:bodyPr wrap="square" lIns="0" tIns="0" rIns="0" bIns="0" rtlCol="0" anchor="t">
-            <a:normAutofit/>
-          </a:bodyPr>
-          <a:lstStyle/>
-          <a:p>
-            <a:pPr indent="0" marL="0">
-              <a:buNone/>
-            </a:pPr>
-            <a:r>
-              <a:rPr lang="en-US" sz="1150" dirty="0">
-                <a:solidFill>
-                  <a:srgbClr val="212121"/>
+              <a:t>  —  JSON-RPC 2.0 requests, responses, and notifications are the only message shapes the protocol defines</a:t>
+            </a:r>
+            <a:endParaRPr lang="en-US" sz="1600" dirty="0"/>
+          </a:p>
+          <a:p>
+            <a:pPr marL="342900" indent="-342900">
+              <a:spcAft>
+                <a:spcPts val="1000"/>
+              </a:spcAft>
+              <a:buSzPct val="100000"/>
+              <a:buChar char="•"/>
+            </a:pPr>
+            <a:r>
+              <a:rPr lang="en-US" sz="1600" b="1" dirty="0">
+                <a:solidFill>
+                  <a:srgbClr val="1E2761"/>
                 </a:solidFill>
                 <a:latin typeface="Calibri" pitchFamily="34" charset="0"/>
                 <a:ea typeface="Calibri" pitchFamily="34" charset="-122"/>
                 <a:cs typeface="Calibri" pitchFamily="34" charset="-120"/>
               </a:rPr>
-              <a:t>Your MAF MCP tool opens the configured transport</a:t>
-            </a:r>
-            <a:endParaRPr lang="en-US" sz="1150" dirty="0"/>
-          </a:p>
-        </p:txBody>
-      </p:sp>
-      <p:sp>
-        <p:nvSpPr>
-          <p:cNvPr id="10" name="Shape 8"/>
-          <p:cNvSpPr/>
-          <p:nvPr/>
-        </p:nvSpPr>
-        <p:spPr>
-          <a:xfrm>
-            <a:off x="3035808" y="1892808"/>
-            <a:ext cx="164592" cy="219456"/>
-          </a:xfrm>
-          <a:prstGeom prst="chevron">
-            <a:avLst/>
-          </a:prstGeom>
-          <a:solidFill>
-            <a:srgbClr val="E8A87C"/>
-          </a:solidFill>
-          <a:ln/>
-        </p:spPr>
-      </p:sp>
-      <p:sp>
-        <p:nvSpPr>
-          <p:cNvPr id="11" name="Shape 9"/>
-          <p:cNvSpPr/>
-          <p:nvPr/>
-        </p:nvSpPr>
-        <p:spPr>
-          <a:xfrm>
-            <a:off x="3255264" y="1216152"/>
-            <a:ext cx="2633472" cy="1572768"/>
-          </a:xfrm>
-          <a:prstGeom prst="roundRect">
-            <a:avLst>
-              <a:gd name="adj" fmla="val 3488"/>
-            </a:avLst>
-          </a:prstGeom>
-          <a:solidFill>
-            <a:srgbClr val="F3F4F6"/>
-          </a:solidFill>
-          <a:ln w="10160">
-            <a:solidFill>
-              <a:srgbClr val="D1D5DB"/>
-            </a:solidFill>
-            <a:prstDash val="solid"/>
-          </a:ln>
-        </p:spPr>
-      </p:sp>
-      <p:sp>
-        <p:nvSpPr>
-          <p:cNvPr id="12" name="Shape 10"/>
-          <p:cNvSpPr/>
-          <p:nvPr/>
-        </p:nvSpPr>
-        <p:spPr>
-          <a:xfrm>
-            <a:off x="3364992" y="1335024"/>
-            <a:ext cx="320040" cy="320040"/>
-          </a:xfrm>
-          <a:prstGeom prst="ellipse">
-            <a:avLst/>
-          </a:prstGeom>
-          <a:solidFill>
-            <a:srgbClr val="1E2761"/>
-          </a:solidFill>
-          <a:ln/>
-        </p:spPr>
-      </p:sp>
-      <p:sp>
-        <p:nvSpPr>
-          <p:cNvPr id="13" name="Text 11"/>
-          <p:cNvSpPr/>
-          <p:nvPr/>
-        </p:nvSpPr>
-        <p:spPr>
-          <a:xfrm>
-            <a:off x="3364992" y="1385316"/>
-            <a:ext cx="320040" cy="146304"/>
-          </a:xfrm>
-          <a:prstGeom prst="rect">
-            <a:avLst/>
-          </a:prstGeom>
-          <a:noFill/>
-          <a:ln/>
-        </p:spPr>
-        <p:txBody>
-          <a:bodyPr wrap="square" lIns="0" tIns="0" rIns="0" bIns="0" rtlCol="0" anchor="ctr"/>
-          <a:lstStyle/>
-          <a:p>
-            <a:pPr algn="ctr" indent="0" marL="0">
-              <a:buNone/>
-            </a:pPr>
-            <a:r>
-              <a:rPr lang="en-US" sz="900" b="1" dirty="0">
-                <a:solidFill>
-                  <a:srgbClr val="FFFFFF"/>
+              <a:t>Lifecycle</a:t>
+            </a:r>
+            <a:pPr indent="0" marL="0">
+              <a:spcAft>
+                <a:spcPts val="1000"/>
+              </a:spcAft>
+              <a:buNone/>
+            </a:pPr>
+            <a:r>
+              <a:rPr lang="en-US" sz="1600" dirty="0">
+                <a:solidFill>
+                  <a:srgbClr val="212121"/>
                 </a:solidFill>
                 <a:latin typeface="Calibri" pitchFamily="34" charset="0"/>
                 <a:ea typeface="Calibri" pitchFamily="34" charset="-122"/>
                 <a:cs typeface="Calibri" pitchFamily="34" charset="-120"/>
               </a:rPr>
-              <a:t>2</a:t>
-            </a:r>
-            <a:endParaRPr lang="en-US" sz="900" dirty="0"/>
-          </a:p>
-        </p:txBody>
-      </p:sp>
-      <p:sp>
-        <p:nvSpPr>
-          <p:cNvPr id="14" name="Text 12"/>
-          <p:cNvSpPr/>
-          <p:nvPr/>
-        </p:nvSpPr>
-        <p:spPr>
-          <a:xfrm>
-            <a:off x="3785616" y="1335024"/>
-            <a:ext cx="1975104" cy="310896"/>
-          </a:xfrm>
-          <a:prstGeom prst="rect">
-            <a:avLst/>
-          </a:prstGeom>
-          <a:noFill/>
-          <a:ln/>
-        </p:spPr>
-        <p:txBody>
-          <a:bodyPr wrap="square" lIns="0" tIns="0" rIns="0" bIns="0" rtlCol="0" anchor="ctr">
-            <a:normAutofit/>
-          </a:bodyPr>
-          <a:lstStyle/>
-          <a:p>
-            <a:pPr indent="0" marL="0">
-              <a:buNone/>
-            </a:pPr>
-            <a:r>
-              <a:rPr lang="en-US" sz="1500" b="1" dirty="0">
+              <a:t>  —  The initialize → initialized handshake negotiates protocol version and capabilities before normal operation begins</a:t>
+            </a:r>
+            <a:endParaRPr lang="en-US" sz="1600" dirty="0"/>
+          </a:p>
+          <a:p>
+            <a:pPr marL="342900" indent="-342900">
+              <a:spcAft>
+                <a:spcPts val="1000"/>
+              </a:spcAft>
+              <a:buSzPct val="100000"/>
+              <a:buChar char="•"/>
+            </a:pPr>
+            <a:r>
+              <a:rPr lang="en-US" sz="1600" b="1" dirty="0">
                 <a:solidFill>
                   <a:srgbClr val="1E2761"/>
                 </a:solidFill>
@@ -6881,40 +8155,16 @@
                 <a:ea typeface="Calibri" pitchFamily="34" charset="-122"/>
                 <a:cs typeface="Calibri" pitchFamily="34" charset="-120"/>
               </a:rPr>
-              <a:t>Discover</a:t>
-            </a:r>
-            <a:endParaRPr lang="en-US" sz="1500" dirty="0"/>
-          </a:p>
-        </p:txBody>
-      </p:sp>
-      <p:sp>
-        <p:nvSpPr>
-          <p:cNvPr id="15" name="Text 13"/>
-          <p:cNvSpPr/>
-          <p:nvPr/>
-        </p:nvSpPr>
-        <p:spPr>
-          <a:xfrm>
-            <a:off x="3401568" y="1719072"/>
-            <a:ext cx="2340864" cy="950976"/>
-          </a:xfrm>
-          <a:prstGeom prst="rect">
-            <a:avLst/>
-          </a:prstGeom>
-          <a:noFill/>
-          <a:ln/>
-        </p:spPr>
-        <p:txBody>
-          <a:bodyPr wrap="square" lIns="0" tIns="0" rIns="0" bIns="0" rtlCol="0" anchor="t">
-            <a:normAutofit/>
-          </a:bodyPr>
-          <a:lstStyle/>
-          <a:p>
-            <a:pPr indent="0" marL="0">
-              <a:buNone/>
-            </a:pPr>
-            <a:r>
-              <a:rPr lang="en-US" sz="1150" dirty="0">
+              <a:t>Transports</a:t>
+            </a:r>
+            <a:pPr indent="0" marL="0">
+              <a:spcAft>
+                <a:spcPts val="1000"/>
+              </a:spcAft>
+              <a:buNone/>
+            </a:pPr>
+            <a:r>
+              <a:rPr lang="en-US" sz="1600" dirty="0">
                 <a:solidFill>
                   <a:srgbClr val="212121"/>
                 </a:solidFill>
@@ -6922,559 +8172,91 @@
                 <a:ea typeface="Calibri" pitchFamily="34" charset="-122"/>
                 <a:cs typeface="Calibri" pitchFamily="34" charset="-120"/>
               </a:rPr>
-              <a:t>The client loads tools exposed by the server</a:t>
-            </a:r>
-            <a:endParaRPr lang="en-US" sz="1150" dirty="0"/>
-          </a:p>
-        </p:txBody>
-      </p:sp>
-      <p:sp>
-        <p:nvSpPr>
-          <p:cNvPr id="16" name="Shape 14"/>
-          <p:cNvSpPr/>
-          <p:nvPr/>
-        </p:nvSpPr>
-        <p:spPr>
-          <a:xfrm>
-            <a:off x="5925312" y="1892808"/>
-            <a:ext cx="164592" cy="219456"/>
-          </a:xfrm>
-          <a:prstGeom prst="chevron">
-            <a:avLst/>
-          </a:prstGeom>
-          <a:solidFill>
-            <a:srgbClr val="E8A87C"/>
-          </a:solidFill>
-          <a:ln/>
-        </p:spPr>
-      </p:sp>
-      <p:sp>
-        <p:nvSpPr>
-          <p:cNvPr id="17" name="Shape 15"/>
-          <p:cNvSpPr/>
-          <p:nvPr/>
-        </p:nvSpPr>
-        <p:spPr>
-          <a:xfrm>
-            <a:off x="6144768" y="1216152"/>
-            <a:ext cx="2633472" cy="1572768"/>
-          </a:xfrm>
-          <a:prstGeom prst="roundRect">
-            <a:avLst>
-              <a:gd name="adj" fmla="val 3488"/>
-            </a:avLst>
-          </a:prstGeom>
-          <a:solidFill>
-            <a:srgbClr val="F3F4F6"/>
-          </a:solidFill>
-          <a:ln w="10160">
-            <a:solidFill>
-              <a:srgbClr val="D1D5DB"/>
-            </a:solidFill>
-            <a:prstDash val="solid"/>
-          </a:ln>
-        </p:spPr>
-      </p:sp>
-      <p:sp>
-        <p:nvSpPr>
-          <p:cNvPr id="18" name="Shape 16"/>
-          <p:cNvSpPr/>
-          <p:nvPr/>
-        </p:nvSpPr>
-        <p:spPr>
-          <a:xfrm>
-            <a:off x="6254496" y="1335024"/>
-            <a:ext cx="320040" cy="320040"/>
-          </a:xfrm>
-          <a:prstGeom prst="ellipse">
-            <a:avLst/>
-          </a:prstGeom>
-          <a:solidFill>
-            <a:srgbClr val="1E2761"/>
-          </a:solidFill>
-          <a:ln/>
-        </p:spPr>
-      </p:sp>
-      <p:sp>
-        <p:nvSpPr>
-          <p:cNvPr id="19" name="Text 17"/>
-          <p:cNvSpPr/>
-          <p:nvPr/>
-        </p:nvSpPr>
-        <p:spPr>
-          <a:xfrm>
-            <a:off x="6254496" y="1385316"/>
-            <a:ext cx="320040" cy="146304"/>
-          </a:xfrm>
-          <a:prstGeom prst="rect">
-            <a:avLst/>
-          </a:prstGeom>
-          <a:noFill/>
-          <a:ln/>
-        </p:spPr>
-        <p:txBody>
-          <a:bodyPr wrap="square" lIns="0" tIns="0" rIns="0" bIns="0" rtlCol="0" anchor="ctr"/>
-          <a:lstStyle/>
-          <a:p>
-            <a:pPr algn="ctr" indent="0" marL="0">
-              <a:buNone/>
-            </a:pPr>
-            <a:r>
-              <a:rPr lang="en-US" sz="900" b="1" dirty="0">
-                <a:solidFill>
-                  <a:srgbClr val="FFFFFF"/>
+              <a:t>  —  stdio (client launches the server as a subprocess) and Streamable HTTP (with optional SSE) are the two standard transports</a:t>
+            </a:r>
+            <a:endParaRPr lang="en-US" sz="1600" dirty="0"/>
+          </a:p>
+          <a:p>
+            <a:pPr marL="342900" indent="-342900">
+              <a:spcAft>
+                <a:spcPts val="1000"/>
+              </a:spcAft>
+              <a:buSzPct val="100000"/>
+              <a:buChar char="•"/>
+            </a:pPr>
+            <a:r>
+              <a:rPr lang="en-US" sz="1600" b="1" dirty="0">
+                <a:solidFill>
+                  <a:srgbClr val="1E2761"/>
                 </a:solidFill>
                 <a:latin typeface="Calibri" pitchFamily="34" charset="0"/>
                 <a:ea typeface="Calibri" pitchFamily="34" charset="-122"/>
                 <a:cs typeface="Calibri" pitchFamily="34" charset="-120"/>
               </a:rPr>
-              <a:t>3</a:t>
-            </a:r>
-            <a:endParaRPr lang="en-US" sz="900" dirty="0"/>
-          </a:p>
-        </p:txBody>
-      </p:sp>
-      <p:sp>
-        <p:nvSpPr>
-          <p:cNvPr id="20" name="Text 18"/>
-          <p:cNvSpPr/>
-          <p:nvPr/>
-        </p:nvSpPr>
-        <p:spPr>
-          <a:xfrm>
-            <a:off x="6675120" y="1335024"/>
-            <a:ext cx="1975104" cy="310896"/>
-          </a:xfrm>
-          <a:prstGeom prst="rect">
-            <a:avLst/>
-          </a:prstGeom>
-          <a:noFill/>
-          <a:ln/>
-        </p:spPr>
-        <p:txBody>
-          <a:bodyPr wrap="square" lIns="0" tIns="0" rIns="0" bIns="0" rtlCol="0" anchor="ctr">
-            <a:normAutofit/>
-          </a:bodyPr>
-          <a:lstStyle/>
-          <a:p>
-            <a:pPr indent="0" marL="0">
-              <a:buNone/>
-            </a:pPr>
-            <a:r>
-              <a:rPr lang="en-US" sz="1500" b="1" dirty="0">
-                <a:solidFill>
-                  <a:srgbClr val="1E2761"/>
+              <a:t>Authorization</a:t>
+            </a:r>
+            <a:pPr indent="0" marL="0">
+              <a:spcAft>
+                <a:spcPts val="1000"/>
+              </a:spcAft>
+              <a:buNone/>
+            </a:pPr>
+            <a:r>
+              <a:rPr lang="en-US" sz="1600" dirty="0">
+                <a:solidFill>
+                  <a:srgbClr val="212121"/>
                 </a:solidFill>
                 <a:latin typeface="Calibri" pitchFamily="34" charset="0"/>
                 <a:ea typeface="Calibri" pitchFamily="34" charset="-122"/>
                 <a:cs typeface="Calibri" pitchFamily="34" charset="-120"/>
               </a:rPr>
-              <a:t>Select</a:t>
-            </a:r>
-            <a:endParaRPr lang="en-US" sz="1500" dirty="0"/>
-          </a:p>
-        </p:txBody>
-      </p:sp>
-      <p:sp>
-        <p:nvSpPr>
-          <p:cNvPr id="21" name="Text 19"/>
-          <p:cNvSpPr/>
-          <p:nvPr/>
-        </p:nvSpPr>
-        <p:spPr>
-          <a:xfrm>
-            <a:off x="6291072" y="1719072"/>
-            <a:ext cx="2340864" cy="950976"/>
-          </a:xfrm>
-          <a:prstGeom prst="rect">
-            <a:avLst/>
-          </a:prstGeom>
-          <a:noFill/>
-          <a:ln/>
-        </p:spPr>
-        <p:txBody>
-          <a:bodyPr wrap="square" lIns="0" tIns="0" rIns="0" bIns="0" rtlCol="0" anchor="t">
-            <a:normAutofit/>
-          </a:bodyPr>
-          <a:lstStyle/>
-          <a:p>
-            <a:pPr indent="0" marL="0">
-              <a:buNone/>
-            </a:pPr>
-            <a:r>
-              <a:rPr lang="en-US" sz="1150" dirty="0">
-                <a:solidFill>
-                  <a:srgbClr val="212121"/>
+              <a:t>  —  Optional OAuth 2.1-based framework for HTTP transports; stdio implementations use environment credentials instead</a:t>
+            </a:r>
+            <a:endParaRPr lang="en-US" sz="1600" dirty="0"/>
+          </a:p>
+          <a:p>
+            <a:pPr marL="342900" indent="-342900">
+              <a:spcAft>
+                <a:spcPts val="1000"/>
+              </a:spcAft>
+              <a:buSzPct val="100000"/>
+              <a:buChar char="•"/>
+            </a:pPr>
+            <a:r>
+              <a:rPr lang="en-US" sz="1600" b="1" dirty="0">
+                <a:solidFill>
+                  <a:srgbClr val="1E2761"/>
                 </a:solidFill>
                 <a:latin typeface="Calibri" pitchFamily="34" charset="0"/>
                 <a:ea typeface="Calibri" pitchFamily="34" charset="-122"/>
                 <a:cs typeface="Calibri" pitchFamily="34" charset="-120"/>
               </a:rPr>
-              <a:t>The model chooses from the allowed tool schemas</a:t>
-            </a:r>
-            <a:endParaRPr lang="en-US" sz="1150" dirty="0"/>
-          </a:p>
-        </p:txBody>
-      </p:sp>
-      <p:sp>
-        <p:nvSpPr>
-          <p:cNvPr id="22" name="Shape 20"/>
-          <p:cNvSpPr/>
-          <p:nvPr/>
-        </p:nvSpPr>
-        <p:spPr>
-          <a:xfrm>
-            <a:off x="365760" y="3044952"/>
-            <a:ext cx="2633472" cy="1572768"/>
-          </a:xfrm>
-          <a:prstGeom prst="roundRect">
-            <a:avLst>
-              <a:gd name="adj" fmla="val 3488"/>
-            </a:avLst>
-          </a:prstGeom>
-          <a:solidFill>
-            <a:srgbClr val="F3F4F6"/>
-          </a:solidFill>
-          <a:ln w="10160">
-            <a:solidFill>
-              <a:srgbClr val="D1D5DB"/>
-            </a:solidFill>
-            <a:prstDash val="solid"/>
-          </a:ln>
-        </p:spPr>
-      </p:sp>
-      <p:sp>
-        <p:nvSpPr>
-          <p:cNvPr id="23" name="Shape 21"/>
-          <p:cNvSpPr/>
-          <p:nvPr/>
-        </p:nvSpPr>
-        <p:spPr>
-          <a:xfrm>
-            <a:off x="475488" y="3163824"/>
-            <a:ext cx="320040" cy="320040"/>
-          </a:xfrm>
-          <a:prstGeom prst="ellipse">
-            <a:avLst/>
-          </a:prstGeom>
-          <a:solidFill>
-            <a:srgbClr val="1E2761"/>
-          </a:solidFill>
-          <a:ln/>
-        </p:spPr>
-      </p:sp>
-      <p:sp>
-        <p:nvSpPr>
-          <p:cNvPr id="24" name="Text 22"/>
-          <p:cNvSpPr/>
-          <p:nvPr/>
-        </p:nvSpPr>
-        <p:spPr>
-          <a:xfrm>
-            <a:off x="475488" y="3214116"/>
-            <a:ext cx="320040" cy="146304"/>
-          </a:xfrm>
-          <a:prstGeom prst="rect">
-            <a:avLst/>
-          </a:prstGeom>
-          <a:noFill/>
-          <a:ln/>
-        </p:spPr>
-        <p:txBody>
-          <a:bodyPr wrap="square" lIns="0" tIns="0" rIns="0" bIns="0" rtlCol="0" anchor="ctr"/>
-          <a:lstStyle/>
-          <a:p>
-            <a:pPr algn="ctr" indent="0" marL="0">
-              <a:buNone/>
-            </a:pPr>
-            <a:r>
-              <a:rPr lang="en-US" sz="900" b="1" dirty="0">
-                <a:solidFill>
-                  <a:srgbClr val="FFFFFF"/>
+              <a:t>Utilities</a:t>
+            </a:r>
+            <a:pPr indent="0" marL="0">
+              <a:spcAft>
+                <a:spcPts val="1000"/>
+              </a:spcAft>
+              <a:buNone/>
+            </a:pPr>
+            <a:r>
+              <a:rPr lang="en-US" sz="1600" dirty="0">
+                <a:solidFill>
+                  <a:srgbClr val="212121"/>
                 </a:solidFill>
                 <a:latin typeface="Calibri" pitchFamily="34" charset="0"/>
                 <a:ea typeface="Calibri" pitchFamily="34" charset="-122"/>
                 <a:cs typeface="Calibri" pitchFamily="34" charset="-120"/>
               </a:rPr>
-              <a:t>4</a:t>
-            </a:r>
-            <a:endParaRPr lang="en-US" sz="900" dirty="0"/>
-          </a:p>
-        </p:txBody>
-      </p:sp>
-      <p:sp>
-        <p:nvSpPr>
-          <p:cNvPr id="25" name="Text 23"/>
-          <p:cNvSpPr/>
-          <p:nvPr/>
-        </p:nvSpPr>
-        <p:spPr>
-          <a:xfrm>
-            <a:off x="896112" y="3163824"/>
-            <a:ext cx="1975104" cy="310896"/>
-          </a:xfrm>
-          <a:prstGeom prst="rect">
-            <a:avLst/>
-          </a:prstGeom>
-          <a:noFill/>
-          <a:ln/>
-        </p:spPr>
-        <p:txBody>
-          <a:bodyPr wrap="square" lIns="0" tIns="0" rIns="0" bIns="0" rtlCol="0" anchor="ctr">
-            <a:normAutofit/>
-          </a:bodyPr>
-          <a:lstStyle/>
-          <a:p>
-            <a:pPr indent="0" marL="0">
-              <a:buNone/>
-            </a:pPr>
-            <a:r>
-              <a:rPr lang="en-US" sz="1500" b="1" dirty="0">
-                <a:solidFill>
-                  <a:srgbClr val="1E2761"/>
-                </a:solidFill>
-                <a:latin typeface="Calibri" pitchFamily="34" charset="0"/>
-                <a:ea typeface="Calibri" pitchFamily="34" charset="-122"/>
-                <a:cs typeface="Calibri" pitchFamily="34" charset="-120"/>
-              </a:rPr>
-              <a:t>Invoke</a:t>
-            </a:r>
-            <a:endParaRPr lang="en-US" sz="1500" dirty="0"/>
-          </a:p>
-        </p:txBody>
-      </p:sp>
-      <p:sp>
-        <p:nvSpPr>
-          <p:cNvPr id="26" name="Text 24"/>
-          <p:cNvSpPr/>
-          <p:nvPr/>
-        </p:nvSpPr>
-        <p:spPr>
-          <a:xfrm>
-            <a:off x="512064" y="3547872"/>
-            <a:ext cx="2340864" cy="950976"/>
-          </a:xfrm>
-          <a:prstGeom prst="rect">
-            <a:avLst/>
-          </a:prstGeom>
-          <a:noFill/>
-          <a:ln/>
-        </p:spPr>
-        <p:txBody>
-          <a:bodyPr wrap="square" lIns="0" tIns="0" rIns="0" bIns="0" rtlCol="0" anchor="t">
-            <a:normAutofit/>
-          </a:bodyPr>
-          <a:lstStyle/>
-          <a:p>
-            <a:pPr indent="0" marL="0">
-              <a:buNone/>
-            </a:pPr>
-            <a:r>
-              <a:rPr lang="en-US" sz="1150" dirty="0">
-                <a:solidFill>
-                  <a:srgbClr val="212121"/>
-                </a:solidFill>
-                <a:latin typeface="Calibri" pitchFamily="34" charset="0"/>
-                <a:ea typeface="Calibri" pitchFamily="34" charset="-122"/>
-                <a:cs typeface="Calibri" pitchFamily="34" charset="-120"/>
-              </a:rPr>
-              <a:t>The client calls the server with validated arguments</a:t>
-            </a:r>
-            <a:endParaRPr lang="en-US" sz="1150" dirty="0"/>
-          </a:p>
-        </p:txBody>
-      </p:sp>
-      <p:sp>
-        <p:nvSpPr>
-          <p:cNvPr id="27" name="Shape 25"/>
-          <p:cNvSpPr/>
-          <p:nvPr/>
-        </p:nvSpPr>
-        <p:spPr>
-          <a:xfrm>
-            <a:off x="3035808" y="3721608"/>
-            <a:ext cx="164592" cy="219456"/>
-          </a:xfrm>
-          <a:prstGeom prst="chevron">
-            <a:avLst/>
-          </a:prstGeom>
-          <a:solidFill>
-            <a:srgbClr val="E8A87C"/>
-          </a:solidFill>
-          <a:ln/>
-        </p:spPr>
-      </p:sp>
-      <p:sp>
-        <p:nvSpPr>
-          <p:cNvPr id="28" name="Shape 26"/>
-          <p:cNvSpPr/>
-          <p:nvPr/>
-        </p:nvSpPr>
-        <p:spPr>
-          <a:xfrm>
-            <a:off x="3255264" y="3044952"/>
-            <a:ext cx="2633472" cy="1572768"/>
-          </a:xfrm>
-          <a:prstGeom prst="roundRect">
-            <a:avLst>
-              <a:gd name="adj" fmla="val 3488"/>
-            </a:avLst>
-          </a:prstGeom>
-          <a:solidFill>
-            <a:srgbClr val="CADCFC"/>
-          </a:solidFill>
-          <a:ln w="10160">
-            <a:solidFill>
-              <a:srgbClr val="1E2761"/>
-            </a:solidFill>
-            <a:prstDash val="solid"/>
-          </a:ln>
-        </p:spPr>
-      </p:sp>
-      <p:sp>
-        <p:nvSpPr>
-          <p:cNvPr id="29" name="Shape 27"/>
-          <p:cNvSpPr/>
-          <p:nvPr/>
-        </p:nvSpPr>
-        <p:spPr>
-          <a:xfrm>
-            <a:off x="3364992" y="3163824"/>
-            <a:ext cx="320040" cy="320040"/>
-          </a:xfrm>
-          <a:prstGeom prst="ellipse">
-            <a:avLst/>
-          </a:prstGeom>
-          <a:solidFill>
-            <a:srgbClr val="1E2761"/>
-          </a:solidFill>
-          <a:ln/>
-        </p:spPr>
-      </p:sp>
-      <p:sp>
-        <p:nvSpPr>
-          <p:cNvPr id="30" name="Text 28"/>
-          <p:cNvSpPr/>
-          <p:nvPr/>
-        </p:nvSpPr>
-        <p:spPr>
-          <a:xfrm>
-            <a:off x="3364992" y="3214116"/>
-            <a:ext cx="320040" cy="146304"/>
-          </a:xfrm>
-          <a:prstGeom prst="rect">
-            <a:avLst/>
-          </a:prstGeom>
-          <a:noFill/>
-          <a:ln/>
-        </p:spPr>
-        <p:txBody>
-          <a:bodyPr wrap="square" lIns="0" tIns="0" rIns="0" bIns="0" rtlCol="0" anchor="ctr"/>
-          <a:lstStyle/>
-          <a:p>
-            <a:pPr algn="ctr" indent="0" marL="0">
-              <a:buNone/>
-            </a:pPr>
-            <a:r>
-              <a:rPr lang="en-US" sz="900" b="1" dirty="0">
-                <a:solidFill>
-                  <a:srgbClr val="FFFFFF"/>
-                </a:solidFill>
-                <a:latin typeface="Calibri" pitchFamily="34" charset="0"/>
-                <a:ea typeface="Calibri" pitchFamily="34" charset="-122"/>
-                <a:cs typeface="Calibri" pitchFamily="34" charset="-120"/>
-              </a:rPr>
-              <a:t>5</a:t>
-            </a:r>
-            <a:endParaRPr lang="en-US" sz="900" dirty="0"/>
-          </a:p>
-        </p:txBody>
-      </p:sp>
-      <p:sp>
-        <p:nvSpPr>
-          <p:cNvPr id="31" name="Text 29"/>
-          <p:cNvSpPr/>
-          <p:nvPr/>
-        </p:nvSpPr>
-        <p:spPr>
-          <a:xfrm>
-            <a:off x="3785616" y="3163824"/>
-            <a:ext cx="1975104" cy="310896"/>
-          </a:xfrm>
-          <a:prstGeom prst="rect">
-            <a:avLst/>
-          </a:prstGeom>
-          <a:noFill/>
-          <a:ln/>
-        </p:spPr>
-        <p:txBody>
-          <a:bodyPr wrap="square" lIns="0" tIns="0" rIns="0" bIns="0" rtlCol="0" anchor="ctr">
-            <a:normAutofit/>
-          </a:bodyPr>
-          <a:lstStyle/>
-          <a:p>
-            <a:pPr indent="0" marL="0">
-              <a:buNone/>
-            </a:pPr>
-            <a:r>
-              <a:rPr lang="en-US" sz="1500" b="1" dirty="0">
-                <a:solidFill>
-                  <a:srgbClr val="1E2761"/>
-                </a:solidFill>
-                <a:latin typeface="Calibri" pitchFamily="34" charset="0"/>
-                <a:ea typeface="Calibri" pitchFamily="34" charset="-122"/>
-                <a:cs typeface="Calibri" pitchFamily="34" charset="-120"/>
-              </a:rPr>
-              <a:t>Synthesize</a:t>
-            </a:r>
-            <a:endParaRPr lang="en-US" sz="1500" dirty="0"/>
-          </a:p>
-        </p:txBody>
-      </p:sp>
-      <p:sp>
-        <p:nvSpPr>
-          <p:cNvPr id="32" name="Text 30"/>
-          <p:cNvSpPr/>
-          <p:nvPr/>
-        </p:nvSpPr>
-        <p:spPr>
-          <a:xfrm>
-            <a:off x="3401568" y="3547872"/>
-            <a:ext cx="2340864" cy="950976"/>
-          </a:xfrm>
-          <a:prstGeom prst="rect">
-            <a:avLst/>
-          </a:prstGeom>
-          <a:noFill/>
-          <a:ln/>
-        </p:spPr>
-        <p:txBody>
-          <a:bodyPr wrap="square" lIns="0" tIns="0" rIns="0" bIns="0" rtlCol="0" anchor="t">
-            <a:normAutofit/>
-          </a:bodyPr>
-          <a:lstStyle/>
-          <a:p>
-            <a:pPr indent="0" marL="0">
-              <a:buNone/>
-            </a:pPr>
-            <a:r>
-              <a:rPr lang="en-US" sz="1150" dirty="0">
-                <a:solidFill>
-                  <a:srgbClr val="212121"/>
-                </a:solidFill>
-                <a:latin typeface="Calibri" pitchFamily="34" charset="0"/>
-                <a:ea typeface="Calibri" pitchFamily="34" charset="-122"/>
-                <a:cs typeface="Calibri" pitchFamily="34" charset="-120"/>
-              </a:rPr>
-              <a:t>The agent uses the returned content</a:t>
-            </a:r>
-            <a:endParaRPr lang="en-US" sz="1150" dirty="0"/>
-          </a:p>
-        </p:txBody>
-      </p:sp>
-      <p:sp>
-        <p:nvSpPr>
-          <p:cNvPr id="33" name="Shape 31"/>
+              <a:t>  —  Ping (liveness check), Cancellation (notifications/cancelled), and Progress (progressToken updates) support long-running or unreliable connections</a:t>
+            </a:r>
+            <a:endParaRPr lang="en-US" sz="1600" dirty="0"/>
+          </a:p>
+        </p:txBody>
+      </p:sp>
+      <p:sp>
+        <p:nvSpPr>
+          <p:cNvPr id="6" name="Shape 4"/>
           <p:cNvSpPr/>
           <p:nvPr/>
         </p:nvSpPr>
@@ -7497,7 +8279,7 @@
       </p:sp>
       <p:sp>
         <p:nvSpPr>
-          <p:cNvPr id="34" name="Text 32"/>
+          <p:cNvPr id="7" name="Text 5"/>
           <p:cNvSpPr/>
           <p:nvPr/>
         </p:nvSpPr>
@@ -7530,7 +8312,7 @@
                 <a:ea typeface="Calibri" pitchFamily="34" charset="-122"/>
                 <a:cs typeface="Calibri" pitchFamily="34" charset="-120"/>
               </a:rPr>
-              <a:t>Source: https://learn.microsoft.com/en-us/agent-framework/agents/tools/local-mcp-tools?tabs=python</a:t>
+              <a:t>Source: https://modelcontextprotocol.io/specification/2025-06-18/basic  ·  +3 in notes</a:t>
             </a:r>
             <a:endParaRPr lang="en-US" sz="820" dirty="0"/>
           </a:p>
@@ -7656,7 +8438,7 @@
               <a:buNone/>
             </a:pPr>
             <a:r>
-              <a:rPr lang="en-US" sz="2500" b="1" dirty="0">
+              <a:rPr lang="en-US" sz="2800" b="1" dirty="0">
                 <a:solidFill>
                   <a:srgbClr val="1E2761"/>
                 </a:solidFill>
@@ -7664,6 +8446,938 @@
                 <a:ea typeface="Calibri" pitchFamily="34" charset="-122"/>
                 <a:cs typeface="Calibri" pitchFamily="34" charset="-120"/>
               </a:rPr>
+              <a:t>MCP Client Features</a:t>
+            </a:r>
+            <a:endParaRPr lang="en-US" sz="2800" dirty="0"/>
+          </a:p>
+        </p:txBody>
+      </p:sp>
+      <p:sp>
+        <p:nvSpPr>
+          <p:cNvPr id="5" name="Text 3"/>
+          <p:cNvSpPr/>
+          <p:nvPr/>
+        </p:nvSpPr>
+        <p:spPr>
+          <a:xfrm>
+            <a:off x="502920" y="1170432"/>
+            <a:ext cx="7955280" cy="3520440"/>
+          </a:xfrm>
+          <a:prstGeom prst="rect">
+            <a:avLst/>
+          </a:prstGeom>
+          <a:noFill/>
+          <a:ln/>
+        </p:spPr>
+        <p:txBody>
+          <a:bodyPr wrap="square" lIns="0" tIns="0" rIns="0" bIns="0" rtlCol="0" anchor="t">
+            <a:normAutofit/>
+          </a:bodyPr>
+          <a:lstStyle/>
+          <a:p>
+            <a:pPr marL="342900" indent="-342900">
+              <a:spcAft>
+                <a:spcPts val="1000"/>
+              </a:spcAft>
+              <a:buSzPct val="100000"/>
+              <a:buChar char="•"/>
+            </a:pPr>
+            <a:r>
+              <a:rPr lang="en-US" sz="1600" b="1" dirty="0">
+                <a:solidFill>
+                  <a:srgbClr val="1E2761"/>
+                </a:solidFill>
+                <a:latin typeface="Calibri" pitchFamily="34" charset="0"/>
+                <a:ea typeface="Calibri" pitchFamily="34" charset="-122"/>
+                <a:cs typeface="Calibri" pitchFamily="34" charset="-120"/>
+              </a:rPr>
+              <a:t>Roots</a:t>
+            </a:r>
+            <a:pPr indent="0" marL="0">
+              <a:spcAft>
+                <a:spcPts val="1000"/>
+              </a:spcAft>
+              <a:buNone/>
+            </a:pPr>
+            <a:r>
+              <a:rPr lang="en-US" sz="1600" dirty="0">
+                <a:solidFill>
+                  <a:srgbClr val="212121"/>
+                </a:solidFill>
+                <a:latin typeface="Calibri" pitchFamily="34" charset="0"/>
+                <a:ea typeface="Calibri" pitchFamily="34" charset="-122"/>
+                <a:cs typeface="Calibri" pitchFamily="34" charset="-120"/>
+              </a:rPr>
+              <a:t>  —  Servers can query which filesystem/URI boundaries a client exposes, so they know where they're allowed to operate</a:t>
+            </a:r>
+            <a:endParaRPr lang="en-US" sz="1600" dirty="0"/>
+          </a:p>
+          <a:p>
+            <a:pPr marL="342900" indent="-342900">
+              <a:spcAft>
+                <a:spcPts val="1000"/>
+              </a:spcAft>
+              <a:buSzPct val="100000"/>
+              <a:buChar char="•"/>
+            </a:pPr>
+            <a:r>
+              <a:rPr lang="en-US" sz="1600" b="1" dirty="0">
+                <a:solidFill>
+                  <a:srgbClr val="1E2761"/>
+                </a:solidFill>
+                <a:latin typeface="Calibri" pitchFamily="34" charset="0"/>
+                <a:ea typeface="Calibri" pitchFamily="34" charset="-122"/>
+                <a:cs typeface="Calibri" pitchFamily="34" charset="-120"/>
+              </a:rPr>
+              <a:t>Sampling</a:t>
+            </a:r>
+            <a:pPr indent="0" marL="0">
+              <a:spcAft>
+                <a:spcPts val="1000"/>
+              </a:spcAft>
+              <a:buNone/>
+            </a:pPr>
+            <a:r>
+              <a:rPr lang="en-US" sz="1600" dirty="0">
+                <a:solidFill>
+                  <a:srgbClr val="212121"/>
+                </a:solidFill>
+                <a:latin typeface="Calibri" pitchFamily="34" charset="0"/>
+                <a:ea typeface="Calibri" pitchFamily="34" charset="-122"/>
+                <a:cs typeface="Calibri" pitchFamily="34" charset="-120"/>
+              </a:rPr>
+              <a:t>  —  Servers can request an LLM completion through the client, keeping model access, prompt content, and approval under client control</a:t>
+            </a:r>
+            <a:endParaRPr lang="en-US" sz="1600" dirty="0"/>
+          </a:p>
+          <a:p>
+            <a:pPr marL="342900" indent="-342900">
+              <a:spcAft>
+                <a:spcPts val="1000"/>
+              </a:spcAft>
+              <a:buSzPct val="100000"/>
+              <a:buChar char="•"/>
+            </a:pPr>
+            <a:r>
+              <a:rPr lang="en-US" sz="1600" b="1" dirty="0">
+                <a:solidFill>
+                  <a:srgbClr val="1E2761"/>
+                </a:solidFill>
+                <a:latin typeface="Calibri" pitchFamily="34" charset="0"/>
+                <a:ea typeface="Calibri" pitchFamily="34" charset="-122"/>
+                <a:cs typeface="Calibri" pitchFamily="34" charset="-120"/>
+              </a:rPr>
+              <a:t>Elicitation</a:t>
+            </a:r>
+            <a:pPr indent="0" marL="0">
+              <a:spcAft>
+                <a:spcPts val="1000"/>
+              </a:spcAft>
+              <a:buNone/>
+            </a:pPr>
+            <a:r>
+              <a:rPr lang="en-US" sz="1600" dirty="0">
+                <a:solidFill>
+                  <a:srgbClr val="212121"/>
+                </a:solidFill>
+                <a:latin typeface="Calibri" pitchFamily="34" charset="0"/>
+                <a:ea typeface="Calibri" pitchFamily="34" charset="-122"/>
+                <a:cs typeface="Calibri" pitchFamily="34" charset="-120"/>
+              </a:rPr>
+              <a:t>  —  Servers can ask the user for additional structured input mid-interaction, validated against a JSON schema</a:t>
+            </a:r>
+            <a:endParaRPr lang="en-US" sz="1600" dirty="0"/>
+          </a:p>
+        </p:txBody>
+      </p:sp>
+      <p:sp>
+        <p:nvSpPr>
+          <p:cNvPr id="6" name="Shape 4"/>
+          <p:cNvSpPr/>
+          <p:nvPr/>
+        </p:nvSpPr>
+        <p:spPr>
+          <a:xfrm>
+            <a:off x="365760" y="4773168"/>
+            <a:ext cx="8412480" cy="0"/>
+          </a:xfrm>
+          <a:prstGeom prst="line">
+            <a:avLst/>
+          </a:prstGeom>
+          <a:noFill/>
+          <a:ln w="6350">
+            <a:solidFill>
+              <a:srgbClr val="D1D5DB"/>
+            </a:solidFill>
+            <a:prstDash val="solid"/>
+          </a:ln>
+        </p:spPr>
+      </p:sp>
+      <p:sp>
+        <p:nvSpPr>
+          <p:cNvPr id="7" name="Text 5"/>
+          <p:cNvSpPr/>
+          <p:nvPr/>
+        </p:nvSpPr>
+        <p:spPr>
+          <a:xfrm>
+            <a:off x="384048" y="4818888"/>
+            <a:ext cx="8275320" cy="182880"/>
+          </a:xfrm>
+          <a:prstGeom prst="rect">
+            <a:avLst/>
+          </a:prstGeom>
+          <a:noFill/>
+          <a:ln/>
+        </p:spPr>
+        <p:txBody>
+          <a:bodyPr wrap="square" lIns="0" tIns="0" rIns="0" bIns="0" rtlCol="0" anchor="ctr">
+            <a:normAutofit/>
+          </a:bodyPr>
+          <a:lstStyle/>
+          <a:p>
+            <a:pPr indent="0" marL="0">
+              <a:buNone/>
+            </a:pPr>
+            <a:r>
+              <a:rPr lang="en-US" sz="820" dirty="0">
+                <a:solidFill>
+                  <a:srgbClr val="6B7280"/>
+                </a:solidFill>
+                <a:latin typeface="Calibri" pitchFamily="34" charset="0"/>
+                <a:ea typeface="Calibri" pitchFamily="34" charset="-122"/>
+                <a:cs typeface="Calibri" pitchFamily="34" charset="-120"/>
+              </a:rPr>
+              <a:t>Source: https://modelcontextprotocol.io/specification/2025-06-18/client/roots  ·  +2 in notes</a:t>
+            </a:r>
+            <a:endParaRPr lang="en-US" sz="820" dirty="0"/>
+          </a:p>
+        </p:txBody>
+      </p:sp>
+    </p:spTree>
+  </p:cSld>
+  <p:clrMapOvr>
+    <a:masterClrMapping/>
+  </p:clrMapOvr>
+</p:sld>
+</file>
+
+<file path=ppt/slides/slide4.xml><?xml version="1.0" encoding="utf-8"?>
+<p:sld xmlns:a="http://schemas.openxmlformats.org/drawingml/2006/main" xmlns:r="http://schemas.openxmlformats.org/officeDocument/2006/relationships" xmlns:p="http://schemas.openxmlformats.org/presentationml/2006/main">
+  <p:cSld name="Slide 4">
+    <p:bg>
+      <p:bgPr>
+        <a:solidFill>
+          <a:srgbClr val="FFFFFF"/>
+        </a:solidFill>
+      </p:bgPr>
+    </p:bg>
+    <p:spTree>
+      <p:nvGrpSpPr>
+        <p:cNvPr id="1" name=""/>
+        <p:cNvGrpSpPr/>
+        <p:nvPr/>
+      </p:nvGrpSpPr>
+      <p:grpSpPr>
+        <a:xfrm>
+          <a:off x="0" y="0"/>
+          <a:ext cx="0" cy="0"/>
+          <a:chOff x="0" y="0"/>
+          <a:chExt cx="0" cy="0"/>
+        </a:xfrm>
+      </p:grpSpPr>
+      <p:sp>
+        <p:nvSpPr>
+          <p:cNvPr id="2" name="Shape 0"/>
+          <p:cNvSpPr/>
+          <p:nvPr/>
+        </p:nvSpPr>
+        <p:spPr>
+          <a:xfrm>
+            <a:off x="0" y="0"/>
+            <a:ext cx="54864" cy="5143500"/>
+          </a:xfrm>
+          <a:prstGeom prst="rect">
+            <a:avLst/>
+          </a:prstGeom>
+          <a:solidFill>
+            <a:srgbClr val="1E2761"/>
+          </a:solidFill>
+          <a:ln/>
+        </p:spPr>
+      </p:sp>
+      <p:sp>
+        <p:nvSpPr>
+          <p:cNvPr id="3" name="Text 1"/>
+          <p:cNvSpPr/>
+          <p:nvPr/>
+        </p:nvSpPr>
+        <p:spPr>
+          <a:xfrm>
+            <a:off x="5486400" y="256032"/>
+            <a:ext cx="3337560" cy="228600"/>
+          </a:xfrm>
+          <a:prstGeom prst="rect">
+            <a:avLst/>
+          </a:prstGeom>
+          <a:noFill/>
+          <a:ln/>
+        </p:spPr>
+        <p:txBody>
+          <a:bodyPr wrap="square" lIns="0" tIns="0" rIns="0" bIns="0" rtlCol="0" anchor="ctr">
+            <a:normAutofit/>
+          </a:bodyPr>
+          <a:lstStyle/>
+          <a:p>
+            <a:pPr algn="r" indent="0" marL="0">
+              <a:buNone/>
+            </a:pPr>
+            <a:r>
+              <a:rPr lang="en-US" sz="950" dirty="0">
+                <a:solidFill>
+                  <a:srgbClr val="6B7280"/>
+                </a:solidFill>
+                <a:latin typeface="Calibri" pitchFamily="34" charset="0"/>
+                <a:ea typeface="Calibri" pitchFamily="34" charset="-122"/>
+                <a:cs typeface="Calibri" pitchFamily="34" charset="-120"/>
+              </a:rPr>
+              <a:t>Day 3 · Module 5</a:t>
+            </a:r>
+            <a:endParaRPr lang="en-US" sz="950" dirty="0"/>
+          </a:p>
+        </p:txBody>
+      </p:sp>
+      <p:sp>
+        <p:nvSpPr>
+          <p:cNvPr id="4" name="Text 2"/>
+          <p:cNvSpPr/>
+          <p:nvPr/>
+        </p:nvSpPr>
+        <p:spPr>
+          <a:xfrm>
+            <a:off x="365760" y="310896"/>
+            <a:ext cx="6583680" cy="603504"/>
+          </a:xfrm>
+          <a:prstGeom prst="rect">
+            <a:avLst/>
+          </a:prstGeom>
+          <a:noFill/>
+          <a:ln/>
+        </p:spPr>
+        <p:txBody>
+          <a:bodyPr wrap="square" lIns="0" tIns="0" rIns="0" bIns="0" rtlCol="0" anchor="ctr">
+            <a:normAutofit/>
+          </a:bodyPr>
+          <a:lstStyle/>
+          <a:p>
+            <a:pPr indent="0" marL="0">
+              <a:buNone/>
+            </a:pPr>
+            <a:r>
+              <a:rPr lang="en-US" sz="2800" b="1" dirty="0">
+                <a:solidFill>
+                  <a:srgbClr val="1E2761"/>
+                </a:solidFill>
+                <a:latin typeface="Calibri" pitchFamily="34" charset="0"/>
+                <a:ea typeface="Calibri" pitchFamily="34" charset="-122"/>
+                <a:cs typeface="Calibri" pitchFamily="34" charset="-120"/>
+              </a:rPr>
+              <a:t>MCP Server Features</a:t>
+            </a:r>
+            <a:endParaRPr lang="en-US" sz="2800" dirty="0"/>
+          </a:p>
+        </p:txBody>
+      </p:sp>
+      <p:sp>
+        <p:nvSpPr>
+          <p:cNvPr id="5" name="Text 3"/>
+          <p:cNvSpPr/>
+          <p:nvPr/>
+        </p:nvSpPr>
+        <p:spPr>
+          <a:xfrm>
+            <a:off x="502920" y="1170432"/>
+            <a:ext cx="7955280" cy="3520440"/>
+          </a:xfrm>
+          <a:prstGeom prst="rect">
+            <a:avLst/>
+          </a:prstGeom>
+          <a:noFill/>
+          <a:ln/>
+        </p:spPr>
+        <p:txBody>
+          <a:bodyPr wrap="square" lIns="0" tIns="0" rIns="0" bIns="0" rtlCol="0" anchor="t">
+            <a:normAutofit/>
+          </a:bodyPr>
+          <a:lstStyle/>
+          <a:p>
+            <a:pPr marL="342900" indent="-342900">
+              <a:spcAft>
+                <a:spcPts val="1000"/>
+              </a:spcAft>
+              <a:buSzPct val="100000"/>
+              <a:buChar char="•"/>
+            </a:pPr>
+            <a:r>
+              <a:rPr lang="en-US" sz="1600" b="1" dirty="0">
+                <a:solidFill>
+                  <a:srgbClr val="1E2761"/>
+                </a:solidFill>
+                <a:latin typeface="Calibri" pitchFamily="34" charset="0"/>
+                <a:ea typeface="Calibri" pitchFamily="34" charset="-122"/>
+                <a:cs typeface="Calibri" pitchFamily="34" charset="-120"/>
+              </a:rPr>
+              <a:t>Tools</a:t>
+            </a:r>
+            <a:pPr indent="0" marL="0">
+              <a:spcAft>
+                <a:spcPts val="1000"/>
+              </a:spcAft>
+              <a:buNone/>
+            </a:pPr>
+            <a:r>
+              <a:rPr lang="en-US" sz="1600" dirty="0">
+                <a:solidFill>
+                  <a:srgbClr val="212121"/>
+                </a:solidFill>
+                <a:latin typeface="Calibri" pitchFamily="34" charset="0"/>
+                <a:ea typeface="Calibri" pitchFamily="34" charset="-122"/>
+                <a:cs typeface="Calibri" pitchFamily="34" charset="-120"/>
+              </a:rPr>
+              <a:t>  —  Model-callable functions that let an agent perform actions or invoke external systems — the loop covered next</a:t>
+            </a:r>
+            <a:endParaRPr lang="en-US" sz="1600" dirty="0"/>
+          </a:p>
+          <a:p>
+            <a:pPr marL="342900" indent="-342900">
+              <a:spcAft>
+                <a:spcPts val="1000"/>
+              </a:spcAft>
+              <a:buSzPct val="100000"/>
+              <a:buChar char="•"/>
+            </a:pPr>
+            <a:r>
+              <a:rPr lang="en-US" sz="1600" b="1" dirty="0">
+                <a:solidFill>
+                  <a:srgbClr val="1E2761"/>
+                </a:solidFill>
+                <a:latin typeface="Calibri" pitchFamily="34" charset="0"/>
+                <a:ea typeface="Calibri" pitchFamily="34" charset="-122"/>
+                <a:cs typeface="Calibri" pitchFamily="34" charset="-120"/>
+              </a:rPr>
+              <a:t>Resources</a:t>
+            </a:r>
+            <a:pPr indent="0" marL="0">
+              <a:spcAft>
+                <a:spcPts val="1000"/>
+              </a:spcAft>
+              <a:buNone/>
+            </a:pPr>
+            <a:r>
+              <a:rPr lang="en-US" sz="1600" dirty="0">
+                <a:solidFill>
+                  <a:srgbClr val="212121"/>
+                </a:solidFill>
+                <a:latin typeface="Calibri" pitchFamily="34" charset="0"/>
+                <a:ea typeface="Calibri" pitchFamily="34" charset="-122"/>
+                <a:cs typeface="Calibri" pitchFamily="34" charset="-120"/>
+              </a:rPr>
+              <a:t>  —  Context and data (files, schemas, app-specific info) a user or model can bring into the conversation</a:t>
+            </a:r>
+            <a:endParaRPr lang="en-US" sz="1600" dirty="0"/>
+          </a:p>
+          <a:p>
+            <a:pPr marL="342900" indent="-342900">
+              <a:spcAft>
+                <a:spcPts val="1000"/>
+              </a:spcAft>
+              <a:buSzPct val="100000"/>
+              <a:buChar char="•"/>
+            </a:pPr>
+            <a:r>
+              <a:rPr lang="en-US" sz="1600" b="1" dirty="0">
+                <a:solidFill>
+                  <a:srgbClr val="1E2761"/>
+                </a:solidFill>
+                <a:latin typeface="Calibri" pitchFamily="34" charset="0"/>
+                <a:ea typeface="Calibri" pitchFamily="34" charset="-122"/>
+                <a:cs typeface="Calibri" pitchFamily="34" charset="-120"/>
+              </a:rPr>
+              <a:t>Prompts</a:t>
+            </a:r>
+            <a:pPr indent="0" marL="0">
+              <a:spcAft>
+                <a:spcPts val="1000"/>
+              </a:spcAft>
+              <a:buNone/>
+            </a:pPr>
+            <a:r>
+              <a:rPr lang="en-US" sz="1600" dirty="0">
+                <a:solidFill>
+                  <a:srgbClr val="212121"/>
+                </a:solidFill>
+                <a:latin typeface="Calibri" pitchFamily="34" charset="0"/>
+                <a:ea typeface="Calibri" pitchFamily="34" charset="-122"/>
+                <a:cs typeface="Calibri" pitchFamily="34" charset="-120"/>
+              </a:rPr>
+              <a:t>  —  Reusable, user-triggered templates and workflows a server exposes, e.g. as slash commands</a:t>
+            </a:r>
+            <a:endParaRPr lang="en-US" sz="1600" dirty="0"/>
+          </a:p>
+          <a:p>
+            <a:pPr marL="342900" indent="-342900">
+              <a:spcAft>
+                <a:spcPts val="1000"/>
+              </a:spcAft>
+              <a:buSzPct val="100000"/>
+              <a:buChar char="•"/>
+            </a:pPr>
+            <a:r>
+              <a:rPr lang="en-US" sz="1600" b="1" dirty="0">
+                <a:solidFill>
+                  <a:srgbClr val="1E2761"/>
+                </a:solidFill>
+                <a:latin typeface="Calibri" pitchFamily="34" charset="0"/>
+                <a:ea typeface="Calibri" pitchFamily="34" charset="-122"/>
+                <a:cs typeface="Calibri" pitchFamily="34" charset="-120"/>
+              </a:rPr>
+              <a:t>Utilities</a:t>
+            </a:r>
+            <a:pPr indent="0" marL="0">
+              <a:spcAft>
+                <a:spcPts val="1000"/>
+              </a:spcAft>
+              <a:buNone/>
+            </a:pPr>
+            <a:r>
+              <a:rPr lang="en-US" sz="1600" dirty="0">
+                <a:solidFill>
+                  <a:srgbClr val="212121"/>
+                </a:solidFill>
+                <a:latin typeface="Calibri" pitchFamily="34" charset="0"/>
+                <a:ea typeface="Calibri" pitchFamily="34" charset="-122"/>
+                <a:cs typeface="Calibri" pitchFamily="34" charset="-120"/>
+              </a:rPr>
+              <a:t>  —  Completion (argument autocomplete), Logging (structured log levels), and Pagination (cursor-based paging for large list results)</a:t>
+            </a:r>
+            <a:endParaRPr lang="en-US" sz="1600" dirty="0"/>
+          </a:p>
+        </p:txBody>
+      </p:sp>
+      <p:sp>
+        <p:nvSpPr>
+          <p:cNvPr id="6" name="Shape 4"/>
+          <p:cNvSpPr/>
+          <p:nvPr/>
+        </p:nvSpPr>
+        <p:spPr>
+          <a:xfrm>
+            <a:off x="365760" y="4773168"/>
+            <a:ext cx="8412480" cy="0"/>
+          </a:xfrm>
+          <a:prstGeom prst="line">
+            <a:avLst/>
+          </a:prstGeom>
+          <a:noFill/>
+          <a:ln w="6350">
+            <a:solidFill>
+              <a:srgbClr val="D1D5DB"/>
+            </a:solidFill>
+            <a:prstDash val="solid"/>
+          </a:ln>
+        </p:spPr>
+      </p:sp>
+      <p:sp>
+        <p:nvSpPr>
+          <p:cNvPr id="7" name="Text 5"/>
+          <p:cNvSpPr/>
+          <p:nvPr/>
+        </p:nvSpPr>
+        <p:spPr>
+          <a:xfrm>
+            <a:off x="384048" y="4818888"/>
+            <a:ext cx="8275320" cy="182880"/>
+          </a:xfrm>
+          <a:prstGeom prst="rect">
+            <a:avLst/>
+          </a:prstGeom>
+          <a:noFill/>
+          <a:ln/>
+        </p:spPr>
+        <p:txBody>
+          <a:bodyPr wrap="square" lIns="0" tIns="0" rIns="0" bIns="0" rtlCol="0" anchor="ctr">
+            <a:normAutofit/>
+          </a:bodyPr>
+          <a:lstStyle/>
+          <a:p>
+            <a:pPr indent="0" marL="0">
+              <a:buNone/>
+            </a:pPr>
+            <a:r>
+              <a:rPr lang="en-US" sz="820" dirty="0">
+                <a:solidFill>
+                  <a:srgbClr val="6B7280"/>
+                </a:solidFill>
+                <a:latin typeface="Calibri" pitchFamily="34" charset="0"/>
+                <a:ea typeface="Calibri" pitchFamily="34" charset="-122"/>
+                <a:cs typeface="Calibri" pitchFamily="34" charset="-120"/>
+              </a:rPr>
+              <a:t>Source: https://modelcontextprotocol.io/specification/2025-06-18/server/tools  ·  +3 in notes</a:t>
+            </a:r>
+            <a:endParaRPr lang="en-US" sz="820" dirty="0"/>
+          </a:p>
+        </p:txBody>
+      </p:sp>
+    </p:spTree>
+  </p:cSld>
+  <p:clrMapOvr>
+    <a:masterClrMapping/>
+  </p:clrMapOvr>
+</p:sld>
+</file>
+
+<file path=ppt/slides/slide5.xml><?xml version="1.0" encoding="utf-8"?>
+<p:sld xmlns:a="http://schemas.openxmlformats.org/drawingml/2006/main" xmlns:r="http://schemas.openxmlformats.org/officeDocument/2006/relationships" xmlns:p="http://schemas.openxmlformats.org/presentationml/2006/main">
+  <p:cSld name="Slide 5">
+    <p:bg>
+      <p:bgPr>
+        <a:solidFill>
+          <a:srgbClr val="FFFFFF"/>
+        </a:solidFill>
+      </p:bgPr>
+    </p:bg>
+    <p:spTree>
+      <p:nvGrpSpPr>
+        <p:cNvPr id="1" name=""/>
+        <p:cNvGrpSpPr/>
+        <p:nvPr/>
+      </p:nvGrpSpPr>
+      <p:grpSpPr>
+        <a:xfrm>
+          <a:off x="0" y="0"/>
+          <a:ext cx="0" cy="0"/>
+          <a:chOff x="0" y="0"/>
+          <a:chExt cx="0" cy="0"/>
+        </a:xfrm>
+      </p:grpSpPr>
+      <p:sp>
+        <p:nvSpPr>
+          <p:cNvPr id="2" name="Shape 0"/>
+          <p:cNvSpPr/>
+          <p:nvPr/>
+        </p:nvSpPr>
+        <p:spPr>
+          <a:xfrm>
+            <a:off x="0" y="0"/>
+            <a:ext cx="54864" cy="5143500"/>
+          </a:xfrm>
+          <a:prstGeom prst="rect">
+            <a:avLst/>
+          </a:prstGeom>
+          <a:solidFill>
+            <a:srgbClr val="1E2761"/>
+          </a:solidFill>
+          <a:ln/>
+        </p:spPr>
+      </p:sp>
+      <p:sp>
+        <p:nvSpPr>
+          <p:cNvPr id="3" name="Text 1"/>
+          <p:cNvSpPr/>
+          <p:nvPr/>
+        </p:nvSpPr>
+        <p:spPr>
+          <a:xfrm>
+            <a:off x="5486400" y="256032"/>
+            <a:ext cx="3337560" cy="228600"/>
+          </a:xfrm>
+          <a:prstGeom prst="rect">
+            <a:avLst/>
+          </a:prstGeom>
+          <a:noFill/>
+          <a:ln/>
+        </p:spPr>
+        <p:txBody>
+          <a:bodyPr wrap="square" lIns="0" tIns="0" rIns="0" bIns="0" rtlCol="0" anchor="ctr">
+            <a:normAutofit/>
+          </a:bodyPr>
+          <a:lstStyle/>
+          <a:p>
+            <a:pPr algn="r" indent="0" marL="0">
+              <a:buNone/>
+            </a:pPr>
+            <a:r>
+              <a:rPr lang="en-US" sz="950" dirty="0">
+                <a:solidFill>
+                  <a:srgbClr val="6B7280"/>
+                </a:solidFill>
+                <a:latin typeface="Calibri" pitchFamily="34" charset="0"/>
+                <a:ea typeface="Calibri" pitchFamily="34" charset="-122"/>
+                <a:cs typeface="Calibri" pitchFamily="34" charset="-120"/>
+              </a:rPr>
+              <a:t>Day 3 · Module 5</a:t>
+            </a:r>
+            <a:endParaRPr lang="en-US" sz="950" dirty="0"/>
+          </a:p>
+        </p:txBody>
+      </p:sp>
+      <p:sp>
+        <p:nvSpPr>
+          <p:cNvPr id="4" name="Text 2"/>
+          <p:cNvSpPr/>
+          <p:nvPr/>
+        </p:nvSpPr>
+        <p:spPr>
+          <a:xfrm>
+            <a:off x="365760" y="310896"/>
+            <a:ext cx="6583680" cy="603504"/>
+          </a:xfrm>
+          <a:prstGeom prst="rect">
+            <a:avLst/>
+          </a:prstGeom>
+          <a:noFill/>
+          <a:ln/>
+        </p:spPr>
+        <p:txBody>
+          <a:bodyPr wrap="square" lIns="0" tIns="0" rIns="0" bIns="0" rtlCol="0" anchor="ctr">
+            <a:normAutofit/>
+          </a:bodyPr>
+          <a:lstStyle/>
+          <a:p>
+            <a:pPr indent="0" marL="0">
+              <a:buNone/>
+            </a:pPr>
+            <a:r>
+              <a:rPr lang="en-US" sz="2800" b="1" dirty="0">
+                <a:solidFill>
+                  <a:srgbClr val="1E2761"/>
+                </a:solidFill>
+                <a:latin typeface="Calibri" pitchFamily="34" charset="0"/>
+                <a:ea typeface="Calibri" pitchFamily="34" charset="-122"/>
+                <a:cs typeface="Calibri" pitchFamily="34" charset="-120"/>
+              </a:rPr>
+              <a:t>MCP Tool Message Flow</a:t>
+            </a:r>
+            <a:endParaRPr lang="en-US" sz="2800" dirty="0"/>
+          </a:p>
+        </p:txBody>
+      </p:sp>
+      <p:pic>
+        <p:nvPicPr>
+          <p:cNvPr id="5" name="Image 0" descr="[object Object]">    </p:cNvPr>
+          <p:cNvPicPr>
+            <a:picLocks noChangeAspect="1"/>
+          </p:cNvPicPr>
+          <p:nvPr/>
+        </p:nvPicPr>
+        <p:blipFill>
+          <a:blip r:embed="rId1"/>
+          <a:stretch>
+            <a:fillRect/>
+          </a:stretch>
+        </p:blipFill>
+        <p:spPr>
+          <a:xfrm>
+            <a:off x="3025729" y="1078992"/>
+            <a:ext cx="3092542" cy="3630168"/>
+          </a:xfrm>
+          <a:prstGeom prst="rect">
+            <a:avLst/>
+          </a:prstGeom>
+        </p:spPr>
+      </p:pic>
+      <p:sp>
+        <p:nvSpPr>
+          <p:cNvPr id="6" name="Shape 3"/>
+          <p:cNvSpPr/>
+          <p:nvPr/>
+        </p:nvSpPr>
+        <p:spPr>
+          <a:xfrm>
+            <a:off x="365760" y="4773168"/>
+            <a:ext cx="8412480" cy="0"/>
+          </a:xfrm>
+          <a:prstGeom prst="line">
+            <a:avLst/>
+          </a:prstGeom>
+          <a:noFill/>
+          <a:ln w="6350">
+            <a:solidFill>
+              <a:srgbClr val="D1D5DB"/>
+            </a:solidFill>
+            <a:prstDash val="solid"/>
+          </a:ln>
+        </p:spPr>
+      </p:sp>
+      <p:sp>
+        <p:nvSpPr>
+          <p:cNvPr id="7" name="Text 4"/>
+          <p:cNvSpPr/>
+          <p:nvPr/>
+        </p:nvSpPr>
+        <p:spPr>
+          <a:xfrm>
+            <a:off x="384048" y="4818888"/>
+            <a:ext cx="8275320" cy="182880"/>
+          </a:xfrm>
+          <a:prstGeom prst="rect">
+            <a:avLst/>
+          </a:prstGeom>
+          <a:noFill/>
+          <a:ln/>
+        </p:spPr>
+        <p:txBody>
+          <a:bodyPr wrap="square" lIns="0" tIns="0" rIns="0" bIns="0" rtlCol="0" anchor="ctr">
+            <a:normAutofit/>
+          </a:bodyPr>
+          <a:lstStyle/>
+          <a:p>
+            <a:pPr indent="0" marL="0">
+              <a:buNone/>
+            </a:pPr>
+            <a:r>
+              <a:rPr lang="en-US" sz="820" dirty="0">
+                <a:solidFill>
+                  <a:srgbClr val="6B7280"/>
+                </a:solidFill>
+                <a:latin typeface="Calibri" pitchFamily="34" charset="0"/>
+                <a:ea typeface="Calibri" pitchFamily="34" charset="-122"/>
+                <a:cs typeface="Calibri" pitchFamily="34" charset="-120"/>
+              </a:rPr>
+              <a:t>Source: https://modelcontextprotocol.io/specification/2025-06-18/server/tools</a:t>
+            </a:r>
+            <a:endParaRPr lang="en-US" sz="820" dirty="0"/>
+          </a:p>
+        </p:txBody>
+      </p:sp>
+    </p:spTree>
+  </p:cSld>
+  <p:clrMapOvr>
+    <a:masterClrMapping/>
+  </p:clrMapOvr>
+</p:sld>
+</file>
+
+<file path=ppt/slides/slide6.xml><?xml version="1.0" encoding="utf-8"?>
+<p:sld xmlns:a="http://schemas.openxmlformats.org/drawingml/2006/main" xmlns:r="http://schemas.openxmlformats.org/officeDocument/2006/relationships" xmlns:p="http://schemas.openxmlformats.org/presentationml/2006/main">
+  <p:cSld name="Slide 6">
+    <p:bg>
+      <p:bgPr>
+        <a:solidFill>
+          <a:srgbClr val="FFFFFF"/>
+        </a:solidFill>
+      </p:bgPr>
+    </p:bg>
+    <p:spTree>
+      <p:nvGrpSpPr>
+        <p:cNvPr id="1" name=""/>
+        <p:cNvGrpSpPr/>
+        <p:nvPr/>
+      </p:nvGrpSpPr>
+      <p:grpSpPr>
+        <a:xfrm>
+          <a:off x="0" y="0"/>
+          <a:ext cx="0" cy="0"/>
+          <a:chOff x="0" y="0"/>
+          <a:chExt cx="0" cy="0"/>
+        </a:xfrm>
+      </p:grpSpPr>
+      <p:sp>
+        <p:nvSpPr>
+          <p:cNvPr id="2" name="Shape 0"/>
+          <p:cNvSpPr/>
+          <p:nvPr/>
+        </p:nvSpPr>
+        <p:spPr>
+          <a:xfrm>
+            <a:off x="0" y="0"/>
+            <a:ext cx="54864" cy="5143500"/>
+          </a:xfrm>
+          <a:prstGeom prst="rect">
+            <a:avLst/>
+          </a:prstGeom>
+          <a:solidFill>
+            <a:srgbClr val="1E2761"/>
+          </a:solidFill>
+          <a:ln/>
+        </p:spPr>
+      </p:sp>
+      <p:sp>
+        <p:nvSpPr>
+          <p:cNvPr id="3" name="Text 1"/>
+          <p:cNvSpPr/>
+          <p:nvPr/>
+        </p:nvSpPr>
+        <p:spPr>
+          <a:xfrm>
+            <a:off x="5486400" y="256032"/>
+            <a:ext cx="3337560" cy="228600"/>
+          </a:xfrm>
+          <a:prstGeom prst="rect">
+            <a:avLst/>
+          </a:prstGeom>
+          <a:noFill/>
+          <a:ln/>
+        </p:spPr>
+        <p:txBody>
+          <a:bodyPr wrap="square" lIns="0" tIns="0" rIns="0" bIns="0" rtlCol="0" anchor="ctr">
+            <a:normAutofit/>
+          </a:bodyPr>
+          <a:lstStyle/>
+          <a:p>
+            <a:pPr algn="r" indent="0" marL="0">
+              <a:buNone/>
+            </a:pPr>
+            <a:r>
+              <a:rPr lang="en-US" sz="950" dirty="0">
+                <a:solidFill>
+                  <a:srgbClr val="6B7280"/>
+                </a:solidFill>
+                <a:latin typeface="Calibri" pitchFamily="34" charset="0"/>
+                <a:ea typeface="Calibri" pitchFamily="34" charset="-122"/>
+                <a:cs typeface="Calibri" pitchFamily="34" charset="-120"/>
+              </a:rPr>
+              <a:t>Day 3 · Module 5</a:t>
+            </a:r>
+            <a:endParaRPr lang="en-US" sz="950" dirty="0"/>
+          </a:p>
+        </p:txBody>
+      </p:sp>
+      <p:sp>
+        <p:nvSpPr>
+          <p:cNvPr id="4" name="Text 2"/>
+          <p:cNvSpPr/>
+          <p:nvPr/>
+        </p:nvSpPr>
+        <p:spPr>
+          <a:xfrm>
+            <a:off x="365760" y="310896"/>
+            <a:ext cx="6583680" cy="603504"/>
+          </a:xfrm>
+          <a:prstGeom prst="rect">
+            <a:avLst/>
+          </a:prstGeom>
+          <a:noFill/>
+          <a:ln/>
+        </p:spPr>
+        <p:txBody>
+          <a:bodyPr wrap="square" lIns="0" tIns="0" rIns="0" bIns="0" rtlCol="0" anchor="ctr">
+            <a:normAutofit/>
+          </a:bodyPr>
+          <a:lstStyle/>
+          <a:p>
+            <a:pPr indent="0" marL="0">
+              <a:buNone/>
+            </a:pPr>
+            <a:r>
+              <a:rPr lang="en-US" sz="2500" b="1" dirty="0">
+                <a:solidFill>
+                  <a:srgbClr val="1E2761"/>
+                </a:solidFill>
+                <a:latin typeface="Calibri" pitchFamily="34" charset="0"/>
+                <a:ea typeface="Calibri" pitchFamily="34" charset="-122"/>
+                <a:cs typeface="Calibri" pitchFamily="34" charset="-120"/>
+              </a:rPr>
               <a:t>Pick the transport that matches the server</a:t>
             </a:r>
             <a:endParaRPr lang="en-US" sz="2500" dirty="0"/>
@@ -7672,7 +9386,7 @@
       </p:sp>
       <p:graphicFrame>
         <p:nvGraphicFramePr>
-          <p:cNvPr id="4" name="Table 0"/>
+          <p:cNvPr id="7" name="Table 0"/>
           <p:cNvGraphicFramePr>
             <a:graphicFrameLocks noGrp="1"/>
           </p:cNvGraphicFramePr>
@@ -8597,1611 +10311,6 @@
 </p:sld>
 </file>
 
-<file path=ppt/slides/slide4.xml><?xml version="1.0" encoding="utf-8"?>
-<p:sld xmlns:a="http://schemas.openxmlformats.org/drawingml/2006/main" xmlns:r="http://schemas.openxmlformats.org/officeDocument/2006/relationships" xmlns:p="http://schemas.openxmlformats.org/presentationml/2006/main">
-  <p:cSld name="Slide 4">
-    <p:bg>
-      <p:bgPr>
-        <a:solidFill>
-          <a:srgbClr val="FFFFFF"/>
-        </a:solidFill>
-      </p:bgPr>
-    </p:bg>
-    <p:spTree>
-      <p:nvGrpSpPr>
-        <p:cNvPr id="1" name=""/>
-        <p:cNvGrpSpPr/>
-        <p:nvPr/>
-      </p:nvGrpSpPr>
-      <p:grpSpPr>
-        <a:xfrm>
-          <a:off x="0" y="0"/>
-          <a:ext cx="0" cy="0"/>
-          <a:chOff x="0" y="0"/>
-          <a:chExt cx="0" cy="0"/>
-        </a:xfrm>
-      </p:grpSpPr>
-      <p:sp>
-        <p:nvSpPr>
-          <p:cNvPr id="2" name="Shape 0"/>
-          <p:cNvSpPr/>
-          <p:nvPr/>
-        </p:nvSpPr>
-        <p:spPr>
-          <a:xfrm>
-            <a:off x="0" y="0"/>
-            <a:ext cx="54864" cy="5143500"/>
-          </a:xfrm>
-          <a:prstGeom prst="rect">
-            <a:avLst/>
-          </a:prstGeom>
-          <a:solidFill>
-            <a:srgbClr val="1E2761"/>
-          </a:solidFill>
-          <a:ln/>
-        </p:spPr>
-      </p:sp>
-      <p:sp>
-        <p:nvSpPr>
-          <p:cNvPr id="3" name="Text 1"/>
-          <p:cNvSpPr/>
-          <p:nvPr/>
-        </p:nvSpPr>
-        <p:spPr>
-          <a:xfrm>
-            <a:off x="5486400" y="256032"/>
-            <a:ext cx="3337560" cy="228600"/>
-          </a:xfrm>
-          <a:prstGeom prst="rect">
-            <a:avLst/>
-          </a:prstGeom>
-          <a:noFill/>
-          <a:ln/>
-        </p:spPr>
-        <p:txBody>
-          <a:bodyPr wrap="square" lIns="0" tIns="0" rIns="0" bIns="0" rtlCol="0" anchor="ctr">
-            <a:normAutofit/>
-          </a:bodyPr>
-          <a:lstStyle/>
-          <a:p>
-            <a:pPr algn="r" indent="0" marL="0">
-              <a:buNone/>
-            </a:pPr>
-            <a:r>
-              <a:rPr lang="en-US" sz="950" dirty="0">
-                <a:solidFill>
-                  <a:srgbClr val="6B7280"/>
-                </a:solidFill>
-                <a:latin typeface="Calibri" pitchFamily="34" charset="0"/>
-                <a:ea typeface="Calibri" pitchFamily="34" charset="-122"/>
-                <a:cs typeface="Calibri" pitchFamily="34" charset="-120"/>
-              </a:rPr>
-              <a:t>Day 3 · Module 5</a:t>
-            </a:r>
-            <a:endParaRPr lang="en-US" sz="950" dirty="0"/>
-          </a:p>
-        </p:txBody>
-      </p:sp>
-      <p:sp>
-        <p:nvSpPr>
-          <p:cNvPr id="4" name="Text 2"/>
-          <p:cNvSpPr/>
-          <p:nvPr/>
-        </p:nvSpPr>
-        <p:spPr>
-          <a:xfrm>
-            <a:off x="365760" y="310896"/>
-            <a:ext cx="6583680" cy="603504"/>
-          </a:xfrm>
-          <a:prstGeom prst="rect">
-            <a:avLst/>
-          </a:prstGeom>
-          <a:noFill/>
-          <a:ln/>
-        </p:spPr>
-        <p:txBody>
-          <a:bodyPr wrap="square" lIns="0" tIns="0" rIns="0" bIns="0" rtlCol="0" anchor="ctr">
-            <a:normAutofit/>
-          </a:bodyPr>
-          <a:lstStyle/>
-          <a:p>
-            <a:pPr indent="0" marL="0">
-              <a:buNone/>
-            </a:pPr>
-            <a:r>
-              <a:rPr lang="en-US" sz="2500" b="1" dirty="0">
-                <a:solidFill>
-                  <a:srgbClr val="1E2761"/>
-                </a:solidFill>
-                <a:latin typeface="Calibri" pitchFamily="34" charset="0"/>
-                <a:ea typeface="Calibri" pitchFamily="34" charset="-122"/>
-                <a:cs typeface="Calibri" pitchFamily="34" charset="-120"/>
-              </a:rPr>
-              <a:t>Local stdio is a child-process boundary</a:t>
-            </a:r>
-            <a:endParaRPr lang="en-US" sz="2500" dirty="0"/>
-          </a:p>
-        </p:txBody>
-      </p:sp>
-      <p:sp>
-        <p:nvSpPr>
-          <p:cNvPr id="5" name="Shape 3"/>
-          <p:cNvSpPr/>
-          <p:nvPr/>
-        </p:nvSpPr>
-        <p:spPr>
-          <a:xfrm>
-            <a:off x="365760" y="1115568"/>
-            <a:ext cx="8412480" cy="2350008"/>
-          </a:xfrm>
-          <a:prstGeom prst="rect">
-            <a:avLst/>
-          </a:prstGeom>
-          <a:solidFill>
-            <a:srgbClr val="1D1E22"/>
-          </a:solidFill>
-          <a:ln w="9525">
-            <a:solidFill>
-              <a:srgbClr val="2A2B2E"/>
-            </a:solidFill>
-            <a:prstDash val="solid"/>
-          </a:ln>
-        </p:spPr>
-      </p:sp>
-      <p:sp>
-        <p:nvSpPr>
-          <p:cNvPr id="6" name="Text 4"/>
-          <p:cNvSpPr/>
-          <p:nvPr/>
-        </p:nvSpPr>
-        <p:spPr>
-          <a:xfrm>
-            <a:off x="502920" y="1207008"/>
-            <a:ext cx="8138160" cy="2167128"/>
-          </a:xfrm>
-          <a:prstGeom prst="rect">
-            <a:avLst/>
-          </a:prstGeom>
-          <a:noFill/>
-          <a:ln/>
-        </p:spPr>
-        <p:txBody>
-          <a:bodyPr wrap="square" lIns="0" tIns="0" rIns="0" bIns="0" rtlCol="0" anchor="t"/>
-          <a:lstStyle/>
-          <a:p>
-            <a:pPr indent="0" marL="0">
-              <a:buNone/>
-            </a:pPr>
-            <a:r>
-              <a:rPr lang="en-US" sz="1280" dirty="0">
-                <a:solidFill>
-                  <a:srgbClr val="A996B6"/>
-                </a:solidFill>
-                <a:latin typeface="Consolas" pitchFamily="34" charset="0"/>
-                <a:ea typeface="Consolas" pitchFamily="34" charset="-122"/>
-                <a:cs typeface="Consolas" pitchFamily="34" charset="-120"/>
-              </a:rPr>
-              <a:t>async</a:t>
-            </a:r>
-            <a:pPr indent="0" marL="0">
-              <a:buNone/>
-            </a:pPr>
-            <a:r>
-              <a:rPr lang="en-US" sz="1280" dirty="0">
-                <a:solidFill>
-                  <a:srgbClr val="FFFFFF"/>
-                </a:solidFill>
-                <a:latin typeface="Consolas" pitchFamily="34" charset="0"/>
-                <a:ea typeface="Consolas" pitchFamily="34" charset="-122"/>
-                <a:cs typeface="Consolas" pitchFamily="34" charset="-120"/>
-              </a:rPr>
-              <a:t> </a:t>
-            </a:r>
-            <a:pPr indent="0" marL="0">
-              <a:buNone/>
-            </a:pPr>
-            <a:r>
-              <a:rPr lang="en-US" sz="1280" dirty="0">
-                <a:solidFill>
-                  <a:srgbClr val="A996B6"/>
-                </a:solidFill>
-                <a:latin typeface="Consolas" pitchFamily="34" charset="0"/>
-                <a:ea typeface="Consolas" pitchFamily="34" charset="-122"/>
-                <a:cs typeface="Consolas" pitchFamily="34" charset="-120"/>
-              </a:rPr>
-              <a:t>with</a:t>
-            </a:r>
-            <a:pPr indent="0" marL="0">
-              <a:buNone/>
-            </a:pPr>
-            <a:r>
-              <a:rPr lang="en-US" sz="1280" dirty="0">
-                <a:solidFill>
-                  <a:srgbClr val="FFFFFF"/>
-                </a:solidFill>
-                <a:latin typeface="Consolas" pitchFamily="34" charset="0"/>
-                <a:ea typeface="Consolas" pitchFamily="34" charset="-122"/>
-                <a:cs typeface="Consolas" pitchFamily="34" charset="-120"/>
-              </a:rPr>
-              <a:t> MCPStdioTool(</a:t>
-            </a:r>
-            <a:endParaRPr lang="en-US" sz="1280" dirty="0"/>
-          </a:p>
-          <a:p>
-            <a:pPr indent="0" marL="0">
-              <a:buNone/>
-            </a:pPr>
-            <a:r>
-              <a:rPr lang="en-US" sz="1280" dirty="0">
-                <a:solidFill>
-                  <a:srgbClr val="FFFFFF"/>
-                </a:solidFill>
-                <a:latin typeface="Consolas" pitchFamily="34" charset="0"/>
-                <a:ea typeface="Consolas" pitchFamily="34" charset="-122"/>
-                <a:cs typeface="Consolas" pitchFamily="34" charset="-120"/>
-              </a:rPr>
-              <a:t>    name=</a:t>
-            </a:r>
-            <a:endParaRPr lang="en-US" sz="1280" dirty="0"/>
-          </a:p>
-          <a:p>
-            <a:pPr indent="0" marL="0">
-              <a:buNone/>
-            </a:pPr>
-            <a:r>
-              <a:rPr lang="en-US" sz="1280" dirty="0">
-                <a:solidFill>
-                  <a:srgbClr val="E4C98A"/>
-                </a:solidFill>
-                <a:latin typeface="Consolas" pitchFamily="34" charset="0"/>
-                <a:ea typeface="Consolas" pitchFamily="34" charset="-122"/>
-                <a:cs typeface="Consolas" pitchFamily="34" charset="-120"/>
-              </a:rPr>
-              <a:t>"calculator"</a:t>
-            </a:r>
-            <a:pPr indent="0" marL="0">
-              <a:buNone/>
-            </a:pPr>
-            <a:r>
-              <a:rPr lang="en-US" sz="1280" dirty="0">
-                <a:solidFill>
-                  <a:srgbClr val="FFFFFF"/>
-                </a:solidFill>
-                <a:latin typeface="Consolas" pitchFamily="34" charset="0"/>
-                <a:ea typeface="Consolas" pitchFamily="34" charset="-122"/>
-                <a:cs typeface="Consolas" pitchFamily="34" charset="-120"/>
-              </a:rPr>
-              <a:t>,</a:t>
-            </a:r>
-            <a:endParaRPr lang="en-US" sz="1280" dirty="0"/>
-          </a:p>
-          <a:p>
-            <a:pPr indent="0" marL="0">
-              <a:buNone/>
-            </a:pPr>
-            <a:r>
-              <a:rPr lang="en-US" sz="1280" dirty="0">
-                <a:solidFill>
-                  <a:srgbClr val="FFFFFF"/>
-                </a:solidFill>
-                <a:latin typeface="Consolas" pitchFamily="34" charset="0"/>
-                <a:ea typeface="Consolas" pitchFamily="34" charset="-122"/>
-                <a:cs typeface="Consolas" pitchFamily="34" charset="-120"/>
-              </a:rPr>
-              <a:t>    command=</a:t>
-            </a:r>
-            <a:endParaRPr lang="en-US" sz="1280" dirty="0"/>
-          </a:p>
-          <a:p>
-            <a:pPr indent="0" marL="0">
-              <a:buNone/>
-            </a:pPr>
-            <a:r>
-              <a:rPr lang="en-US" sz="1280" dirty="0">
-                <a:solidFill>
-                  <a:srgbClr val="E4C98A"/>
-                </a:solidFill>
-                <a:latin typeface="Consolas" pitchFamily="34" charset="0"/>
-                <a:ea typeface="Consolas" pitchFamily="34" charset="-122"/>
-                <a:cs typeface="Consolas" pitchFamily="34" charset="-120"/>
-              </a:rPr>
-              <a:t>"uvx"</a:t>
-            </a:r>
-            <a:pPr indent="0" marL="0">
-              <a:buNone/>
-            </a:pPr>
-            <a:r>
-              <a:rPr lang="en-US" sz="1280" dirty="0">
-                <a:solidFill>
-                  <a:srgbClr val="FFFFFF"/>
-                </a:solidFill>
-                <a:latin typeface="Consolas" pitchFamily="34" charset="0"/>
-                <a:ea typeface="Consolas" pitchFamily="34" charset="-122"/>
-                <a:cs typeface="Consolas" pitchFamily="34" charset="-120"/>
-              </a:rPr>
-              <a:t>,</a:t>
-            </a:r>
-            <a:endParaRPr lang="en-US" sz="1280" dirty="0"/>
-          </a:p>
-          <a:p>
-            <a:pPr indent="0" marL="0">
-              <a:buNone/>
-            </a:pPr>
-            <a:r>
-              <a:rPr lang="en-US" sz="1280" dirty="0">
-                <a:solidFill>
-                  <a:srgbClr val="FFFFFF"/>
-                </a:solidFill>
-                <a:latin typeface="Consolas" pitchFamily="34" charset="0"/>
-                <a:ea typeface="Consolas" pitchFamily="34" charset="-122"/>
-                <a:cs typeface="Consolas" pitchFamily="34" charset="-120"/>
-              </a:rPr>
-              <a:t>    args=[</a:t>
-            </a:r>
-            <a:endParaRPr lang="en-US" sz="1280" dirty="0"/>
-          </a:p>
-          <a:p>
-            <a:pPr indent="0" marL="0">
-              <a:buNone/>
-            </a:pPr>
-            <a:r>
-              <a:rPr lang="en-US" sz="1280" dirty="0">
-                <a:solidFill>
-                  <a:srgbClr val="E4C98A"/>
-                </a:solidFill>
-                <a:latin typeface="Consolas" pitchFamily="34" charset="0"/>
-                <a:ea typeface="Consolas" pitchFamily="34" charset="-122"/>
-                <a:cs typeface="Consolas" pitchFamily="34" charset="-120"/>
-              </a:rPr>
-              <a:t>"mcp-server-calculator"</a:t>
-            </a:r>
-            <a:pPr indent="0" marL="0">
-              <a:buNone/>
-            </a:pPr>
-            <a:r>
-              <a:rPr lang="en-US" sz="1280" dirty="0">
-                <a:solidFill>
-                  <a:srgbClr val="FFFFFF"/>
-                </a:solidFill>
-                <a:latin typeface="Consolas" pitchFamily="34" charset="0"/>
-                <a:ea typeface="Consolas" pitchFamily="34" charset="-122"/>
-                <a:cs typeface="Consolas" pitchFamily="34" charset="-120"/>
-              </a:rPr>
-              <a:t>],</a:t>
-            </a:r>
-            <a:endParaRPr lang="en-US" sz="1280" dirty="0"/>
-          </a:p>
-          <a:p>
-            <a:pPr indent="0" marL="0">
-              <a:buNone/>
-            </a:pPr>
-            <a:r>
-              <a:rPr lang="en-US" sz="1280" dirty="0">
-                <a:solidFill>
-                  <a:srgbClr val="FFFFFF"/>
-                </a:solidFill>
-                <a:latin typeface="Consolas" pitchFamily="34" charset="0"/>
-                <a:ea typeface="Consolas" pitchFamily="34" charset="-122"/>
-                <a:cs typeface="Consolas" pitchFamily="34" charset="-120"/>
-              </a:rPr>
-              <a:t>) </a:t>
-            </a:r>
-            <a:endParaRPr lang="en-US" sz="1280" dirty="0"/>
-          </a:p>
-          <a:p>
-            <a:pPr indent="0" marL="0">
-              <a:buNone/>
-            </a:pPr>
-            <a:r>
-              <a:rPr lang="en-US" sz="1280" dirty="0">
-                <a:solidFill>
-                  <a:srgbClr val="A996B6"/>
-                </a:solidFill>
-                <a:latin typeface="Consolas" pitchFamily="34" charset="0"/>
-                <a:ea typeface="Consolas" pitchFamily="34" charset="-122"/>
-                <a:cs typeface="Consolas" pitchFamily="34" charset="-120"/>
-              </a:rPr>
-              <a:t>as</a:t>
-            </a:r>
-            <a:pPr indent="0" marL="0">
-              <a:buNone/>
-            </a:pPr>
-            <a:r>
-              <a:rPr lang="en-US" sz="1280" dirty="0">
-                <a:solidFill>
-                  <a:srgbClr val="FFFFFF"/>
-                </a:solidFill>
-                <a:latin typeface="Consolas" pitchFamily="34" charset="0"/>
-                <a:ea typeface="Consolas" pitchFamily="34" charset="-122"/>
-                <a:cs typeface="Consolas" pitchFamily="34" charset="-120"/>
-              </a:rPr>
-              <a:t> mcp:</a:t>
-            </a:r>
-            <a:endParaRPr lang="en-US" sz="1280" dirty="0"/>
-          </a:p>
-          <a:p>
-            <a:pPr indent="0" marL="0">
-              <a:buNone/>
-            </a:pPr>
-            <a:r>
-              <a:rPr lang="en-US" sz="1280" dirty="0">
-                <a:solidFill>
-                  <a:srgbClr val="FFFFFF"/>
-                </a:solidFill>
-                <a:latin typeface="Consolas" pitchFamily="34" charset="0"/>
-                <a:ea typeface="Consolas" pitchFamily="34" charset="-122"/>
-                <a:cs typeface="Consolas" pitchFamily="34" charset="-120"/>
-              </a:rPr>
-              <a:t>    result = </a:t>
-            </a:r>
-            <a:endParaRPr lang="en-US" sz="1280" dirty="0"/>
-          </a:p>
-          <a:p>
-            <a:pPr indent="0" marL="0">
-              <a:buNone/>
-            </a:pPr>
-            <a:r>
-              <a:rPr lang="en-US" sz="1280" dirty="0">
-                <a:solidFill>
-                  <a:srgbClr val="A996B6"/>
-                </a:solidFill>
-                <a:latin typeface="Consolas" pitchFamily="34" charset="0"/>
-                <a:ea typeface="Consolas" pitchFamily="34" charset="-122"/>
-                <a:cs typeface="Consolas" pitchFamily="34" charset="-120"/>
-              </a:rPr>
-              <a:t>await</a:t>
-            </a:r>
-            <a:pPr indent="0" marL="0">
-              <a:buNone/>
-            </a:pPr>
-            <a:r>
-              <a:rPr lang="en-US" sz="1280" dirty="0">
-                <a:solidFill>
-                  <a:srgbClr val="FFFFFF"/>
-                </a:solidFill>
-                <a:latin typeface="Consolas" pitchFamily="34" charset="0"/>
-                <a:ea typeface="Consolas" pitchFamily="34" charset="-122"/>
-                <a:cs typeface="Consolas" pitchFamily="34" charset="-120"/>
-              </a:rPr>
-              <a:t> agent.run(</a:t>
-            </a:r>
-            <a:endParaRPr lang="en-US" sz="1280" dirty="0"/>
-          </a:p>
-          <a:p>
-            <a:pPr indent="0" marL="0">
-              <a:buNone/>
-            </a:pPr>
-            <a:r>
-              <a:rPr lang="en-US" sz="1280" dirty="0">
-                <a:solidFill>
-                  <a:srgbClr val="FFFFFF"/>
-                </a:solidFill>
-                <a:latin typeface="Consolas" pitchFamily="34" charset="0"/>
-                <a:ea typeface="Consolas" pitchFamily="34" charset="-122"/>
-                <a:cs typeface="Consolas" pitchFamily="34" charset="-120"/>
-              </a:rPr>
-              <a:t>        </a:t>
-            </a:r>
-            <a:endParaRPr lang="en-US" sz="1280" dirty="0"/>
-          </a:p>
-          <a:p>
-            <a:pPr indent="0" marL="0">
-              <a:buNone/>
-            </a:pPr>
-            <a:r>
-              <a:rPr lang="en-US" sz="1280" dirty="0">
-                <a:solidFill>
-                  <a:srgbClr val="E4C98A"/>
-                </a:solidFill>
-                <a:latin typeface="Consolas" pitchFamily="34" charset="0"/>
-                <a:ea typeface="Consolas" pitchFamily="34" charset="-122"/>
-                <a:cs typeface="Consolas" pitchFamily="34" charset="-120"/>
-              </a:rPr>
-              <a:t>"Calculate the total."</a:t>
-            </a:r>
-            <a:pPr indent="0" marL="0">
-              <a:buNone/>
-            </a:pPr>
-            <a:r>
-              <a:rPr lang="en-US" sz="1280" dirty="0">
-                <a:solidFill>
-                  <a:srgbClr val="FFFFFF"/>
-                </a:solidFill>
-                <a:latin typeface="Consolas" pitchFamily="34" charset="0"/>
-                <a:ea typeface="Consolas" pitchFamily="34" charset="-122"/>
-                <a:cs typeface="Consolas" pitchFamily="34" charset="-120"/>
-              </a:rPr>
-              <a:t>,</a:t>
-            </a:r>
-            <a:endParaRPr lang="en-US" sz="1280" dirty="0"/>
-          </a:p>
-          <a:p>
-            <a:pPr indent="0" marL="0">
-              <a:buNone/>
-            </a:pPr>
-            <a:r>
-              <a:rPr lang="en-US" sz="1280" dirty="0">
-                <a:solidFill>
-                  <a:srgbClr val="FFFFFF"/>
-                </a:solidFill>
-                <a:latin typeface="Consolas" pitchFamily="34" charset="0"/>
-                <a:ea typeface="Consolas" pitchFamily="34" charset="-122"/>
-                <a:cs typeface="Consolas" pitchFamily="34" charset="-120"/>
-              </a:rPr>
-              <a:t>        tools=mcp,</a:t>
-            </a:r>
-            <a:endParaRPr lang="en-US" sz="1280" dirty="0"/>
-          </a:p>
-          <a:p>
-            <a:pPr indent="0" marL="0">
-              <a:buNone/>
-            </a:pPr>
-            <a:r>
-              <a:rPr lang="en-US" sz="1280" dirty="0">
-                <a:solidFill>
-                  <a:srgbClr val="FFFFFF"/>
-                </a:solidFill>
-                <a:latin typeface="Consolas" pitchFamily="34" charset="0"/>
-                <a:ea typeface="Consolas" pitchFamily="34" charset="-122"/>
-                <a:cs typeface="Consolas" pitchFamily="34" charset="-120"/>
-              </a:rPr>
-              <a:t>    )</a:t>
-            </a:r>
-            <a:endParaRPr lang="en-US" sz="1280" dirty="0"/>
-          </a:p>
-        </p:txBody>
-      </p:sp>
-      <p:sp>
-        <p:nvSpPr>
-          <p:cNvPr id="7" name="Shape 5"/>
-          <p:cNvSpPr/>
-          <p:nvPr/>
-        </p:nvSpPr>
-        <p:spPr>
-          <a:xfrm>
-            <a:off x="365760" y="4773168"/>
-            <a:ext cx="8412480" cy="0"/>
-          </a:xfrm>
-          <a:prstGeom prst="line">
-            <a:avLst/>
-          </a:prstGeom>
-          <a:noFill/>
-          <a:ln w="6350">
-            <a:solidFill>
-              <a:srgbClr val="D1D5DB"/>
-            </a:solidFill>
-            <a:prstDash val="solid"/>
-          </a:ln>
-        </p:spPr>
-      </p:sp>
-      <p:sp>
-        <p:nvSpPr>
-          <p:cNvPr id="8" name="Text 6"/>
-          <p:cNvSpPr/>
-          <p:nvPr/>
-        </p:nvSpPr>
-        <p:spPr>
-          <a:xfrm>
-            <a:off x="384048" y="4818888"/>
-            <a:ext cx="8275320" cy="182880"/>
-          </a:xfrm>
-          <a:prstGeom prst="rect">
-            <a:avLst/>
-          </a:prstGeom>
-          <a:noFill/>
-          <a:ln/>
-        </p:spPr>
-        <p:txBody>
-          <a:bodyPr wrap="square" lIns="0" tIns="0" rIns="0" bIns="0" rtlCol="0" anchor="ctr">
-            <a:normAutofit/>
-          </a:bodyPr>
-          <a:lstStyle/>
-          <a:p>
-            <a:pPr indent="0" marL="0">
-              <a:buNone/>
-            </a:pPr>
-            <a:r>
-              <a:rPr lang="en-US" sz="820" dirty="0">
-                <a:solidFill>
-                  <a:srgbClr val="6B7280"/>
-                </a:solidFill>
-                <a:latin typeface="Calibri" pitchFamily="34" charset="0"/>
-                <a:ea typeface="Calibri" pitchFamily="34" charset="-122"/>
-                <a:cs typeface="Calibri" pitchFamily="34" charset="-120"/>
-              </a:rPr>
-              <a:t>Source: https://learn.microsoft.com/en-us/agent-framework/agents/tools/local-mcp-tools?tabs=python</a:t>
-            </a:r>
-            <a:endParaRPr lang="en-US" sz="820" dirty="0"/>
-          </a:p>
-        </p:txBody>
-      </p:sp>
-    </p:spTree>
-  </p:cSld>
-  <p:clrMapOvr>
-    <a:masterClrMapping/>
-  </p:clrMapOvr>
-</p:sld>
-</file>
-
-<file path=ppt/slides/slide5.xml><?xml version="1.0" encoding="utf-8"?>
-<p:sld xmlns:a="http://schemas.openxmlformats.org/drawingml/2006/main" xmlns:r="http://schemas.openxmlformats.org/officeDocument/2006/relationships" xmlns:p="http://schemas.openxmlformats.org/presentationml/2006/main">
-  <p:cSld name="Slide 5">
-    <p:bg>
-      <p:bgPr>
-        <a:solidFill>
-          <a:srgbClr val="CADCFC"/>
-        </a:solidFill>
-      </p:bgPr>
-    </p:bg>
-    <p:spTree>
-      <p:nvGrpSpPr>
-        <p:cNvPr id="1" name=""/>
-        <p:cNvGrpSpPr/>
-        <p:nvPr/>
-      </p:nvGrpSpPr>
-      <p:grpSpPr>
-        <a:xfrm>
-          <a:off x="0" y="0"/>
-          <a:ext cx="0" cy="0"/>
-          <a:chOff x="0" y="0"/>
-          <a:chExt cx="0" cy="0"/>
-        </a:xfrm>
-      </p:grpSpPr>
-      <p:sp>
-        <p:nvSpPr>
-          <p:cNvPr id="2" name="Shape 0"/>
-          <p:cNvSpPr/>
-          <p:nvPr/>
-        </p:nvSpPr>
-        <p:spPr>
-          <a:xfrm>
-            <a:off x="0" y="0"/>
-            <a:ext cx="146304" cy="5143500"/>
-          </a:xfrm>
-          <a:prstGeom prst="rect">
-            <a:avLst/>
-          </a:prstGeom>
-          <a:solidFill>
-            <a:srgbClr val="1E2761"/>
-          </a:solidFill>
-          <a:ln/>
-        </p:spPr>
-      </p:sp>
-      <p:sp>
-        <p:nvSpPr>
-          <p:cNvPr id="3" name="Text 1"/>
-          <p:cNvSpPr/>
-          <p:nvPr/>
-        </p:nvSpPr>
-        <p:spPr>
-          <a:xfrm>
-            <a:off x="5669280" y="274320"/>
-            <a:ext cx="3291840" cy="274320"/>
-          </a:xfrm>
-          <a:prstGeom prst="rect">
-            <a:avLst/>
-          </a:prstGeom>
-          <a:noFill/>
-          <a:ln/>
-        </p:spPr>
-        <p:txBody>
-          <a:bodyPr wrap="square" lIns="0" tIns="0" rIns="0" bIns="0" rtlCol="0" anchor="ctr"/>
-          <a:lstStyle/>
-          <a:p>
-            <a:pPr algn="r" indent="0" marL="0">
-              <a:buNone/>
-            </a:pPr>
-            <a:r>
-              <a:rPr lang="en-US" sz="1000" dirty="0">
-                <a:solidFill>
-                  <a:srgbClr val="6B7280"/>
-                </a:solidFill>
-                <a:latin typeface="Calibri" pitchFamily="34" charset="0"/>
-                <a:ea typeface="Calibri" pitchFamily="34" charset="-122"/>
-                <a:cs typeface="Calibri" pitchFamily="34" charset="-120"/>
-              </a:rPr>
-              <a:t>Day 3 · Module 5 · Demo</a:t>
-            </a:r>
-            <a:endParaRPr lang="en-US" sz="1000" dirty="0"/>
-          </a:p>
-        </p:txBody>
-      </p:sp>
-      <p:sp>
-        <p:nvSpPr>
-          <p:cNvPr id="4" name="Text 2"/>
-          <p:cNvSpPr/>
-          <p:nvPr/>
-        </p:nvSpPr>
-        <p:spPr>
-          <a:xfrm>
-            <a:off x="548640" y="1051560"/>
-            <a:ext cx="5486400" cy="502920"/>
-          </a:xfrm>
-          <a:prstGeom prst="rect">
-            <a:avLst/>
-          </a:prstGeom>
-          <a:noFill/>
-          <a:ln/>
-        </p:spPr>
-        <p:txBody>
-          <a:bodyPr wrap="square" lIns="0" tIns="0" rIns="0" bIns="0" rtlCol="0" anchor="ctr"/>
-          <a:lstStyle/>
-          <a:p>
-            <a:pPr indent="0" marL="0">
-              <a:buNone/>
-            </a:pPr>
-            <a:r>
-              <a:rPr lang="en-US" sz="3200" b="1" spc="800" kern="0" dirty="0">
-                <a:solidFill>
-                  <a:srgbClr val="1E2761"/>
-                </a:solidFill>
-                <a:latin typeface="Calibri" pitchFamily="34" charset="0"/>
-                <a:ea typeface="Calibri" pitchFamily="34" charset="-122"/>
-                <a:cs typeface="Calibri" pitchFamily="34" charset="-120"/>
-              </a:rPr>
-              <a:t>DEMO</a:t>
-            </a:r>
-            <a:endParaRPr lang="en-US" sz="3200" dirty="0"/>
-          </a:p>
-        </p:txBody>
-      </p:sp>
-      <p:sp>
-        <p:nvSpPr>
-          <p:cNvPr id="5" name="Text 3"/>
-          <p:cNvSpPr/>
-          <p:nvPr/>
-        </p:nvSpPr>
-        <p:spPr>
-          <a:xfrm>
-            <a:off x="548640" y="1691640"/>
-            <a:ext cx="8046720" cy="914400"/>
-          </a:xfrm>
-          <a:prstGeom prst="rect">
-            <a:avLst/>
-          </a:prstGeom>
-          <a:noFill/>
-          <a:ln/>
-        </p:spPr>
-        <p:txBody>
-          <a:bodyPr wrap="square" lIns="0" tIns="0" rIns="0" bIns="0" rtlCol="0" anchor="ctr"/>
-          <a:lstStyle/>
-          <a:p>
-            <a:pPr indent="0" marL="0">
-              <a:buNone/>
-            </a:pPr>
-            <a:r>
-              <a:rPr lang="en-US" sz="3000" b="1" dirty="0">
-                <a:solidFill>
-                  <a:srgbClr val="1E2761"/>
-                </a:solidFill>
-                <a:latin typeface="Calibri" pitchFamily="34" charset="0"/>
-                <a:ea typeface="Calibri" pitchFamily="34" charset="-122"/>
-                <a:cs typeface="Calibri" pitchFamily="34" charset="-120"/>
-              </a:rPr>
-              <a:t>Local stdio MCP tool call, end to end</a:t>
-            </a:r>
-            <a:endParaRPr lang="en-US" sz="3000" dirty="0"/>
-          </a:p>
-        </p:txBody>
-      </p:sp>
-      <p:sp>
-        <p:nvSpPr>
-          <p:cNvPr id="6" name="Text 4"/>
-          <p:cNvSpPr/>
-          <p:nvPr/>
-        </p:nvSpPr>
-        <p:spPr>
-          <a:xfrm>
-            <a:off x="6583680" y="1051560"/>
-            <a:ext cx="2194560" cy="502920"/>
-          </a:xfrm>
-          <a:prstGeom prst="rect">
-            <a:avLst/>
-          </a:prstGeom>
-          <a:noFill/>
-          <a:ln/>
-        </p:spPr>
-        <p:txBody>
-          <a:bodyPr wrap="square" lIns="0" tIns="0" rIns="0" bIns="0" rtlCol="0" anchor="ctr"/>
-          <a:lstStyle/>
-          <a:p>
-            <a:pPr algn="r" indent="0" marL="0">
-              <a:buNone/>
-            </a:pPr>
-            <a:r>
-              <a:rPr lang="en-US" sz="1800" i="1" dirty="0">
-                <a:solidFill>
-                  <a:srgbClr val="6B7280"/>
-                </a:solidFill>
-                <a:latin typeface="Calibri" pitchFamily="34" charset="0"/>
-                <a:ea typeface="Calibri" pitchFamily="34" charset="-122"/>
-                <a:cs typeface="Calibri" pitchFamily="34" charset="-120"/>
-              </a:rPr>
-              <a:t>~5 min</a:t>
-            </a:r>
-            <a:endParaRPr lang="en-US" sz="1800" dirty="0"/>
-          </a:p>
-        </p:txBody>
-      </p:sp>
-      <p:sp>
-        <p:nvSpPr>
-          <p:cNvPr id="7" name="Text 5"/>
-          <p:cNvSpPr/>
-          <p:nvPr/>
-        </p:nvSpPr>
-        <p:spPr>
-          <a:xfrm>
-            <a:off x="548640" y="2788920"/>
-            <a:ext cx="8046720" cy="1371600"/>
-          </a:xfrm>
-          <a:prstGeom prst="rect">
-            <a:avLst/>
-          </a:prstGeom>
-          <a:noFill/>
-          <a:ln/>
-        </p:spPr>
-        <p:txBody>
-          <a:bodyPr wrap="square" lIns="0" tIns="0" rIns="0" bIns="0" rtlCol="0" anchor="ctr"/>
-          <a:lstStyle/>
-          <a:p>
-            <a:pPr indent="0" marL="0">
-              <a:spcAft>
-                <a:spcPts val="600"/>
-              </a:spcAft>
-              <a:buNone/>
-            </a:pPr>
-            <a:r>
-              <a:rPr lang="en-US" sz="1600" dirty="0">
-                <a:solidFill>
-                  <a:srgbClr val="212121"/>
-                </a:solidFill>
-                <a:latin typeface="Calibri" pitchFamily="34" charset="0"/>
-                <a:ea typeface="Calibri" pitchFamily="34" charset="-122"/>
-                <a:cs typeface="Calibri" pitchFamily="34" charset="-120"/>
-              </a:rPr>
-              <a:t>Run the previous slide's exact code live: connect to a local mcp-server-calculator child process, watch the agent discover and invoke a tool through it, and close the connection — client/server loop end to end.</a:t>
-            </a:r>
-            <a:endParaRPr lang="en-US" sz="1600" dirty="0"/>
-          </a:p>
-        </p:txBody>
-      </p:sp>
-      <p:sp>
-        <p:nvSpPr>
-          <p:cNvPr id="8" name="Text 6"/>
-          <p:cNvSpPr/>
-          <p:nvPr/>
-        </p:nvSpPr>
-        <p:spPr>
-          <a:xfrm>
-            <a:off x="548640" y="4434840"/>
-            <a:ext cx="8046720" cy="320040"/>
-          </a:xfrm>
-          <a:prstGeom prst="rect">
-            <a:avLst/>
-          </a:prstGeom>
-          <a:noFill/>
-          <a:ln/>
-        </p:spPr>
-        <p:txBody>
-          <a:bodyPr wrap="square" lIns="0" tIns="0" rIns="0" bIns="0" rtlCol="0" anchor="ctr"/>
-          <a:lstStyle/>
-          <a:p>
-            <a:pPr indent="0" marL="0">
-              <a:buNone/>
-            </a:pPr>
-            <a:r>
-              <a:rPr lang="en-US" sz="1100" i="1" dirty="0">
-                <a:solidFill>
-                  <a:srgbClr val="6B7280"/>
-                </a:solidFill>
-                <a:latin typeface="Calibri" pitchFamily="34" charset="0"/>
-                <a:ea typeface="Calibri" pitchFamily="34" charset="-122"/>
-                <a:cs typeface="Calibri" pitchFamily="34" charset="-120"/>
-              </a:rPr>
-              <a:t>Runbook: demos/day3/module-5-demo-1-stdio-mcp.md</a:t>
-            </a:r>
-            <a:endParaRPr lang="en-US" sz="1100" dirty="0"/>
-          </a:p>
-        </p:txBody>
-      </p:sp>
-      <p:sp>
-        <p:nvSpPr>
-          <p:cNvPr id="9" name="Shape 7"/>
-          <p:cNvSpPr/>
-          <p:nvPr/>
-        </p:nvSpPr>
-        <p:spPr>
-          <a:xfrm>
-            <a:off x="365760" y="4773168"/>
-            <a:ext cx="8412480" cy="0"/>
-          </a:xfrm>
-          <a:prstGeom prst="line">
-            <a:avLst/>
-          </a:prstGeom>
-          <a:noFill/>
-          <a:ln w="6350">
-            <a:solidFill>
-              <a:srgbClr val="D1D5DB"/>
-            </a:solidFill>
-            <a:prstDash val="solid"/>
-          </a:ln>
-        </p:spPr>
-      </p:sp>
-      <p:sp>
-        <p:nvSpPr>
-          <p:cNvPr id="10" name="Text 8"/>
-          <p:cNvSpPr/>
-          <p:nvPr/>
-        </p:nvSpPr>
-        <p:spPr>
-          <a:xfrm>
-            <a:off x="384048" y="4818888"/>
-            <a:ext cx="8275320" cy="182880"/>
-          </a:xfrm>
-          <a:prstGeom prst="rect">
-            <a:avLst/>
-          </a:prstGeom>
-          <a:noFill/>
-          <a:ln/>
-        </p:spPr>
-        <p:txBody>
-          <a:bodyPr wrap="square" lIns="0" tIns="0" rIns="0" bIns="0" rtlCol="0" anchor="ctr">
-            <a:normAutofit/>
-          </a:bodyPr>
-          <a:lstStyle/>
-          <a:p>
-            <a:pPr indent="0" marL="0">
-              <a:buNone/>
-            </a:pPr>
-            <a:r>
-              <a:rPr lang="en-US" sz="820" dirty="0">
-                <a:solidFill>
-                  <a:srgbClr val="6B7280"/>
-                </a:solidFill>
-                <a:latin typeface="Calibri" pitchFamily="34" charset="0"/>
-                <a:ea typeface="Calibri" pitchFamily="34" charset="-122"/>
-                <a:cs typeface="Calibri" pitchFamily="34" charset="-120"/>
-              </a:rPr>
-              <a:t>Source: https://learn.microsoft.com/en-us/agent-framework/agents/tools/local-mcp-tools?tabs=python</a:t>
-            </a:r>
-            <a:endParaRPr lang="en-US" sz="820" dirty="0"/>
-          </a:p>
-        </p:txBody>
-      </p:sp>
-    </p:spTree>
-  </p:cSld>
-  <p:clrMapOvr>
-    <a:masterClrMapping/>
-  </p:clrMapOvr>
-</p:sld>
-</file>
-
-<file path=ppt/slides/slide6.xml><?xml version="1.0" encoding="utf-8"?>
-<p:sld xmlns:a="http://schemas.openxmlformats.org/drawingml/2006/main" xmlns:r="http://schemas.openxmlformats.org/officeDocument/2006/relationships" xmlns:p="http://schemas.openxmlformats.org/presentationml/2006/main">
-  <p:cSld name="Slide 6">
-    <p:bg>
-      <p:bgPr>
-        <a:solidFill>
-          <a:srgbClr val="FFFFFF"/>
-        </a:solidFill>
-      </p:bgPr>
-    </p:bg>
-    <p:spTree>
-      <p:nvGrpSpPr>
-        <p:cNvPr id="1" name=""/>
-        <p:cNvGrpSpPr/>
-        <p:nvPr/>
-      </p:nvGrpSpPr>
-      <p:grpSpPr>
-        <a:xfrm>
-          <a:off x="0" y="0"/>
-          <a:ext cx="0" cy="0"/>
-          <a:chOff x="0" y="0"/>
-          <a:chExt cx="0" cy="0"/>
-        </a:xfrm>
-      </p:grpSpPr>
-      <p:sp>
-        <p:nvSpPr>
-          <p:cNvPr id="2" name="Shape 0"/>
-          <p:cNvSpPr/>
-          <p:nvPr/>
-        </p:nvSpPr>
-        <p:spPr>
-          <a:xfrm>
-            <a:off x="0" y="0"/>
-            <a:ext cx="54864" cy="5143500"/>
-          </a:xfrm>
-          <a:prstGeom prst="rect">
-            <a:avLst/>
-          </a:prstGeom>
-          <a:solidFill>
-            <a:srgbClr val="1E2761"/>
-          </a:solidFill>
-          <a:ln/>
-        </p:spPr>
-      </p:sp>
-      <p:sp>
-        <p:nvSpPr>
-          <p:cNvPr id="3" name="Text 1"/>
-          <p:cNvSpPr/>
-          <p:nvPr/>
-        </p:nvSpPr>
-        <p:spPr>
-          <a:xfrm>
-            <a:off x="5486400" y="256032"/>
-            <a:ext cx="3337560" cy="228600"/>
-          </a:xfrm>
-          <a:prstGeom prst="rect">
-            <a:avLst/>
-          </a:prstGeom>
-          <a:noFill/>
-          <a:ln/>
-        </p:spPr>
-        <p:txBody>
-          <a:bodyPr wrap="square" lIns="0" tIns="0" rIns="0" bIns="0" rtlCol="0" anchor="ctr">
-            <a:normAutofit/>
-          </a:bodyPr>
-          <a:lstStyle/>
-          <a:p>
-            <a:pPr algn="r" indent="0" marL="0">
-              <a:buNone/>
-            </a:pPr>
-            <a:r>
-              <a:rPr lang="en-US" sz="950" dirty="0">
-                <a:solidFill>
-                  <a:srgbClr val="6B7280"/>
-                </a:solidFill>
-                <a:latin typeface="Calibri" pitchFamily="34" charset="0"/>
-                <a:ea typeface="Calibri" pitchFamily="34" charset="-122"/>
-                <a:cs typeface="Calibri" pitchFamily="34" charset="-120"/>
-              </a:rPr>
-              <a:t>Day 3 · Module 5</a:t>
-            </a:r>
-            <a:endParaRPr lang="en-US" sz="950" dirty="0"/>
-          </a:p>
-        </p:txBody>
-      </p:sp>
-      <p:sp>
-        <p:nvSpPr>
-          <p:cNvPr id="4" name="Text 2"/>
-          <p:cNvSpPr/>
-          <p:nvPr/>
-        </p:nvSpPr>
-        <p:spPr>
-          <a:xfrm>
-            <a:off x="365760" y="310896"/>
-            <a:ext cx="6583680" cy="603504"/>
-          </a:xfrm>
-          <a:prstGeom prst="rect">
-            <a:avLst/>
-          </a:prstGeom>
-          <a:noFill/>
-          <a:ln/>
-        </p:spPr>
-        <p:txBody>
-          <a:bodyPr wrap="square" lIns="0" tIns="0" rIns="0" bIns="0" rtlCol="0" anchor="ctr">
-            <a:normAutofit/>
-          </a:bodyPr>
-          <a:lstStyle/>
-          <a:p>
-            <a:pPr indent="0" marL="0">
-              <a:buNone/>
-            </a:pPr>
-            <a:r>
-              <a:rPr lang="en-US" sz="2500" b="1" dirty="0">
-                <a:solidFill>
-                  <a:srgbClr val="1E2761"/>
-                </a:solidFill>
-                <a:latin typeface="Calibri" pitchFamily="34" charset="0"/>
-                <a:ea typeface="Calibri" pitchFamily="34" charset="-122"/>
-                <a:cs typeface="Calibri" pitchFamily="34" charset="-120"/>
-              </a:rPr>
-              <a:t>Remote HTTP belongs behind explicit auth</a:t>
-            </a:r>
-            <a:endParaRPr lang="en-US" sz="2500" dirty="0"/>
-          </a:p>
-        </p:txBody>
-      </p:sp>
-      <p:sp>
-        <p:nvSpPr>
-          <p:cNvPr id="5" name="Shape 3"/>
-          <p:cNvSpPr/>
-          <p:nvPr/>
-        </p:nvSpPr>
-        <p:spPr>
-          <a:xfrm>
-            <a:off x="365760" y="1115568"/>
-            <a:ext cx="8412480" cy="2350008"/>
-          </a:xfrm>
-          <a:prstGeom prst="rect">
-            <a:avLst/>
-          </a:prstGeom>
-          <a:solidFill>
-            <a:srgbClr val="1D1E22"/>
-          </a:solidFill>
-          <a:ln w="9525">
-            <a:solidFill>
-              <a:srgbClr val="2A2B2E"/>
-            </a:solidFill>
-            <a:prstDash val="solid"/>
-          </a:ln>
-        </p:spPr>
-      </p:sp>
-      <p:sp>
-        <p:nvSpPr>
-          <p:cNvPr id="6" name="Text 4"/>
-          <p:cNvSpPr/>
-          <p:nvPr/>
-        </p:nvSpPr>
-        <p:spPr>
-          <a:xfrm>
-            <a:off x="502920" y="1207008"/>
-            <a:ext cx="8138160" cy="2167128"/>
-          </a:xfrm>
-          <a:prstGeom prst="rect">
-            <a:avLst/>
-          </a:prstGeom>
-          <a:noFill/>
-          <a:ln/>
-        </p:spPr>
-        <p:txBody>
-          <a:bodyPr wrap="square" lIns="0" tIns="0" rIns="0" bIns="0" rtlCol="0" anchor="t"/>
-          <a:lstStyle/>
-          <a:p>
-            <a:pPr indent="0" marL="0">
-              <a:buNone/>
-            </a:pPr>
-            <a:r>
-              <a:rPr lang="en-US" sz="1280" dirty="0">
-                <a:solidFill>
-                  <a:srgbClr val="A996B6"/>
-                </a:solidFill>
-                <a:latin typeface="Consolas" pitchFamily="34" charset="0"/>
-                <a:ea typeface="Consolas" pitchFamily="34" charset="-122"/>
-                <a:cs typeface="Consolas" pitchFamily="34" charset="-120"/>
-              </a:rPr>
-              <a:t>async</a:t>
-            </a:r>
-            <a:pPr indent="0" marL="0">
-              <a:buNone/>
-            </a:pPr>
-            <a:r>
-              <a:rPr lang="en-US" sz="1280" dirty="0">
-                <a:solidFill>
-                  <a:srgbClr val="FFFFFF"/>
-                </a:solidFill>
-                <a:latin typeface="Consolas" pitchFamily="34" charset="0"/>
-                <a:ea typeface="Consolas" pitchFamily="34" charset="-122"/>
-                <a:cs typeface="Consolas" pitchFamily="34" charset="-120"/>
-              </a:rPr>
-              <a:t> </a:t>
-            </a:r>
-            <a:pPr indent="0" marL="0">
-              <a:buNone/>
-            </a:pPr>
-            <a:r>
-              <a:rPr lang="en-US" sz="1280" dirty="0">
-                <a:solidFill>
-                  <a:srgbClr val="A996B6"/>
-                </a:solidFill>
-                <a:latin typeface="Consolas" pitchFamily="34" charset="0"/>
-                <a:ea typeface="Consolas" pitchFamily="34" charset="-122"/>
-                <a:cs typeface="Consolas" pitchFamily="34" charset="-120"/>
-              </a:rPr>
-              <a:t>with</a:t>
-            </a:r>
-            <a:pPr indent="0" marL="0">
-              <a:buNone/>
-            </a:pPr>
-            <a:r>
-              <a:rPr lang="en-US" sz="1280" dirty="0">
-                <a:solidFill>
-                  <a:srgbClr val="FFFFFF"/>
-                </a:solidFill>
-                <a:latin typeface="Consolas" pitchFamily="34" charset="0"/>
-                <a:ea typeface="Consolas" pitchFamily="34" charset="-122"/>
-                <a:cs typeface="Consolas" pitchFamily="34" charset="-120"/>
-              </a:rPr>
-              <a:t> MCPStreamableHTTPTool(</a:t>
-            </a:r>
-            <a:endParaRPr lang="en-US" sz="1280" dirty="0"/>
-          </a:p>
-          <a:p>
-            <a:pPr indent="0" marL="0">
-              <a:buNone/>
-            </a:pPr>
-            <a:r>
-              <a:rPr lang="en-US" sz="1280" dirty="0">
-                <a:solidFill>
-                  <a:srgbClr val="FFFFFF"/>
-                </a:solidFill>
-                <a:latin typeface="Consolas" pitchFamily="34" charset="0"/>
-                <a:ea typeface="Consolas" pitchFamily="34" charset="-122"/>
-                <a:cs typeface="Consolas" pitchFamily="34" charset="-120"/>
-              </a:rPr>
-              <a:t>    name=</a:t>
-            </a:r>
-            <a:endParaRPr lang="en-US" sz="1280" dirty="0"/>
-          </a:p>
-          <a:p>
-            <a:pPr indent="0" marL="0">
-              <a:buNone/>
-            </a:pPr>
-            <a:r>
-              <a:rPr lang="en-US" sz="1280" dirty="0">
-                <a:solidFill>
-                  <a:srgbClr val="E4C98A"/>
-                </a:solidFill>
-                <a:latin typeface="Consolas" pitchFamily="34" charset="0"/>
-                <a:ea typeface="Consolas" pitchFamily="34" charset="-122"/>
-                <a:cs typeface="Consolas" pitchFamily="34" charset="-120"/>
-              </a:rPr>
-              <a:t>"docs"</a:t>
-            </a:r>
-            <a:pPr indent="0" marL="0">
-              <a:buNone/>
-            </a:pPr>
-            <a:r>
-              <a:rPr lang="en-US" sz="1280" dirty="0">
-                <a:solidFill>
-                  <a:srgbClr val="FFFFFF"/>
-                </a:solidFill>
-                <a:latin typeface="Consolas" pitchFamily="34" charset="0"/>
-                <a:ea typeface="Consolas" pitchFamily="34" charset="-122"/>
-                <a:cs typeface="Consolas" pitchFamily="34" charset="-120"/>
-              </a:rPr>
-              <a:t>,</a:t>
-            </a:r>
-            <a:endParaRPr lang="en-US" sz="1280" dirty="0"/>
-          </a:p>
-          <a:p>
-            <a:pPr indent="0" marL="0">
-              <a:buNone/>
-            </a:pPr>
-            <a:r>
-              <a:rPr lang="en-US" sz="1280" dirty="0">
-                <a:solidFill>
-                  <a:srgbClr val="FFFFFF"/>
-                </a:solidFill>
-                <a:latin typeface="Consolas" pitchFamily="34" charset="0"/>
-                <a:ea typeface="Consolas" pitchFamily="34" charset="-122"/>
-                <a:cs typeface="Consolas" pitchFamily="34" charset="-120"/>
-              </a:rPr>
-              <a:t>    url=</a:t>
-            </a:r>
-            <a:endParaRPr lang="en-US" sz="1280" dirty="0"/>
-          </a:p>
-          <a:p>
-            <a:pPr indent="0" marL="0">
-              <a:buNone/>
-            </a:pPr>
-            <a:r>
-              <a:rPr lang="en-US" sz="1280" dirty="0">
-                <a:solidFill>
-                  <a:srgbClr val="E4C98A"/>
-                </a:solidFill>
-                <a:latin typeface="Consolas" pitchFamily="34" charset="0"/>
-                <a:ea typeface="Consolas" pitchFamily="34" charset="-122"/>
-                <a:cs typeface="Consolas" pitchFamily="34" charset="-120"/>
-              </a:rPr>
-              <a:t>"https://learn.microsoft.com/api/mcp"</a:t>
-            </a:r>
-            <a:pPr indent="0" marL="0">
-              <a:buNone/>
-            </a:pPr>
-            <a:r>
-              <a:rPr lang="en-US" sz="1280" dirty="0">
-                <a:solidFill>
-                  <a:srgbClr val="FFFFFF"/>
-                </a:solidFill>
-                <a:latin typeface="Consolas" pitchFamily="34" charset="0"/>
-                <a:ea typeface="Consolas" pitchFamily="34" charset="-122"/>
-                <a:cs typeface="Consolas" pitchFamily="34" charset="-120"/>
-              </a:rPr>
-              <a:t>,</a:t>
-            </a:r>
-            <a:endParaRPr lang="en-US" sz="1280" dirty="0"/>
-          </a:p>
-          <a:p>
-            <a:pPr indent="0" marL="0">
-              <a:buNone/>
-            </a:pPr>
-            <a:r>
-              <a:rPr lang="en-US" sz="1280" dirty="0">
-                <a:solidFill>
-                  <a:srgbClr val="FFFFFF"/>
-                </a:solidFill>
-                <a:latin typeface="Consolas" pitchFamily="34" charset="0"/>
-                <a:ea typeface="Consolas" pitchFamily="34" charset="-122"/>
-                <a:cs typeface="Consolas" pitchFamily="34" charset="-120"/>
-              </a:rPr>
-              <a:t>    allowed_tools=[</a:t>
-            </a:r>
-            <a:endParaRPr lang="en-US" sz="1280" dirty="0"/>
-          </a:p>
-          <a:p>
-            <a:pPr indent="0" marL="0">
-              <a:buNone/>
-            </a:pPr>
-            <a:r>
-              <a:rPr lang="en-US" sz="1280" dirty="0">
-                <a:solidFill>
-                  <a:srgbClr val="E4C98A"/>
-                </a:solidFill>
-                <a:latin typeface="Consolas" pitchFamily="34" charset="0"/>
-                <a:ea typeface="Consolas" pitchFamily="34" charset="-122"/>
-                <a:cs typeface="Consolas" pitchFamily="34" charset="-120"/>
-              </a:rPr>
-              <a:t>"microsoft_docs_search"</a:t>
-            </a:r>
-            <a:pPr indent="0" marL="0">
-              <a:buNone/>
-            </a:pPr>
-            <a:r>
-              <a:rPr lang="en-US" sz="1280" dirty="0">
-                <a:solidFill>
-                  <a:srgbClr val="FFFFFF"/>
-                </a:solidFill>
-                <a:latin typeface="Consolas" pitchFamily="34" charset="0"/>
-                <a:ea typeface="Consolas" pitchFamily="34" charset="-122"/>
-                <a:cs typeface="Consolas" pitchFamily="34" charset="-120"/>
-              </a:rPr>
-              <a:t>],</a:t>
-            </a:r>
-            <a:endParaRPr lang="en-US" sz="1280" dirty="0"/>
-          </a:p>
-          <a:p>
-            <a:pPr indent="0" marL="0">
-              <a:buNone/>
-            </a:pPr>
-            <a:r>
-              <a:rPr lang="en-US" sz="1280" dirty="0">
-                <a:solidFill>
-                  <a:srgbClr val="FFFFFF"/>
-                </a:solidFill>
-                <a:latin typeface="Consolas" pitchFamily="34" charset="0"/>
-                <a:ea typeface="Consolas" pitchFamily="34" charset="-122"/>
-                <a:cs typeface="Consolas" pitchFamily="34" charset="-120"/>
-              </a:rPr>
-              <a:t>) </a:t>
-            </a:r>
-            <a:endParaRPr lang="en-US" sz="1280" dirty="0"/>
-          </a:p>
-          <a:p>
-            <a:pPr indent="0" marL="0">
-              <a:buNone/>
-            </a:pPr>
-            <a:r>
-              <a:rPr lang="en-US" sz="1280" dirty="0">
-                <a:solidFill>
-                  <a:srgbClr val="A996B6"/>
-                </a:solidFill>
-                <a:latin typeface="Consolas" pitchFamily="34" charset="0"/>
-                <a:ea typeface="Consolas" pitchFamily="34" charset="-122"/>
-                <a:cs typeface="Consolas" pitchFamily="34" charset="-120"/>
-              </a:rPr>
-              <a:t>as</a:t>
-            </a:r>
-            <a:pPr indent="0" marL="0">
-              <a:buNone/>
-            </a:pPr>
-            <a:r>
-              <a:rPr lang="en-US" sz="1280" dirty="0">
-                <a:solidFill>
-                  <a:srgbClr val="FFFFFF"/>
-                </a:solidFill>
-                <a:latin typeface="Consolas" pitchFamily="34" charset="0"/>
-                <a:ea typeface="Consolas" pitchFamily="34" charset="-122"/>
-                <a:cs typeface="Consolas" pitchFamily="34" charset="-120"/>
-              </a:rPr>
-              <a:t> mcp:</a:t>
-            </a:r>
-            <a:endParaRPr lang="en-US" sz="1280" dirty="0"/>
-          </a:p>
-          <a:p>
-            <a:pPr indent="0" marL="0">
-              <a:buNone/>
-            </a:pPr>
-            <a:r>
-              <a:rPr lang="en-US" sz="1280" dirty="0">
-                <a:solidFill>
-                  <a:srgbClr val="FFFFFF"/>
-                </a:solidFill>
-                <a:latin typeface="Consolas" pitchFamily="34" charset="0"/>
-                <a:ea typeface="Consolas" pitchFamily="34" charset="-122"/>
-                <a:cs typeface="Consolas" pitchFamily="34" charset="-120"/>
-              </a:rPr>
-              <a:t>    result = </a:t>
-            </a:r>
-            <a:endParaRPr lang="en-US" sz="1280" dirty="0"/>
-          </a:p>
-          <a:p>
-            <a:pPr indent="0" marL="0">
-              <a:buNone/>
-            </a:pPr>
-            <a:r>
-              <a:rPr lang="en-US" sz="1280" dirty="0">
-                <a:solidFill>
-                  <a:srgbClr val="A996B6"/>
-                </a:solidFill>
-                <a:latin typeface="Consolas" pitchFamily="34" charset="0"/>
-                <a:ea typeface="Consolas" pitchFamily="34" charset="-122"/>
-                <a:cs typeface="Consolas" pitchFamily="34" charset="-120"/>
-              </a:rPr>
-              <a:t>await</a:t>
-            </a:r>
-            <a:pPr indent="0" marL="0">
-              <a:buNone/>
-            </a:pPr>
-            <a:r>
-              <a:rPr lang="en-US" sz="1280" dirty="0">
-                <a:solidFill>
-                  <a:srgbClr val="FFFFFF"/>
-                </a:solidFill>
-                <a:latin typeface="Consolas" pitchFamily="34" charset="0"/>
-                <a:ea typeface="Consolas" pitchFamily="34" charset="-122"/>
-                <a:cs typeface="Consolas" pitchFamily="34" charset="-120"/>
-              </a:rPr>
-              <a:t> agent.run(</a:t>
-            </a:r>
-            <a:endParaRPr lang="en-US" sz="1280" dirty="0"/>
-          </a:p>
-          <a:p>
-            <a:pPr indent="0" marL="0">
-              <a:buNone/>
-            </a:pPr>
-            <a:r>
-              <a:rPr lang="en-US" sz="1280" dirty="0">
-                <a:solidFill>
-                  <a:srgbClr val="FFFFFF"/>
-                </a:solidFill>
-                <a:latin typeface="Consolas" pitchFamily="34" charset="0"/>
-                <a:ea typeface="Consolas" pitchFamily="34" charset="-122"/>
-                <a:cs typeface="Consolas" pitchFamily="34" charset="-120"/>
-              </a:rPr>
-              <a:t>        </a:t>
-            </a:r>
-            <a:endParaRPr lang="en-US" sz="1280" dirty="0"/>
-          </a:p>
-          <a:p>
-            <a:pPr indent="0" marL="0">
-              <a:buNone/>
-            </a:pPr>
-            <a:r>
-              <a:rPr lang="en-US" sz="1280" dirty="0">
-                <a:solidFill>
-                  <a:srgbClr val="E4C98A"/>
-                </a:solidFill>
-                <a:latin typeface="Consolas" pitchFamily="34" charset="0"/>
-                <a:ea typeface="Consolas" pitchFamily="34" charset="-122"/>
-                <a:cs typeface="Consolas" pitchFamily="34" charset="-120"/>
-              </a:rPr>
-              <a:t>"Find the current guidance."</a:t>
-            </a:r>
-            <a:pPr indent="0" marL="0">
-              <a:buNone/>
-            </a:pPr>
-            <a:r>
-              <a:rPr lang="en-US" sz="1280" dirty="0">
-                <a:solidFill>
-                  <a:srgbClr val="FFFFFF"/>
-                </a:solidFill>
-                <a:latin typeface="Consolas" pitchFamily="34" charset="0"/>
-                <a:ea typeface="Consolas" pitchFamily="34" charset="-122"/>
-                <a:cs typeface="Consolas" pitchFamily="34" charset="-120"/>
-              </a:rPr>
-              <a:t>,</a:t>
-            </a:r>
-            <a:endParaRPr lang="en-US" sz="1280" dirty="0"/>
-          </a:p>
-          <a:p>
-            <a:pPr indent="0" marL="0">
-              <a:buNone/>
-            </a:pPr>
-            <a:r>
-              <a:rPr lang="en-US" sz="1280" dirty="0">
-                <a:solidFill>
-                  <a:srgbClr val="FFFFFF"/>
-                </a:solidFill>
-                <a:latin typeface="Consolas" pitchFamily="34" charset="0"/>
-                <a:ea typeface="Consolas" pitchFamily="34" charset="-122"/>
-                <a:cs typeface="Consolas" pitchFamily="34" charset="-120"/>
-              </a:rPr>
-              <a:t>        tools=mcp,</a:t>
-            </a:r>
-            <a:endParaRPr lang="en-US" sz="1280" dirty="0"/>
-          </a:p>
-          <a:p>
-            <a:pPr indent="0" marL="0">
-              <a:buNone/>
-            </a:pPr>
-            <a:r>
-              <a:rPr lang="en-US" sz="1280" dirty="0">
-                <a:solidFill>
-                  <a:srgbClr val="FFFFFF"/>
-                </a:solidFill>
-                <a:latin typeface="Consolas" pitchFamily="34" charset="0"/>
-                <a:ea typeface="Consolas" pitchFamily="34" charset="-122"/>
-                <a:cs typeface="Consolas" pitchFamily="34" charset="-120"/>
-              </a:rPr>
-              <a:t>    )</a:t>
-            </a:r>
-            <a:endParaRPr lang="en-US" sz="1280" dirty="0"/>
-          </a:p>
-        </p:txBody>
-      </p:sp>
-      <p:sp>
-        <p:nvSpPr>
-          <p:cNvPr id="7" name="Shape 5"/>
-          <p:cNvSpPr/>
-          <p:nvPr/>
-        </p:nvSpPr>
-        <p:spPr>
-          <a:xfrm>
-            <a:off x="365760" y="4773168"/>
-            <a:ext cx="8412480" cy="0"/>
-          </a:xfrm>
-          <a:prstGeom prst="line">
-            <a:avLst/>
-          </a:prstGeom>
-          <a:noFill/>
-          <a:ln w="6350">
-            <a:solidFill>
-              <a:srgbClr val="D1D5DB"/>
-            </a:solidFill>
-            <a:prstDash val="solid"/>
-          </a:ln>
-        </p:spPr>
-      </p:sp>
-      <p:sp>
-        <p:nvSpPr>
-          <p:cNvPr id="8" name="Text 6"/>
-          <p:cNvSpPr/>
-          <p:nvPr/>
-        </p:nvSpPr>
-        <p:spPr>
-          <a:xfrm>
-            <a:off x="384048" y="4818888"/>
-            <a:ext cx="8275320" cy="182880"/>
-          </a:xfrm>
-          <a:prstGeom prst="rect">
-            <a:avLst/>
-          </a:prstGeom>
-          <a:noFill/>
-          <a:ln/>
-        </p:spPr>
-        <p:txBody>
-          <a:bodyPr wrap="square" lIns="0" tIns="0" rIns="0" bIns="0" rtlCol="0" anchor="ctr">
-            <a:normAutofit/>
-          </a:bodyPr>
-          <a:lstStyle/>
-          <a:p>
-            <a:pPr indent="0" marL="0">
-              <a:buNone/>
-            </a:pPr>
-            <a:r>
-              <a:rPr lang="en-US" sz="820" dirty="0">
-                <a:solidFill>
-                  <a:srgbClr val="6B7280"/>
-                </a:solidFill>
-                <a:latin typeface="Calibri" pitchFamily="34" charset="0"/>
-                <a:ea typeface="Calibri" pitchFamily="34" charset="-122"/>
-                <a:cs typeface="Calibri" pitchFamily="34" charset="-120"/>
-              </a:rPr>
-              <a:t>Source: https://learn.microsoft.com/en-us/agent-framework/agents/tools/local-mcp-tools?tabs=python  ·  +1 in notes</a:t>
-            </a:r>
-            <a:endParaRPr lang="en-US" sz="820" dirty="0"/>
-          </a:p>
-        </p:txBody>
-      </p:sp>
-    </p:spTree>
-  </p:cSld>
-  <p:clrMapOvr>
-    <a:masterClrMapping/>
-  </p:clrMapOvr>
-</p:sld>
-</file>
-
 <file path=ppt/slides/slide7.xml><?xml version="1.0" encoding="utf-8"?>
 <p:sld xmlns:a="http://schemas.openxmlformats.org/drawingml/2006/main" xmlns:r="http://schemas.openxmlformats.org/officeDocument/2006/relationships" xmlns:p="http://schemas.openxmlformats.org/presentationml/2006/main">
   <p:cSld name="Slide 7">
@@ -10322,7 +10431,7 @@
                 <a:ea typeface="Calibri" pitchFamily="34" charset="-122"/>
                 <a:cs typeface="Calibri" pitchFamily="34" charset="-120"/>
               </a:rPr>
-              <a:t>header_provider has two call shapes</a:t>
+              <a:t>Local stdio is a child-process boundary</a:t>
             </a:r>
             <a:endParaRPr lang="en-US" sz="2500" dirty="0"/>
           </a:p>
@@ -10336,18 +10445,18 @@
         </p:nvSpPr>
         <p:spPr>
           <a:xfrm>
-            <a:off x="365760" y="1078992"/>
-            <a:ext cx="4114800" cy="3493008"/>
-          </a:xfrm>
-          <a:prstGeom prst="roundRect">
+            <a:off x="365760" y="1115568"/>
+            <a:ext cx="8412480" cy="2350008"/>
+          </a:xfrm>
+          <a:prstGeom prst="rect">
             <a:avLst/>
           </a:prstGeom>
           <a:solidFill>
-            <a:srgbClr val="F3F4F6"/>
+            <a:srgbClr val="1D1E22"/>
           </a:solidFill>
-          <a:ln w="11430">
+          <a:ln w="9525">
             <a:solidFill>
-              <a:srgbClr val="D1D5DB"/>
+              <a:srgbClr val="2A2B2E"/>
             </a:solidFill>
             <a:prstDash val="solid"/>
           </a:ln>
@@ -10361,8 +10470,8 @@
         </p:nvSpPr>
         <p:spPr>
           <a:xfrm>
-            <a:off x="566928" y="1298448"/>
-            <a:ext cx="3712464" cy="411480"/>
+            <a:off x="502920" y="1207008"/>
+            <a:ext cx="8138160" cy="2167128"/>
           </a:xfrm>
           <a:prstGeom prst="rect">
             <a:avLst/>
@@ -10371,7 +10480,7 @@
           <a:ln/>
         </p:spPr>
         <p:txBody>
-          <a:bodyPr wrap="square" lIns="0" tIns="0" rIns="0" bIns="0" rtlCol="0" anchor="ctr">
+          <a:bodyPr wrap="square" lIns="0" tIns="0" rIns="0" bIns="0" rtlCol="0" anchor="t">
             <a:normAutofit/>
           </a:bodyPr>
           <a:lstStyle/>
@@ -10380,245 +10489,369 @@
               <a:buNone/>
             </a:pPr>
             <a:r>
-              <a:rPr lang="en-US" sz="2000" b="1" dirty="0">
-                <a:solidFill>
-                  <a:srgbClr val="1E2761"/>
-                </a:solidFill>
-                <a:latin typeface="Calibri" pitchFamily="34" charset="0"/>
-                <a:ea typeface="Calibri" pitchFamily="34" charset="-122"/>
-                <a:cs typeface="Calibri" pitchFamily="34" charset="-120"/>
-              </a:rPr>
-              <a:t>Tool-call request</a:t>
-            </a:r>
-            <a:endParaRPr lang="en-US" sz="2000" dirty="0"/>
-          </a:p>
-        </p:txBody>
-      </p:sp>
-      <p:sp>
-        <p:nvSpPr>
-          <p:cNvPr id="7" name="Text 5"/>
-          <p:cNvSpPr/>
-          <p:nvPr/>
-        </p:nvSpPr>
-        <p:spPr>
-          <a:xfrm>
-            <a:off x="594360" y="1828800"/>
-            <a:ext cx="3639312" cy="2395728"/>
-          </a:xfrm>
-          <a:prstGeom prst="rect">
-            <a:avLst/>
-          </a:prstGeom>
-          <a:noFill/>
-          <a:ln/>
-        </p:spPr>
-        <p:txBody>
-          <a:bodyPr wrap="square" lIns="381" tIns="381" rIns="381" bIns="381" rtlCol="0" anchor="ctr">
-            <a:normAutofit/>
-          </a:bodyPr>
-          <a:lstStyle/>
-          <a:p>
-            <a:pPr marL="342900" indent="-342900">
-              <a:buSzPct val="100000"/>
-              <a:buChar char="•"/>
-            </a:pPr>
-            <a:r>
-              <a:rPr lang="en-US" sz="1300" dirty="0">
-                <a:solidFill>
-                  <a:srgbClr val="212121"/>
-                </a:solidFill>
-                <a:latin typeface="Calibri" pitchFamily="34" charset="0"/>
-                <a:ea typeface="Calibri" pitchFamily="34" charset="-122"/>
-                <a:cs typeface="Calibri" pitchFamily="34" charset="-120"/>
-              </a:rPr>
-              <a:t>Receives function_invocation_kwargs</a:t>
-            </a:r>
-            <a:endParaRPr lang="en-US" sz="1300" dirty="0"/>
-          </a:p>
-          <a:p>
-            <a:pPr marL="342900" indent="-342900">
-              <a:buSzPct val="100000"/>
-              <a:buChar char="•"/>
-            </a:pPr>
-            <a:r>
-              <a:rPr lang="en-US" sz="1300" dirty="0">
-                <a:solidFill>
-                  <a:srgbClr val="212121"/>
-                </a:solidFill>
-                <a:latin typeface="Calibri" pitchFamily="34" charset="0"/>
-                <a:ea typeface="Calibri" pitchFamily="34" charset="-122"/>
-                <a:cs typeface="Calibri" pitchFamily="34" charset="-120"/>
-              </a:rPr>
-              <a:t>Can derive request-scoped headers</a:t>
-            </a:r>
-            <a:endParaRPr lang="en-US" sz="1300" dirty="0"/>
-          </a:p>
-          <a:p>
-            <a:pPr marL="342900" indent="-342900">
-              <a:buSzPct val="100000"/>
-              <a:buChar char="•"/>
-            </a:pPr>
-            <a:r>
-              <a:rPr lang="en-US" sz="1300" dirty="0">
-                <a:solidFill>
-                  <a:srgbClr val="212121"/>
-                </a:solidFill>
-                <a:latin typeface="Calibri" pitchFamily="34" charset="0"/>
-                <a:ea typeface="Calibri" pitchFamily="34" charset="-122"/>
-                <a:cs typeface="Calibri" pitchFamily="34" charset="-120"/>
-              </a:rPr>
-              <a:t>Keep secrets outside model-visible arguments</a:t>
-            </a:r>
-            <a:endParaRPr lang="en-US" sz="1300" dirty="0"/>
-          </a:p>
-        </p:txBody>
-      </p:sp>
-      <p:sp>
-        <p:nvSpPr>
-          <p:cNvPr id="8" name="Shape 6"/>
-          <p:cNvSpPr/>
-          <p:nvPr/>
-        </p:nvSpPr>
-        <p:spPr>
-          <a:xfrm>
-            <a:off x="4663440" y="1078992"/>
-            <a:ext cx="4114800" cy="3493008"/>
-          </a:xfrm>
-          <a:prstGeom prst="roundRect">
-            <a:avLst/>
-          </a:prstGeom>
-          <a:solidFill>
-            <a:srgbClr val="CADCFC"/>
-          </a:solidFill>
-          <a:ln w="11430">
-            <a:solidFill>
-              <a:srgbClr val="1E2761"/>
-            </a:solidFill>
-            <a:prstDash val="solid"/>
-          </a:ln>
-        </p:spPr>
-      </p:sp>
-      <p:sp>
-        <p:nvSpPr>
-          <p:cNvPr id="9" name="Text 7"/>
-          <p:cNvSpPr/>
-          <p:nvPr/>
-        </p:nvSpPr>
-        <p:spPr>
-          <a:xfrm>
-            <a:off x="4864608" y="1298448"/>
-            <a:ext cx="3712464" cy="411480"/>
-          </a:xfrm>
-          <a:prstGeom prst="rect">
-            <a:avLst/>
-          </a:prstGeom>
-          <a:noFill/>
-          <a:ln/>
-        </p:spPr>
-        <p:txBody>
-          <a:bodyPr wrap="square" lIns="0" tIns="0" rIns="0" bIns="0" rtlCol="0" anchor="ctr">
-            <a:normAutofit/>
-          </a:bodyPr>
-          <a:lstStyle/>
-          <a:p>
-            <a:pPr indent="0" marL="0">
-              <a:buNone/>
-            </a:pPr>
-            <a:r>
-              <a:rPr lang="en-US" sz="2000" b="1" dirty="0">
-                <a:solidFill>
-                  <a:srgbClr val="1E2761"/>
-                </a:solidFill>
-                <a:latin typeface="Calibri" pitchFamily="34" charset="0"/>
-                <a:ea typeface="Calibri" pitchFamily="34" charset="-122"/>
-                <a:cs typeface="Calibri" pitchFamily="34" charset="-120"/>
-              </a:rPr>
-              <a:t>Ambient request</a:t>
-            </a:r>
-            <a:endParaRPr lang="en-US" sz="2000" dirty="0"/>
-          </a:p>
-        </p:txBody>
-      </p:sp>
-      <p:sp>
-        <p:nvSpPr>
-          <p:cNvPr id="10" name="Text 8"/>
-          <p:cNvSpPr/>
-          <p:nvPr/>
-        </p:nvSpPr>
-        <p:spPr>
-          <a:xfrm>
-            <a:off x="4892040" y="1828800"/>
-            <a:ext cx="3639312" cy="2395728"/>
-          </a:xfrm>
-          <a:prstGeom prst="rect">
-            <a:avLst/>
-          </a:prstGeom>
-          <a:noFill/>
-          <a:ln/>
-        </p:spPr>
-        <p:txBody>
-          <a:bodyPr wrap="square" lIns="381" tIns="381" rIns="381" bIns="381" rtlCol="0" anchor="ctr">
-            <a:normAutofit/>
-          </a:bodyPr>
-          <a:lstStyle/>
-          <a:p>
-            <a:pPr marL="342900" indent="-342900">
-              <a:buSzPct val="100000"/>
-              <a:buChar char="•"/>
-            </a:pPr>
-            <a:r>
-              <a:rPr lang="en-US" sz="1300" dirty="0">
-                <a:solidFill>
-                  <a:srgbClr val="212121"/>
-                </a:solidFill>
-                <a:latin typeface="Calibri" pitchFamily="34" charset="0"/>
-                <a:ea typeface="Calibri" pitchFamily="34" charset="-122"/>
-                <a:cs typeface="Calibri" pitchFamily="34" charset="-120"/>
-              </a:rPr>
-              <a:t>Receives {}</a:t>
-            </a:r>
-            <a:endParaRPr lang="en-US" sz="1300" dirty="0"/>
-          </a:p>
-          <a:p>
-            <a:pPr marL="342900" indent="-342900">
-              <a:buSzPct val="100000"/>
-              <a:buChar char="•"/>
-            </a:pPr>
-            <a:r>
-              <a:rPr lang="en-US" sz="1300" dirty="0">
-                <a:solidFill>
-                  <a:srgbClr val="212121"/>
-                </a:solidFill>
-                <a:latin typeface="Calibri" pitchFamily="34" charset="0"/>
-                <a:ea typeface="Calibri" pitchFamily="34" charset="-122"/>
-                <a:cs typeface="Calibri" pitchFamily="34" charset="-120"/>
-              </a:rPr>
-              <a:t>Includes initialization, discovery, and pings</a:t>
-            </a:r>
-            <a:endParaRPr lang="en-US" sz="1300" dirty="0"/>
-          </a:p>
-          <a:p>
-            <a:pPr marL="342900" indent="-342900">
-              <a:buSzPct val="100000"/>
-              <a:buChar char="•"/>
-            </a:pPr>
-            <a:r>
-              <a:rPr lang="en-US" sz="1300" dirty="0">
-                <a:solidFill>
-                  <a:srgbClr val="212121"/>
-                </a:solidFill>
-                <a:latin typeface="Calibri" pitchFamily="34" charset="0"/>
-                <a:ea typeface="Calibri" pitchFamily="34" charset="-122"/>
-                <a:cs typeface="Calibri" pitchFamily="34" charset="-120"/>
-              </a:rPr>
-              <a:t>Provider must still acquire required connection auth</a:t>
-            </a:r>
-            <a:endParaRPr lang="en-US" sz="1300" dirty="0"/>
-          </a:p>
-        </p:txBody>
-      </p:sp>
-      <p:sp>
-        <p:nvSpPr>
-          <p:cNvPr id="11" name="Shape 9"/>
+              <a:rPr lang="en-US" sz="1280" dirty="0">
+                <a:solidFill>
+                  <a:srgbClr val="A996B6"/>
+                </a:solidFill>
+                <a:latin typeface="Consolas" pitchFamily="34" charset="0"/>
+                <a:ea typeface="Consolas" pitchFamily="34" charset="-122"/>
+                <a:cs typeface="Consolas" pitchFamily="34" charset="-120"/>
+              </a:rPr>
+              <a:t>async</a:t>
+            </a:r>
+            <a:pPr indent="0" marL="0">
+              <a:buNone/>
+            </a:pPr>
+            <a:r>
+              <a:rPr lang="en-US" sz="1280" dirty="0">
+                <a:solidFill>
+                  <a:srgbClr val="FFFFFF"/>
+                </a:solidFill>
+                <a:latin typeface="Consolas" pitchFamily="34" charset="0"/>
+                <a:ea typeface="Consolas" pitchFamily="34" charset="-122"/>
+                <a:cs typeface="Consolas" pitchFamily="34" charset="-120"/>
+              </a:rPr>
+              <a:t> </a:t>
+            </a:r>
+            <a:pPr indent="0" marL="0">
+              <a:buNone/>
+            </a:pPr>
+            <a:r>
+              <a:rPr lang="en-US" sz="1280" dirty="0">
+                <a:solidFill>
+                  <a:srgbClr val="A996B6"/>
+                </a:solidFill>
+                <a:latin typeface="Consolas" pitchFamily="34" charset="0"/>
+                <a:ea typeface="Consolas" pitchFamily="34" charset="-122"/>
+                <a:cs typeface="Consolas" pitchFamily="34" charset="-120"/>
+              </a:rPr>
+              <a:t>with</a:t>
+            </a:r>
+            <a:pPr indent="0" marL="0">
+              <a:buNone/>
+            </a:pPr>
+            <a:r>
+              <a:rPr lang="en-US" sz="1280" dirty="0">
+                <a:solidFill>
+                  <a:srgbClr val="FFFFFF"/>
+                </a:solidFill>
+                <a:latin typeface="Consolas" pitchFamily="34" charset="0"/>
+                <a:ea typeface="Consolas" pitchFamily="34" charset="-122"/>
+                <a:cs typeface="Consolas" pitchFamily="34" charset="-120"/>
+              </a:rPr>
+              <a:t> MCPStdioTool(</a:t>
+            </a:r>
+            <a:endParaRPr lang="en-US" sz="1280" dirty="0"/>
+          </a:p>
+          <a:p>
+            <a:pPr indent="0" marL="0">
+              <a:buNone/>
+            </a:pPr>
+            <a:r>
+              <a:rPr lang="en-US" sz="1280" dirty="0">
+                <a:solidFill>
+                  <a:srgbClr val="FFFFFF"/>
+                </a:solidFill>
+                <a:latin typeface="Consolas" pitchFamily="34" charset="0"/>
+                <a:ea typeface="Consolas" pitchFamily="34" charset="-122"/>
+                <a:cs typeface="Consolas" pitchFamily="34" charset="-120"/>
+              </a:rPr>
+              <a:t>    name=</a:t>
+            </a:r>
+            <a:pPr indent="0" marL="0">
+              <a:buNone/>
+            </a:pPr>
+            <a:r>
+              <a:rPr lang="en-US" sz="1280" dirty="0">
+                <a:solidFill>
+                  <a:srgbClr val="E4C98A"/>
+                </a:solidFill>
+                <a:latin typeface="Consolas" pitchFamily="34" charset="0"/>
+                <a:ea typeface="Consolas" pitchFamily="34" charset="-122"/>
+                <a:cs typeface="Consolas" pitchFamily="34" charset="-120"/>
+              </a:rPr>
+              <a:t>"calculator"</a:t>
+            </a:r>
+            <a:pPr indent="0" marL="0">
+              <a:buNone/>
+            </a:pPr>
+            <a:r>
+              <a:rPr lang="en-US" sz="1280" dirty="0">
+                <a:solidFill>
+                  <a:srgbClr val="FFFFFF"/>
+                </a:solidFill>
+                <a:latin typeface="Consolas" pitchFamily="34" charset="0"/>
+                <a:ea typeface="Consolas" pitchFamily="34" charset="-122"/>
+                <a:cs typeface="Consolas" pitchFamily="34" charset="-120"/>
+              </a:rPr>
+              <a:t>,</a:t>
+            </a:r>
+            <a:endParaRPr lang="en-US" sz="1280" dirty="0"/>
+          </a:p>
+          <a:p>
+            <a:pPr indent="0" marL="0">
+              <a:buNone/>
+            </a:pPr>
+            <a:r>
+              <a:rPr lang="en-US" sz="1280" dirty="0">
+                <a:solidFill>
+                  <a:srgbClr val="FFFFFF"/>
+                </a:solidFill>
+                <a:latin typeface="Consolas" pitchFamily="34" charset="0"/>
+                <a:ea typeface="Consolas" pitchFamily="34" charset="-122"/>
+                <a:cs typeface="Consolas" pitchFamily="34" charset="-120"/>
+              </a:rPr>
+              <a:t>    command=</a:t>
+            </a:r>
+            <a:pPr indent="0" marL="0">
+              <a:buNone/>
+            </a:pPr>
+            <a:r>
+              <a:rPr lang="en-US" sz="1280" dirty="0">
+                <a:solidFill>
+                  <a:srgbClr val="E4C98A"/>
+                </a:solidFill>
+                <a:latin typeface="Consolas" pitchFamily="34" charset="0"/>
+                <a:ea typeface="Consolas" pitchFamily="34" charset="-122"/>
+                <a:cs typeface="Consolas" pitchFamily="34" charset="-120"/>
+              </a:rPr>
+              <a:t>"uvx"</a:t>
+            </a:r>
+            <a:pPr indent="0" marL="0">
+              <a:buNone/>
+            </a:pPr>
+            <a:r>
+              <a:rPr lang="en-US" sz="1280" dirty="0">
+                <a:solidFill>
+                  <a:srgbClr val="FFFFFF"/>
+                </a:solidFill>
+                <a:latin typeface="Consolas" pitchFamily="34" charset="0"/>
+                <a:ea typeface="Consolas" pitchFamily="34" charset="-122"/>
+                <a:cs typeface="Consolas" pitchFamily="34" charset="-120"/>
+              </a:rPr>
+              <a:t>,</a:t>
+            </a:r>
+            <a:endParaRPr lang="en-US" sz="1280" dirty="0"/>
+          </a:p>
+          <a:p>
+            <a:pPr indent="0" marL="0">
+              <a:buNone/>
+            </a:pPr>
+            <a:r>
+              <a:rPr lang="en-US" sz="1280" dirty="0">
+                <a:solidFill>
+                  <a:srgbClr val="FFFFFF"/>
+                </a:solidFill>
+                <a:latin typeface="Consolas" pitchFamily="34" charset="0"/>
+                <a:ea typeface="Consolas" pitchFamily="34" charset="-122"/>
+                <a:cs typeface="Consolas" pitchFamily="34" charset="-120"/>
+              </a:rPr>
+              <a:t>    args=[</a:t>
+            </a:r>
+            <a:pPr indent="0" marL="0">
+              <a:buNone/>
+            </a:pPr>
+            <a:r>
+              <a:rPr lang="en-US" sz="1280" dirty="0">
+                <a:solidFill>
+                  <a:srgbClr val="E4C98A"/>
+                </a:solidFill>
+                <a:latin typeface="Consolas" pitchFamily="34" charset="0"/>
+                <a:ea typeface="Consolas" pitchFamily="34" charset="-122"/>
+                <a:cs typeface="Consolas" pitchFamily="34" charset="-120"/>
+              </a:rPr>
+              <a:t>"mcp-server-calculator"</a:t>
+            </a:r>
+            <a:pPr indent="0" marL="0">
+              <a:buNone/>
+            </a:pPr>
+            <a:r>
+              <a:rPr lang="en-US" sz="1280" dirty="0">
+                <a:solidFill>
+                  <a:srgbClr val="FFFFFF"/>
+                </a:solidFill>
+                <a:latin typeface="Consolas" pitchFamily="34" charset="0"/>
+                <a:ea typeface="Consolas" pitchFamily="34" charset="-122"/>
+                <a:cs typeface="Consolas" pitchFamily="34" charset="-120"/>
+              </a:rPr>
+              <a:t>],</a:t>
+            </a:r>
+            <a:endParaRPr lang="en-US" sz="1280" dirty="0"/>
+          </a:p>
+          <a:p>
+            <a:pPr indent="0" marL="0">
+              <a:buNone/>
+            </a:pPr>
+            <a:r>
+              <a:rPr lang="en-US" sz="1280" dirty="0">
+                <a:solidFill>
+                  <a:srgbClr val="FFFFFF"/>
+                </a:solidFill>
+                <a:latin typeface="Consolas" pitchFamily="34" charset="0"/>
+                <a:ea typeface="Consolas" pitchFamily="34" charset="-122"/>
+                <a:cs typeface="Consolas" pitchFamily="34" charset="-120"/>
+              </a:rPr>
+              <a:t>) </a:t>
+            </a:r>
+            <a:pPr indent="0" marL="0">
+              <a:buNone/>
+            </a:pPr>
+            <a:r>
+              <a:rPr lang="en-US" sz="1280" dirty="0">
+                <a:solidFill>
+                  <a:srgbClr val="A996B6"/>
+                </a:solidFill>
+                <a:latin typeface="Consolas" pitchFamily="34" charset="0"/>
+                <a:ea typeface="Consolas" pitchFamily="34" charset="-122"/>
+                <a:cs typeface="Consolas" pitchFamily="34" charset="-120"/>
+              </a:rPr>
+              <a:t>as</a:t>
+            </a:r>
+            <a:pPr indent="0" marL="0">
+              <a:buNone/>
+            </a:pPr>
+            <a:r>
+              <a:rPr lang="en-US" sz="1280" dirty="0">
+                <a:solidFill>
+                  <a:srgbClr val="FFFFFF"/>
+                </a:solidFill>
+                <a:latin typeface="Consolas" pitchFamily="34" charset="0"/>
+                <a:ea typeface="Consolas" pitchFamily="34" charset="-122"/>
+                <a:cs typeface="Consolas" pitchFamily="34" charset="-120"/>
+              </a:rPr>
+              <a:t> mcp:</a:t>
+            </a:r>
+            <a:endParaRPr lang="en-US" sz="1280" dirty="0"/>
+          </a:p>
+          <a:p>
+            <a:pPr indent="0" marL="0">
+              <a:buNone/>
+            </a:pPr>
+            <a:r>
+              <a:rPr lang="en-US" sz="1280" dirty="0">
+                <a:solidFill>
+                  <a:srgbClr val="FFFFFF"/>
+                </a:solidFill>
+                <a:latin typeface="Consolas" pitchFamily="34" charset="0"/>
+                <a:ea typeface="Consolas" pitchFamily="34" charset="-122"/>
+                <a:cs typeface="Consolas" pitchFamily="34" charset="-120"/>
+              </a:rPr>
+              <a:t>    result = </a:t>
+            </a:r>
+            <a:pPr indent="0" marL="0">
+              <a:buNone/>
+            </a:pPr>
+            <a:r>
+              <a:rPr lang="en-US" sz="1280" dirty="0">
+                <a:solidFill>
+                  <a:srgbClr val="A996B6"/>
+                </a:solidFill>
+                <a:latin typeface="Consolas" pitchFamily="34" charset="0"/>
+                <a:ea typeface="Consolas" pitchFamily="34" charset="-122"/>
+                <a:cs typeface="Consolas" pitchFamily="34" charset="-120"/>
+              </a:rPr>
+              <a:t>await</a:t>
+            </a:r>
+            <a:pPr indent="0" marL="0">
+              <a:buNone/>
+            </a:pPr>
+            <a:r>
+              <a:rPr lang="en-US" sz="1280" dirty="0">
+                <a:solidFill>
+                  <a:srgbClr val="FFFFFF"/>
+                </a:solidFill>
+                <a:latin typeface="Consolas" pitchFamily="34" charset="0"/>
+                <a:ea typeface="Consolas" pitchFamily="34" charset="-122"/>
+                <a:cs typeface="Consolas" pitchFamily="34" charset="-120"/>
+              </a:rPr>
+              <a:t> agent.run(</a:t>
+            </a:r>
+            <a:endParaRPr lang="en-US" sz="1280" dirty="0"/>
+          </a:p>
+          <a:p>
+            <a:pPr indent="0" marL="0">
+              <a:buNone/>
+            </a:pPr>
+            <a:r>
+              <a:rPr lang="en-US" sz="1280" dirty="0">
+                <a:solidFill>
+                  <a:srgbClr val="FFFFFF"/>
+                </a:solidFill>
+                <a:latin typeface="Consolas" pitchFamily="34" charset="0"/>
+                <a:ea typeface="Consolas" pitchFamily="34" charset="-122"/>
+                <a:cs typeface="Consolas" pitchFamily="34" charset="-120"/>
+              </a:rPr>
+              <a:t>        </a:t>
+            </a:r>
+            <a:pPr indent="0" marL="0">
+              <a:buNone/>
+            </a:pPr>
+            <a:r>
+              <a:rPr lang="en-US" sz="1280" dirty="0">
+                <a:solidFill>
+                  <a:srgbClr val="E4C98A"/>
+                </a:solidFill>
+                <a:latin typeface="Consolas" pitchFamily="34" charset="0"/>
+                <a:ea typeface="Consolas" pitchFamily="34" charset="-122"/>
+                <a:cs typeface="Consolas" pitchFamily="34" charset="-120"/>
+              </a:rPr>
+              <a:t>"Calculate the total."</a:t>
+            </a:r>
+            <a:pPr indent="0" marL="0">
+              <a:buNone/>
+            </a:pPr>
+            <a:r>
+              <a:rPr lang="en-US" sz="1280" dirty="0">
+                <a:solidFill>
+                  <a:srgbClr val="FFFFFF"/>
+                </a:solidFill>
+                <a:latin typeface="Consolas" pitchFamily="34" charset="0"/>
+                <a:ea typeface="Consolas" pitchFamily="34" charset="-122"/>
+                <a:cs typeface="Consolas" pitchFamily="34" charset="-120"/>
+              </a:rPr>
+              <a:t>,</a:t>
+            </a:r>
+            <a:endParaRPr lang="en-US" sz="1280" dirty="0"/>
+          </a:p>
+          <a:p>
+            <a:pPr indent="0" marL="0">
+              <a:buNone/>
+            </a:pPr>
+            <a:r>
+              <a:rPr lang="en-US" sz="1280" dirty="0">
+                <a:solidFill>
+                  <a:srgbClr val="FFFFFF"/>
+                </a:solidFill>
+                <a:latin typeface="Consolas" pitchFamily="34" charset="0"/>
+                <a:ea typeface="Consolas" pitchFamily="34" charset="-122"/>
+                <a:cs typeface="Consolas" pitchFamily="34" charset="-120"/>
+              </a:rPr>
+              <a:t>        tools=mcp,</a:t>
+            </a:r>
+            <a:endParaRPr lang="en-US" sz="1280" dirty="0"/>
+          </a:p>
+          <a:p>
+            <a:pPr indent="0" marL="0">
+              <a:buNone/>
+            </a:pPr>
+            <a:r>
+              <a:rPr lang="en-US" sz="1280" dirty="0">
+                <a:solidFill>
+                  <a:srgbClr val="FFFFFF"/>
+                </a:solidFill>
+                <a:latin typeface="Consolas" pitchFamily="34" charset="0"/>
+                <a:ea typeface="Consolas" pitchFamily="34" charset="-122"/>
+                <a:cs typeface="Consolas" pitchFamily="34" charset="-120"/>
+              </a:rPr>
+              <a:t>    )</a:t>
+            </a:r>
+            <a:endParaRPr lang="en-US" sz="1280" dirty="0"/>
+          </a:p>
+        </p:txBody>
+      </p:sp>
+      <p:sp>
+        <p:nvSpPr>
+          <p:cNvPr id="7" name="Shape 5"/>
           <p:cNvSpPr/>
           <p:nvPr/>
         </p:nvSpPr>
@@ -10641,7 +10874,7 @@
       </p:sp>
       <p:sp>
         <p:nvSpPr>
-          <p:cNvPr id="12" name="Text 10"/>
+          <p:cNvPr id="8" name="Text 6"/>
           <p:cNvSpPr/>
           <p:nvPr/>
         </p:nvSpPr>
@@ -10694,7 +10927,7 @@
     <p:bg>
       <p:bgPr>
         <a:solidFill>
-          <a:srgbClr val="FFFFFF"/>
+          <a:srgbClr val="CADCFC"/>
         </a:solidFill>
       </p:bgPr>
     </p:bg>
@@ -10721,7 +10954,7 @@
         <p:spPr>
           <a:xfrm>
             <a:off x="0" y="0"/>
-            <a:ext cx="54864" cy="5143500"/>
+            <a:ext cx="146304" cy="5143500"/>
           </a:xfrm>
           <a:prstGeom prst="rect">
             <a:avLst/>
@@ -10740,8 +10973,8 @@
         </p:nvSpPr>
         <p:spPr>
           <a:xfrm>
-            <a:off x="5486400" y="256032"/>
-            <a:ext cx="3337560" cy="228600"/>
+            <a:off x="5669280" y="274320"/>
+            <a:ext cx="3291840" cy="274320"/>
           </a:xfrm>
           <a:prstGeom prst="rect">
             <a:avLst/>
@@ -10750,16 +10983,14 @@
           <a:ln/>
         </p:spPr>
         <p:txBody>
-          <a:bodyPr wrap="square" lIns="0" tIns="0" rIns="0" bIns="0" rtlCol="0" anchor="ctr">
-            <a:normAutofit/>
-          </a:bodyPr>
+          <a:bodyPr wrap="square" lIns="0" tIns="0" rIns="0" bIns="0" rtlCol="0" anchor="ctr"/>
           <a:lstStyle/>
           <a:p>
             <a:pPr algn="r" indent="0" marL="0">
               <a:buNone/>
             </a:pPr>
             <a:r>
-              <a:rPr lang="en-US" sz="950" dirty="0">
+              <a:rPr lang="en-US" sz="1000" dirty="0">
                 <a:solidFill>
                   <a:srgbClr val="6B7280"/>
                 </a:solidFill>
@@ -10767,9 +10998,9 @@
                 <a:ea typeface="Calibri" pitchFamily="34" charset="-122"/>
                 <a:cs typeface="Calibri" pitchFamily="34" charset="-120"/>
               </a:rPr>
-              <a:t>Day 3 · Module 5</a:t>
-            </a:r>
-            <a:endParaRPr lang="en-US" sz="950" dirty="0"/>
+              <a:t>Day 3 · Module 5 · Demo</a:t>
+            </a:r>
+            <a:endParaRPr lang="en-US" sz="1000" dirty="0"/>
           </a:p>
         </p:txBody>
       </p:sp>
@@ -10781,8 +11012,8 @@
         </p:nvSpPr>
         <p:spPr>
           <a:xfrm>
-            <a:off x="365760" y="310896"/>
-            <a:ext cx="6583680" cy="603504"/>
+            <a:off x="548640" y="1051560"/>
+            <a:ext cx="5486400" cy="502920"/>
           </a:xfrm>
           <a:prstGeom prst="rect">
             <a:avLst/>
@@ -10791,16 +11022,14 @@
           <a:ln/>
         </p:spPr>
         <p:txBody>
-          <a:bodyPr wrap="square" lIns="0" tIns="0" rIns="0" bIns="0" rtlCol="0" anchor="ctr">
-            <a:normAutofit/>
-          </a:bodyPr>
-          <a:lstStyle/>
-          <a:p>
-            <a:pPr indent="0" marL="0">
-              <a:buNone/>
-            </a:pPr>
-            <a:r>
-              <a:rPr lang="en-US" sz="2800" b="1" dirty="0">
+          <a:bodyPr wrap="square" lIns="0" tIns="0" rIns="0" bIns="0" rtlCol="0" anchor="ctr"/>
+          <a:lstStyle/>
+          <a:p>
+            <a:pPr indent="0" marL="0">
+              <a:buNone/>
+            </a:pPr>
+            <a:r>
+              <a:rPr lang="en-US" sz="3200" b="1" spc="800" kern="0" dirty="0">
                 <a:solidFill>
                   <a:srgbClr val="1E2761"/>
                 </a:solidFill>
@@ -10808,49 +11037,22 @@
                 <a:ea typeface="Calibri" pitchFamily="34" charset="-122"/>
                 <a:cs typeface="Calibri" pitchFamily="34" charset="-120"/>
               </a:rPr>
-              <a:t>Reduce the model's tool surface</a:t>
-            </a:r>
-            <a:endParaRPr lang="en-US" sz="2800" dirty="0"/>
-          </a:p>
-        </p:txBody>
-      </p:sp>
-      <p:sp>
-        <p:nvSpPr>
-          <p:cNvPr id="5" name="Shape 3"/>
-          <p:cNvSpPr/>
-          <p:nvPr/>
-        </p:nvSpPr>
-        <p:spPr>
-          <a:xfrm>
-            <a:off x="365760" y="1078992"/>
-            <a:ext cx="4105656" cy="1655064"/>
-          </a:xfrm>
-          <a:prstGeom prst="roundRect">
-            <a:avLst>
-              <a:gd name="adj" fmla="val 3315"/>
-            </a:avLst>
-          </a:prstGeom>
-          <a:solidFill>
-            <a:srgbClr val="CADCFC"/>
-          </a:solidFill>
-          <a:ln w="10160">
-            <a:solidFill>
-              <a:srgbClr val="1E2761"/>
-            </a:solidFill>
-            <a:prstDash val="solid"/>
-          </a:ln>
-        </p:spPr>
-      </p:sp>
-      <p:sp>
-        <p:nvSpPr>
-          <p:cNvPr id="6" name="Text 4"/>
-          <p:cNvSpPr/>
-          <p:nvPr/>
-        </p:nvSpPr>
-        <p:spPr>
-          <a:xfrm>
-            <a:off x="512064" y="1197864"/>
-            <a:ext cx="3813048" cy="310896"/>
+              <a:t>DEMO</a:t>
+            </a:r>
+            <a:endParaRPr lang="en-US" sz="3200" dirty="0"/>
+          </a:p>
+        </p:txBody>
+      </p:sp>
+      <p:sp>
+        <p:nvSpPr>
+          <p:cNvPr id="5" name="Text 3"/>
+          <p:cNvSpPr/>
+          <p:nvPr/>
+        </p:nvSpPr>
+        <p:spPr>
+          <a:xfrm>
+            <a:off x="548640" y="1691640"/>
+            <a:ext cx="8046720" cy="914400"/>
           </a:xfrm>
           <a:prstGeom prst="rect">
             <a:avLst/>
@@ -10859,16 +11061,14 @@
           <a:ln/>
         </p:spPr>
         <p:txBody>
-          <a:bodyPr wrap="square" lIns="0" tIns="0" rIns="0" bIns="0" rtlCol="0" anchor="ctr">
-            <a:normAutofit/>
-          </a:bodyPr>
-          <a:lstStyle/>
-          <a:p>
-            <a:pPr indent="0" marL="0">
-              <a:buNone/>
-            </a:pPr>
-            <a:r>
-              <a:rPr lang="en-US" sz="1500" b="1" dirty="0">
+          <a:bodyPr wrap="square" lIns="0" tIns="0" rIns="0" bIns="0" rtlCol="0" anchor="ctr"/>
+          <a:lstStyle/>
+          <a:p>
+            <a:pPr indent="0" marL="0">
+              <a:buNone/>
+            </a:pPr>
+            <a:r>
+              <a:rPr lang="en-US" sz="3000" b="1" dirty="0">
                 <a:solidFill>
                   <a:srgbClr val="1E2761"/>
                 </a:solidFill>
@@ -10876,22 +11076,22 @@
                 <a:ea typeface="Calibri" pitchFamily="34" charset="-122"/>
                 <a:cs typeface="Calibri" pitchFamily="34" charset="-120"/>
               </a:rPr>
-              <a:t>allowed_tools</a:t>
-            </a:r>
-            <a:endParaRPr lang="en-US" sz="1500" dirty="0"/>
-          </a:p>
-        </p:txBody>
-      </p:sp>
-      <p:sp>
-        <p:nvSpPr>
-          <p:cNvPr id="7" name="Text 5"/>
-          <p:cNvSpPr/>
-          <p:nvPr/>
-        </p:nvSpPr>
-        <p:spPr>
-          <a:xfrm>
-            <a:off x="512064" y="1581912"/>
-            <a:ext cx="3813048" cy="1033272"/>
+              <a:t>Local stdio MCP tool call, end to end</a:t>
+            </a:r>
+            <a:endParaRPr lang="en-US" sz="3000" dirty="0"/>
+          </a:p>
+        </p:txBody>
+      </p:sp>
+      <p:sp>
+        <p:nvSpPr>
+          <p:cNvPr id="6" name="Text 4"/>
+          <p:cNvSpPr/>
+          <p:nvPr/>
+        </p:nvSpPr>
+        <p:spPr>
+          <a:xfrm>
+            <a:off x="6583680" y="1051560"/>
+            <a:ext cx="2194560" cy="502920"/>
           </a:xfrm>
           <a:prstGeom prst="rect">
             <a:avLst/>
@@ -10900,66 +11100,37 @@
           <a:ln/>
         </p:spPr>
         <p:txBody>
-          <a:bodyPr wrap="square" lIns="0" tIns="0" rIns="0" bIns="0" rtlCol="0" anchor="t">
-            <a:normAutofit/>
-          </a:bodyPr>
-          <a:lstStyle/>
-          <a:p>
-            <a:pPr indent="0" marL="0">
-              <a:buNone/>
-            </a:pPr>
-            <a:r>
-              <a:rPr lang="en-US" sz="1150" dirty="0">
-                <a:solidFill>
-                  <a:srgbClr val="212121"/>
+          <a:bodyPr wrap="square" lIns="0" tIns="0" rIns="0" bIns="0" rtlCol="0" anchor="ctr"/>
+          <a:lstStyle/>
+          <a:p>
+            <a:pPr algn="r" indent="0" marL="0">
+              <a:buNone/>
+            </a:pPr>
+            <a:r>
+              <a:rPr lang="en-US" sz="1800" i="1" dirty="0">
+                <a:solidFill>
+                  <a:srgbClr val="6B7280"/>
                 </a:solidFill>
                 <a:latin typeface="Calibri" pitchFamily="34" charset="0"/>
                 <a:ea typeface="Calibri" pitchFamily="34" charset="-122"/>
                 <a:cs typeface="Calibri" pitchFamily="34" charset="-120"/>
               </a:rPr>
-              <a:t>Expose an explicit MCP allow-list</a:t>
-            </a:r>
-            <a:endParaRPr lang="en-US" sz="1150" dirty="0"/>
-          </a:p>
-        </p:txBody>
-      </p:sp>
-      <p:sp>
-        <p:nvSpPr>
-          <p:cNvPr id="8" name="Shape 6"/>
-          <p:cNvSpPr/>
-          <p:nvPr/>
-        </p:nvSpPr>
-        <p:spPr>
-          <a:xfrm>
-            <a:off x="4672584" y="1078992"/>
-            <a:ext cx="4105656" cy="1655064"/>
-          </a:xfrm>
-          <a:prstGeom prst="roundRect">
-            <a:avLst>
-              <a:gd name="adj" fmla="val 3315"/>
-            </a:avLst>
-          </a:prstGeom>
-          <a:solidFill>
-            <a:srgbClr val="F3F4F6"/>
-          </a:solidFill>
-          <a:ln w="10160">
-            <a:solidFill>
-              <a:srgbClr val="D1D5DB"/>
-            </a:solidFill>
-            <a:prstDash val="solid"/>
-          </a:ln>
-        </p:spPr>
-      </p:sp>
-      <p:sp>
-        <p:nvSpPr>
-          <p:cNvPr id="9" name="Text 7"/>
-          <p:cNvSpPr/>
-          <p:nvPr/>
-        </p:nvSpPr>
-        <p:spPr>
-          <a:xfrm>
-            <a:off x="4818888" y="1197864"/>
-            <a:ext cx="3813048" cy="310896"/>
+              <a:t>~5 min</a:t>
+            </a:r>
+            <a:endParaRPr lang="en-US" sz="1800" dirty="0"/>
+          </a:p>
+        </p:txBody>
+      </p:sp>
+      <p:sp>
+        <p:nvSpPr>
+          <p:cNvPr id="7" name="Text 5"/>
+          <p:cNvSpPr/>
+          <p:nvPr/>
+        </p:nvSpPr>
+        <p:spPr>
+          <a:xfrm>
+            <a:off x="548640" y="2788920"/>
+            <a:ext cx="8046720" cy="1371600"/>
           </a:xfrm>
           <a:prstGeom prst="rect">
             <a:avLst/>
@@ -10968,39 +11139,40 @@
           <a:ln/>
         </p:spPr>
         <p:txBody>
-          <a:bodyPr wrap="square" lIns="0" tIns="0" rIns="0" bIns="0" rtlCol="0" anchor="ctr">
-            <a:normAutofit/>
-          </a:bodyPr>
-          <a:lstStyle/>
-          <a:p>
-            <a:pPr indent="0" marL="0">
-              <a:buNone/>
-            </a:pPr>
-            <a:r>
-              <a:rPr lang="en-US" sz="1500" b="1" dirty="0">
-                <a:solidFill>
-                  <a:srgbClr val="1E2761"/>
+          <a:bodyPr wrap="square" lIns="0" tIns="0" rIns="0" bIns="0" rtlCol="0" anchor="ctr"/>
+          <a:lstStyle/>
+          <a:p>
+            <a:pPr indent="0" marL="0">
+              <a:spcAft>
+                <a:spcPts val="600"/>
+              </a:spcAft>
+              <a:buNone/>
+            </a:pPr>
+            <a:r>
+              <a:rPr lang="en-US" sz="1600" dirty="0">
+                <a:solidFill>
+                  <a:srgbClr val="212121"/>
                 </a:solidFill>
                 <a:latin typeface="Calibri" pitchFamily="34" charset="0"/>
                 <a:ea typeface="Calibri" pitchFamily="34" charset="-122"/>
                 <a:cs typeface="Calibri" pitchFamily="34" charset="-120"/>
               </a:rPr>
-              <a:t>Clear names</a:t>
-            </a:r>
-            <a:endParaRPr lang="en-US" sz="1500" dirty="0"/>
-          </a:p>
-        </p:txBody>
-      </p:sp>
-      <p:sp>
-        <p:nvSpPr>
-          <p:cNvPr id="10" name="Text 8"/>
-          <p:cNvSpPr/>
-          <p:nvPr/>
-        </p:nvSpPr>
-        <p:spPr>
-          <a:xfrm>
-            <a:off x="4818888" y="1581912"/>
-            <a:ext cx="3813048" cy="1033272"/>
+              <a:t>Run the previous slide's exact code live: connect to a local mcp-server-calculator child process, watch the agent discover and invoke a tool through it, and close the connection — client/server loop end to end.</a:t>
+            </a:r>
+            <a:endParaRPr lang="en-US" sz="1600" dirty="0"/>
+          </a:p>
+        </p:txBody>
+      </p:sp>
+      <p:sp>
+        <p:nvSpPr>
+          <p:cNvPr id="8" name="Text 6"/>
+          <p:cNvSpPr/>
+          <p:nvPr/>
+        </p:nvSpPr>
+        <p:spPr>
+          <a:xfrm>
+            <a:off x="548640" y="4434840"/>
+            <a:ext cx="8046720" cy="320040"/>
           </a:xfrm>
           <a:prstGeom prst="rect">
             <a:avLst/>
@@ -11009,250 +11181,30 @@
           <a:ln/>
         </p:spPr>
         <p:txBody>
-          <a:bodyPr wrap="square" lIns="0" tIns="0" rIns="0" bIns="0" rtlCol="0" anchor="t">
-            <a:normAutofit/>
-          </a:bodyPr>
-          <a:lstStyle/>
-          <a:p>
-            <a:pPr indent="0" marL="0">
-              <a:buNone/>
-            </a:pPr>
-            <a:r>
-              <a:rPr lang="en-US" sz="1150" dirty="0">
-                <a:solidFill>
-                  <a:srgbClr val="212121"/>
+          <a:bodyPr wrap="square" lIns="0" tIns="0" rIns="0" bIns="0" rtlCol="0" anchor="ctr"/>
+          <a:lstStyle/>
+          <a:p>
+            <a:pPr indent="0" marL="0">
+              <a:buNone/>
+            </a:pPr>
+            <a:r>
+              <a:rPr lang="en-US" sz="1100" i="1" dirty="0">
+                <a:solidFill>
+                  <a:srgbClr val="6B7280"/>
                 </a:solidFill>
                 <a:latin typeface="Calibri" pitchFamily="34" charset="0"/>
                 <a:ea typeface="Calibri" pitchFamily="34" charset="-122"/>
                 <a:cs typeface="Calibri" pitchFamily="34" charset="-120"/>
               </a:rPr>
-              <a:t>Avoid collisions by selecting or wrapping distinct tool names</a:t>
-            </a:r>
-            <a:endParaRPr lang="en-US" sz="1150" dirty="0"/>
-          </a:p>
-        </p:txBody>
-      </p:sp>
-      <p:sp>
-        <p:nvSpPr>
-          <p:cNvPr id="11" name="Shape 9"/>
-          <p:cNvSpPr/>
-          <p:nvPr/>
-        </p:nvSpPr>
-        <p:spPr>
-          <a:xfrm>
-            <a:off x="365760" y="2935224"/>
-            <a:ext cx="4105656" cy="1655064"/>
-          </a:xfrm>
-          <a:prstGeom prst="roundRect">
-            <a:avLst>
-              <a:gd name="adj" fmla="val 3315"/>
-            </a:avLst>
-          </a:prstGeom>
-          <a:solidFill>
-            <a:srgbClr val="F3F4F6"/>
-          </a:solidFill>
-          <a:ln w="10160">
-            <a:solidFill>
-              <a:srgbClr val="D1D5DB"/>
-            </a:solidFill>
-            <a:prstDash val="solid"/>
-          </a:ln>
-        </p:spPr>
-      </p:sp>
-      <p:sp>
-        <p:nvSpPr>
-          <p:cNvPr id="12" name="Text 10"/>
-          <p:cNvSpPr/>
-          <p:nvPr/>
-        </p:nvSpPr>
-        <p:spPr>
-          <a:xfrm>
-            <a:off x="512064" y="3054096"/>
-            <a:ext cx="3813048" cy="310896"/>
-          </a:xfrm>
-          <a:prstGeom prst="rect">
-            <a:avLst/>
-          </a:prstGeom>
-          <a:noFill/>
-          <a:ln/>
-        </p:spPr>
-        <p:txBody>
-          <a:bodyPr wrap="square" lIns="0" tIns="0" rIns="0" bIns="0" rtlCol="0" anchor="ctr">
-            <a:normAutofit/>
-          </a:bodyPr>
-          <a:lstStyle/>
-          <a:p>
-            <a:pPr indent="0" marL="0">
-              <a:buNone/>
-            </a:pPr>
-            <a:r>
-              <a:rPr lang="en-US" sz="1500" b="1" dirty="0">
-                <a:solidFill>
-                  <a:srgbClr val="1E2761"/>
-                </a:solidFill>
-                <a:latin typeface="Calibri" pitchFamily="34" charset="0"/>
-                <a:ea typeface="Calibri" pitchFamily="34" charset="-122"/>
-                <a:cs typeface="Calibri" pitchFamily="34" charset="-120"/>
-              </a:rPr>
-              <a:t>Progressive exposure — EXPERIMENTAL</a:t>
-            </a:r>
-            <a:endParaRPr lang="en-US" sz="1500" dirty="0"/>
-          </a:p>
-        </p:txBody>
-      </p:sp>
-      <p:sp>
-        <p:nvSpPr>
-          <p:cNvPr id="13" name="Text 11"/>
-          <p:cNvSpPr/>
-          <p:nvPr/>
-        </p:nvSpPr>
-        <p:spPr>
-          <a:xfrm>
-            <a:off x="512064" y="3438144"/>
-            <a:ext cx="3813048" cy="1033272"/>
-          </a:xfrm>
-          <a:prstGeom prst="rect">
-            <a:avLst/>
-          </a:prstGeom>
-          <a:noFill/>
-          <a:ln/>
-        </p:spPr>
-        <p:txBody>
-          <a:bodyPr wrap="square" lIns="0" tIns="0" rIns="0" bIns="0" rtlCol="0" anchor="t">
-            <a:normAutofit/>
-          </a:bodyPr>
-          <a:lstStyle/>
-          <a:p>
-            <a:pPr indent="0" marL="0">
-              <a:buNone/>
-            </a:pPr>
-            <a:r>
-              <a:rPr lang="en-US" sz="1150" dirty="0">
-                <a:solidFill>
-                  <a:srgbClr val="212121"/>
-                </a:solidFill>
-                <a:latin typeface="Calibri" pitchFamily="34" charset="0"/>
-                <a:ea typeface="Calibri" pitchFamily="34" charset="-122"/>
-                <a:cs typeface="Calibri" pitchFamily="34" charset="-120"/>
-              </a:rPr>
-              <a:t>Add tools for the next loop iteration only</a:t>
-            </a:r>
-            <a:endParaRPr lang="en-US" sz="1150" dirty="0"/>
-          </a:p>
-        </p:txBody>
-      </p:sp>
-      <p:sp>
-        <p:nvSpPr>
-          <p:cNvPr id="14" name="Shape 12"/>
-          <p:cNvSpPr/>
-          <p:nvPr/>
-        </p:nvSpPr>
-        <p:spPr>
-          <a:xfrm>
-            <a:off x="4672584" y="2935224"/>
-            <a:ext cx="4105656" cy="1655064"/>
-          </a:xfrm>
-          <a:prstGeom prst="roundRect">
-            <a:avLst>
-              <a:gd name="adj" fmla="val 3315"/>
-            </a:avLst>
-          </a:prstGeom>
-          <a:solidFill>
-            <a:srgbClr val="F3F4F6"/>
-          </a:solidFill>
-          <a:ln w="10160">
-            <a:solidFill>
-              <a:srgbClr val="D1D5DB"/>
-            </a:solidFill>
-            <a:prstDash val="solid"/>
-          </a:ln>
-        </p:spPr>
-      </p:sp>
-      <p:sp>
-        <p:nvSpPr>
-          <p:cNvPr id="15" name="Text 13"/>
-          <p:cNvSpPr/>
-          <p:nvPr/>
-        </p:nvSpPr>
-        <p:spPr>
-          <a:xfrm>
-            <a:off x="4818888" y="3054096"/>
-            <a:ext cx="3813048" cy="310896"/>
-          </a:xfrm>
-          <a:prstGeom prst="rect">
-            <a:avLst/>
-          </a:prstGeom>
-          <a:noFill/>
-          <a:ln/>
-        </p:spPr>
-        <p:txBody>
-          <a:bodyPr wrap="square" lIns="0" tIns="0" rIns="0" bIns="0" rtlCol="0" anchor="ctr">
-            <a:normAutofit/>
-          </a:bodyPr>
-          <a:lstStyle/>
-          <a:p>
-            <a:pPr indent="0" marL="0">
-              <a:buNone/>
-            </a:pPr>
-            <a:r>
-              <a:rPr lang="en-US" sz="1500" b="1" dirty="0">
-                <a:solidFill>
-                  <a:srgbClr val="1E2761"/>
-                </a:solidFill>
-                <a:latin typeface="Calibri" pitchFamily="34" charset="0"/>
-                <a:ea typeface="Calibri" pitchFamily="34" charset="-122"/>
-                <a:cs typeface="Calibri" pitchFamily="34" charset="-120"/>
-              </a:rPr>
-              <a:t>Reset</a:t>
-            </a:r>
-            <a:endParaRPr lang="en-US" sz="1500" dirty="0"/>
-          </a:p>
-        </p:txBody>
-      </p:sp>
-      <p:sp>
-        <p:nvSpPr>
-          <p:cNvPr id="16" name="Text 14"/>
-          <p:cNvSpPr/>
-          <p:nvPr/>
-        </p:nvSpPr>
-        <p:spPr>
-          <a:xfrm>
-            <a:off x="4818888" y="3438144"/>
-            <a:ext cx="3813048" cy="1033272"/>
-          </a:xfrm>
-          <a:prstGeom prst="rect">
-            <a:avLst/>
-          </a:prstGeom>
-          <a:noFill/>
-          <a:ln/>
-        </p:spPr>
-        <p:txBody>
-          <a:bodyPr wrap="square" lIns="0" tIns="0" rIns="0" bIns="0" rtlCol="0" anchor="t">
-            <a:normAutofit/>
-          </a:bodyPr>
-          <a:lstStyle/>
-          <a:p>
-            <a:pPr indent="0" marL="0">
-              <a:buNone/>
-            </a:pPr>
-            <a:r>
-              <a:rPr lang="en-US" sz="1150" dirty="0">
-                <a:solidFill>
-                  <a:srgbClr val="212121"/>
-                </a:solidFill>
-                <a:latin typeface="Calibri" pitchFamily="34" charset="0"/>
-                <a:ea typeface="Calibri" pitchFamily="34" charset="-122"/>
-                <a:cs typeface="Calibri" pitchFamily="34" charset="-120"/>
-              </a:rPr>
-              <a:t>Progressive tool changes re-arm on each new agent run</a:t>
-            </a:r>
-            <a:endParaRPr lang="en-US" sz="1150" dirty="0"/>
-          </a:p>
-        </p:txBody>
-      </p:sp>
-      <p:sp>
-        <p:nvSpPr>
-          <p:cNvPr id="17" name="Shape 15"/>
+              <a:t>Runbook: demos/day3/module-5-demo-1-stdio-mcp.md</a:t>
+            </a:r>
+            <a:endParaRPr lang="en-US" sz="1100" dirty="0"/>
+          </a:p>
+        </p:txBody>
+      </p:sp>
+      <p:sp>
+        <p:nvSpPr>
+          <p:cNvPr id="9" name="Shape 7"/>
           <p:cNvSpPr/>
           <p:nvPr/>
         </p:nvSpPr>
@@ -11275,7 +11227,7 @@
       </p:sp>
       <p:sp>
         <p:nvSpPr>
-          <p:cNvPr id="18" name="Text 16"/>
+          <p:cNvPr id="10" name="Text 8"/>
           <p:cNvSpPr/>
           <p:nvPr/>
         </p:nvSpPr>
@@ -11308,7 +11260,7 @@
                 <a:ea typeface="Calibri" pitchFamily="34" charset="-122"/>
                 <a:cs typeface="Calibri" pitchFamily="34" charset="-120"/>
               </a:rPr>
-              <a:t>Source: https://learn.microsoft.com/en-us/python/api/agent-framework-core/agent_framework.mcpstreamablehttptool?view=agent-framework-python-latest  ·  +1 in notes</a:t>
+              <a:t>Source: https://learn.microsoft.com/en-us/agent-framework/agents/tools/local-mcp-tools?tabs=python</a:t>
             </a:r>
             <a:endParaRPr lang="en-US" sz="820" dirty="0"/>
           </a:p>
@@ -11442,870 +11394,427 @@
                 <a:ea typeface="Calibri" pitchFamily="34" charset="-122"/>
                 <a:cs typeface="Calibri" pitchFamily="34" charset="-120"/>
               </a:rPr>
-              <a:t>approval_mode creates a human boundary</a:t>
+              <a:t>Remote HTTP belongs behind explicit auth</a:t>
             </a:r>
             <a:endParaRPr lang="en-US" sz="2500" dirty="0"/>
           </a:p>
         </p:txBody>
       </p:sp>
-      <p:graphicFrame>
-        <p:nvGraphicFramePr>
-          <p:cNvPr id="10" name="Table 0"/>
-          <p:cNvGraphicFramePr>
-            <a:graphicFrameLocks noGrp="1"/>
-          </p:cNvGraphicFramePr>
-          <p:nvPr>
-            <p:extLst>
-              <p:ext uri="{D42A27DB-BD31-4B8C-83A1-F6EECF244321}">
-                <p14:modId xmlns:p14="http://schemas.microsoft.com/office/powerpoint/2010/main" val="1579011935"/>
-              </p:ext>
-            </p:extLst>
-          </p:nvPr>
-        </p:nvGraphicFramePr>
-        <p:xfrm>
-          <a:off x="365760" y="1078992"/>
-          <a:ext cx="8412480" cy="914400"/>
-        </p:xfrm>
-        <a:graphic>
-          <a:graphicData uri="http://schemas.openxmlformats.org/drawingml/2006/table">
-            <a:tbl>
-              <a:tblPr/>
-              <a:tblGrid>
-                <a:gridCol w="2804160"/>
-                <a:gridCol w="2804160"/>
-                <a:gridCol w="2804160"/>
-              </a:tblGrid>
-              <a:tr h="658368">
-                <a:tc>
-                  <a:txBody>
-                    <a:bodyPr/>
-                    <a:lstStyle/>
-                    <a:p>
-                      <a:pPr indent="0" marL="0">
-                        <a:buNone/>
-                      </a:pPr>
-                      <a:r>
-                        <a:rPr lang="en-US" sz="1100" b="1" dirty="0">
-                          <a:solidFill>
-                            <a:srgbClr val="FFFFFF"/>
-                          </a:solidFill>
-                          <a:latin typeface="Calibri" pitchFamily="34" charset="0"/>
-                          <a:ea typeface="Calibri" pitchFamily="34" charset="-122"/>
-                          <a:cs typeface="Calibri" pitchFamily="34" charset="-120"/>
-                        </a:rPr>
-                        <a:t>Setting</a:t>
-                      </a:r>
-                      <a:endParaRPr lang="en-US" sz="1100" dirty="0">
-                        <a:latin typeface="Calibri" charset="0"/>
-                        <a:ea typeface="Calibri" charset="0"/>
-                        <a:cs typeface="Calibri" charset="0"/>
-                      </a:endParaRPr>
-                    </a:p>
-                  </a:txBody>
-                  <a:tcPr marL="54864" marR="54864" marT="54864" marB="54864" anchor="ctr">
-                    <a:lnL w="6350" cap="flat" cmpd="sng" algn="ctr">
-                      <a:solidFill>
-                        <a:srgbClr val="D1D5DB"/>
-                      </a:solidFill>
-                      <a:prstDash val="solid"/>
-                      <a:round/>
-                      <a:headEnd type="none" w="med" len="med"/>
-                      <a:tailEnd type="none" w="med" len="med"/>
-                    </a:lnL>
-                    <a:lnR w="6350" cap="flat" cmpd="sng" algn="ctr">
-                      <a:solidFill>
-                        <a:srgbClr val="D1D5DB"/>
-                      </a:solidFill>
-                      <a:prstDash val="solid"/>
-                      <a:round/>
-                      <a:headEnd type="none" w="med" len="med"/>
-                      <a:tailEnd type="none" w="med" len="med"/>
-                    </a:lnR>
-                    <a:lnT w="6350" cap="flat" cmpd="sng" algn="ctr">
-                      <a:solidFill>
-                        <a:srgbClr val="D1D5DB"/>
-                      </a:solidFill>
-                      <a:prstDash val="solid"/>
-                      <a:round/>
-                      <a:headEnd type="none" w="med" len="med"/>
-                      <a:tailEnd type="none" w="med" len="med"/>
-                    </a:lnT>
-                    <a:lnB w="6350" cap="flat" cmpd="sng" algn="ctr">
-                      <a:solidFill>
-                        <a:srgbClr val="D1D5DB"/>
-                      </a:solidFill>
-                      <a:prstDash val="solid"/>
-                      <a:round/>
-                      <a:headEnd type="none" w="med" len="med"/>
-                      <a:tailEnd type="none" w="med" len="med"/>
-                    </a:lnB>
-                    <a:solidFill>
-                      <a:srgbClr val="1E2761"/>
-                    </a:solidFill>
-                  </a:tcPr>
-                </a:tc>
-                <a:tc>
-                  <a:txBody>
-                    <a:bodyPr/>
-                    <a:lstStyle/>
-                    <a:p>
-                      <a:pPr indent="0" marL="0">
-                        <a:buNone/>
-                      </a:pPr>
-                      <a:r>
-                        <a:rPr lang="en-US" sz="1100" b="1" dirty="0">
-                          <a:solidFill>
-                            <a:srgbClr val="FFFFFF"/>
-                          </a:solidFill>
-                          <a:latin typeface="Calibri" pitchFamily="34" charset="0"/>
-                          <a:ea typeface="Calibri" pitchFamily="34" charset="-122"/>
-                          <a:cs typeface="Calibri" pitchFamily="34" charset="-120"/>
-                        </a:rPr>
-                        <a:t>Effect</a:t>
-                      </a:r>
-                      <a:endParaRPr lang="en-US" sz="1100" dirty="0">
-                        <a:latin typeface="Calibri" charset="0"/>
-                        <a:ea typeface="Calibri" charset="0"/>
-                        <a:cs typeface="Calibri" charset="0"/>
-                      </a:endParaRPr>
-                    </a:p>
-                  </a:txBody>
-                  <a:tcPr marL="54864" marR="54864" marT="54864" marB="54864" anchor="ctr">
-                    <a:lnL w="6350" cap="flat" cmpd="sng" algn="ctr">
-                      <a:solidFill>
-                        <a:srgbClr val="D1D5DB"/>
-                      </a:solidFill>
-                      <a:prstDash val="solid"/>
-                      <a:round/>
-                      <a:headEnd type="none" w="med" len="med"/>
-                      <a:tailEnd type="none" w="med" len="med"/>
-                    </a:lnL>
-                    <a:lnR w="6350" cap="flat" cmpd="sng" algn="ctr">
-                      <a:solidFill>
-                        <a:srgbClr val="D1D5DB"/>
-                      </a:solidFill>
-                      <a:prstDash val="solid"/>
-                      <a:round/>
-                      <a:headEnd type="none" w="med" len="med"/>
-                      <a:tailEnd type="none" w="med" len="med"/>
-                    </a:lnR>
-                    <a:lnT w="6350" cap="flat" cmpd="sng" algn="ctr">
-                      <a:solidFill>
-                        <a:srgbClr val="D1D5DB"/>
-                      </a:solidFill>
-                      <a:prstDash val="solid"/>
-                      <a:round/>
-                      <a:headEnd type="none" w="med" len="med"/>
-                      <a:tailEnd type="none" w="med" len="med"/>
-                    </a:lnT>
-                    <a:lnB w="6350" cap="flat" cmpd="sng" algn="ctr">
-                      <a:solidFill>
-                        <a:srgbClr val="D1D5DB"/>
-                      </a:solidFill>
-                      <a:prstDash val="solid"/>
-                      <a:round/>
-                      <a:headEnd type="none" w="med" len="med"/>
-                      <a:tailEnd type="none" w="med" len="med"/>
-                    </a:lnB>
-                    <a:solidFill>
-                      <a:srgbClr val="1E2761"/>
-                    </a:solidFill>
-                  </a:tcPr>
-                </a:tc>
-                <a:tc>
-                  <a:txBody>
-                    <a:bodyPr/>
-                    <a:lstStyle/>
-                    <a:p>
-                      <a:pPr indent="0" marL="0">
-                        <a:buNone/>
-                      </a:pPr>
-                      <a:r>
-                        <a:rPr lang="en-US" sz="1100" b="1" dirty="0">
-                          <a:solidFill>
-                            <a:srgbClr val="FFFFFF"/>
-                          </a:solidFill>
-                          <a:latin typeface="Calibri" pitchFamily="34" charset="0"/>
-                          <a:ea typeface="Calibri" pitchFamily="34" charset="-122"/>
-                          <a:cs typeface="Calibri" pitchFamily="34" charset="-120"/>
-                        </a:rPr>
-                        <a:t>Appropriate use</a:t>
-                      </a:r>
-                      <a:endParaRPr lang="en-US" sz="1100" dirty="0">
-                        <a:latin typeface="Calibri" charset="0"/>
-                        <a:ea typeface="Calibri" charset="0"/>
-                        <a:cs typeface="Calibri" charset="0"/>
-                      </a:endParaRPr>
-                    </a:p>
-                  </a:txBody>
-                  <a:tcPr marL="54864" marR="54864" marT="54864" marB="54864" anchor="ctr">
-                    <a:lnL w="6350" cap="flat" cmpd="sng" algn="ctr">
-                      <a:solidFill>
-                        <a:srgbClr val="D1D5DB"/>
-                      </a:solidFill>
-                      <a:prstDash val="solid"/>
-                      <a:round/>
-                      <a:headEnd type="none" w="med" len="med"/>
-                      <a:tailEnd type="none" w="med" len="med"/>
-                    </a:lnL>
-                    <a:lnR w="6350" cap="flat" cmpd="sng" algn="ctr">
-                      <a:solidFill>
-                        <a:srgbClr val="D1D5DB"/>
-                      </a:solidFill>
-                      <a:prstDash val="solid"/>
-                      <a:round/>
-                      <a:headEnd type="none" w="med" len="med"/>
-                      <a:tailEnd type="none" w="med" len="med"/>
-                    </a:lnR>
-                    <a:lnT w="6350" cap="flat" cmpd="sng" algn="ctr">
-                      <a:solidFill>
-                        <a:srgbClr val="D1D5DB"/>
-                      </a:solidFill>
-                      <a:prstDash val="solid"/>
-                      <a:round/>
-                      <a:headEnd type="none" w="med" len="med"/>
-                      <a:tailEnd type="none" w="med" len="med"/>
-                    </a:lnT>
-                    <a:lnB w="6350" cap="flat" cmpd="sng" algn="ctr">
-                      <a:solidFill>
-                        <a:srgbClr val="D1D5DB"/>
-                      </a:solidFill>
-                      <a:prstDash val="solid"/>
-                      <a:round/>
-                      <a:headEnd type="none" w="med" len="med"/>
-                      <a:tailEnd type="none" w="med" len="med"/>
-                    </a:lnB>
-                    <a:solidFill>
-                      <a:srgbClr val="1E2761"/>
-                    </a:solidFill>
-                  </a:tcPr>
-                </a:tc>
-              </a:tr>
-              <a:tr h="658368">
-                <a:tc>
-                  <a:txBody>
-                    <a:bodyPr/>
-                    <a:lstStyle/>
-                    <a:p>
-                      <a:pPr indent="0" marL="0">
-                        <a:buNone/>
-                      </a:pPr>
-                      <a:r>
-                        <a:rPr lang="en-US" sz="1100" dirty="0">
-                          <a:solidFill>
-                            <a:srgbClr val="212121"/>
-                          </a:solidFill>
-                          <a:latin typeface="Calibri" pitchFamily="34" charset="0"/>
-                          <a:ea typeface="Calibri" pitchFamily="34" charset="-122"/>
-                          <a:cs typeface="Calibri" pitchFamily="34" charset="-120"/>
-                        </a:rPr>
-                        <a:t>always_require</a:t>
-                      </a:r>
-                      <a:endParaRPr lang="en-US" sz="1100" dirty="0">
-                        <a:latin typeface="Calibri" charset="0"/>
-                        <a:ea typeface="Calibri" charset="0"/>
-                        <a:cs typeface="Calibri" charset="0"/>
-                      </a:endParaRPr>
-                    </a:p>
-                  </a:txBody>
-                  <a:tcPr marL="54864" marR="54864" marT="54864" marB="54864" anchor="ctr">
-                    <a:lnL w="6350" cap="flat" cmpd="sng" algn="ctr">
-                      <a:solidFill>
-                        <a:srgbClr val="D1D5DB"/>
-                      </a:solidFill>
-                      <a:prstDash val="solid"/>
-                      <a:round/>
-                      <a:headEnd type="none" w="med" len="med"/>
-                      <a:tailEnd type="none" w="med" len="med"/>
-                    </a:lnL>
-                    <a:lnR w="6350" cap="flat" cmpd="sng" algn="ctr">
-                      <a:solidFill>
-                        <a:srgbClr val="D1D5DB"/>
-                      </a:solidFill>
-                      <a:prstDash val="solid"/>
-                      <a:round/>
-                      <a:headEnd type="none" w="med" len="med"/>
-                      <a:tailEnd type="none" w="med" len="med"/>
-                    </a:lnR>
-                    <a:lnT w="6350" cap="flat" cmpd="sng" algn="ctr">
-                      <a:solidFill>
-                        <a:srgbClr val="D1D5DB"/>
-                      </a:solidFill>
-                      <a:prstDash val="solid"/>
-                      <a:round/>
-                      <a:headEnd type="none" w="med" len="med"/>
-                      <a:tailEnd type="none" w="med" len="med"/>
-                    </a:lnT>
-                    <a:lnB w="6350" cap="flat" cmpd="sng" algn="ctr">
-                      <a:solidFill>
-                        <a:srgbClr val="D1D5DB"/>
-                      </a:solidFill>
-                      <a:prstDash val="solid"/>
-                      <a:round/>
-                      <a:headEnd type="none" w="med" len="med"/>
-                      <a:tailEnd type="none" w="med" len="med"/>
-                    </a:lnB>
-                    <a:solidFill>
-                      <a:srgbClr val="FFFFFF"/>
-                    </a:solidFill>
-                  </a:tcPr>
-                </a:tc>
-                <a:tc>
-                  <a:txBody>
-                    <a:bodyPr/>
-                    <a:lstStyle/>
-                    <a:p>
-                      <a:pPr indent="0" marL="0">
-                        <a:buNone/>
-                      </a:pPr>
-                      <a:r>
-                        <a:rPr lang="en-US" sz="1100" dirty="0">
-                          <a:solidFill>
-                            <a:srgbClr val="212121"/>
-                          </a:solidFill>
-                          <a:latin typeface="Calibri" pitchFamily="34" charset="0"/>
-                          <a:ea typeface="Calibri" pitchFamily="34" charset="-122"/>
-                          <a:cs typeface="Calibri" pitchFamily="34" charset="-120"/>
-                        </a:rPr>
-                        <a:t>Every exposed MCP tool needs approval</a:t>
-                      </a:r>
-                      <a:endParaRPr lang="en-US" sz="1100" dirty="0">
-                        <a:latin typeface="Calibri" charset="0"/>
-                        <a:ea typeface="Calibri" charset="0"/>
-                        <a:cs typeface="Calibri" charset="0"/>
-                      </a:endParaRPr>
-                    </a:p>
-                  </a:txBody>
-                  <a:tcPr marL="54864" marR="54864" marT="54864" marB="54864" anchor="ctr">
-                    <a:lnL w="6350" cap="flat" cmpd="sng" algn="ctr">
-                      <a:solidFill>
-                        <a:srgbClr val="D1D5DB"/>
-                      </a:solidFill>
-                      <a:prstDash val="solid"/>
-                      <a:round/>
-                      <a:headEnd type="none" w="med" len="med"/>
-                      <a:tailEnd type="none" w="med" len="med"/>
-                    </a:lnL>
-                    <a:lnR w="6350" cap="flat" cmpd="sng" algn="ctr">
-                      <a:solidFill>
-                        <a:srgbClr val="D1D5DB"/>
-                      </a:solidFill>
-                      <a:prstDash val="solid"/>
-                      <a:round/>
-                      <a:headEnd type="none" w="med" len="med"/>
-                      <a:tailEnd type="none" w="med" len="med"/>
-                    </a:lnR>
-                    <a:lnT w="6350" cap="flat" cmpd="sng" algn="ctr">
-                      <a:solidFill>
-                        <a:srgbClr val="D1D5DB"/>
-                      </a:solidFill>
-                      <a:prstDash val="solid"/>
-                      <a:round/>
-                      <a:headEnd type="none" w="med" len="med"/>
-                      <a:tailEnd type="none" w="med" len="med"/>
-                    </a:lnT>
-                    <a:lnB w="6350" cap="flat" cmpd="sng" algn="ctr">
-                      <a:solidFill>
-                        <a:srgbClr val="D1D5DB"/>
-                      </a:solidFill>
-                      <a:prstDash val="solid"/>
-                      <a:round/>
-                      <a:headEnd type="none" w="med" len="med"/>
-                      <a:tailEnd type="none" w="med" len="med"/>
-                    </a:lnB>
-                    <a:solidFill>
-                      <a:srgbClr val="FFFFFF"/>
-                    </a:solidFill>
-                  </a:tcPr>
-                </a:tc>
-                <a:tc>
-                  <a:txBody>
-                    <a:bodyPr/>
-                    <a:lstStyle/>
-                    <a:p>
-                      <a:pPr indent="0" marL="0">
-                        <a:buNone/>
-                      </a:pPr>
-                      <a:r>
-                        <a:rPr lang="en-US" sz="1100" dirty="0">
-                          <a:solidFill>
-                            <a:srgbClr val="212121"/>
-                          </a:solidFill>
-                          <a:latin typeface="Calibri" pitchFamily="34" charset="0"/>
-                          <a:ea typeface="Calibri" pitchFamily="34" charset="-122"/>
-                          <a:cs typeface="Calibri" pitchFamily="34" charset="-120"/>
-                        </a:rPr>
-                        <a:t>Unknown or high-risk server</a:t>
-                      </a:r>
-                      <a:endParaRPr lang="en-US" sz="1100" dirty="0">
-                        <a:latin typeface="Calibri" charset="0"/>
-                        <a:ea typeface="Calibri" charset="0"/>
-                        <a:cs typeface="Calibri" charset="0"/>
-                      </a:endParaRPr>
-                    </a:p>
-                  </a:txBody>
-                  <a:tcPr marL="54864" marR="54864" marT="54864" marB="54864" anchor="ctr">
-                    <a:lnL w="6350" cap="flat" cmpd="sng" algn="ctr">
-                      <a:solidFill>
-                        <a:srgbClr val="D1D5DB"/>
-                      </a:solidFill>
-                      <a:prstDash val="solid"/>
-                      <a:round/>
-                      <a:headEnd type="none" w="med" len="med"/>
-                      <a:tailEnd type="none" w="med" len="med"/>
-                    </a:lnL>
-                    <a:lnR w="6350" cap="flat" cmpd="sng" algn="ctr">
-                      <a:solidFill>
-                        <a:srgbClr val="D1D5DB"/>
-                      </a:solidFill>
-                      <a:prstDash val="solid"/>
-                      <a:round/>
-                      <a:headEnd type="none" w="med" len="med"/>
-                      <a:tailEnd type="none" w="med" len="med"/>
-                    </a:lnR>
-                    <a:lnT w="6350" cap="flat" cmpd="sng" algn="ctr">
-                      <a:solidFill>
-                        <a:srgbClr val="D1D5DB"/>
-                      </a:solidFill>
-                      <a:prstDash val="solid"/>
-                      <a:round/>
-                      <a:headEnd type="none" w="med" len="med"/>
-                      <a:tailEnd type="none" w="med" len="med"/>
-                    </a:lnT>
-                    <a:lnB w="6350" cap="flat" cmpd="sng" algn="ctr">
-                      <a:solidFill>
-                        <a:srgbClr val="D1D5DB"/>
-                      </a:solidFill>
-                      <a:prstDash val="solid"/>
-                      <a:round/>
-                      <a:headEnd type="none" w="med" len="med"/>
-                      <a:tailEnd type="none" w="med" len="med"/>
-                    </a:lnB>
-                    <a:solidFill>
-                      <a:srgbClr val="FFFFFF"/>
-                    </a:solidFill>
-                  </a:tcPr>
-                </a:tc>
-              </a:tr>
-              <a:tr h="658368">
-                <a:tc>
-                  <a:txBody>
-                    <a:bodyPr/>
-                    <a:lstStyle/>
-                    <a:p>
-                      <a:pPr indent="0" marL="0">
-                        <a:buNone/>
-                      </a:pPr>
-                      <a:r>
-                        <a:rPr lang="en-US" sz="1100" dirty="0">
-                          <a:solidFill>
-                            <a:srgbClr val="212121"/>
-                          </a:solidFill>
-                          <a:latin typeface="Calibri" pitchFamily="34" charset="0"/>
-                          <a:ea typeface="Calibri" pitchFamily="34" charset="-122"/>
-                          <a:cs typeface="Calibri" pitchFamily="34" charset="-120"/>
-                        </a:rPr>
-                        <a:t>never_require</a:t>
-                      </a:r>
-                      <a:endParaRPr lang="en-US" sz="1100" dirty="0">
-                        <a:latin typeface="Calibri" charset="0"/>
-                        <a:ea typeface="Calibri" charset="0"/>
-                        <a:cs typeface="Calibri" charset="0"/>
-                      </a:endParaRPr>
-                    </a:p>
-                  </a:txBody>
-                  <a:tcPr marL="54864" marR="54864" marT="54864" marB="54864" anchor="ctr">
-                    <a:lnL w="6350" cap="flat" cmpd="sng" algn="ctr">
-                      <a:solidFill>
-                        <a:srgbClr val="D1D5DB"/>
-                      </a:solidFill>
-                      <a:prstDash val="solid"/>
-                      <a:round/>
-                      <a:headEnd type="none" w="med" len="med"/>
-                      <a:tailEnd type="none" w="med" len="med"/>
-                    </a:lnL>
-                    <a:lnR w="6350" cap="flat" cmpd="sng" algn="ctr">
-                      <a:solidFill>
-                        <a:srgbClr val="D1D5DB"/>
-                      </a:solidFill>
-                      <a:prstDash val="solid"/>
-                      <a:round/>
-                      <a:headEnd type="none" w="med" len="med"/>
-                      <a:tailEnd type="none" w="med" len="med"/>
-                    </a:lnR>
-                    <a:lnT w="6350" cap="flat" cmpd="sng" algn="ctr">
-                      <a:solidFill>
-                        <a:srgbClr val="D1D5DB"/>
-                      </a:solidFill>
-                      <a:prstDash val="solid"/>
-                      <a:round/>
-                      <a:headEnd type="none" w="med" len="med"/>
-                      <a:tailEnd type="none" w="med" len="med"/>
-                    </a:lnT>
-                    <a:lnB w="6350" cap="flat" cmpd="sng" algn="ctr">
-                      <a:solidFill>
-                        <a:srgbClr val="D1D5DB"/>
-                      </a:solidFill>
-                      <a:prstDash val="solid"/>
-                      <a:round/>
-                      <a:headEnd type="none" w="med" len="med"/>
-                      <a:tailEnd type="none" w="med" len="med"/>
-                    </a:lnB>
-                    <a:solidFill>
-                      <a:srgbClr val="F3F4F6"/>
-                    </a:solidFill>
-                  </a:tcPr>
-                </a:tc>
-                <a:tc>
-                  <a:txBody>
-                    <a:bodyPr/>
-                    <a:lstStyle/>
-                    <a:p>
-                      <a:pPr indent="0" marL="0">
-                        <a:buNone/>
-                      </a:pPr>
-                      <a:r>
-                        <a:rPr lang="en-US" sz="1100" dirty="0">
-                          <a:solidFill>
-                            <a:srgbClr val="212121"/>
-                          </a:solidFill>
-                          <a:latin typeface="Calibri" pitchFamily="34" charset="0"/>
-                          <a:ea typeface="Calibri" pitchFamily="34" charset="-122"/>
-                          <a:cs typeface="Calibri" pitchFamily="34" charset="-120"/>
-                        </a:rPr>
-                        <a:t>Calls proceed without approval</a:t>
-                      </a:r>
-                      <a:endParaRPr lang="en-US" sz="1100" dirty="0">
-                        <a:latin typeface="Calibri" charset="0"/>
-                        <a:ea typeface="Calibri" charset="0"/>
-                        <a:cs typeface="Calibri" charset="0"/>
-                      </a:endParaRPr>
-                    </a:p>
-                  </a:txBody>
-                  <a:tcPr marL="54864" marR="54864" marT="54864" marB="54864" anchor="ctr">
-                    <a:lnL w="6350" cap="flat" cmpd="sng" algn="ctr">
-                      <a:solidFill>
-                        <a:srgbClr val="D1D5DB"/>
-                      </a:solidFill>
-                      <a:prstDash val="solid"/>
-                      <a:round/>
-                      <a:headEnd type="none" w="med" len="med"/>
-                      <a:tailEnd type="none" w="med" len="med"/>
-                    </a:lnL>
-                    <a:lnR w="6350" cap="flat" cmpd="sng" algn="ctr">
-                      <a:solidFill>
-                        <a:srgbClr val="D1D5DB"/>
-                      </a:solidFill>
-                      <a:prstDash val="solid"/>
-                      <a:round/>
-                      <a:headEnd type="none" w="med" len="med"/>
-                      <a:tailEnd type="none" w="med" len="med"/>
-                    </a:lnR>
-                    <a:lnT w="6350" cap="flat" cmpd="sng" algn="ctr">
-                      <a:solidFill>
-                        <a:srgbClr val="D1D5DB"/>
-                      </a:solidFill>
-                      <a:prstDash val="solid"/>
-                      <a:round/>
-                      <a:headEnd type="none" w="med" len="med"/>
-                      <a:tailEnd type="none" w="med" len="med"/>
-                    </a:lnT>
-                    <a:lnB w="6350" cap="flat" cmpd="sng" algn="ctr">
-                      <a:solidFill>
-                        <a:srgbClr val="D1D5DB"/>
-                      </a:solidFill>
-                      <a:prstDash val="solid"/>
-                      <a:round/>
-                      <a:headEnd type="none" w="med" len="med"/>
-                      <a:tailEnd type="none" w="med" len="med"/>
-                    </a:lnB>
-                    <a:solidFill>
-                      <a:srgbClr val="F3F4F6"/>
-                    </a:solidFill>
-                  </a:tcPr>
-                </a:tc>
-                <a:tc>
-                  <a:txBody>
-                    <a:bodyPr/>
-                    <a:lstStyle/>
-                    <a:p>
-                      <a:pPr indent="0" marL="0">
-                        <a:buNone/>
-                      </a:pPr>
-                      <a:r>
-                        <a:rPr lang="en-US" sz="1100" dirty="0">
-                          <a:solidFill>
-                            <a:srgbClr val="212121"/>
-                          </a:solidFill>
-                          <a:latin typeface="Calibri" pitchFamily="34" charset="0"/>
-                          <a:ea typeface="Calibri" pitchFamily="34" charset="-122"/>
-                          <a:cs typeface="Calibri" pitchFamily="34" charset="-120"/>
-                        </a:rPr>
-                        <a:t>Trusted, low-risk read tools</a:t>
-                      </a:r>
-                      <a:endParaRPr lang="en-US" sz="1100" dirty="0">
-                        <a:latin typeface="Calibri" charset="0"/>
-                        <a:ea typeface="Calibri" charset="0"/>
-                        <a:cs typeface="Calibri" charset="0"/>
-                      </a:endParaRPr>
-                    </a:p>
-                  </a:txBody>
-                  <a:tcPr marL="54864" marR="54864" marT="54864" marB="54864" anchor="ctr">
-                    <a:lnL w="6350" cap="flat" cmpd="sng" algn="ctr">
-                      <a:solidFill>
-                        <a:srgbClr val="D1D5DB"/>
-                      </a:solidFill>
-                      <a:prstDash val="solid"/>
-                      <a:round/>
-                      <a:headEnd type="none" w="med" len="med"/>
-                      <a:tailEnd type="none" w="med" len="med"/>
-                    </a:lnL>
-                    <a:lnR w="6350" cap="flat" cmpd="sng" algn="ctr">
-                      <a:solidFill>
-                        <a:srgbClr val="D1D5DB"/>
-                      </a:solidFill>
-                      <a:prstDash val="solid"/>
-                      <a:round/>
-                      <a:headEnd type="none" w="med" len="med"/>
-                      <a:tailEnd type="none" w="med" len="med"/>
-                    </a:lnR>
-                    <a:lnT w="6350" cap="flat" cmpd="sng" algn="ctr">
-                      <a:solidFill>
-                        <a:srgbClr val="D1D5DB"/>
-                      </a:solidFill>
-                      <a:prstDash val="solid"/>
-                      <a:round/>
-                      <a:headEnd type="none" w="med" len="med"/>
-                      <a:tailEnd type="none" w="med" len="med"/>
-                    </a:lnT>
-                    <a:lnB w="6350" cap="flat" cmpd="sng" algn="ctr">
-                      <a:solidFill>
-                        <a:srgbClr val="D1D5DB"/>
-                      </a:solidFill>
-                      <a:prstDash val="solid"/>
-                      <a:round/>
-                      <a:headEnd type="none" w="med" len="med"/>
-                      <a:tailEnd type="none" w="med" len="med"/>
-                    </a:lnB>
-                    <a:solidFill>
-                      <a:srgbClr val="F3F4F6"/>
-                    </a:solidFill>
-                  </a:tcPr>
-                </a:tc>
-              </a:tr>
-              <a:tr h="658368">
-                <a:tc>
-                  <a:txBody>
-                    <a:bodyPr/>
-                    <a:lstStyle/>
-                    <a:p>
-                      <a:pPr indent="0" marL="0">
-                        <a:buNone/>
-                      </a:pPr>
-                      <a:r>
-                        <a:rPr lang="en-US" sz="1100" dirty="0">
-                          <a:solidFill>
-                            <a:srgbClr val="212121"/>
-                          </a:solidFill>
-                          <a:latin typeface="Calibri" pitchFamily="34" charset="0"/>
-                          <a:ea typeface="Calibri" pitchFamily="34" charset="-122"/>
-                          <a:cs typeface="Calibri" pitchFamily="34" charset="-120"/>
-                        </a:rPr>
-                        <a:t>Per-tool mapping</a:t>
-                      </a:r>
-                      <a:endParaRPr lang="en-US" sz="1100" dirty="0">
-                        <a:latin typeface="Calibri" charset="0"/>
-                        <a:ea typeface="Calibri" charset="0"/>
-                        <a:cs typeface="Calibri" charset="0"/>
-                      </a:endParaRPr>
-                    </a:p>
-                  </a:txBody>
-                  <a:tcPr marL="54864" marR="54864" marT="54864" marB="54864" anchor="ctr">
-                    <a:lnL w="6350" cap="flat" cmpd="sng" algn="ctr">
-                      <a:solidFill>
-                        <a:srgbClr val="D1D5DB"/>
-                      </a:solidFill>
-                      <a:prstDash val="solid"/>
-                      <a:round/>
-                      <a:headEnd type="none" w="med" len="med"/>
-                      <a:tailEnd type="none" w="med" len="med"/>
-                    </a:lnL>
-                    <a:lnR w="6350" cap="flat" cmpd="sng" algn="ctr">
-                      <a:solidFill>
-                        <a:srgbClr val="D1D5DB"/>
-                      </a:solidFill>
-                      <a:prstDash val="solid"/>
-                      <a:round/>
-                      <a:headEnd type="none" w="med" len="med"/>
-                      <a:tailEnd type="none" w="med" len="med"/>
-                    </a:lnR>
-                    <a:lnT w="6350" cap="flat" cmpd="sng" algn="ctr">
-                      <a:solidFill>
-                        <a:srgbClr val="D1D5DB"/>
-                      </a:solidFill>
-                      <a:prstDash val="solid"/>
-                      <a:round/>
-                      <a:headEnd type="none" w="med" len="med"/>
-                      <a:tailEnd type="none" w="med" len="med"/>
-                    </a:lnT>
-                    <a:lnB w="6350" cap="flat" cmpd="sng" algn="ctr">
-                      <a:solidFill>
-                        <a:srgbClr val="D1D5DB"/>
-                      </a:solidFill>
-                      <a:prstDash val="solid"/>
-                      <a:round/>
-                      <a:headEnd type="none" w="med" len="med"/>
-                      <a:tailEnd type="none" w="med" len="med"/>
-                    </a:lnB>
-                    <a:solidFill>
-                      <a:srgbClr val="FFFFFF"/>
-                    </a:solidFill>
-                  </a:tcPr>
-                </a:tc>
-                <a:tc>
-                  <a:txBody>
-                    <a:bodyPr/>
-                    <a:lstStyle/>
-                    <a:p>
-                      <a:pPr indent="0" marL="0">
-                        <a:buNone/>
-                      </a:pPr>
-                      <a:r>
-                        <a:rPr lang="en-US" sz="1100" dirty="0">
-                          <a:solidFill>
-                            <a:srgbClr val="212121"/>
-                          </a:solidFill>
-                          <a:latin typeface="Calibri" pitchFamily="34" charset="0"/>
-                          <a:ea typeface="Calibri" pitchFamily="34" charset="-122"/>
-                          <a:cs typeface="Calibri" pitchFamily="34" charset="-120"/>
-                        </a:rPr>
-                        <a:t>Different rules by tool name</a:t>
-                      </a:r>
-                      <a:endParaRPr lang="en-US" sz="1100" dirty="0">
-                        <a:latin typeface="Calibri" charset="0"/>
-                        <a:ea typeface="Calibri" charset="0"/>
-                        <a:cs typeface="Calibri" charset="0"/>
-                      </a:endParaRPr>
-                    </a:p>
-                  </a:txBody>
-                  <a:tcPr marL="54864" marR="54864" marT="54864" marB="54864" anchor="ctr">
-                    <a:lnL w="6350" cap="flat" cmpd="sng" algn="ctr">
-                      <a:solidFill>
-                        <a:srgbClr val="D1D5DB"/>
-                      </a:solidFill>
-                      <a:prstDash val="solid"/>
-                      <a:round/>
-                      <a:headEnd type="none" w="med" len="med"/>
-                      <a:tailEnd type="none" w="med" len="med"/>
-                    </a:lnL>
-                    <a:lnR w="6350" cap="flat" cmpd="sng" algn="ctr">
-                      <a:solidFill>
-                        <a:srgbClr val="D1D5DB"/>
-                      </a:solidFill>
-                      <a:prstDash val="solid"/>
-                      <a:round/>
-                      <a:headEnd type="none" w="med" len="med"/>
-                      <a:tailEnd type="none" w="med" len="med"/>
-                    </a:lnR>
-                    <a:lnT w="6350" cap="flat" cmpd="sng" algn="ctr">
-                      <a:solidFill>
-                        <a:srgbClr val="D1D5DB"/>
-                      </a:solidFill>
-                      <a:prstDash val="solid"/>
-                      <a:round/>
-                      <a:headEnd type="none" w="med" len="med"/>
-                      <a:tailEnd type="none" w="med" len="med"/>
-                    </a:lnT>
-                    <a:lnB w="6350" cap="flat" cmpd="sng" algn="ctr">
-                      <a:solidFill>
-                        <a:srgbClr val="D1D5DB"/>
-                      </a:solidFill>
-                      <a:prstDash val="solid"/>
-                      <a:round/>
-                      <a:headEnd type="none" w="med" len="med"/>
-                      <a:tailEnd type="none" w="med" len="med"/>
-                    </a:lnB>
-                    <a:solidFill>
-                      <a:srgbClr val="FFFFFF"/>
-                    </a:solidFill>
-                  </a:tcPr>
-                </a:tc>
-                <a:tc>
-                  <a:txBody>
-                    <a:bodyPr/>
-                    <a:lstStyle/>
-                    <a:p>
-                      <a:pPr indent="0" marL="0">
-                        <a:buNone/>
-                      </a:pPr>
-                      <a:r>
-                        <a:rPr lang="en-US" sz="1100" dirty="0">
-                          <a:solidFill>
-                            <a:srgbClr val="212121"/>
-                          </a:solidFill>
-                          <a:latin typeface="Calibri" pitchFamily="34" charset="0"/>
-                          <a:ea typeface="Calibri" pitchFamily="34" charset="-122"/>
-                          <a:cs typeface="Calibri" pitchFamily="34" charset="-120"/>
-                        </a:rPr>
-                        <a:t>Read automatically; review writes</a:t>
-                      </a:r>
-                      <a:endParaRPr lang="en-US" sz="1100" dirty="0">
-                        <a:latin typeface="Calibri" charset="0"/>
-                        <a:ea typeface="Calibri" charset="0"/>
-                        <a:cs typeface="Calibri" charset="0"/>
-                      </a:endParaRPr>
-                    </a:p>
-                  </a:txBody>
-                  <a:tcPr marL="54864" marR="54864" marT="54864" marB="54864" anchor="ctr">
-                    <a:lnL w="6350" cap="flat" cmpd="sng" algn="ctr">
-                      <a:solidFill>
-                        <a:srgbClr val="D1D5DB"/>
-                      </a:solidFill>
-                      <a:prstDash val="solid"/>
-                      <a:round/>
-                      <a:headEnd type="none" w="med" len="med"/>
-                      <a:tailEnd type="none" w="med" len="med"/>
-                    </a:lnL>
-                    <a:lnR w="6350" cap="flat" cmpd="sng" algn="ctr">
-                      <a:solidFill>
-                        <a:srgbClr val="D1D5DB"/>
-                      </a:solidFill>
-                      <a:prstDash val="solid"/>
-                      <a:round/>
-                      <a:headEnd type="none" w="med" len="med"/>
-                      <a:tailEnd type="none" w="med" len="med"/>
-                    </a:lnR>
-                    <a:lnT w="6350" cap="flat" cmpd="sng" algn="ctr">
-                      <a:solidFill>
-                        <a:srgbClr val="D1D5DB"/>
-                      </a:solidFill>
-                      <a:prstDash val="solid"/>
-                      <a:round/>
-                      <a:headEnd type="none" w="med" len="med"/>
-                      <a:tailEnd type="none" w="med" len="med"/>
-                    </a:lnT>
-                    <a:lnB w="6350" cap="flat" cmpd="sng" algn="ctr">
-                      <a:solidFill>
-                        <a:srgbClr val="D1D5DB"/>
-                      </a:solidFill>
-                      <a:prstDash val="solid"/>
-                      <a:round/>
-                      <a:headEnd type="none" w="med" len="med"/>
-                      <a:tailEnd type="none" w="med" len="med"/>
-                    </a:lnB>
-                    <a:solidFill>
-                      <a:srgbClr val="FFFFFF"/>
-                    </a:solidFill>
-                  </a:tcPr>
-                </a:tc>
-              </a:tr>
-            </a:tbl>
-          </a:graphicData>
-        </a:graphic>
-      </p:graphicFrame>
-      <p:sp>
-        <p:nvSpPr>
-          <p:cNvPr id="6" name="Shape 3"/>
+      <p:sp>
+        <p:nvSpPr>
+          <p:cNvPr id="5" name="Shape 3"/>
+          <p:cNvSpPr/>
+          <p:nvPr/>
+        </p:nvSpPr>
+        <p:spPr>
+          <a:xfrm>
+            <a:off x="365760" y="1115568"/>
+            <a:ext cx="8412480" cy="2350008"/>
+          </a:xfrm>
+          <a:prstGeom prst="rect">
+            <a:avLst/>
+          </a:prstGeom>
+          <a:solidFill>
+            <a:srgbClr val="1D1E22"/>
+          </a:solidFill>
+          <a:ln w="9525">
+            <a:solidFill>
+              <a:srgbClr val="2A2B2E"/>
+            </a:solidFill>
+            <a:prstDash val="solid"/>
+          </a:ln>
+        </p:spPr>
+      </p:sp>
+      <p:sp>
+        <p:nvSpPr>
+          <p:cNvPr id="6" name="Text 4"/>
+          <p:cNvSpPr/>
+          <p:nvPr/>
+        </p:nvSpPr>
+        <p:spPr>
+          <a:xfrm>
+            <a:off x="502920" y="1207008"/>
+            <a:ext cx="8138160" cy="2167128"/>
+          </a:xfrm>
+          <a:prstGeom prst="rect">
+            <a:avLst/>
+          </a:prstGeom>
+          <a:noFill/>
+          <a:ln/>
+        </p:spPr>
+        <p:txBody>
+          <a:bodyPr wrap="square" lIns="0" tIns="0" rIns="0" bIns="0" rtlCol="0" anchor="t">
+            <a:normAutofit/>
+          </a:bodyPr>
+          <a:lstStyle/>
+          <a:p>
+            <a:pPr indent="0" marL="0">
+              <a:buNone/>
+            </a:pPr>
+            <a:r>
+              <a:rPr lang="en-US" sz="1280" dirty="0">
+                <a:solidFill>
+                  <a:srgbClr val="A996B6"/>
+                </a:solidFill>
+                <a:latin typeface="Consolas" pitchFamily="34" charset="0"/>
+                <a:ea typeface="Consolas" pitchFamily="34" charset="-122"/>
+                <a:cs typeface="Consolas" pitchFamily="34" charset="-120"/>
+              </a:rPr>
+              <a:t>async</a:t>
+            </a:r>
+            <a:pPr indent="0" marL="0">
+              <a:buNone/>
+            </a:pPr>
+            <a:r>
+              <a:rPr lang="en-US" sz="1280" dirty="0">
+                <a:solidFill>
+                  <a:srgbClr val="FFFFFF"/>
+                </a:solidFill>
+                <a:latin typeface="Consolas" pitchFamily="34" charset="0"/>
+                <a:ea typeface="Consolas" pitchFamily="34" charset="-122"/>
+                <a:cs typeface="Consolas" pitchFamily="34" charset="-120"/>
+              </a:rPr>
+              <a:t> </a:t>
+            </a:r>
+            <a:pPr indent="0" marL="0">
+              <a:buNone/>
+            </a:pPr>
+            <a:r>
+              <a:rPr lang="en-US" sz="1280" dirty="0">
+                <a:solidFill>
+                  <a:srgbClr val="A996B6"/>
+                </a:solidFill>
+                <a:latin typeface="Consolas" pitchFamily="34" charset="0"/>
+                <a:ea typeface="Consolas" pitchFamily="34" charset="-122"/>
+                <a:cs typeface="Consolas" pitchFamily="34" charset="-120"/>
+              </a:rPr>
+              <a:t>with</a:t>
+            </a:r>
+            <a:pPr indent="0" marL="0">
+              <a:buNone/>
+            </a:pPr>
+            <a:r>
+              <a:rPr lang="en-US" sz="1280" dirty="0">
+                <a:solidFill>
+                  <a:srgbClr val="FFFFFF"/>
+                </a:solidFill>
+                <a:latin typeface="Consolas" pitchFamily="34" charset="0"/>
+                <a:ea typeface="Consolas" pitchFamily="34" charset="-122"/>
+                <a:cs typeface="Consolas" pitchFamily="34" charset="-120"/>
+              </a:rPr>
+              <a:t> MCPStreamableHTTPTool(</a:t>
+            </a:r>
+            <a:endParaRPr lang="en-US" sz="1280" dirty="0"/>
+          </a:p>
+          <a:p>
+            <a:pPr indent="0" marL="0">
+              <a:buNone/>
+            </a:pPr>
+            <a:r>
+              <a:rPr lang="en-US" sz="1280" dirty="0">
+                <a:solidFill>
+                  <a:srgbClr val="FFFFFF"/>
+                </a:solidFill>
+                <a:latin typeface="Consolas" pitchFamily="34" charset="0"/>
+                <a:ea typeface="Consolas" pitchFamily="34" charset="-122"/>
+                <a:cs typeface="Consolas" pitchFamily="34" charset="-120"/>
+              </a:rPr>
+              <a:t>    name=</a:t>
+            </a:r>
+            <a:pPr indent="0" marL="0">
+              <a:buNone/>
+            </a:pPr>
+            <a:r>
+              <a:rPr lang="en-US" sz="1280" dirty="0">
+                <a:solidFill>
+                  <a:srgbClr val="E4C98A"/>
+                </a:solidFill>
+                <a:latin typeface="Consolas" pitchFamily="34" charset="0"/>
+                <a:ea typeface="Consolas" pitchFamily="34" charset="-122"/>
+                <a:cs typeface="Consolas" pitchFamily="34" charset="-120"/>
+              </a:rPr>
+              <a:t>"docs"</a:t>
+            </a:r>
+            <a:pPr indent="0" marL="0">
+              <a:buNone/>
+            </a:pPr>
+            <a:r>
+              <a:rPr lang="en-US" sz="1280" dirty="0">
+                <a:solidFill>
+                  <a:srgbClr val="FFFFFF"/>
+                </a:solidFill>
+                <a:latin typeface="Consolas" pitchFamily="34" charset="0"/>
+                <a:ea typeface="Consolas" pitchFamily="34" charset="-122"/>
+                <a:cs typeface="Consolas" pitchFamily="34" charset="-120"/>
+              </a:rPr>
+              <a:t>,</a:t>
+            </a:r>
+            <a:endParaRPr lang="en-US" sz="1280" dirty="0"/>
+          </a:p>
+          <a:p>
+            <a:pPr indent="0" marL="0">
+              <a:buNone/>
+            </a:pPr>
+            <a:r>
+              <a:rPr lang="en-US" sz="1280" dirty="0">
+                <a:solidFill>
+                  <a:srgbClr val="FFFFFF"/>
+                </a:solidFill>
+                <a:latin typeface="Consolas" pitchFamily="34" charset="0"/>
+                <a:ea typeface="Consolas" pitchFamily="34" charset="-122"/>
+                <a:cs typeface="Consolas" pitchFamily="34" charset="-120"/>
+              </a:rPr>
+              <a:t>    url=</a:t>
+            </a:r>
+            <a:pPr indent="0" marL="0">
+              <a:buNone/>
+            </a:pPr>
+            <a:r>
+              <a:rPr lang="en-US" sz="1280" dirty="0">
+                <a:solidFill>
+                  <a:srgbClr val="E4C98A"/>
+                </a:solidFill>
+                <a:latin typeface="Consolas" pitchFamily="34" charset="0"/>
+                <a:ea typeface="Consolas" pitchFamily="34" charset="-122"/>
+                <a:cs typeface="Consolas" pitchFamily="34" charset="-120"/>
+              </a:rPr>
+              <a:t>"https://learn.microsoft.com/api/mcp"</a:t>
+            </a:r>
+            <a:pPr indent="0" marL="0">
+              <a:buNone/>
+            </a:pPr>
+            <a:r>
+              <a:rPr lang="en-US" sz="1280" dirty="0">
+                <a:solidFill>
+                  <a:srgbClr val="FFFFFF"/>
+                </a:solidFill>
+                <a:latin typeface="Consolas" pitchFamily="34" charset="0"/>
+                <a:ea typeface="Consolas" pitchFamily="34" charset="-122"/>
+                <a:cs typeface="Consolas" pitchFamily="34" charset="-120"/>
+              </a:rPr>
+              <a:t>,</a:t>
+            </a:r>
+            <a:endParaRPr lang="en-US" sz="1280" dirty="0"/>
+          </a:p>
+          <a:p>
+            <a:pPr indent="0" marL="0">
+              <a:buNone/>
+            </a:pPr>
+            <a:r>
+              <a:rPr lang="en-US" sz="1280" dirty="0">
+                <a:solidFill>
+                  <a:srgbClr val="FFFFFF"/>
+                </a:solidFill>
+                <a:latin typeface="Consolas" pitchFamily="34" charset="0"/>
+                <a:ea typeface="Consolas" pitchFamily="34" charset="-122"/>
+                <a:cs typeface="Consolas" pitchFamily="34" charset="-120"/>
+              </a:rPr>
+              <a:t>    allowed_tools=[</a:t>
+            </a:r>
+            <a:pPr indent="0" marL="0">
+              <a:buNone/>
+            </a:pPr>
+            <a:r>
+              <a:rPr lang="en-US" sz="1280" dirty="0">
+                <a:solidFill>
+                  <a:srgbClr val="E4C98A"/>
+                </a:solidFill>
+                <a:latin typeface="Consolas" pitchFamily="34" charset="0"/>
+                <a:ea typeface="Consolas" pitchFamily="34" charset="-122"/>
+                <a:cs typeface="Consolas" pitchFamily="34" charset="-120"/>
+              </a:rPr>
+              <a:t>"microsoft_docs_search"</a:t>
+            </a:r>
+            <a:pPr indent="0" marL="0">
+              <a:buNone/>
+            </a:pPr>
+            <a:r>
+              <a:rPr lang="en-US" sz="1280" dirty="0">
+                <a:solidFill>
+                  <a:srgbClr val="FFFFFF"/>
+                </a:solidFill>
+                <a:latin typeface="Consolas" pitchFamily="34" charset="0"/>
+                <a:ea typeface="Consolas" pitchFamily="34" charset="-122"/>
+                <a:cs typeface="Consolas" pitchFamily="34" charset="-120"/>
+              </a:rPr>
+              <a:t>],</a:t>
+            </a:r>
+            <a:endParaRPr lang="en-US" sz="1280" dirty="0"/>
+          </a:p>
+          <a:p>
+            <a:pPr indent="0" marL="0">
+              <a:buNone/>
+            </a:pPr>
+            <a:r>
+              <a:rPr lang="en-US" sz="1280" dirty="0">
+                <a:solidFill>
+                  <a:srgbClr val="FFFFFF"/>
+                </a:solidFill>
+                <a:latin typeface="Consolas" pitchFamily="34" charset="0"/>
+                <a:ea typeface="Consolas" pitchFamily="34" charset="-122"/>
+                <a:cs typeface="Consolas" pitchFamily="34" charset="-120"/>
+              </a:rPr>
+              <a:t>) </a:t>
+            </a:r>
+            <a:pPr indent="0" marL="0">
+              <a:buNone/>
+            </a:pPr>
+            <a:r>
+              <a:rPr lang="en-US" sz="1280" dirty="0">
+                <a:solidFill>
+                  <a:srgbClr val="A996B6"/>
+                </a:solidFill>
+                <a:latin typeface="Consolas" pitchFamily="34" charset="0"/>
+                <a:ea typeface="Consolas" pitchFamily="34" charset="-122"/>
+                <a:cs typeface="Consolas" pitchFamily="34" charset="-120"/>
+              </a:rPr>
+              <a:t>as</a:t>
+            </a:r>
+            <a:pPr indent="0" marL="0">
+              <a:buNone/>
+            </a:pPr>
+            <a:r>
+              <a:rPr lang="en-US" sz="1280" dirty="0">
+                <a:solidFill>
+                  <a:srgbClr val="FFFFFF"/>
+                </a:solidFill>
+                <a:latin typeface="Consolas" pitchFamily="34" charset="0"/>
+                <a:ea typeface="Consolas" pitchFamily="34" charset="-122"/>
+                <a:cs typeface="Consolas" pitchFamily="34" charset="-120"/>
+              </a:rPr>
+              <a:t> mcp:</a:t>
+            </a:r>
+            <a:endParaRPr lang="en-US" sz="1280" dirty="0"/>
+          </a:p>
+          <a:p>
+            <a:pPr indent="0" marL="0">
+              <a:buNone/>
+            </a:pPr>
+            <a:r>
+              <a:rPr lang="en-US" sz="1280" dirty="0">
+                <a:solidFill>
+                  <a:srgbClr val="FFFFFF"/>
+                </a:solidFill>
+                <a:latin typeface="Consolas" pitchFamily="34" charset="0"/>
+                <a:ea typeface="Consolas" pitchFamily="34" charset="-122"/>
+                <a:cs typeface="Consolas" pitchFamily="34" charset="-120"/>
+              </a:rPr>
+              <a:t>    result = </a:t>
+            </a:r>
+            <a:pPr indent="0" marL="0">
+              <a:buNone/>
+            </a:pPr>
+            <a:r>
+              <a:rPr lang="en-US" sz="1280" dirty="0">
+                <a:solidFill>
+                  <a:srgbClr val="A996B6"/>
+                </a:solidFill>
+                <a:latin typeface="Consolas" pitchFamily="34" charset="0"/>
+                <a:ea typeface="Consolas" pitchFamily="34" charset="-122"/>
+                <a:cs typeface="Consolas" pitchFamily="34" charset="-120"/>
+              </a:rPr>
+              <a:t>await</a:t>
+            </a:r>
+            <a:pPr indent="0" marL="0">
+              <a:buNone/>
+            </a:pPr>
+            <a:r>
+              <a:rPr lang="en-US" sz="1280" dirty="0">
+                <a:solidFill>
+                  <a:srgbClr val="FFFFFF"/>
+                </a:solidFill>
+                <a:latin typeface="Consolas" pitchFamily="34" charset="0"/>
+                <a:ea typeface="Consolas" pitchFamily="34" charset="-122"/>
+                <a:cs typeface="Consolas" pitchFamily="34" charset="-120"/>
+              </a:rPr>
+              <a:t> agent.run(</a:t>
+            </a:r>
+            <a:endParaRPr lang="en-US" sz="1280" dirty="0"/>
+          </a:p>
+          <a:p>
+            <a:pPr indent="0" marL="0">
+              <a:buNone/>
+            </a:pPr>
+            <a:r>
+              <a:rPr lang="en-US" sz="1280" dirty="0">
+                <a:solidFill>
+                  <a:srgbClr val="FFFFFF"/>
+                </a:solidFill>
+                <a:latin typeface="Consolas" pitchFamily="34" charset="0"/>
+                <a:ea typeface="Consolas" pitchFamily="34" charset="-122"/>
+                <a:cs typeface="Consolas" pitchFamily="34" charset="-120"/>
+              </a:rPr>
+              <a:t>        </a:t>
+            </a:r>
+            <a:pPr indent="0" marL="0">
+              <a:buNone/>
+            </a:pPr>
+            <a:r>
+              <a:rPr lang="en-US" sz="1280" dirty="0">
+                <a:solidFill>
+                  <a:srgbClr val="E4C98A"/>
+                </a:solidFill>
+                <a:latin typeface="Consolas" pitchFamily="34" charset="0"/>
+                <a:ea typeface="Consolas" pitchFamily="34" charset="-122"/>
+                <a:cs typeface="Consolas" pitchFamily="34" charset="-120"/>
+              </a:rPr>
+              <a:t>"Find the current guidance."</a:t>
+            </a:r>
+            <a:pPr indent="0" marL="0">
+              <a:buNone/>
+            </a:pPr>
+            <a:r>
+              <a:rPr lang="en-US" sz="1280" dirty="0">
+                <a:solidFill>
+                  <a:srgbClr val="FFFFFF"/>
+                </a:solidFill>
+                <a:latin typeface="Consolas" pitchFamily="34" charset="0"/>
+                <a:ea typeface="Consolas" pitchFamily="34" charset="-122"/>
+                <a:cs typeface="Consolas" pitchFamily="34" charset="-120"/>
+              </a:rPr>
+              <a:t>,</a:t>
+            </a:r>
+            <a:endParaRPr lang="en-US" sz="1280" dirty="0"/>
+          </a:p>
+          <a:p>
+            <a:pPr indent="0" marL="0">
+              <a:buNone/>
+            </a:pPr>
+            <a:r>
+              <a:rPr lang="en-US" sz="1280" dirty="0">
+                <a:solidFill>
+                  <a:srgbClr val="FFFFFF"/>
+                </a:solidFill>
+                <a:latin typeface="Consolas" pitchFamily="34" charset="0"/>
+                <a:ea typeface="Consolas" pitchFamily="34" charset="-122"/>
+                <a:cs typeface="Consolas" pitchFamily="34" charset="-120"/>
+              </a:rPr>
+              <a:t>        tools=mcp,</a:t>
+            </a:r>
+            <a:endParaRPr lang="en-US" sz="1280" dirty="0"/>
+          </a:p>
+          <a:p>
+            <a:pPr indent="0" marL="0">
+              <a:buNone/>
+            </a:pPr>
+            <a:r>
+              <a:rPr lang="en-US" sz="1280" dirty="0">
+                <a:solidFill>
+                  <a:srgbClr val="FFFFFF"/>
+                </a:solidFill>
+                <a:latin typeface="Consolas" pitchFamily="34" charset="0"/>
+                <a:ea typeface="Consolas" pitchFamily="34" charset="-122"/>
+                <a:cs typeface="Consolas" pitchFamily="34" charset="-120"/>
+              </a:rPr>
+              <a:t>    )</a:t>
+            </a:r>
+            <a:endParaRPr lang="en-US" sz="1280" dirty="0"/>
+          </a:p>
+        </p:txBody>
+      </p:sp>
+      <p:sp>
+        <p:nvSpPr>
+          <p:cNvPr id="7" name="Shape 5"/>
           <p:cNvSpPr/>
           <p:nvPr/>
         </p:nvSpPr>
@@ -12328,7 +11837,7 @@
       </p:sp>
       <p:sp>
         <p:nvSpPr>
-          <p:cNvPr id="7" name="Text 4"/>
+          <p:cNvPr id="8" name="Text 6"/>
           <p:cNvSpPr/>
           <p:nvPr/>
         </p:nvSpPr>
@@ -12361,7 +11870,7 @@
                 <a:ea typeface="Calibri" pitchFamily="34" charset="-122"/>
                 <a:cs typeface="Calibri" pitchFamily="34" charset="-120"/>
               </a:rPr>
-              <a:t>Source: https://learn.microsoft.com/en-us/python/api/agent-framework-core/agent_framework.mcpstreamablehttptool?view=agent-framework-python-latest  ·  +1 in notes</a:t>
+              <a:t>Source: https://learn.microsoft.com/en-us/agent-framework/agents/tools/local-mcp-tools?tabs=python  ·  +1 in notes</a:t>
             </a:r>
             <a:endParaRPr lang="en-US" sz="820" dirty="0"/>
           </a:p>

--- a/decks/day3/module-5-mcp.pptx
+++ b/decks/day3/module-5-mcp.pptx
@@ -3735,9 +3735,9 @@
             <a:tbl>
               <a:tblPr/>
               <a:tblGrid>
-                <a:gridCol w="2804160"/>
-                <a:gridCol w="2804160"/>
-                <a:gridCol w="2804160"/>
+                <a:gridCol w="1565113"/>
+                <a:gridCol w="3619323"/>
+                <a:gridCol w="3228045"/>
               </a:tblGrid>
               <a:tr h="658368">
                 <a:tc>
@@ -5775,8 +5775,8 @@
             <a:tbl>
               <a:tblPr/>
               <a:tblGrid>
-                <a:gridCol w="2804160"/>
-                <a:gridCol w="2804160"/>
+                <a:gridCol w="1869440"/>
+                <a:gridCol w="3738880"/>
                 <a:gridCol w="2804160"/>
               </a:tblGrid>
               <a:tr h="586740">
@@ -9407,9 +9407,9 @@
             <a:tbl>
               <a:tblPr/>
               <a:tblGrid>
-                <a:gridCol w="2804160"/>
-                <a:gridCol w="2804160"/>
-                <a:gridCol w="2804160"/>
+                <a:gridCol w="1563381"/>
+                <a:gridCol w="3052316"/>
+                <a:gridCol w="3796783"/>
               </a:tblGrid>
               <a:tr h="658368">
                 <a:tc>

--- a/decks/day3/module-5-mcp.pptx
+++ b/decks/day3/module-5-mcp.pptx
@@ -3114,7 +3114,7 @@
         <p:spPr>
           <a:xfrm>
             <a:off x="512064" y="1197864"/>
-            <a:ext cx="3813048" cy="310896"/>
+            <a:ext cx="3813048" cy="311277"/>
           </a:xfrm>
           <a:prstGeom prst="rect">
             <a:avLst/>
@@ -3123,7 +3123,7 @@
           <a:ln/>
         </p:spPr>
         <p:txBody>
-          <a:bodyPr wrap="square" lIns="0" tIns="0" rIns="0" bIns="0" rtlCol="0" anchor="ctr">
+          <a:bodyPr wrap="square" lIns="0" tIns="0" rIns="0" bIns="0" rtlCol="0" anchor="t">
             <a:normAutofit/>
           </a:bodyPr>
           <a:lstStyle/>
@@ -3154,8 +3154,8 @@
         </p:nvSpPr>
         <p:spPr>
           <a:xfrm>
-            <a:off x="512064" y="1581912"/>
-            <a:ext cx="3813048" cy="1033272"/>
+            <a:off x="512064" y="1564005"/>
+            <a:ext cx="3813048" cy="1078611"/>
           </a:xfrm>
           <a:prstGeom prst="rect">
             <a:avLst/>
@@ -3223,7 +3223,7 @@
         <p:spPr>
           <a:xfrm>
             <a:off x="4818888" y="1197864"/>
-            <a:ext cx="3813048" cy="310896"/>
+            <a:ext cx="3813048" cy="311277"/>
           </a:xfrm>
           <a:prstGeom prst="rect">
             <a:avLst/>
@@ -3232,7 +3232,7 @@
           <a:ln/>
         </p:spPr>
         <p:txBody>
-          <a:bodyPr wrap="square" lIns="0" tIns="0" rIns="0" bIns="0" rtlCol="0" anchor="ctr">
+          <a:bodyPr wrap="square" lIns="0" tIns="0" rIns="0" bIns="0" rtlCol="0" anchor="t">
             <a:normAutofit/>
           </a:bodyPr>
           <a:lstStyle/>
@@ -3263,8 +3263,8 @@
         </p:nvSpPr>
         <p:spPr>
           <a:xfrm>
-            <a:off x="4818888" y="1581912"/>
-            <a:ext cx="3813048" cy="1033272"/>
+            <a:off x="4818888" y="1564005"/>
+            <a:ext cx="3813048" cy="1078611"/>
           </a:xfrm>
           <a:prstGeom prst="rect">
             <a:avLst/>
@@ -3332,7 +3332,7 @@
         <p:spPr>
           <a:xfrm>
             <a:off x="512064" y="3054096"/>
-            <a:ext cx="3813048" cy="310896"/>
+            <a:ext cx="3813048" cy="311277"/>
           </a:xfrm>
           <a:prstGeom prst="rect">
             <a:avLst/>
@@ -3341,7 +3341,7 @@
           <a:ln/>
         </p:spPr>
         <p:txBody>
-          <a:bodyPr wrap="square" lIns="0" tIns="0" rIns="0" bIns="0" rtlCol="0" anchor="ctr">
+          <a:bodyPr wrap="square" lIns="0" tIns="0" rIns="0" bIns="0" rtlCol="0" anchor="t">
             <a:normAutofit/>
           </a:bodyPr>
           <a:lstStyle/>
@@ -3372,8 +3372,8 @@
         </p:nvSpPr>
         <p:spPr>
           <a:xfrm>
-            <a:off x="512064" y="3438144"/>
-            <a:ext cx="3813048" cy="1033272"/>
+            <a:off x="512064" y="3420237"/>
+            <a:ext cx="3813048" cy="1078611"/>
           </a:xfrm>
           <a:prstGeom prst="rect">
             <a:avLst/>
@@ -3441,7 +3441,7 @@
         <p:spPr>
           <a:xfrm>
             <a:off x="4818888" y="3054096"/>
-            <a:ext cx="3813048" cy="310896"/>
+            <a:ext cx="3813048" cy="311277"/>
           </a:xfrm>
           <a:prstGeom prst="rect">
             <a:avLst/>
@@ -3450,7 +3450,7 @@
           <a:ln/>
         </p:spPr>
         <p:txBody>
-          <a:bodyPr wrap="square" lIns="0" tIns="0" rIns="0" bIns="0" rtlCol="0" anchor="ctr">
+          <a:bodyPr wrap="square" lIns="0" tIns="0" rIns="0" bIns="0" rtlCol="0" anchor="t">
             <a:normAutofit/>
           </a:bodyPr>
           <a:lstStyle/>
@@ -3481,8 +3481,8 @@
         </p:nvSpPr>
         <p:spPr>
           <a:xfrm>
-            <a:off x="4818888" y="3438144"/>
-            <a:ext cx="3813048" cy="1033272"/>
+            <a:off x="4818888" y="3420237"/>
+            <a:ext cx="3813048" cy="1078611"/>
           </a:xfrm>
           <a:prstGeom prst="rect">
             <a:avLst/>
@@ -5154,7 +5154,7 @@
         <p:spPr>
           <a:xfrm>
             <a:off x="512064" y="1197864"/>
-            <a:ext cx="3813048" cy="310896"/>
+            <a:ext cx="3813048" cy="311277"/>
           </a:xfrm>
           <a:prstGeom prst="rect">
             <a:avLst/>
@@ -5163,7 +5163,7 @@
           <a:ln/>
         </p:spPr>
         <p:txBody>
-          <a:bodyPr wrap="square" lIns="0" tIns="0" rIns="0" bIns="0" rtlCol="0" anchor="ctr">
+          <a:bodyPr wrap="square" lIns="0" tIns="0" rIns="0" bIns="0" rtlCol="0" anchor="t">
             <a:normAutofit/>
           </a:bodyPr>
           <a:lstStyle/>
@@ -5194,8 +5194,8 @@
         </p:nvSpPr>
         <p:spPr>
           <a:xfrm>
-            <a:off x="512064" y="1581912"/>
-            <a:ext cx="3813048" cy="1033272"/>
+            <a:off x="512064" y="1564005"/>
+            <a:ext cx="3813048" cy="1078611"/>
           </a:xfrm>
           <a:prstGeom prst="rect">
             <a:avLst/>
@@ -5263,7 +5263,7 @@
         <p:spPr>
           <a:xfrm>
             <a:off x="4818888" y="1197864"/>
-            <a:ext cx="3813048" cy="310896"/>
+            <a:ext cx="3813048" cy="311277"/>
           </a:xfrm>
           <a:prstGeom prst="rect">
             <a:avLst/>
@@ -5272,7 +5272,7 @@
           <a:ln/>
         </p:spPr>
         <p:txBody>
-          <a:bodyPr wrap="square" lIns="0" tIns="0" rIns="0" bIns="0" rtlCol="0" anchor="ctr">
+          <a:bodyPr wrap="square" lIns="0" tIns="0" rIns="0" bIns="0" rtlCol="0" anchor="t">
             <a:normAutofit/>
           </a:bodyPr>
           <a:lstStyle/>
@@ -5303,8 +5303,8 @@
         </p:nvSpPr>
         <p:spPr>
           <a:xfrm>
-            <a:off x="4818888" y="1581912"/>
-            <a:ext cx="3813048" cy="1033272"/>
+            <a:off x="4818888" y="1564005"/>
+            <a:ext cx="3813048" cy="1078611"/>
           </a:xfrm>
           <a:prstGeom prst="rect">
             <a:avLst/>
@@ -5372,7 +5372,7 @@
         <p:spPr>
           <a:xfrm>
             <a:off x="512064" y="3054096"/>
-            <a:ext cx="3813048" cy="310896"/>
+            <a:ext cx="3813048" cy="311277"/>
           </a:xfrm>
           <a:prstGeom prst="rect">
             <a:avLst/>
@@ -5381,7 +5381,7 @@
           <a:ln/>
         </p:spPr>
         <p:txBody>
-          <a:bodyPr wrap="square" lIns="0" tIns="0" rIns="0" bIns="0" rtlCol="0" anchor="ctr">
+          <a:bodyPr wrap="square" lIns="0" tIns="0" rIns="0" bIns="0" rtlCol="0" anchor="t">
             <a:normAutofit/>
           </a:bodyPr>
           <a:lstStyle/>
@@ -5412,8 +5412,8 @@
         </p:nvSpPr>
         <p:spPr>
           <a:xfrm>
-            <a:off x="512064" y="3438144"/>
-            <a:ext cx="3813048" cy="1033272"/>
+            <a:off x="512064" y="3420237"/>
+            <a:ext cx="3813048" cy="1078611"/>
           </a:xfrm>
           <a:prstGeom prst="rect">
             <a:avLst/>
@@ -5481,7 +5481,7 @@
         <p:spPr>
           <a:xfrm>
             <a:off x="4818888" y="3054096"/>
-            <a:ext cx="3813048" cy="310896"/>
+            <a:ext cx="3813048" cy="311277"/>
           </a:xfrm>
           <a:prstGeom prst="rect">
             <a:avLst/>
@@ -5490,7 +5490,7 @@
           <a:ln/>
         </p:spPr>
         <p:txBody>
-          <a:bodyPr wrap="square" lIns="0" tIns="0" rIns="0" bIns="0" rtlCol="0" anchor="ctr">
+          <a:bodyPr wrap="square" lIns="0" tIns="0" rIns="0" bIns="0" rtlCol="0" anchor="t">
             <a:normAutofit/>
           </a:bodyPr>
           <a:lstStyle/>
@@ -5521,8 +5521,8 @@
         </p:nvSpPr>
         <p:spPr>
           <a:xfrm>
-            <a:off x="4818888" y="3438144"/>
-            <a:ext cx="3813048" cy="1033272"/>
+            <a:off x="4818888" y="3420237"/>
+            <a:ext cx="3813048" cy="1078611"/>
           </a:xfrm>
           <a:prstGeom prst="rect">
             <a:avLst/>
